--- a/tempimento.pptx
+++ b/tempimento.pptx
@@ -197,7 +197,7 @@
           <a:p>
             <a:fld id="{A584E3A2-E8EA-4705-A613-CFE9F6F5D3B4}" type="datetimeFigureOut">
               <a:rPr lang="pt-BR" smtClean="0"/>
-              <a:t>19/09/2022</a:t>
+              <a:t>26/09/2022</a:t>
             </a:fld>
             <a:endParaRPr lang="pt-BR"/>
           </a:p>
@@ -680,7 +680,7 @@
           <a:p>
             <a:fld id="{52231B9D-E9F6-4612-9B82-E89961B389AC}" type="datetimeFigureOut">
               <a:rPr lang="pt-BR" smtClean="0"/>
-              <a:t>19/09/2022</a:t>
+              <a:t>26/09/2022</a:t>
             </a:fld>
             <a:endParaRPr lang="pt-BR"/>
           </a:p>
@@ -850,7 +850,7 @@
           <a:p>
             <a:fld id="{52231B9D-E9F6-4612-9B82-E89961B389AC}" type="datetimeFigureOut">
               <a:rPr lang="pt-BR" smtClean="0"/>
-              <a:t>19/09/2022</a:t>
+              <a:t>26/09/2022</a:t>
             </a:fld>
             <a:endParaRPr lang="pt-BR"/>
           </a:p>
@@ -1030,7 +1030,7 @@
           <a:p>
             <a:fld id="{52231B9D-E9F6-4612-9B82-E89961B389AC}" type="datetimeFigureOut">
               <a:rPr lang="pt-BR" smtClean="0"/>
-              <a:t>19/09/2022</a:t>
+              <a:t>26/09/2022</a:t>
             </a:fld>
             <a:endParaRPr lang="pt-BR"/>
           </a:p>
@@ -1200,7 +1200,7 @@
           <a:p>
             <a:fld id="{52231B9D-E9F6-4612-9B82-E89961B389AC}" type="datetimeFigureOut">
               <a:rPr lang="pt-BR" smtClean="0"/>
-              <a:t>19/09/2022</a:t>
+              <a:t>26/09/2022</a:t>
             </a:fld>
             <a:endParaRPr lang="pt-BR"/>
           </a:p>
@@ -1446,7 +1446,7 @@
           <a:p>
             <a:fld id="{52231B9D-E9F6-4612-9B82-E89961B389AC}" type="datetimeFigureOut">
               <a:rPr lang="pt-BR" smtClean="0"/>
-              <a:t>19/09/2022</a:t>
+              <a:t>26/09/2022</a:t>
             </a:fld>
             <a:endParaRPr lang="pt-BR"/>
           </a:p>
@@ -1678,7 +1678,7 @@
           <a:p>
             <a:fld id="{52231B9D-E9F6-4612-9B82-E89961B389AC}" type="datetimeFigureOut">
               <a:rPr lang="pt-BR" smtClean="0"/>
-              <a:t>19/09/2022</a:t>
+              <a:t>26/09/2022</a:t>
             </a:fld>
             <a:endParaRPr lang="pt-BR"/>
           </a:p>
@@ -2045,7 +2045,7 @@
           <a:p>
             <a:fld id="{52231B9D-E9F6-4612-9B82-E89961B389AC}" type="datetimeFigureOut">
               <a:rPr lang="pt-BR" smtClean="0"/>
-              <a:t>19/09/2022</a:t>
+              <a:t>26/09/2022</a:t>
             </a:fld>
             <a:endParaRPr lang="pt-BR"/>
           </a:p>
@@ -2163,7 +2163,7 @@
           <a:p>
             <a:fld id="{52231B9D-E9F6-4612-9B82-E89961B389AC}" type="datetimeFigureOut">
               <a:rPr lang="pt-BR" smtClean="0"/>
-              <a:t>19/09/2022</a:t>
+              <a:t>26/09/2022</a:t>
             </a:fld>
             <a:endParaRPr lang="pt-BR"/>
           </a:p>
@@ -2258,7 +2258,7 @@
           <a:p>
             <a:fld id="{52231B9D-E9F6-4612-9B82-E89961B389AC}" type="datetimeFigureOut">
               <a:rPr lang="pt-BR" smtClean="0"/>
-              <a:t>19/09/2022</a:t>
+              <a:t>26/09/2022</a:t>
             </a:fld>
             <a:endParaRPr lang="pt-BR"/>
           </a:p>
@@ -2535,7 +2535,7 @@
           <a:p>
             <a:fld id="{52231B9D-E9F6-4612-9B82-E89961B389AC}" type="datetimeFigureOut">
               <a:rPr lang="pt-BR" smtClean="0"/>
-              <a:t>19/09/2022</a:t>
+              <a:t>26/09/2022</a:t>
             </a:fld>
             <a:endParaRPr lang="pt-BR"/>
           </a:p>
@@ -2788,7 +2788,7 @@
           <a:p>
             <a:fld id="{52231B9D-E9F6-4612-9B82-E89961B389AC}" type="datetimeFigureOut">
               <a:rPr lang="pt-BR" smtClean="0"/>
-              <a:t>19/09/2022</a:t>
+              <a:t>26/09/2022</a:t>
             </a:fld>
             <a:endParaRPr lang="pt-BR"/>
           </a:p>
@@ -3001,7 +3001,7 @@
           <a:p>
             <a:fld id="{52231B9D-E9F6-4612-9B82-E89961B389AC}" type="datetimeFigureOut">
               <a:rPr lang="pt-BR" smtClean="0"/>
-              <a:t>19/09/2022</a:t>
+              <a:t>26/09/2022</a:t>
             </a:fld>
             <a:endParaRPr lang="pt-BR"/>
           </a:p>
@@ -3665,7 +3665,17 @@
                   </a:schemeClr>
                 </a:solidFill>
               </a:rPr>
-              <a:t>18/09/2022</a:t>
+              <a:t>25</a:t>
+            </a:r>
+            <a:r>
+              <a:rPr lang="pt-BR" sz="1600" dirty="0" smtClean="0">
+                <a:solidFill>
+                  <a:schemeClr val="bg2">
+                    <a:lumMod val="90000"/>
+                  </a:schemeClr>
+                </a:solidFill>
+              </a:rPr>
+              <a:t>/09/2022</a:t>
             </a:r>
             <a:endParaRPr lang="pt-BR" sz="1600" dirty="0">
               <a:solidFill>

--- a/tempimento.pptx
+++ b/tempimento.pptx
@@ -197,7 +197,7 @@
           <a:p>
             <a:fld id="{A584E3A2-E8EA-4705-A613-CFE9F6F5D3B4}" type="datetimeFigureOut">
               <a:rPr lang="pt-BR" smtClean="0"/>
-              <a:t>26/09/2022</a:t>
+              <a:t>04/10/2022</a:t>
             </a:fld>
             <a:endParaRPr lang="pt-BR"/>
           </a:p>
@@ -680,7 +680,7 @@
           <a:p>
             <a:fld id="{52231B9D-E9F6-4612-9B82-E89961B389AC}" type="datetimeFigureOut">
               <a:rPr lang="pt-BR" smtClean="0"/>
-              <a:t>26/09/2022</a:t>
+              <a:t>04/10/2022</a:t>
             </a:fld>
             <a:endParaRPr lang="pt-BR"/>
           </a:p>
@@ -850,7 +850,7 @@
           <a:p>
             <a:fld id="{52231B9D-E9F6-4612-9B82-E89961B389AC}" type="datetimeFigureOut">
               <a:rPr lang="pt-BR" smtClean="0"/>
-              <a:t>26/09/2022</a:t>
+              <a:t>04/10/2022</a:t>
             </a:fld>
             <a:endParaRPr lang="pt-BR"/>
           </a:p>
@@ -1030,7 +1030,7 @@
           <a:p>
             <a:fld id="{52231B9D-E9F6-4612-9B82-E89961B389AC}" type="datetimeFigureOut">
               <a:rPr lang="pt-BR" smtClean="0"/>
-              <a:t>26/09/2022</a:t>
+              <a:t>04/10/2022</a:t>
             </a:fld>
             <a:endParaRPr lang="pt-BR"/>
           </a:p>
@@ -1200,7 +1200,7 @@
           <a:p>
             <a:fld id="{52231B9D-E9F6-4612-9B82-E89961B389AC}" type="datetimeFigureOut">
               <a:rPr lang="pt-BR" smtClean="0"/>
-              <a:t>26/09/2022</a:t>
+              <a:t>04/10/2022</a:t>
             </a:fld>
             <a:endParaRPr lang="pt-BR"/>
           </a:p>
@@ -1446,7 +1446,7 @@
           <a:p>
             <a:fld id="{52231B9D-E9F6-4612-9B82-E89961B389AC}" type="datetimeFigureOut">
               <a:rPr lang="pt-BR" smtClean="0"/>
-              <a:t>26/09/2022</a:t>
+              <a:t>04/10/2022</a:t>
             </a:fld>
             <a:endParaRPr lang="pt-BR"/>
           </a:p>
@@ -1678,7 +1678,7 @@
           <a:p>
             <a:fld id="{52231B9D-E9F6-4612-9B82-E89961B389AC}" type="datetimeFigureOut">
               <a:rPr lang="pt-BR" smtClean="0"/>
-              <a:t>26/09/2022</a:t>
+              <a:t>04/10/2022</a:t>
             </a:fld>
             <a:endParaRPr lang="pt-BR"/>
           </a:p>
@@ -2045,7 +2045,7 @@
           <a:p>
             <a:fld id="{52231B9D-E9F6-4612-9B82-E89961B389AC}" type="datetimeFigureOut">
               <a:rPr lang="pt-BR" smtClean="0"/>
-              <a:t>26/09/2022</a:t>
+              <a:t>04/10/2022</a:t>
             </a:fld>
             <a:endParaRPr lang="pt-BR"/>
           </a:p>
@@ -2163,7 +2163,7 @@
           <a:p>
             <a:fld id="{52231B9D-E9F6-4612-9B82-E89961B389AC}" type="datetimeFigureOut">
               <a:rPr lang="pt-BR" smtClean="0"/>
-              <a:t>26/09/2022</a:t>
+              <a:t>04/10/2022</a:t>
             </a:fld>
             <a:endParaRPr lang="pt-BR"/>
           </a:p>
@@ -2258,7 +2258,7 @@
           <a:p>
             <a:fld id="{52231B9D-E9F6-4612-9B82-E89961B389AC}" type="datetimeFigureOut">
               <a:rPr lang="pt-BR" smtClean="0"/>
-              <a:t>26/09/2022</a:t>
+              <a:t>04/10/2022</a:t>
             </a:fld>
             <a:endParaRPr lang="pt-BR"/>
           </a:p>
@@ -2535,7 +2535,7 @@
           <a:p>
             <a:fld id="{52231B9D-E9F6-4612-9B82-E89961B389AC}" type="datetimeFigureOut">
               <a:rPr lang="pt-BR" smtClean="0"/>
-              <a:t>26/09/2022</a:t>
+              <a:t>04/10/2022</a:t>
             </a:fld>
             <a:endParaRPr lang="pt-BR"/>
           </a:p>
@@ -2788,7 +2788,7 @@
           <a:p>
             <a:fld id="{52231B9D-E9F6-4612-9B82-E89961B389AC}" type="datetimeFigureOut">
               <a:rPr lang="pt-BR" smtClean="0"/>
-              <a:t>26/09/2022</a:t>
+              <a:t>04/10/2022</a:t>
             </a:fld>
             <a:endParaRPr lang="pt-BR"/>
           </a:p>
@@ -3001,7 +3001,7 @@
           <a:p>
             <a:fld id="{52231B9D-E9F6-4612-9B82-E89961B389AC}" type="datetimeFigureOut">
               <a:rPr lang="pt-BR" smtClean="0"/>
-              <a:t>26/09/2022</a:t>
+              <a:t>04/10/2022</a:t>
             </a:fld>
             <a:endParaRPr lang="pt-BR"/>
           </a:p>
@@ -3665,7 +3665,7 @@
                   </a:schemeClr>
                 </a:solidFill>
               </a:rPr>
-              <a:t>25</a:t>
+              <a:t>02</a:t>
             </a:r>
             <a:r>
               <a:rPr lang="pt-BR" sz="1600" dirty="0" smtClean="0">
@@ -3675,7 +3675,7 @@
                   </a:schemeClr>
                 </a:solidFill>
               </a:rPr>
-              <a:t>/09/2022</a:t>
+              <a:t>/10/2022</a:t>
             </a:r>
             <a:endParaRPr lang="pt-BR" sz="1600" dirty="0">
               <a:solidFill>

--- a/tempimento.pptx
+++ b/tempimento.pptx
@@ -197,7 +197,7 @@
           <a:p>
             <a:fld id="{A584E3A2-E8EA-4705-A613-CFE9F6F5D3B4}" type="datetimeFigureOut">
               <a:rPr lang="pt-BR" smtClean="0"/>
-              <a:t>04/10/2022</a:t>
+              <a:t>10/10/2022</a:t>
             </a:fld>
             <a:endParaRPr lang="pt-BR"/>
           </a:p>
@@ -680,7 +680,7 @@
           <a:p>
             <a:fld id="{52231B9D-E9F6-4612-9B82-E89961B389AC}" type="datetimeFigureOut">
               <a:rPr lang="pt-BR" smtClean="0"/>
-              <a:t>04/10/2022</a:t>
+              <a:t>10/10/2022</a:t>
             </a:fld>
             <a:endParaRPr lang="pt-BR"/>
           </a:p>
@@ -850,7 +850,7 @@
           <a:p>
             <a:fld id="{52231B9D-E9F6-4612-9B82-E89961B389AC}" type="datetimeFigureOut">
               <a:rPr lang="pt-BR" smtClean="0"/>
-              <a:t>04/10/2022</a:t>
+              <a:t>10/10/2022</a:t>
             </a:fld>
             <a:endParaRPr lang="pt-BR"/>
           </a:p>
@@ -1030,7 +1030,7 @@
           <a:p>
             <a:fld id="{52231B9D-E9F6-4612-9B82-E89961B389AC}" type="datetimeFigureOut">
               <a:rPr lang="pt-BR" smtClean="0"/>
-              <a:t>04/10/2022</a:t>
+              <a:t>10/10/2022</a:t>
             </a:fld>
             <a:endParaRPr lang="pt-BR"/>
           </a:p>
@@ -1200,7 +1200,7 @@
           <a:p>
             <a:fld id="{52231B9D-E9F6-4612-9B82-E89961B389AC}" type="datetimeFigureOut">
               <a:rPr lang="pt-BR" smtClean="0"/>
-              <a:t>04/10/2022</a:t>
+              <a:t>10/10/2022</a:t>
             </a:fld>
             <a:endParaRPr lang="pt-BR"/>
           </a:p>
@@ -1446,7 +1446,7 @@
           <a:p>
             <a:fld id="{52231B9D-E9F6-4612-9B82-E89961B389AC}" type="datetimeFigureOut">
               <a:rPr lang="pt-BR" smtClean="0"/>
-              <a:t>04/10/2022</a:t>
+              <a:t>10/10/2022</a:t>
             </a:fld>
             <a:endParaRPr lang="pt-BR"/>
           </a:p>
@@ -1678,7 +1678,7 @@
           <a:p>
             <a:fld id="{52231B9D-E9F6-4612-9B82-E89961B389AC}" type="datetimeFigureOut">
               <a:rPr lang="pt-BR" smtClean="0"/>
-              <a:t>04/10/2022</a:t>
+              <a:t>10/10/2022</a:t>
             </a:fld>
             <a:endParaRPr lang="pt-BR"/>
           </a:p>
@@ -2045,7 +2045,7 @@
           <a:p>
             <a:fld id="{52231B9D-E9F6-4612-9B82-E89961B389AC}" type="datetimeFigureOut">
               <a:rPr lang="pt-BR" smtClean="0"/>
-              <a:t>04/10/2022</a:t>
+              <a:t>10/10/2022</a:t>
             </a:fld>
             <a:endParaRPr lang="pt-BR"/>
           </a:p>
@@ -2163,7 +2163,7 @@
           <a:p>
             <a:fld id="{52231B9D-E9F6-4612-9B82-E89961B389AC}" type="datetimeFigureOut">
               <a:rPr lang="pt-BR" smtClean="0"/>
-              <a:t>04/10/2022</a:t>
+              <a:t>10/10/2022</a:t>
             </a:fld>
             <a:endParaRPr lang="pt-BR"/>
           </a:p>
@@ -2258,7 +2258,7 @@
           <a:p>
             <a:fld id="{52231B9D-E9F6-4612-9B82-E89961B389AC}" type="datetimeFigureOut">
               <a:rPr lang="pt-BR" smtClean="0"/>
-              <a:t>04/10/2022</a:t>
+              <a:t>10/10/2022</a:t>
             </a:fld>
             <a:endParaRPr lang="pt-BR"/>
           </a:p>
@@ -2535,7 +2535,7 @@
           <a:p>
             <a:fld id="{52231B9D-E9F6-4612-9B82-E89961B389AC}" type="datetimeFigureOut">
               <a:rPr lang="pt-BR" smtClean="0"/>
-              <a:t>04/10/2022</a:t>
+              <a:t>10/10/2022</a:t>
             </a:fld>
             <a:endParaRPr lang="pt-BR"/>
           </a:p>
@@ -2788,7 +2788,7 @@
           <a:p>
             <a:fld id="{52231B9D-E9F6-4612-9B82-E89961B389AC}" type="datetimeFigureOut">
               <a:rPr lang="pt-BR" smtClean="0"/>
-              <a:t>04/10/2022</a:t>
+              <a:t>10/10/2022</a:t>
             </a:fld>
             <a:endParaRPr lang="pt-BR"/>
           </a:p>
@@ -3001,7 +3001,7 @@
           <a:p>
             <a:fld id="{52231B9D-E9F6-4612-9B82-E89961B389AC}" type="datetimeFigureOut">
               <a:rPr lang="pt-BR" smtClean="0"/>
-              <a:t>04/10/2022</a:t>
+              <a:t>10/10/2022</a:t>
             </a:fld>
             <a:endParaRPr lang="pt-BR"/>
           </a:p>
@@ -3665,17 +3665,7 @@
                   </a:schemeClr>
                 </a:solidFill>
               </a:rPr>
-              <a:t>02</a:t>
-            </a:r>
-            <a:r>
-              <a:rPr lang="pt-BR" sz="1600" dirty="0" smtClean="0">
-                <a:solidFill>
-                  <a:schemeClr val="bg2">
-                    <a:lumMod val="90000"/>
-                  </a:schemeClr>
-                </a:solidFill>
-              </a:rPr>
-              <a:t>/10/2022</a:t>
+              <a:t>09/10/2022</a:t>
             </a:r>
             <a:endParaRPr lang="pt-BR" sz="1600" dirty="0">
               <a:solidFill>

--- a/tempimento.pptx
+++ b/tempimento.pptx
@@ -197,7 +197,7 @@
           <a:p>
             <a:fld id="{A584E3A2-E8EA-4705-A613-CFE9F6F5D3B4}" type="datetimeFigureOut">
               <a:rPr lang="pt-BR" smtClean="0"/>
-              <a:t>10/10/2022</a:t>
+              <a:t>18/10/2022</a:t>
             </a:fld>
             <a:endParaRPr lang="pt-BR"/>
           </a:p>
@@ -680,7 +680,7 @@
           <a:p>
             <a:fld id="{52231B9D-E9F6-4612-9B82-E89961B389AC}" type="datetimeFigureOut">
               <a:rPr lang="pt-BR" smtClean="0"/>
-              <a:t>10/10/2022</a:t>
+              <a:t>18/10/2022</a:t>
             </a:fld>
             <a:endParaRPr lang="pt-BR"/>
           </a:p>
@@ -850,7 +850,7 @@
           <a:p>
             <a:fld id="{52231B9D-E9F6-4612-9B82-E89961B389AC}" type="datetimeFigureOut">
               <a:rPr lang="pt-BR" smtClean="0"/>
-              <a:t>10/10/2022</a:t>
+              <a:t>18/10/2022</a:t>
             </a:fld>
             <a:endParaRPr lang="pt-BR"/>
           </a:p>
@@ -1030,7 +1030,7 @@
           <a:p>
             <a:fld id="{52231B9D-E9F6-4612-9B82-E89961B389AC}" type="datetimeFigureOut">
               <a:rPr lang="pt-BR" smtClean="0"/>
-              <a:t>10/10/2022</a:t>
+              <a:t>18/10/2022</a:t>
             </a:fld>
             <a:endParaRPr lang="pt-BR"/>
           </a:p>
@@ -1200,7 +1200,7 @@
           <a:p>
             <a:fld id="{52231B9D-E9F6-4612-9B82-E89961B389AC}" type="datetimeFigureOut">
               <a:rPr lang="pt-BR" smtClean="0"/>
-              <a:t>10/10/2022</a:t>
+              <a:t>18/10/2022</a:t>
             </a:fld>
             <a:endParaRPr lang="pt-BR"/>
           </a:p>
@@ -1446,7 +1446,7 @@
           <a:p>
             <a:fld id="{52231B9D-E9F6-4612-9B82-E89961B389AC}" type="datetimeFigureOut">
               <a:rPr lang="pt-BR" smtClean="0"/>
-              <a:t>10/10/2022</a:t>
+              <a:t>18/10/2022</a:t>
             </a:fld>
             <a:endParaRPr lang="pt-BR"/>
           </a:p>
@@ -1678,7 +1678,7 @@
           <a:p>
             <a:fld id="{52231B9D-E9F6-4612-9B82-E89961B389AC}" type="datetimeFigureOut">
               <a:rPr lang="pt-BR" smtClean="0"/>
-              <a:t>10/10/2022</a:t>
+              <a:t>18/10/2022</a:t>
             </a:fld>
             <a:endParaRPr lang="pt-BR"/>
           </a:p>
@@ -2045,7 +2045,7 @@
           <a:p>
             <a:fld id="{52231B9D-E9F6-4612-9B82-E89961B389AC}" type="datetimeFigureOut">
               <a:rPr lang="pt-BR" smtClean="0"/>
-              <a:t>10/10/2022</a:t>
+              <a:t>18/10/2022</a:t>
             </a:fld>
             <a:endParaRPr lang="pt-BR"/>
           </a:p>
@@ -2163,7 +2163,7 @@
           <a:p>
             <a:fld id="{52231B9D-E9F6-4612-9B82-E89961B389AC}" type="datetimeFigureOut">
               <a:rPr lang="pt-BR" smtClean="0"/>
-              <a:t>10/10/2022</a:t>
+              <a:t>18/10/2022</a:t>
             </a:fld>
             <a:endParaRPr lang="pt-BR"/>
           </a:p>
@@ -2258,7 +2258,7 @@
           <a:p>
             <a:fld id="{52231B9D-E9F6-4612-9B82-E89961B389AC}" type="datetimeFigureOut">
               <a:rPr lang="pt-BR" smtClean="0"/>
-              <a:t>10/10/2022</a:t>
+              <a:t>18/10/2022</a:t>
             </a:fld>
             <a:endParaRPr lang="pt-BR"/>
           </a:p>
@@ -2535,7 +2535,7 @@
           <a:p>
             <a:fld id="{52231B9D-E9F6-4612-9B82-E89961B389AC}" type="datetimeFigureOut">
               <a:rPr lang="pt-BR" smtClean="0"/>
-              <a:t>10/10/2022</a:t>
+              <a:t>18/10/2022</a:t>
             </a:fld>
             <a:endParaRPr lang="pt-BR"/>
           </a:p>
@@ -2788,7 +2788,7 @@
           <a:p>
             <a:fld id="{52231B9D-E9F6-4612-9B82-E89961B389AC}" type="datetimeFigureOut">
               <a:rPr lang="pt-BR" smtClean="0"/>
-              <a:t>10/10/2022</a:t>
+              <a:t>18/10/2022</a:t>
             </a:fld>
             <a:endParaRPr lang="pt-BR"/>
           </a:p>
@@ -3001,7 +3001,7 @@
           <a:p>
             <a:fld id="{52231B9D-E9F6-4612-9B82-E89961B389AC}" type="datetimeFigureOut">
               <a:rPr lang="pt-BR" smtClean="0"/>
-              <a:t>10/10/2022</a:t>
+              <a:t>18/10/2022</a:t>
             </a:fld>
             <a:endParaRPr lang="pt-BR"/>
           </a:p>
@@ -3665,7 +3665,17 @@
                   </a:schemeClr>
                 </a:solidFill>
               </a:rPr>
-              <a:t>09/10/2022</a:t>
+              <a:t>16</a:t>
+            </a:r>
+            <a:r>
+              <a:rPr lang="pt-BR" sz="1600" dirty="0" smtClean="0">
+                <a:solidFill>
+                  <a:schemeClr val="bg2">
+                    <a:lumMod val="90000"/>
+                  </a:schemeClr>
+                </a:solidFill>
+              </a:rPr>
+              <a:t>/10/2022</a:t>
             </a:r>
             <a:endParaRPr lang="pt-BR" sz="1600" dirty="0">
               <a:solidFill>

--- a/tempimento.pptx
+++ b/tempimento.pptx
@@ -3665,17 +3665,7 @@
                   </a:schemeClr>
                 </a:solidFill>
               </a:rPr>
-              <a:t>16</a:t>
-            </a:r>
-            <a:r>
-              <a:rPr lang="pt-BR" sz="1600" dirty="0" smtClean="0">
-                <a:solidFill>
-                  <a:schemeClr val="bg2">
-                    <a:lumMod val="90000"/>
-                  </a:schemeClr>
-                </a:solidFill>
-              </a:rPr>
-              <a:t>/10/2022</a:t>
+              <a:t>16/10/2022</a:t>
             </a:r>
             <a:endParaRPr lang="pt-BR" sz="1600" dirty="0">
               <a:solidFill>
@@ -3695,13 +3685,18 @@
         </p:nvCxnSpPr>
         <p:spPr>
           <a:xfrm flipH="1">
-            <a:off x="55648" y="3422469"/>
+            <a:off x="55648" y="3494314"/>
             <a:ext cx="12080704" cy="13063"/>
           </a:xfrm>
           <a:prstGeom prst="straightConnector1">
             <a:avLst/>
           </a:prstGeom>
           <a:ln>
+            <a:solidFill>
+              <a:schemeClr val="bg2">
+                <a:lumMod val="90000"/>
+              </a:schemeClr>
+            </a:solidFill>
             <a:tailEnd type="triangle"/>
           </a:ln>
         </p:spPr>
@@ -3720,6 +3715,493 @@
           </a:fontRef>
         </p:style>
       </p:cxnSp>
+      <p:cxnSp>
+        <p:nvCxnSpPr>
+          <p:cNvPr id="15" name="Conector de seta reta 14"/>
+          <p:cNvCxnSpPr/>
+          <p:nvPr/>
+        </p:nvCxnSpPr>
+        <p:spPr>
+          <a:xfrm flipH="1">
+            <a:off x="55648" y="5156562"/>
+            <a:ext cx="12080704" cy="13063"/>
+          </a:xfrm>
+          <a:prstGeom prst="straightConnector1">
+            <a:avLst/>
+          </a:prstGeom>
+          <a:ln w="3175">
+            <a:solidFill>
+              <a:schemeClr val="bg2">
+                <a:lumMod val="90000"/>
+              </a:schemeClr>
+            </a:solidFill>
+            <a:tailEnd type="triangle"/>
+          </a:ln>
+        </p:spPr>
+        <p:style>
+          <a:lnRef idx="1">
+            <a:schemeClr val="accent1"/>
+          </a:lnRef>
+          <a:fillRef idx="0">
+            <a:schemeClr val="accent1"/>
+          </a:fillRef>
+          <a:effectRef idx="0">
+            <a:schemeClr val="accent1"/>
+          </a:effectRef>
+          <a:fontRef idx="minor">
+            <a:schemeClr val="tx1"/>
+          </a:fontRef>
+        </p:style>
+      </p:cxnSp>
+      <p:cxnSp>
+        <p:nvCxnSpPr>
+          <p:cNvPr id="16" name="Conector de seta reta 15"/>
+          <p:cNvCxnSpPr/>
+          <p:nvPr/>
+        </p:nvCxnSpPr>
+        <p:spPr>
+          <a:xfrm flipH="1">
+            <a:off x="55648" y="1819002"/>
+            <a:ext cx="12080704" cy="13063"/>
+          </a:xfrm>
+          <a:prstGeom prst="straightConnector1">
+            <a:avLst/>
+          </a:prstGeom>
+          <a:ln>
+            <a:solidFill>
+              <a:schemeClr val="bg2">
+                <a:lumMod val="90000"/>
+              </a:schemeClr>
+            </a:solidFill>
+            <a:tailEnd type="triangle"/>
+          </a:ln>
+        </p:spPr>
+        <p:style>
+          <a:lnRef idx="1">
+            <a:schemeClr val="accent1"/>
+          </a:lnRef>
+          <a:fillRef idx="0">
+            <a:schemeClr val="accent1"/>
+          </a:fillRef>
+          <a:effectRef idx="0">
+            <a:schemeClr val="accent1"/>
+          </a:effectRef>
+          <a:fontRef idx="minor">
+            <a:schemeClr val="tx1"/>
+          </a:fontRef>
+        </p:style>
+      </p:cxnSp>
+      <p:sp>
+        <p:nvSpPr>
+          <p:cNvPr id="19" name="Espaço Reservado para Data 12"/>
+          <p:cNvSpPr txBox="1">
+            <a:spLocks/>
+          </p:cNvSpPr>
+          <p:nvPr/>
+        </p:nvSpPr>
+        <p:spPr>
+          <a:xfrm rot="5400000">
+            <a:off x="1107037" y="5293629"/>
+            <a:ext cx="704575" cy="365125"/>
+          </a:xfrm>
+          <a:prstGeom prst="rect">
+            <a:avLst/>
+          </a:prstGeom>
+        </p:spPr>
+        <p:txBody>
+          <a:bodyPr vert="horz" lIns="91440" tIns="45720" rIns="91440" bIns="45720" rtlCol="0" anchor="ctr"/>
+          <a:lstStyle>
+            <a:defPPr>
+              <a:defRPr lang="pt-BR"/>
+            </a:defPPr>
+            <a:lvl1pPr marL="0" algn="l" defTabSz="914400" rtl="0" eaLnBrk="1" latinLnBrk="0" hangingPunct="1">
+              <a:defRPr sz="1200" kern="1200">
+                <a:solidFill>
+                  <a:schemeClr val="tx1">
+                    <a:tint val="75000"/>
+                  </a:schemeClr>
+                </a:solidFill>
+                <a:latin typeface="+mn-lt"/>
+                <a:ea typeface="+mn-ea"/>
+                <a:cs typeface="+mn-cs"/>
+              </a:defRPr>
+            </a:lvl1pPr>
+            <a:lvl2pPr marL="457200" algn="l" defTabSz="914400" rtl="0" eaLnBrk="1" latinLnBrk="0" hangingPunct="1">
+              <a:defRPr sz="1800" kern="1200">
+                <a:solidFill>
+                  <a:schemeClr val="tx1"/>
+                </a:solidFill>
+                <a:latin typeface="+mn-lt"/>
+                <a:ea typeface="+mn-ea"/>
+                <a:cs typeface="+mn-cs"/>
+              </a:defRPr>
+            </a:lvl2pPr>
+            <a:lvl3pPr marL="914400" algn="l" defTabSz="914400" rtl="0" eaLnBrk="1" latinLnBrk="0" hangingPunct="1">
+              <a:defRPr sz="1800" kern="1200">
+                <a:solidFill>
+                  <a:schemeClr val="tx1"/>
+                </a:solidFill>
+                <a:latin typeface="+mn-lt"/>
+                <a:ea typeface="+mn-ea"/>
+                <a:cs typeface="+mn-cs"/>
+              </a:defRPr>
+            </a:lvl3pPr>
+            <a:lvl4pPr marL="1371600" algn="l" defTabSz="914400" rtl="0" eaLnBrk="1" latinLnBrk="0" hangingPunct="1">
+              <a:defRPr sz="1800" kern="1200">
+                <a:solidFill>
+                  <a:schemeClr val="tx1"/>
+                </a:solidFill>
+                <a:latin typeface="+mn-lt"/>
+                <a:ea typeface="+mn-ea"/>
+                <a:cs typeface="+mn-cs"/>
+              </a:defRPr>
+            </a:lvl4pPr>
+            <a:lvl5pPr marL="1828800" algn="l" defTabSz="914400" rtl="0" eaLnBrk="1" latinLnBrk="0" hangingPunct="1">
+              <a:defRPr sz="1800" kern="1200">
+                <a:solidFill>
+                  <a:schemeClr val="tx1"/>
+                </a:solidFill>
+                <a:latin typeface="+mn-lt"/>
+                <a:ea typeface="+mn-ea"/>
+                <a:cs typeface="+mn-cs"/>
+              </a:defRPr>
+            </a:lvl5pPr>
+            <a:lvl6pPr marL="2286000" algn="l" defTabSz="914400" rtl="0" eaLnBrk="1" latinLnBrk="0" hangingPunct="1">
+              <a:defRPr sz="1800" kern="1200">
+                <a:solidFill>
+                  <a:schemeClr val="tx1"/>
+                </a:solidFill>
+                <a:latin typeface="+mn-lt"/>
+                <a:ea typeface="+mn-ea"/>
+                <a:cs typeface="+mn-cs"/>
+              </a:defRPr>
+            </a:lvl6pPr>
+            <a:lvl7pPr marL="2743200" algn="l" defTabSz="914400" rtl="0" eaLnBrk="1" latinLnBrk="0" hangingPunct="1">
+              <a:defRPr sz="1800" kern="1200">
+                <a:solidFill>
+                  <a:schemeClr val="tx1"/>
+                </a:solidFill>
+                <a:latin typeface="+mn-lt"/>
+                <a:ea typeface="+mn-ea"/>
+                <a:cs typeface="+mn-cs"/>
+              </a:defRPr>
+            </a:lvl7pPr>
+            <a:lvl8pPr marL="3200400" algn="l" defTabSz="914400" rtl="0" eaLnBrk="1" latinLnBrk="0" hangingPunct="1">
+              <a:defRPr sz="1800" kern="1200">
+                <a:solidFill>
+                  <a:schemeClr val="tx1"/>
+                </a:solidFill>
+                <a:latin typeface="+mn-lt"/>
+                <a:ea typeface="+mn-ea"/>
+                <a:cs typeface="+mn-cs"/>
+              </a:defRPr>
+            </a:lvl8pPr>
+            <a:lvl9pPr marL="3657600" algn="l" defTabSz="914400" rtl="0" eaLnBrk="1" latinLnBrk="0" hangingPunct="1">
+              <a:defRPr sz="1800" kern="1200">
+                <a:solidFill>
+                  <a:schemeClr val="tx1"/>
+                </a:solidFill>
+                <a:latin typeface="+mn-lt"/>
+                <a:ea typeface="+mn-ea"/>
+                <a:cs typeface="+mn-cs"/>
+              </a:defRPr>
+            </a:lvl9pPr>
+          </a:lstStyle>
+          <a:p>
+            <a:r>
+              <a:rPr lang="pt-BR" sz="1600" dirty="0" smtClean="0">
+                <a:solidFill>
+                  <a:schemeClr val="bg2">
+                    <a:lumMod val="90000"/>
+                  </a:schemeClr>
+                </a:solidFill>
+              </a:rPr>
+              <a:t>19 h</a:t>
+            </a:r>
+            <a:endParaRPr lang="pt-BR" sz="1600" dirty="0">
+              <a:solidFill>
+                <a:schemeClr val="bg2">
+                  <a:lumMod val="90000"/>
+                </a:schemeClr>
+              </a:solidFill>
+            </a:endParaRPr>
+          </a:p>
+        </p:txBody>
+      </p:sp>
+      <p:sp>
+        <p:nvSpPr>
+          <p:cNvPr id="20" name="Espaço Reservado para Data 12"/>
+          <p:cNvSpPr txBox="1">
+            <a:spLocks/>
+          </p:cNvSpPr>
+          <p:nvPr/>
+        </p:nvSpPr>
+        <p:spPr>
+          <a:xfrm rot="5400000">
+            <a:off x="1107035" y="1943006"/>
+            <a:ext cx="704575" cy="365125"/>
+          </a:xfrm>
+          <a:prstGeom prst="rect">
+            <a:avLst/>
+          </a:prstGeom>
+        </p:spPr>
+        <p:txBody>
+          <a:bodyPr vert="horz" lIns="91440" tIns="45720" rIns="91440" bIns="45720" rtlCol="0" anchor="ctr"/>
+          <a:lstStyle>
+            <a:defPPr>
+              <a:defRPr lang="pt-BR"/>
+            </a:defPPr>
+            <a:lvl1pPr marL="0" algn="l" defTabSz="914400" rtl="0" eaLnBrk="1" latinLnBrk="0" hangingPunct="1">
+              <a:defRPr sz="1200" kern="1200">
+                <a:solidFill>
+                  <a:schemeClr val="tx1">
+                    <a:tint val="75000"/>
+                  </a:schemeClr>
+                </a:solidFill>
+                <a:latin typeface="+mn-lt"/>
+                <a:ea typeface="+mn-ea"/>
+                <a:cs typeface="+mn-cs"/>
+              </a:defRPr>
+            </a:lvl1pPr>
+            <a:lvl2pPr marL="457200" algn="l" defTabSz="914400" rtl="0" eaLnBrk="1" latinLnBrk="0" hangingPunct="1">
+              <a:defRPr sz="1800" kern="1200">
+                <a:solidFill>
+                  <a:schemeClr val="tx1"/>
+                </a:solidFill>
+                <a:latin typeface="+mn-lt"/>
+                <a:ea typeface="+mn-ea"/>
+                <a:cs typeface="+mn-cs"/>
+              </a:defRPr>
+            </a:lvl2pPr>
+            <a:lvl3pPr marL="914400" algn="l" defTabSz="914400" rtl="0" eaLnBrk="1" latinLnBrk="0" hangingPunct="1">
+              <a:defRPr sz="1800" kern="1200">
+                <a:solidFill>
+                  <a:schemeClr val="tx1"/>
+                </a:solidFill>
+                <a:latin typeface="+mn-lt"/>
+                <a:ea typeface="+mn-ea"/>
+                <a:cs typeface="+mn-cs"/>
+              </a:defRPr>
+            </a:lvl3pPr>
+            <a:lvl4pPr marL="1371600" algn="l" defTabSz="914400" rtl="0" eaLnBrk="1" latinLnBrk="0" hangingPunct="1">
+              <a:defRPr sz="1800" kern="1200">
+                <a:solidFill>
+                  <a:schemeClr val="tx1"/>
+                </a:solidFill>
+                <a:latin typeface="+mn-lt"/>
+                <a:ea typeface="+mn-ea"/>
+                <a:cs typeface="+mn-cs"/>
+              </a:defRPr>
+            </a:lvl4pPr>
+            <a:lvl5pPr marL="1828800" algn="l" defTabSz="914400" rtl="0" eaLnBrk="1" latinLnBrk="0" hangingPunct="1">
+              <a:defRPr sz="1800" kern="1200">
+                <a:solidFill>
+                  <a:schemeClr val="tx1"/>
+                </a:solidFill>
+                <a:latin typeface="+mn-lt"/>
+                <a:ea typeface="+mn-ea"/>
+                <a:cs typeface="+mn-cs"/>
+              </a:defRPr>
+            </a:lvl5pPr>
+            <a:lvl6pPr marL="2286000" algn="l" defTabSz="914400" rtl="0" eaLnBrk="1" latinLnBrk="0" hangingPunct="1">
+              <a:defRPr sz="1800" kern="1200">
+                <a:solidFill>
+                  <a:schemeClr val="tx1"/>
+                </a:solidFill>
+                <a:latin typeface="+mn-lt"/>
+                <a:ea typeface="+mn-ea"/>
+                <a:cs typeface="+mn-cs"/>
+              </a:defRPr>
+            </a:lvl6pPr>
+            <a:lvl7pPr marL="2743200" algn="l" defTabSz="914400" rtl="0" eaLnBrk="1" latinLnBrk="0" hangingPunct="1">
+              <a:defRPr sz="1800" kern="1200">
+                <a:solidFill>
+                  <a:schemeClr val="tx1"/>
+                </a:solidFill>
+                <a:latin typeface="+mn-lt"/>
+                <a:ea typeface="+mn-ea"/>
+                <a:cs typeface="+mn-cs"/>
+              </a:defRPr>
+            </a:lvl7pPr>
+            <a:lvl8pPr marL="3200400" algn="l" defTabSz="914400" rtl="0" eaLnBrk="1" latinLnBrk="0" hangingPunct="1">
+              <a:defRPr sz="1800" kern="1200">
+                <a:solidFill>
+                  <a:schemeClr val="tx1"/>
+                </a:solidFill>
+                <a:latin typeface="+mn-lt"/>
+                <a:ea typeface="+mn-ea"/>
+                <a:cs typeface="+mn-cs"/>
+              </a:defRPr>
+            </a:lvl8pPr>
+            <a:lvl9pPr marL="3657600" algn="l" defTabSz="914400" rtl="0" eaLnBrk="1" latinLnBrk="0" hangingPunct="1">
+              <a:defRPr sz="1800" kern="1200">
+                <a:solidFill>
+                  <a:schemeClr val="tx1"/>
+                </a:solidFill>
+                <a:latin typeface="+mn-lt"/>
+                <a:ea typeface="+mn-ea"/>
+                <a:cs typeface="+mn-cs"/>
+              </a:defRPr>
+            </a:lvl9pPr>
+          </a:lstStyle>
+          <a:p>
+            <a:r>
+              <a:rPr lang="pt-BR" sz="1600" dirty="0" smtClean="0">
+                <a:solidFill>
+                  <a:schemeClr val="bg2">
+                    <a:lumMod val="90000"/>
+                  </a:schemeClr>
+                </a:solidFill>
+              </a:rPr>
+              <a:t>11 h</a:t>
+            </a:r>
+            <a:endParaRPr lang="pt-BR" sz="1600" dirty="0">
+              <a:solidFill>
+                <a:schemeClr val="bg2">
+                  <a:lumMod val="90000"/>
+                </a:schemeClr>
+              </a:solidFill>
+            </a:endParaRPr>
+          </a:p>
+        </p:txBody>
+      </p:sp>
+      <p:sp>
+        <p:nvSpPr>
+          <p:cNvPr id="21" name="Espaço Reservado para Data 12"/>
+          <p:cNvSpPr txBox="1">
+            <a:spLocks/>
+          </p:cNvSpPr>
+          <p:nvPr/>
+        </p:nvSpPr>
+        <p:spPr>
+          <a:xfrm rot="5400000">
+            <a:off x="1107036" y="3638179"/>
+            <a:ext cx="704575" cy="365125"/>
+          </a:xfrm>
+          <a:prstGeom prst="rect">
+            <a:avLst/>
+          </a:prstGeom>
+        </p:spPr>
+        <p:txBody>
+          <a:bodyPr vert="horz" lIns="91440" tIns="45720" rIns="91440" bIns="45720" rtlCol="0" anchor="ctr"/>
+          <a:lstStyle>
+            <a:defPPr>
+              <a:defRPr lang="pt-BR"/>
+            </a:defPPr>
+            <a:lvl1pPr marL="0" algn="l" defTabSz="914400" rtl="0" eaLnBrk="1" latinLnBrk="0" hangingPunct="1">
+              <a:defRPr sz="1200" kern="1200">
+                <a:solidFill>
+                  <a:schemeClr val="tx1">
+                    <a:tint val="75000"/>
+                  </a:schemeClr>
+                </a:solidFill>
+                <a:latin typeface="+mn-lt"/>
+                <a:ea typeface="+mn-ea"/>
+                <a:cs typeface="+mn-cs"/>
+              </a:defRPr>
+            </a:lvl1pPr>
+            <a:lvl2pPr marL="457200" algn="l" defTabSz="914400" rtl="0" eaLnBrk="1" latinLnBrk="0" hangingPunct="1">
+              <a:defRPr sz="1800" kern="1200">
+                <a:solidFill>
+                  <a:schemeClr val="tx1"/>
+                </a:solidFill>
+                <a:latin typeface="+mn-lt"/>
+                <a:ea typeface="+mn-ea"/>
+                <a:cs typeface="+mn-cs"/>
+              </a:defRPr>
+            </a:lvl2pPr>
+            <a:lvl3pPr marL="914400" algn="l" defTabSz="914400" rtl="0" eaLnBrk="1" latinLnBrk="0" hangingPunct="1">
+              <a:defRPr sz="1800" kern="1200">
+                <a:solidFill>
+                  <a:schemeClr val="tx1"/>
+                </a:solidFill>
+                <a:latin typeface="+mn-lt"/>
+                <a:ea typeface="+mn-ea"/>
+                <a:cs typeface="+mn-cs"/>
+              </a:defRPr>
+            </a:lvl3pPr>
+            <a:lvl4pPr marL="1371600" algn="l" defTabSz="914400" rtl="0" eaLnBrk="1" latinLnBrk="0" hangingPunct="1">
+              <a:defRPr sz="1800" kern="1200">
+                <a:solidFill>
+                  <a:schemeClr val="tx1"/>
+                </a:solidFill>
+                <a:latin typeface="+mn-lt"/>
+                <a:ea typeface="+mn-ea"/>
+                <a:cs typeface="+mn-cs"/>
+              </a:defRPr>
+            </a:lvl4pPr>
+            <a:lvl5pPr marL="1828800" algn="l" defTabSz="914400" rtl="0" eaLnBrk="1" latinLnBrk="0" hangingPunct="1">
+              <a:defRPr sz="1800" kern="1200">
+                <a:solidFill>
+                  <a:schemeClr val="tx1"/>
+                </a:solidFill>
+                <a:latin typeface="+mn-lt"/>
+                <a:ea typeface="+mn-ea"/>
+                <a:cs typeface="+mn-cs"/>
+              </a:defRPr>
+            </a:lvl5pPr>
+            <a:lvl6pPr marL="2286000" algn="l" defTabSz="914400" rtl="0" eaLnBrk="1" latinLnBrk="0" hangingPunct="1">
+              <a:defRPr sz="1800" kern="1200">
+                <a:solidFill>
+                  <a:schemeClr val="tx1"/>
+                </a:solidFill>
+                <a:latin typeface="+mn-lt"/>
+                <a:ea typeface="+mn-ea"/>
+                <a:cs typeface="+mn-cs"/>
+              </a:defRPr>
+            </a:lvl6pPr>
+            <a:lvl7pPr marL="2743200" algn="l" defTabSz="914400" rtl="0" eaLnBrk="1" latinLnBrk="0" hangingPunct="1">
+              <a:defRPr sz="1800" kern="1200">
+                <a:solidFill>
+                  <a:schemeClr val="tx1"/>
+                </a:solidFill>
+                <a:latin typeface="+mn-lt"/>
+                <a:ea typeface="+mn-ea"/>
+                <a:cs typeface="+mn-cs"/>
+              </a:defRPr>
+            </a:lvl7pPr>
+            <a:lvl8pPr marL="3200400" algn="l" defTabSz="914400" rtl="0" eaLnBrk="1" latinLnBrk="0" hangingPunct="1">
+              <a:defRPr sz="1800" kern="1200">
+                <a:solidFill>
+                  <a:schemeClr val="tx1"/>
+                </a:solidFill>
+                <a:latin typeface="+mn-lt"/>
+                <a:ea typeface="+mn-ea"/>
+                <a:cs typeface="+mn-cs"/>
+              </a:defRPr>
+            </a:lvl8pPr>
+            <a:lvl9pPr marL="3657600" algn="l" defTabSz="914400" rtl="0" eaLnBrk="1" latinLnBrk="0" hangingPunct="1">
+              <a:defRPr sz="1800" kern="1200">
+                <a:solidFill>
+                  <a:schemeClr val="tx1"/>
+                </a:solidFill>
+                <a:latin typeface="+mn-lt"/>
+                <a:ea typeface="+mn-ea"/>
+                <a:cs typeface="+mn-cs"/>
+              </a:defRPr>
+            </a:lvl9pPr>
+          </a:lstStyle>
+          <a:p>
+            <a:r>
+              <a:rPr lang="pt-BR" sz="1600" dirty="0" smtClean="0">
+                <a:solidFill>
+                  <a:schemeClr val="bg2">
+                    <a:lumMod val="90000"/>
+                  </a:schemeClr>
+                </a:solidFill>
+              </a:rPr>
+              <a:t>15 h</a:t>
+            </a:r>
+            <a:endParaRPr lang="pt-BR" sz="1600" dirty="0">
+              <a:solidFill>
+                <a:schemeClr val="bg2">
+                  <a:lumMod val="90000"/>
+                </a:schemeClr>
+              </a:solidFill>
+            </a:endParaRPr>
+          </a:p>
+        </p:txBody>
+      </p:sp>
     </p:spTree>
     <p:extLst>
       <p:ext uri="{BB962C8B-B14F-4D97-AF65-F5344CB8AC3E}">

--- a/tempimento.pptx
+++ b/tempimento.pptx
@@ -11,7 +11,7 @@
     <p:sldId id="256" r:id="rId2"/>
   </p:sldIdLst>
   <p:sldSz cx="12192000" cy="6858000"/>
-  <p:notesSz cx="7104063" cy="10234613"/>
+  <p:notesSz cx="6888163" cy="9671050"/>
   <p:defaultTextStyle>
     <a:defPPr>
       <a:defRPr lang="pt-BR"/>
@@ -149,18 +149,18 @@
         </p:nvSpPr>
         <p:spPr>
           <a:xfrm>
-            <a:off x="1" y="1"/>
-            <a:ext cx="3078851" cy="512763"/>
+            <a:off x="2" y="1"/>
+            <a:ext cx="2985281" cy="484528"/>
           </a:xfrm>
           <a:prstGeom prst="rect">
             <a:avLst/>
           </a:prstGeom>
         </p:spPr>
         <p:txBody>
-          <a:bodyPr vert="horz" lIns="91440" tIns="45720" rIns="91440" bIns="45720" rtlCol="0"/>
+          <a:bodyPr vert="horz" lIns="87325" tIns="43663" rIns="87325" bIns="43663" rtlCol="0"/>
           <a:lstStyle>
             <a:lvl1pPr algn="l">
-              <a:defRPr sz="1200"/>
+              <a:defRPr sz="1100"/>
             </a:lvl1pPr>
           </a:lstStyle>
           <a:p>
@@ -180,24 +180,24 @@
         </p:nvSpPr>
         <p:spPr>
           <a:xfrm>
-            <a:off x="4023625" y="1"/>
-            <a:ext cx="3078851" cy="512763"/>
+            <a:off x="3901343" y="1"/>
+            <a:ext cx="2985281" cy="484528"/>
           </a:xfrm>
           <a:prstGeom prst="rect">
             <a:avLst/>
           </a:prstGeom>
         </p:spPr>
         <p:txBody>
-          <a:bodyPr vert="horz" lIns="91440" tIns="45720" rIns="91440" bIns="45720" rtlCol="0"/>
+          <a:bodyPr vert="horz" lIns="87325" tIns="43663" rIns="87325" bIns="43663" rtlCol="0"/>
           <a:lstStyle>
             <a:lvl1pPr algn="r">
-              <a:defRPr sz="1200"/>
+              <a:defRPr sz="1100"/>
             </a:lvl1pPr>
           </a:lstStyle>
           <a:p>
             <a:fld id="{A584E3A2-E8EA-4705-A613-CFE9F6F5D3B4}" type="datetimeFigureOut">
               <a:rPr lang="pt-BR" smtClean="0"/>
-              <a:t>18/10/2022</a:t>
+              <a:t>19/10/2022</a:t>
             </a:fld>
             <a:endParaRPr lang="pt-BR"/>
           </a:p>
@@ -215,8 +215,8 @@
         </p:nvSpPr>
         <p:spPr>
           <a:xfrm>
-            <a:off x="481013" y="1279525"/>
-            <a:ext cx="6142037" cy="3454400"/>
+            <a:off x="542925" y="1209675"/>
+            <a:ext cx="5802313" cy="3263900"/>
           </a:xfrm>
           <a:prstGeom prst="rect">
             <a:avLst/>
@@ -229,7 +229,7 @@
           </a:ln>
         </p:spPr>
         <p:txBody>
-          <a:bodyPr vert="horz" lIns="91440" tIns="45720" rIns="91440" bIns="45720" rtlCol="0" anchor="ctr"/>
+          <a:bodyPr vert="horz" lIns="87325" tIns="43663" rIns="87325" bIns="43663" rtlCol="0" anchor="ctr"/>
           <a:lstStyle/>
           <a:p>
             <a:endParaRPr lang="pt-BR"/>
@@ -248,15 +248,15 @@
         </p:nvSpPr>
         <p:spPr>
           <a:xfrm>
-            <a:off x="709772" y="4926014"/>
-            <a:ext cx="5684521" cy="4029075"/>
+            <a:off x="688202" y="4654767"/>
+            <a:ext cx="5511762" cy="3807216"/>
           </a:xfrm>
           <a:prstGeom prst="rect">
             <a:avLst/>
           </a:prstGeom>
         </p:spPr>
         <p:txBody>
-          <a:bodyPr vert="horz" lIns="91440" tIns="45720" rIns="91440" bIns="45720" rtlCol="0"/>
+          <a:bodyPr vert="horz" lIns="87325" tIns="43663" rIns="87325" bIns="43663" rtlCol="0"/>
           <a:lstStyle/>
           <a:p>
             <a:pPr lvl="0"/>
@@ -308,18 +308,18 @@
         </p:nvSpPr>
         <p:spPr>
           <a:xfrm>
-            <a:off x="1" y="9721851"/>
-            <a:ext cx="3078851" cy="512763"/>
+            <a:off x="2" y="9186523"/>
+            <a:ext cx="2985281" cy="484528"/>
           </a:xfrm>
           <a:prstGeom prst="rect">
             <a:avLst/>
           </a:prstGeom>
         </p:spPr>
         <p:txBody>
-          <a:bodyPr vert="horz" lIns="91440" tIns="45720" rIns="91440" bIns="45720" rtlCol="0" anchor="b"/>
+          <a:bodyPr vert="horz" lIns="87325" tIns="43663" rIns="87325" bIns="43663" rtlCol="0" anchor="b"/>
           <a:lstStyle>
             <a:lvl1pPr algn="l">
-              <a:defRPr sz="1200"/>
+              <a:defRPr sz="1100"/>
             </a:lvl1pPr>
           </a:lstStyle>
           <a:p>
@@ -339,18 +339,18 @@
         </p:nvSpPr>
         <p:spPr>
           <a:xfrm>
-            <a:off x="4023625" y="9721851"/>
-            <a:ext cx="3078851" cy="512763"/>
+            <a:off x="3901343" y="9186523"/>
+            <a:ext cx="2985281" cy="484528"/>
           </a:xfrm>
           <a:prstGeom prst="rect">
             <a:avLst/>
           </a:prstGeom>
         </p:spPr>
         <p:txBody>
-          <a:bodyPr vert="horz" lIns="91440" tIns="45720" rIns="91440" bIns="45720" rtlCol="0" anchor="b"/>
+          <a:bodyPr vert="horz" lIns="87325" tIns="43663" rIns="87325" bIns="43663" rtlCol="0" anchor="b"/>
           <a:lstStyle>
             <a:lvl1pPr algn="r">
-              <a:defRPr sz="1200"/>
+              <a:defRPr sz="1100"/>
             </a:lvl1pPr>
           </a:lstStyle>
           <a:p>
@@ -680,7 +680,7 @@
           <a:p>
             <a:fld id="{52231B9D-E9F6-4612-9B82-E89961B389AC}" type="datetimeFigureOut">
               <a:rPr lang="pt-BR" smtClean="0"/>
-              <a:t>18/10/2022</a:t>
+              <a:t>19/10/2022</a:t>
             </a:fld>
             <a:endParaRPr lang="pt-BR"/>
           </a:p>
@@ -850,7 +850,7 @@
           <a:p>
             <a:fld id="{52231B9D-E9F6-4612-9B82-E89961B389AC}" type="datetimeFigureOut">
               <a:rPr lang="pt-BR" smtClean="0"/>
-              <a:t>18/10/2022</a:t>
+              <a:t>19/10/2022</a:t>
             </a:fld>
             <a:endParaRPr lang="pt-BR"/>
           </a:p>
@@ -1030,7 +1030,7 @@
           <a:p>
             <a:fld id="{52231B9D-E9F6-4612-9B82-E89961B389AC}" type="datetimeFigureOut">
               <a:rPr lang="pt-BR" smtClean="0"/>
-              <a:t>18/10/2022</a:t>
+              <a:t>19/10/2022</a:t>
             </a:fld>
             <a:endParaRPr lang="pt-BR"/>
           </a:p>
@@ -1200,7 +1200,7 @@
           <a:p>
             <a:fld id="{52231B9D-E9F6-4612-9B82-E89961B389AC}" type="datetimeFigureOut">
               <a:rPr lang="pt-BR" smtClean="0"/>
-              <a:t>18/10/2022</a:t>
+              <a:t>19/10/2022</a:t>
             </a:fld>
             <a:endParaRPr lang="pt-BR"/>
           </a:p>
@@ -1446,7 +1446,7 @@
           <a:p>
             <a:fld id="{52231B9D-E9F6-4612-9B82-E89961B389AC}" type="datetimeFigureOut">
               <a:rPr lang="pt-BR" smtClean="0"/>
-              <a:t>18/10/2022</a:t>
+              <a:t>19/10/2022</a:t>
             </a:fld>
             <a:endParaRPr lang="pt-BR"/>
           </a:p>
@@ -1678,7 +1678,7 @@
           <a:p>
             <a:fld id="{52231B9D-E9F6-4612-9B82-E89961B389AC}" type="datetimeFigureOut">
               <a:rPr lang="pt-BR" smtClean="0"/>
-              <a:t>18/10/2022</a:t>
+              <a:t>19/10/2022</a:t>
             </a:fld>
             <a:endParaRPr lang="pt-BR"/>
           </a:p>
@@ -2045,7 +2045,7 @@
           <a:p>
             <a:fld id="{52231B9D-E9F6-4612-9B82-E89961B389AC}" type="datetimeFigureOut">
               <a:rPr lang="pt-BR" smtClean="0"/>
-              <a:t>18/10/2022</a:t>
+              <a:t>19/10/2022</a:t>
             </a:fld>
             <a:endParaRPr lang="pt-BR"/>
           </a:p>
@@ -2163,7 +2163,7 @@
           <a:p>
             <a:fld id="{52231B9D-E9F6-4612-9B82-E89961B389AC}" type="datetimeFigureOut">
               <a:rPr lang="pt-BR" smtClean="0"/>
-              <a:t>18/10/2022</a:t>
+              <a:t>19/10/2022</a:t>
             </a:fld>
             <a:endParaRPr lang="pt-BR"/>
           </a:p>
@@ -2258,7 +2258,7 @@
           <a:p>
             <a:fld id="{52231B9D-E9F6-4612-9B82-E89961B389AC}" type="datetimeFigureOut">
               <a:rPr lang="pt-BR" smtClean="0"/>
-              <a:t>18/10/2022</a:t>
+              <a:t>19/10/2022</a:t>
             </a:fld>
             <a:endParaRPr lang="pt-BR"/>
           </a:p>
@@ -2535,7 +2535,7 @@
           <a:p>
             <a:fld id="{52231B9D-E9F6-4612-9B82-E89961B389AC}" type="datetimeFigureOut">
               <a:rPr lang="pt-BR" smtClean="0"/>
-              <a:t>18/10/2022</a:t>
+              <a:t>19/10/2022</a:t>
             </a:fld>
             <a:endParaRPr lang="pt-BR"/>
           </a:p>
@@ -2788,7 +2788,7 @@
           <a:p>
             <a:fld id="{52231B9D-E9F6-4612-9B82-E89961B389AC}" type="datetimeFigureOut">
               <a:rPr lang="pt-BR" smtClean="0"/>
-              <a:t>18/10/2022</a:t>
+              <a:t>19/10/2022</a:t>
             </a:fld>
             <a:endParaRPr lang="pt-BR"/>
           </a:p>
@@ -3001,7 +3001,7 @@
           <a:p>
             <a:fld id="{52231B9D-E9F6-4612-9B82-E89961B389AC}" type="datetimeFigureOut">
               <a:rPr lang="pt-BR" smtClean="0"/>
-              <a:t>18/10/2022</a:t>
+              <a:t>19/10/2022</a:t>
             </a:fld>
             <a:endParaRPr lang="pt-BR"/>
           </a:p>

--- a/tempimento.pptx
+++ b/tempimento.pptx
@@ -11,7 +11,7 @@
     <p:sldId id="256" r:id="rId2"/>
   </p:sldIdLst>
   <p:sldSz cx="12192000" cy="6858000"/>
-  <p:notesSz cx="6888163" cy="9671050"/>
+  <p:notesSz cx="7104063" cy="10234613"/>
   <p:defaultTextStyle>
     <a:defPPr>
       <a:defRPr lang="pt-BR"/>
@@ -150,17 +150,17 @@
         <p:spPr>
           <a:xfrm>
             <a:off x="2" y="1"/>
-            <a:ext cx="2985281" cy="484528"/>
+            <a:ext cx="3078851" cy="512763"/>
           </a:xfrm>
           <a:prstGeom prst="rect">
             <a:avLst/>
           </a:prstGeom>
         </p:spPr>
         <p:txBody>
-          <a:bodyPr vert="horz" lIns="87325" tIns="43663" rIns="87325" bIns="43663" rtlCol="0"/>
+          <a:bodyPr vert="horz" lIns="91429" tIns="45715" rIns="91429" bIns="45715" rtlCol="0"/>
           <a:lstStyle>
             <a:lvl1pPr algn="l">
-              <a:defRPr sz="1100"/>
+              <a:defRPr sz="1200"/>
             </a:lvl1pPr>
           </a:lstStyle>
           <a:p>
@@ -180,24 +180,24 @@
         </p:nvSpPr>
         <p:spPr>
           <a:xfrm>
-            <a:off x="3901343" y="1"/>
-            <a:ext cx="2985281" cy="484528"/>
+            <a:off x="4023626" y="1"/>
+            <a:ext cx="3078851" cy="512763"/>
           </a:xfrm>
           <a:prstGeom prst="rect">
             <a:avLst/>
           </a:prstGeom>
         </p:spPr>
         <p:txBody>
-          <a:bodyPr vert="horz" lIns="87325" tIns="43663" rIns="87325" bIns="43663" rtlCol="0"/>
+          <a:bodyPr vert="horz" lIns="91429" tIns="45715" rIns="91429" bIns="45715" rtlCol="0"/>
           <a:lstStyle>
             <a:lvl1pPr algn="r">
-              <a:defRPr sz="1100"/>
+              <a:defRPr sz="1200"/>
             </a:lvl1pPr>
           </a:lstStyle>
           <a:p>
             <a:fld id="{A584E3A2-E8EA-4705-A613-CFE9F6F5D3B4}" type="datetimeFigureOut">
               <a:rPr lang="pt-BR" smtClean="0"/>
-              <a:t>19/10/2022</a:t>
+              <a:t>24/10/2022</a:t>
             </a:fld>
             <a:endParaRPr lang="pt-BR"/>
           </a:p>
@@ -215,8 +215,8 @@
         </p:nvSpPr>
         <p:spPr>
           <a:xfrm>
-            <a:off x="542925" y="1209675"/>
-            <a:ext cx="5802313" cy="3263900"/>
+            <a:off x="482600" y="1279525"/>
+            <a:ext cx="6138863" cy="3454400"/>
           </a:xfrm>
           <a:prstGeom prst="rect">
             <a:avLst/>
@@ -229,7 +229,7 @@
           </a:ln>
         </p:spPr>
         <p:txBody>
-          <a:bodyPr vert="horz" lIns="87325" tIns="43663" rIns="87325" bIns="43663" rtlCol="0" anchor="ctr"/>
+          <a:bodyPr vert="horz" lIns="91429" tIns="45715" rIns="91429" bIns="45715" rtlCol="0" anchor="ctr"/>
           <a:lstStyle/>
           <a:p>
             <a:endParaRPr lang="pt-BR"/>
@@ -248,15 +248,15 @@
         </p:nvSpPr>
         <p:spPr>
           <a:xfrm>
-            <a:off x="688202" y="4654767"/>
-            <a:ext cx="5511762" cy="3807216"/>
+            <a:off x="709773" y="4926015"/>
+            <a:ext cx="5684521" cy="4029075"/>
           </a:xfrm>
           <a:prstGeom prst="rect">
             <a:avLst/>
           </a:prstGeom>
         </p:spPr>
         <p:txBody>
-          <a:bodyPr vert="horz" lIns="87325" tIns="43663" rIns="87325" bIns="43663" rtlCol="0"/>
+          <a:bodyPr vert="horz" lIns="91429" tIns="45715" rIns="91429" bIns="45715" rtlCol="0"/>
           <a:lstStyle/>
           <a:p>
             <a:pPr lvl="0"/>
@@ -308,18 +308,18 @@
         </p:nvSpPr>
         <p:spPr>
           <a:xfrm>
-            <a:off x="2" y="9186523"/>
-            <a:ext cx="2985281" cy="484528"/>
+            <a:off x="2" y="9721851"/>
+            <a:ext cx="3078851" cy="512763"/>
           </a:xfrm>
           <a:prstGeom prst="rect">
             <a:avLst/>
           </a:prstGeom>
         </p:spPr>
         <p:txBody>
-          <a:bodyPr vert="horz" lIns="87325" tIns="43663" rIns="87325" bIns="43663" rtlCol="0" anchor="b"/>
+          <a:bodyPr vert="horz" lIns="91429" tIns="45715" rIns="91429" bIns="45715" rtlCol="0" anchor="b"/>
           <a:lstStyle>
             <a:lvl1pPr algn="l">
-              <a:defRPr sz="1100"/>
+              <a:defRPr sz="1200"/>
             </a:lvl1pPr>
           </a:lstStyle>
           <a:p>
@@ -339,18 +339,18 @@
         </p:nvSpPr>
         <p:spPr>
           <a:xfrm>
-            <a:off x="3901343" y="9186523"/>
-            <a:ext cx="2985281" cy="484528"/>
+            <a:off x="4023626" y="9721851"/>
+            <a:ext cx="3078851" cy="512763"/>
           </a:xfrm>
           <a:prstGeom prst="rect">
             <a:avLst/>
           </a:prstGeom>
         </p:spPr>
         <p:txBody>
-          <a:bodyPr vert="horz" lIns="87325" tIns="43663" rIns="87325" bIns="43663" rtlCol="0" anchor="b"/>
+          <a:bodyPr vert="horz" lIns="91429" tIns="45715" rIns="91429" bIns="45715" rtlCol="0" anchor="b"/>
           <a:lstStyle>
             <a:lvl1pPr algn="r">
-              <a:defRPr sz="1100"/>
+              <a:defRPr sz="1200"/>
             </a:lvl1pPr>
           </a:lstStyle>
           <a:p>
@@ -680,7 +680,7 @@
           <a:p>
             <a:fld id="{52231B9D-E9F6-4612-9B82-E89961B389AC}" type="datetimeFigureOut">
               <a:rPr lang="pt-BR" smtClean="0"/>
-              <a:t>19/10/2022</a:t>
+              <a:t>24/10/2022</a:t>
             </a:fld>
             <a:endParaRPr lang="pt-BR"/>
           </a:p>
@@ -850,7 +850,7 @@
           <a:p>
             <a:fld id="{52231B9D-E9F6-4612-9B82-E89961B389AC}" type="datetimeFigureOut">
               <a:rPr lang="pt-BR" smtClean="0"/>
-              <a:t>19/10/2022</a:t>
+              <a:t>24/10/2022</a:t>
             </a:fld>
             <a:endParaRPr lang="pt-BR"/>
           </a:p>
@@ -1030,7 +1030,7 @@
           <a:p>
             <a:fld id="{52231B9D-E9F6-4612-9B82-E89961B389AC}" type="datetimeFigureOut">
               <a:rPr lang="pt-BR" smtClean="0"/>
-              <a:t>19/10/2022</a:t>
+              <a:t>24/10/2022</a:t>
             </a:fld>
             <a:endParaRPr lang="pt-BR"/>
           </a:p>
@@ -1200,7 +1200,7 @@
           <a:p>
             <a:fld id="{52231B9D-E9F6-4612-9B82-E89961B389AC}" type="datetimeFigureOut">
               <a:rPr lang="pt-BR" smtClean="0"/>
-              <a:t>19/10/2022</a:t>
+              <a:t>24/10/2022</a:t>
             </a:fld>
             <a:endParaRPr lang="pt-BR"/>
           </a:p>
@@ -1446,7 +1446,7 @@
           <a:p>
             <a:fld id="{52231B9D-E9F6-4612-9B82-E89961B389AC}" type="datetimeFigureOut">
               <a:rPr lang="pt-BR" smtClean="0"/>
-              <a:t>19/10/2022</a:t>
+              <a:t>24/10/2022</a:t>
             </a:fld>
             <a:endParaRPr lang="pt-BR"/>
           </a:p>
@@ -1678,7 +1678,7 @@
           <a:p>
             <a:fld id="{52231B9D-E9F6-4612-9B82-E89961B389AC}" type="datetimeFigureOut">
               <a:rPr lang="pt-BR" smtClean="0"/>
-              <a:t>19/10/2022</a:t>
+              <a:t>24/10/2022</a:t>
             </a:fld>
             <a:endParaRPr lang="pt-BR"/>
           </a:p>
@@ -2045,7 +2045,7 @@
           <a:p>
             <a:fld id="{52231B9D-E9F6-4612-9B82-E89961B389AC}" type="datetimeFigureOut">
               <a:rPr lang="pt-BR" smtClean="0"/>
-              <a:t>19/10/2022</a:t>
+              <a:t>24/10/2022</a:t>
             </a:fld>
             <a:endParaRPr lang="pt-BR"/>
           </a:p>
@@ -2163,7 +2163,7 @@
           <a:p>
             <a:fld id="{52231B9D-E9F6-4612-9B82-E89961B389AC}" type="datetimeFigureOut">
               <a:rPr lang="pt-BR" smtClean="0"/>
-              <a:t>19/10/2022</a:t>
+              <a:t>24/10/2022</a:t>
             </a:fld>
             <a:endParaRPr lang="pt-BR"/>
           </a:p>
@@ -2258,7 +2258,7 @@
           <a:p>
             <a:fld id="{52231B9D-E9F6-4612-9B82-E89961B389AC}" type="datetimeFigureOut">
               <a:rPr lang="pt-BR" smtClean="0"/>
-              <a:t>19/10/2022</a:t>
+              <a:t>24/10/2022</a:t>
             </a:fld>
             <a:endParaRPr lang="pt-BR"/>
           </a:p>
@@ -2535,7 +2535,7 @@
           <a:p>
             <a:fld id="{52231B9D-E9F6-4612-9B82-E89961B389AC}" type="datetimeFigureOut">
               <a:rPr lang="pt-BR" smtClean="0"/>
-              <a:t>19/10/2022</a:t>
+              <a:t>24/10/2022</a:t>
             </a:fld>
             <a:endParaRPr lang="pt-BR"/>
           </a:p>
@@ -2788,7 +2788,7 @@
           <a:p>
             <a:fld id="{52231B9D-E9F6-4612-9B82-E89961B389AC}" type="datetimeFigureOut">
               <a:rPr lang="pt-BR" smtClean="0"/>
-              <a:t>19/10/2022</a:t>
+              <a:t>24/10/2022</a:t>
             </a:fld>
             <a:endParaRPr lang="pt-BR"/>
           </a:p>
@@ -3001,7 +3001,7 @@
           <a:p>
             <a:fld id="{52231B9D-E9F6-4612-9B82-E89961B389AC}" type="datetimeFigureOut">
               <a:rPr lang="pt-BR" smtClean="0"/>
-              <a:t>19/10/2022</a:t>
+              <a:t>24/10/2022</a:t>
             </a:fld>
             <a:endParaRPr lang="pt-BR"/>
           </a:p>
@@ -3665,7 +3665,17 @@
                   </a:schemeClr>
                 </a:solidFill>
               </a:rPr>
-              <a:t>16/10/2022</a:t>
+              <a:t>31</a:t>
+            </a:r>
+            <a:r>
+              <a:rPr lang="pt-BR" sz="1600" dirty="0" smtClean="0">
+                <a:solidFill>
+                  <a:schemeClr val="bg2">
+                    <a:lumMod val="90000"/>
+                  </a:schemeClr>
+                </a:solidFill>
+              </a:rPr>
+              <a:t>/10/2022</a:t>
             </a:r>
             <a:endParaRPr lang="pt-BR" sz="1600" dirty="0">
               <a:solidFill>

--- a/tempimento.pptx
+++ b/tempimento.pptx
@@ -197,7 +197,7 @@
           <a:p>
             <a:fld id="{A584E3A2-E8EA-4705-A613-CFE9F6F5D3B4}" type="datetimeFigureOut">
               <a:rPr lang="pt-BR" smtClean="0"/>
-              <a:t>24/10/2022</a:t>
+              <a:t>31/10/2022</a:t>
             </a:fld>
             <a:endParaRPr lang="pt-BR"/>
           </a:p>
@@ -680,7 +680,7 @@
           <a:p>
             <a:fld id="{52231B9D-E9F6-4612-9B82-E89961B389AC}" type="datetimeFigureOut">
               <a:rPr lang="pt-BR" smtClean="0"/>
-              <a:t>24/10/2022</a:t>
+              <a:t>31/10/2022</a:t>
             </a:fld>
             <a:endParaRPr lang="pt-BR"/>
           </a:p>
@@ -850,7 +850,7 @@
           <a:p>
             <a:fld id="{52231B9D-E9F6-4612-9B82-E89961B389AC}" type="datetimeFigureOut">
               <a:rPr lang="pt-BR" smtClean="0"/>
-              <a:t>24/10/2022</a:t>
+              <a:t>31/10/2022</a:t>
             </a:fld>
             <a:endParaRPr lang="pt-BR"/>
           </a:p>
@@ -1030,7 +1030,7 @@
           <a:p>
             <a:fld id="{52231B9D-E9F6-4612-9B82-E89961B389AC}" type="datetimeFigureOut">
               <a:rPr lang="pt-BR" smtClean="0"/>
-              <a:t>24/10/2022</a:t>
+              <a:t>31/10/2022</a:t>
             </a:fld>
             <a:endParaRPr lang="pt-BR"/>
           </a:p>
@@ -1200,7 +1200,7 @@
           <a:p>
             <a:fld id="{52231B9D-E9F6-4612-9B82-E89961B389AC}" type="datetimeFigureOut">
               <a:rPr lang="pt-BR" smtClean="0"/>
-              <a:t>24/10/2022</a:t>
+              <a:t>31/10/2022</a:t>
             </a:fld>
             <a:endParaRPr lang="pt-BR"/>
           </a:p>
@@ -1446,7 +1446,7 @@
           <a:p>
             <a:fld id="{52231B9D-E9F6-4612-9B82-E89961B389AC}" type="datetimeFigureOut">
               <a:rPr lang="pt-BR" smtClean="0"/>
-              <a:t>24/10/2022</a:t>
+              <a:t>31/10/2022</a:t>
             </a:fld>
             <a:endParaRPr lang="pt-BR"/>
           </a:p>
@@ -1678,7 +1678,7 @@
           <a:p>
             <a:fld id="{52231B9D-E9F6-4612-9B82-E89961B389AC}" type="datetimeFigureOut">
               <a:rPr lang="pt-BR" smtClean="0"/>
-              <a:t>24/10/2022</a:t>
+              <a:t>31/10/2022</a:t>
             </a:fld>
             <a:endParaRPr lang="pt-BR"/>
           </a:p>
@@ -2045,7 +2045,7 @@
           <a:p>
             <a:fld id="{52231B9D-E9F6-4612-9B82-E89961B389AC}" type="datetimeFigureOut">
               <a:rPr lang="pt-BR" smtClean="0"/>
-              <a:t>24/10/2022</a:t>
+              <a:t>31/10/2022</a:t>
             </a:fld>
             <a:endParaRPr lang="pt-BR"/>
           </a:p>
@@ -2163,7 +2163,7 @@
           <a:p>
             <a:fld id="{52231B9D-E9F6-4612-9B82-E89961B389AC}" type="datetimeFigureOut">
               <a:rPr lang="pt-BR" smtClean="0"/>
-              <a:t>24/10/2022</a:t>
+              <a:t>31/10/2022</a:t>
             </a:fld>
             <a:endParaRPr lang="pt-BR"/>
           </a:p>
@@ -2258,7 +2258,7 @@
           <a:p>
             <a:fld id="{52231B9D-E9F6-4612-9B82-E89961B389AC}" type="datetimeFigureOut">
               <a:rPr lang="pt-BR" smtClean="0"/>
-              <a:t>24/10/2022</a:t>
+              <a:t>31/10/2022</a:t>
             </a:fld>
             <a:endParaRPr lang="pt-BR"/>
           </a:p>
@@ -2535,7 +2535,7 @@
           <a:p>
             <a:fld id="{52231B9D-E9F6-4612-9B82-E89961B389AC}" type="datetimeFigureOut">
               <a:rPr lang="pt-BR" smtClean="0"/>
-              <a:t>24/10/2022</a:t>
+              <a:t>31/10/2022</a:t>
             </a:fld>
             <a:endParaRPr lang="pt-BR"/>
           </a:p>
@@ -2788,7 +2788,7 @@
           <a:p>
             <a:fld id="{52231B9D-E9F6-4612-9B82-E89961B389AC}" type="datetimeFigureOut">
               <a:rPr lang="pt-BR" smtClean="0"/>
-              <a:t>24/10/2022</a:t>
+              <a:t>31/10/2022</a:t>
             </a:fld>
             <a:endParaRPr lang="pt-BR"/>
           </a:p>
@@ -3001,7 +3001,7 @@
           <a:p>
             <a:fld id="{52231B9D-E9F6-4612-9B82-E89961B389AC}" type="datetimeFigureOut">
               <a:rPr lang="pt-BR" smtClean="0"/>
-              <a:t>24/10/2022</a:t>
+              <a:t>31/10/2022</a:t>
             </a:fld>
             <a:endParaRPr lang="pt-BR"/>
           </a:p>
@@ -3665,17 +3665,7 @@
                   </a:schemeClr>
                 </a:solidFill>
               </a:rPr>
-              <a:t>31</a:t>
-            </a:r>
-            <a:r>
-              <a:rPr lang="pt-BR" sz="1600" dirty="0" smtClean="0">
-                <a:solidFill>
-                  <a:schemeClr val="bg2">
-                    <a:lumMod val="90000"/>
-                  </a:schemeClr>
-                </a:solidFill>
-              </a:rPr>
-              <a:t>/10/2022</a:t>
+              <a:t>30/10/2022</a:t>
             </a:r>
             <a:endParaRPr lang="pt-BR" sz="1600" dirty="0">
               <a:solidFill>

--- a/tempimento.pptx
+++ b/tempimento.pptx
@@ -197,7 +197,7 @@
           <a:p>
             <a:fld id="{A584E3A2-E8EA-4705-A613-CFE9F6F5D3B4}" type="datetimeFigureOut">
               <a:rPr lang="pt-BR" smtClean="0"/>
-              <a:t>31/10/2022</a:t>
+              <a:t>07/11/2022</a:t>
             </a:fld>
             <a:endParaRPr lang="pt-BR"/>
           </a:p>
@@ -680,7 +680,7 @@
           <a:p>
             <a:fld id="{52231B9D-E9F6-4612-9B82-E89961B389AC}" type="datetimeFigureOut">
               <a:rPr lang="pt-BR" smtClean="0"/>
-              <a:t>31/10/2022</a:t>
+              <a:t>07/11/2022</a:t>
             </a:fld>
             <a:endParaRPr lang="pt-BR"/>
           </a:p>
@@ -850,7 +850,7 @@
           <a:p>
             <a:fld id="{52231B9D-E9F6-4612-9B82-E89961B389AC}" type="datetimeFigureOut">
               <a:rPr lang="pt-BR" smtClean="0"/>
-              <a:t>31/10/2022</a:t>
+              <a:t>07/11/2022</a:t>
             </a:fld>
             <a:endParaRPr lang="pt-BR"/>
           </a:p>
@@ -1030,7 +1030,7 @@
           <a:p>
             <a:fld id="{52231B9D-E9F6-4612-9B82-E89961B389AC}" type="datetimeFigureOut">
               <a:rPr lang="pt-BR" smtClean="0"/>
-              <a:t>31/10/2022</a:t>
+              <a:t>07/11/2022</a:t>
             </a:fld>
             <a:endParaRPr lang="pt-BR"/>
           </a:p>
@@ -1200,7 +1200,7 @@
           <a:p>
             <a:fld id="{52231B9D-E9F6-4612-9B82-E89961B389AC}" type="datetimeFigureOut">
               <a:rPr lang="pt-BR" smtClean="0"/>
-              <a:t>31/10/2022</a:t>
+              <a:t>07/11/2022</a:t>
             </a:fld>
             <a:endParaRPr lang="pt-BR"/>
           </a:p>
@@ -1446,7 +1446,7 @@
           <a:p>
             <a:fld id="{52231B9D-E9F6-4612-9B82-E89961B389AC}" type="datetimeFigureOut">
               <a:rPr lang="pt-BR" smtClean="0"/>
-              <a:t>31/10/2022</a:t>
+              <a:t>07/11/2022</a:t>
             </a:fld>
             <a:endParaRPr lang="pt-BR"/>
           </a:p>
@@ -1678,7 +1678,7 @@
           <a:p>
             <a:fld id="{52231B9D-E9F6-4612-9B82-E89961B389AC}" type="datetimeFigureOut">
               <a:rPr lang="pt-BR" smtClean="0"/>
-              <a:t>31/10/2022</a:t>
+              <a:t>07/11/2022</a:t>
             </a:fld>
             <a:endParaRPr lang="pt-BR"/>
           </a:p>
@@ -2045,7 +2045,7 @@
           <a:p>
             <a:fld id="{52231B9D-E9F6-4612-9B82-E89961B389AC}" type="datetimeFigureOut">
               <a:rPr lang="pt-BR" smtClean="0"/>
-              <a:t>31/10/2022</a:t>
+              <a:t>07/11/2022</a:t>
             </a:fld>
             <a:endParaRPr lang="pt-BR"/>
           </a:p>
@@ -2163,7 +2163,7 @@
           <a:p>
             <a:fld id="{52231B9D-E9F6-4612-9B82-E89961B389AC}" type="datetimeFigureOut">
               <a:rPr lang="pt-BR" smtClean="0"/>
-              <a:t>31/10/2022</a:t>
+              <a:t>07/11/2022</a:t>
             </a:fld>
             <a:endParaRPr lang="pt-BR"/>
           </a:p>
@@ -2258,7 +2258,7 @@
           <a:p>
             <a:fld id="{52231B9D-E9F6-4612-9B82-E89961B389AC}" type="datetimeFigureOut">
               <a:rPr lang="pt-BR" smtClean="0"/>
-              <a:t>31/10/2022</a:t>
+              <a:t>07/11/2022</a:t>
             </a:fld>
             <a:endParaRPr lang="pt-BR"/>
           </a:p>
@@ -2535,7 +2535,7 @@
           <a:p>
             <a:fld id="{52231B9D-E9F6-4612-9B82-E89961B389AC}" type="datetimeFigureOut">
               <a:rPr lang="pt-BR" smtClean="0"/>
-              <a:t>31/10/2022</a:t>
+              <a:t>07/11/2022</a:t>
             </a:fld>
             <a:endParaRPr lang="pt-BR"/>
           </a:p>
@@ -2788,7 +2788,7 @@
           <a:p>
             <a:fld id="{52231B9D-E9F6-4612-9B82-E89961B389AC}" type="datetimeFigureOut">
               <a:rPr lang="pt-BR" smtClean="0"/>
-              <a:t>31/10/2022</a:t>
+              <a:t>07/11/2022</a:t>
             </a:fld>
             <a:endParaRPr lang="pt-BR"/>
           </a:p>
@@ -3001,7 +3001,7 @@
           <a:p>
             <a:fld id="{52231B9D-E9F6-4612-9B82-E89961B389AC}" type="datetimeFigureOut">
               <a:rPr lang="pt-BR" smtClean="0"/>
-              <a:t>31/10/2022</a:t>
+              <a:t>07/11/2022</a:t>
             </a:fld>
             <a:endParaRPr lang="pt-BR"/>
           </a:p>
@@ -3665,7 +3665,17 @@
                   </a:schemeClr>
                 </a:solidFill>
               </a:rPr>
-              <a:t>30/10/2022</a:t>
+              <a:t>06</a:t>
+            </a:r>
+            <a:r>
+              <a:rPr lang="pt-BR" sz="1600" dirty="0" smtClean="0">
+                <a:solidFill>
+                  <a:schemeClr val="bg2">
+                    <a:lumMod val="90000"/>
+                  </a:schemeClr>
+                </a:solidFill>
+              </a:rPr>
+              <a:t>/11/2022</a:t>
             </a:r>
             <a:endParaRPr lang="pt-BR" sz="1600" dirty="0">
               <a:solidFill>

--- a/tempimento.pptx
+++ b/tempimento.pptx
@@ -197,7 +197,7 @@
           <a:p>
             <a:fld id="{A584E3A2-E8EA-4705-A613-CFE9F6F5D3B4}" type="datetimeFigureOut">
               <a:rPr lang="pt-BR" smtClean="0"/>
-              <a:t>07/11/2022</a:t>
+              <a:t>14/11/2022</a:t>
             </a:fld>
             <a:endParaRPr lang="pt-BR"/>
           </a:p>
@@ -680,7 +680,7 @@
           <a:p>
             <a:fld id="{52231B9D-E9F6-4612-9B82-E89961B389AC}" type="datetimeFigureOut">
               <a:rPr lang="pt-BR" smtClean="0"/>
-              <a:t>07/11/2022</a:t>
+              <a:t>14/11/2022</a:t>
             </a:fld>
             <a:endParaRPr lang="pt-BR"/>
           </a:p>
@@ -850,7 +850,7 @@
           <a:p>
             <a:fld id="{52231B9D-E9F6-4612-9B82-E89961B389AC}" type="datetimeFigureOut">
               <a:rPr lang="pt-BR" smtClean="0"/>
-              <a:t>07/11/2022</a:t>
+              <a:t>14/11/2022</a:t>
             </a:fld>
             <a:endParaRPr lang="pt-BR"/>
           </a:p>
@@ -1030,7 +1030,7 @@
           <a:p>
             <a:fld id="{52231B9D-E9F6-4612-9B82-E89961B389AC}" type="datetimeFigureOut">
               <a:rPr lang="pt-BR" smtClean="0"/>
-              <a:t>07/11/2022</a:t>
+              <a:t>14/11/2022</a:t>
             </a:fld>
             <a:endParaRPr lang="pt-BR"/>
           </a:p>
@@ -1200,7 +1200,7 @@
           <a:p>
             <a:fld id="{52231B9D-E9F6-4612-9B82-E89961B389AC}" type="datetimeFigureOut">
               <a:rPr lang="pt-BR" smtClean="0"/>
-              <a:t>07/11/2022</a:t>
+              <a:t>14/11/2022</a:t>
             </a:fld>
             <a:endParaRPr lang="pt-BR"/>
           </a:p>
@@ -1446,7 +1446,7 @@
           <a:p>
             <a:fld id="{52231B9D-E9F6-4612-9B82-E89961B389AC}" type="datetimeFigureOut">
               <a:rPr lang="pt-BR" smtClean="0"/>
-              <a:t>07/11/2022</a:t>
+              <a:t>14/11/2022</a:t>
             </a:fld>
             <a:endParaRPr lang="pt-BR"/>
           </a:p>
@@ -1678,7 +1678,7 @@
           <a:p>
             <a:fld id="{52231B9D-E9F6-4612-9B82-E89961B389AC}" type="datetimeFigureOut">
               <a:rPr lang="pt-BR" smtClean="0"/>
-              <a:t>07/11/2022</a:t>
+              <a:t>14/11/2022</a:t>
             </a:fld>
             <a:endParaRPr lang="pt-BR"/>
           </a:p>
@@ -2045,7 +2045,7 @@
           <a:p>
             <a:fld id="{52231B9D-E9F6-4612-9B82-E89961B389AC}" type="datetimeFigureOut">
               <a:rPr lang="pt-BR" smtClean="0"/>
-              <a:t>07/11/2022</a:t>
+              <a:t>14/11/2022</a:t>
             </a:fld>
             <a:endParaRPr lang="pt-BR"/>
           </a:p>
@@ -2163,7 +2163,7 @@
           <a:p>
             <a:fld id="{52231B9D-E9F6-4612-9B82-E89961B389AC}" type="datetimeFigureOut">
               <a:rPr lang="pt-BR" smtClean="0"/>
-              <a:t>07/11/2022</a:t>
+              <a:t>14/11/2022</a:t>
             </a:fld>
             <a:endParaRPr lang="pt-BR"/>
           </a:p>
@@ -2258,7 +2258,7 @@
           <a:p>
             <a:fld id="{52231B9D-E9F6-4612-9B82-E89961B389AC}" type="datetimeFigureOut">
               <a:rPr lang="pt-BR" smtClean="0"/>
-              <a:t>07/11/2022</a:t>
+              <a:t>14/11/2022</a:t>
             </a:fld>
             <a:endParaRPr lang="pt-BR"/>
           </a:p>
@@ -2535,7 +2535,7 @@
           <a:p>
             <a:fld id="{52231B9D-E9F6-4612-9B82-E89961B389AC}" type="datetimeFigureOut">
               <a:rPr lang="pt-BR" smtClean="0"/>
-              <a:t>07/11/2022</a:t>
+              <a:t>14/11/2022</a:t>
             </a:fld>
             <a:endParaRPr lang="pt-BR"/>
           </a:p>
@@ -2788,7 +2788,7 @@
           <a:p>
             <a:fld id="{52231B9D-E9F6-4612-9B82-E89961B389AC}" type="datetimeFigureOut">
               <a:rPr lang="pt-BR" smtClean="0"/>
-              <a:t>07/11/2022</a:t>
+              <a:t>14/11/2022</a:t>
             </a:fld>
             <a:endParaRPr lang="pt-BR"/>
           </a:p>
@@ -3001,7 +3001,7 @@
           <a:p>
             <a:fld id="{52231B9D-E9F6-4612-9B82-E89961B389AC}" type="datetimeFigureOut">
               <a:rPr lang="pt-BR" smtClean="0"/>
-              <a:t>07/11/2022</a:t>
+              <a:t>14/11/2022</a:t>
             </a:fld>
             <a:endParaRPr lang="pt-BR"/>
           </a:p>
@@ -3665,7 +3665,7 @@
                   </a:schemeClr>
                 </a:solidFill>
               </a:rPr>
-              <a:t>06</a:t>
+              <a:t>13</a:t>
             </a:r>
             <a:r>
               <a:rPr lang="pt-BR" sz="1600" dirty="0" smtClean="0">

--- a/tempimento.pptx
+++ b/tempimento.pptx
@@ -149,7 +149,7 @@
         </p:nvSpPr>
         <p:spPr>
           <a:xfrm>
-            <a:off x="2" y="1"/>
+            <a:off x="3" y="1"/>
             <a:ext cx="3078851" cy="512763"/>
           </a:xfrm>
           <a:prstGeom prst="rect">
@@ -157,7 +157,7 @@
           </a:prstGeom>
         </p:spPr>
         <p:txBody>
-          <a:bodyPr vert="horz" lIns="91429" tIns="45715" rIns="91429" bIns="45715" rtlCol="0"/>
+          <a:bodyPr vert="horz" lIns="91419" tIns="45710" rIns="91419" bIns="45710" rtlCol="0"/>
           <a:lstStyle>
             <a:lvl1pPr algn="l">
               <a:defRPr sz="1200"/>
@@ -180,7 +180,7 @@
         </p:nvSpPr>
         <p:spPr>
           <a:xfrm>
-            <a:off x="4023626" y="1"/>
+            <a:off x="4023627" y="1"/>
             <a:ext cx="3078851" cy="512763"/>
           </a:xfrm>
           <a:prstGeom prst="rect">
@@ -188,7 +188,7 @@
           </a:prstGeom>
         </p:spPr>
         <p:txBody>
-          <a:bodyPr vert="horz" lIns="91429" tIns="45715" rIns="91429" bIns="45715" rtlCol="0"/>
+          <a:bodyPr vert="horz" lIns="91419" tIns="45710" rIns="91419" bIns="45710" rtlCol="0"/>
           <a:lstStyle>
             <a:lvl1pPr algn="r">
               <a:defRPr sz="1200"/>
@@ -197,7 +197,7 @@
           <a:p>
             <a:fld id="{A584E3A2-E8EA-4705-A613-CFE9F6F5D3B4}" type="datetimeFigureOut">
               <a:rPr lang="pt-BR" smtClean="0"/>
-              <a:t>14/11/2022</a:t>
+              <a:t>21/11/2022</a:t>
             </a:fld>
             <a:endParaRPr lang="pt-BR"/>
           </a:p>
@@ -229,7 +229,7 @@
           </a:ln>
         </p:spPr>
         <p:txBody>
-          <a:bodyPr vert="horz" lIns="91429" tIns="45715" rIns="91429" bIns="45715" rtlCol="0" anchor="ctr"/>
+          <a:bodyPr vert="horz" lIns="91419" tIns="45710" rIns="91419" bIns="45710" rtlCol="0" anchor="ctr"/>
           <a:lstStyle/>
           <a:p>
             <a:endParaRPr lang="pt-BR"/>
@@ -248,7 +248,7 @@
         </p:nvSpPr>
         <p:spPr>
           <a:xfrm>
-            <a:off x="709773" y="4926015"/>
+            <a:off x="709774" y="4926015"/>
             <a:ext cx="5684521" cy="4029075"/>
           </a:xfrm>
           <a:prstGeom prst="rect">
@@ -256,7 +256,7 @@
           </a:prstGeom>
         </p:spPr>
         <p:txBody>
-          <a:bodyPr vert="horz" lIns="91429" tIns="45715" rIns="91429" bIns="45715" rtlCol="0"/>
+          <a:bodyPr vert="horz" lIns="91419" tIns="45710" rIns="91419" bIns="45710" rtlCol="0"/>
           <a:lstStyle/>
           <a:p>
             <a:pPr lvl="0"/>
@@ -308,7 +308,7 @@
         </p:nvSpPr>
         <p:spPr>
           <a:xfrm>
-            <a:off x="2" y="9721851"/>
+            <a:off x="3" y="9721851"/>
             <a:ext cx="3078851" cy="512763"/>
           </a:xfrm>
           <a:prstGeom prst="rect">
@@ -316,7 +316,7 @@
           </a:prstGeom>
         </p:spPr>
         <p:txBody>
-          <a:bodyPr vert="horz" lIns="91429" tIns="45715" rIns="91429" bIns="45715" rtlCol="0" anchor="b"/>
+          <a:bodyPr vert="horz" lIns="91419" tIns="45710" rIns="91419" bIns="45710" rtlCol="0" anchor="b"/>
           <a:lstStyle>
             <a:lvl1pPr algn="l">
               <a:defRPr sz="1200"/>
@@ -339,7 +339,7 @@
         </p:nvSpPr>
         <p:spPr>
           <a:xfrm>
-            <a:off x="4023626" y="9721851"/>
+            <a:off x="4023627" y="9721851"/>
             <a:ext cx="3078851" cy="512763"/>
           </a:xfrm>
           <a:prstGeom prst="rect">
@@ -347,7 +347,7 @@
           </a:prstGeom>
         </p:spPr>
         <p:txBody>
-          <a:bodyPr vert="horz" lIns="91429" tIns="45715" rIns="91429" bIns="45715" rtlCol="0" anchor="b"/>
+          <a:bodyPr vert="horz" lIns="91419" tIns="45710" rIns="91419" bIns="45710" rtlCol="0" anchor="b"/>
           <a:lstStyle>
             <a:lvl1pPr algn="r">
               <a:defRPr sz="1200"/>
@@ -680,7 +680,7 @@
           <a:p>
             <a:fld id="{52231B9D-E9F6-4612-9B82-E89961B389AC}" type="datetimeFigureOut">
               <a:rPr lang="pt-BR" smtClean="0"/>
-              <a:t>14/11/2022</a:t>
+              <a:t>21/11/2022</a:t>
             </a:fld>
             <a:endParaRPr lang="pt-BR"/>
           </a:p>
@@ -850,7 +850,7 @@
           <a:p>
             <a:fld id="{52231B9D-E9F6-4612-9B82-E89961B389AC}" type="datetimeFigureOut">
               <a:rPr lang="pt-BR" smtClean="0"/>
-              <a:t>14/11/2022</a:t>
+              <a:t>21/11/2022</a:t>
             </a:fld>
             <a:endParaRPr lang="pt-BR"/>
           </a:p>
@@ -1030,7 +1030,7 @@
           <a:p>
             <a:fld id="{52231B9D-E9F6-4612-9B82-E89961B389AC}" type="datetimeFigureOut">
               <a:rPr lang="pt-BR" smtClean="0"/>
-              <a:t>14/11/2022</a:t>
+              <a:t>21/11/2022</a:t>
             </a:fld>
             <a:endParaRPr lang="pt-BR"/>
           </a:p>
@@ -1200,7 +1200,7 @@
           <a:p>
             <a:fld id="{52231B9D-E9F6-4612-9B82-E89961B389AC}" type="datetimeFigureOut">
               <a:rPr lang="pt-BR" smtClean="0"/>
-              <a:t>14/11/2022</a:t>
+              <a:t>21/11/2022</a:t>
             </a:fld>
             <a:endParaRPr lang="pt-BR"/>
           </a:p>
@@ -1446,7 +1446,7 @@
           <a:p>
             <a:fld id="{52231B9D-E9F6-4612-9B82-E89961B389AC}" type="datetimeFigureOut">
               <a:rPr lang="pt-BR" smtClean="0"/>
-              <a:t>14/11/2022</a:t>
+              <a:t>21/11/2022</a:t>
             </a:fld>
             <a:endParaRPr lang="pt-BR"/>
           </a:p>
@@ -1678,7 +1678,7 @@
           <a:p>
             <a:fld id="{52231B9D-E9F6-4612-9B82-E89961B389AC}" type="datetimeFigureOut">
               <a:rPr lang="pt-BR" smtClean="0"/>
-              <a:t>14/11/2022</a:t>
+              <a:t>21/11/2022</a:t>
             </a:fld>
             <a:endParaRPr lang="pt-BR"/>
           </a:p>
@@ -2045,7 +2045,7 @@
           <a:p>
             <a:fld id="{52231B9D-E9F6-4612-9B82-E89961B389AC}" type="datetimeFigureOut">
               <a:rPr lang="pt-BR" smtClean="0"/>
-              <a:t>14/11/2022</a:t>
+              <a:t>21/11/2022</a:t>
             </a:fld>
             <a:endParaRPr lang="pt-BR"/>
           </a:p>
@@ -2163,7 +2163,7 @@
           <a:p>
             <a:fld id="{52231B9D-E9F6-4612-9B82-E89961B389AC}" type="datetimeFigureOut">
               <a:rPr lang="pt-BR" smtClean="0"/>
-              <a:t>14/11/2022</a:t>
+              <a:t>21/11/2022</a:t>
             </a:fld>
             <a:endParaRPr lang="pt-BR"/>
           </a:p>
@@ -2258,7 +2258,7 @@
           <a:p>
             <a:fld id="{52231B9D-E9F6-4612-9B82-E89961B389AC}" type="datetimeFigureOut">
               <a:rPr lang="pt-BR" smtClean="0"/>
-              <a:t>14/11/2022</a:t>
+              <a:t>21/11/2022</a:t>
             </a:fld>
             <a:endParaRPr lang="pt-BR"/>
           </a:p>
@@ -2535,7 +2535,7 @@
           <a:p>
             <a:fld id="{52231B9D-E9F6-4612-9B82-E89961B389AC}" type="datetimeFigureOut">
               <a:rPr lang="pt-BR" smtClean="0"/>
-              <a:t>14/11/2022</a:t>
+              <a:t>21/11/2022</a:t>
             </a:fld>
             <a:endParaRPr lang="pt-BR"/>
           </a:p>
@@ -2788,7 +2788,7 @@
           <a:p>
             <a:fld id="{52231B9D-E9F6-4612-9B82-E89961B389AC}" type="datetimeFigureOut">
               <a:rPr lang="pt-BR" smtClean="0"/>
-              <a:t>14/11/2022</a:t>
+              <a:t>21/11/2022</a:t>
             </a:fld>
             <a:endParaRPr lang="pt-BR"/>
           </a:p>
@@ -3001,7 +3001,7 @@
           <a:p>
             <a:fld id="{52231B9D-E9F6-4612-9B82-E89961B389AC}" type="datetimeFigureOut">
               <a:rPr lang="pt-BR" smtClean="0"/>
-              <a:t>14/11/2022</a:t>
+              <a:t>21/11/2022</a:t>
             </a:fld>
             <a:endParaRPr lang="pt-BR"/>
           </a:p>
@@ -3665,7 +3665,7 @@
                   </a:schemeClr>
                 </a:solidFill>
               </a:rPr>
-              <a:t>13</a:t>
+              <a:t>20</a:t>
             </a:r>
             <a:r>
               <a:rPr lang="pt-BR" sz="1600" dirty="0" smtClean="0">

--- a/tempimento.pptx
+++ b/tempimento.pptx
@@ -197,7 +197,7 @@
           <a:p>
             <a:fld id="{A584E3A2-E8EA-4705-A613-CFE9F6F5D3B4}" type="datetimeFigureOut">
               <a:rPr lang="pt-BR" smtClean="0"/>
-              <a:t>21/11/2022</a:t>
+              <a:t>28/11/2022</a:t>
             </a:fld>
             <a:endParaRPr lang="pt-BR"/>
           </a:p>
@@ -680,7 +680,7 @@
           <a:p>
             <a:fld id="{52231B9D-E9F6-4612-9B82-E89961B389AC}" type="datetimeFigureOut">
               <a:rPr lang="pt-BR" smtClean="0"/>
-              <a:t>21/11/2022</a:t>
+              <a:t>28/11/2022</a:t>
             </a:fld>
             <a:endParaRPr lang="pt-BR"/>
           </a:p>
@@ -850,7 +850,7 @@
           <a:p>
             <a:fld id="{52231B9D-E9F6-4612-9B82-E89961B389AC}" type="datetimeFigureOut">
               <a:rPr lang="pt-BR" smtClean="0"/>
-              <a:t>21/11/2022</a:t>
+              <a:t>28/11/2022</a:t>
             </a:fld>
             <a:endParaRPr lang="pt-BR"/>
           </a:p>
@@ -1030,7 +1030,7 @@
           <a:p>
             <a:fld id="{52231B9D-E9F6-4612-9B82-E89961B389AC}" type="datetimeFigureOut">
               <a:rPr lang="pt-BR" smtClean="0"/>
-              <a:t>21/11/2022</a:t>
+              <a:t>28/11/2022</a:t>
             </a:fld>
             <a:endParaRPr lang="pt-BR"/>
           </a:p>
@@ -1200,7 +1200,7 @@
           <a:p>
             <a:fld id="{52231B9D-E9F6-4612-9B82-E89961B389AC}" type="datetimeFigureOut">
               <a:rPr lang="pt-BR" smtClean="0"/>
-              <a:t>21/11/2022</a:t>
+              <a:t>28/11/2022</a:t>
             </a:fld>
             <a:endParaRPr lang="pt-BR"/>
           </a:p>
@@ -1446,7 +1446,7 @@
           <a:p>
             <a:fld id="{52231B9D-E9F6-4612-9B82-E89961B389AC}" type="datetimeFigureOut">
               <a:rPr lang="pt-BR" smtClean="0"/>
-              <a:t>21/11/2022</a:t>
+              <a:t>28/11/2022</a:t>
             </a:fld>
             <a:endParaRPr lang="pt-BR"/>
           </a:p>
@@ -1678,7 +1678,7 @@
           <a:p>
             <a:fld id="{52231B9D-E9F6-4612-9B82-E89961B389AC}" type="datetimeFigureOut">
               <a:rPr lang="pt-BR" smtClean="0"/>
-              <a:t>21/11/2022</a:t>
+              <a:t>28/11/2022</a:t>
             </a:fld>
             <a:endParaRPr lang="pt-BR"/>
           </a:p>
@@ -2045,7 +2045,7 @@
           <a:p>
             <a:fld id="{52231B9D-E9F6-4612-9B82-E89961B389AC}" type="datetimeFigureOut">
               <a:rPr lang="pt-BR" smtClean="0"/>
-              <a:t>21/11/2022</a:t>
+              <a:t>28/11/2022</a:t>
             </a:fld>
             <a:endParaRPr lang="pt-BR"/>
           </a:p>
@@ -2163,7 +2163,7 @@
           <a:p>
             <a:fld id="{52231B9D-E9F6-4612-9B82-E89961B389AC}" type="datetimeFigureOut">
               <a:rPr lang="pt-BR" smtClean="0"/>
-              <a:t>21/11/2022</a:t>
+              <a:t>28/11/2022</a:t>
             </a:fld>
             <a:endParaRPr lang="pt-BR"/>
           </a:p>
@@ -2258,7 +2258,7 @@
           <a:p>
             <a:fld id="{52231B9D-E9F6-4612-9B82-E89961B389AC}" type="datetimeFigureOut">
               <a:rPr lang="pt-BR" smtClean="0"/>
-              <a:t>21/11/2022</a:t>
+              <a:t>28/11/2022</a:t>
             </a:fld>
             <a:endParaRPr lang="pt-BR"/>
           </a:p>
@@ -2535,7 +2535,7 @@
           <a:p>
             <a:fld id="{52231B9D-E9F6-4612-9B82-E89961B389AC}" type="datetimeFigureOut">
               <a:rPr lang="pt-BR" smtClean="0"/>
-              <a:t>21/11/2022</a:t>
+              <a:t>28/11/2022</a:t>
             </a:fld>
             <a:endParaRPr lang="pt-BR"/>
           </a:p>
@@ -2788,7 +2788,7 @@
           <a:p>
             <a:fld id="{52231B9D-E9F6-4612-9B82-E89961B389AC}" type="datetimeFigureOut">
               <a:rPr lang="pt-BR" smtClean="0"/>
-              <a:t>21/11/2022</a:t>
+              <a:t>28/11/2022</a:t>
             </a:fld>
             <a:endParaRPr lang="pt-BR"/>
           </a:p>
@@ -3001,7 +3001,7 @@
           <a:p>
             <a:fld id="{52231B9D-E9F6-4612-9B82-E89961B389AC}" type="datetimeFigureOut">
               <a:rPr lang="pt-BR" smtClean="0"/>
-              <a:t>21/11/2022</a:t>
+              <a:t>28/11/2022</a:t>
             </a:fld>
             <a:endParaRPr lang="pt-BR"/>
           </a:p>
@@ -3665,17 +3665,7 @@
                   </a:schemeClr>
                 </a:solidFill>
               </a:rPr>
-              <a:t>20</a:t>
-            </a:r>
-            <a:r>
-              <a:rPr lang="pt-BR" sz="1600" dirty="0" smtClean="0">
-                <a:solidFill>
-                  <a:schemeClr val="bg2">
-                    <a:lumMod val="90000"/>
-                  </a:schemeClr>
-                </a:solidFill>
-              </a:rPr>
-              <a:t>/11/2022</a:t>
+              <a:t>27/11/2022</a:t>
             </a:r>
             <a:endParaRPr lang="pt-BR" sz="1600" dirty="0">
               <a:solidFill>

--- a/tempimento.pptx
+++ b/tempimento.pptx
@@ -197,7 +197,7 @@
           <a:p>
             <a:fld id="{A584E3A2-E8EA-4705-A613-CFE9F6F5D3B4}" type="datetimeFigureOut">
               <a:rPr lang="pt-BR" smtClean="0"/>
-              <a:t>28/11/2022</a:t>
+              <a:t>05/12/2022</a:t>
             </a:fld>
             <a:endParaRPr lang="pt-BR"/>
           </a:p>
@@ -680,7 +680,7 @@
           <a:p>
             <a:fld id="{52231B9D-E9F6-4612-9B82-E89961B389AC}" type="datetimeFigureOut">
               <a:rPr lang="pt-BR" smtClean="0"/>
-              <a:t>28/11/2022</a:t>
+              <a:t>05/12/2022</a:t>
             </a:fld>
             <a:endParaRPr lang="pt-BR"/>
           </a:p>
@@ -850,7 +850,7 @@
           <a:p>
             <a:fld id="{52231B9D-E9F6-4612-9B82-E89961B389AC}" type="datetimeFigureOut">
               <a:rPr lang="pt-BR" smtClean="0"/>
-              <a:t>28/11/2022</a:t>
+              <a:t>05/12/2022</a:t>
             </a:fld>
             <a:endParaRPr lang="pt-BR"/>
           </a:p>
@@ -1030,7 +1030,7 @@
           <a:p>
             <a:fld id="{52231B9D-E9F6-4612-9B82-E89961B389AC}" type="datetimeFigureOut">
               <a:rPr lang="pt-BR" smtClean="0"/>
-              <a:t>28/11/2022</a:t>
+              <a:t>05/12/2022</a:t>
             </a:fld>
             <a:endParaRPr lang="pt-BR"/>
           </a:p>
@@ -1200,7 +1200,7 @@
           <a:p>
             <a:fld id="{52231B9D-E9F6-4612-9B82-E89961B389AC}" type="datetimeFigureOut">
               <a:rPr lang="pt-BR" smtClean="0"/>
-              <a:t>28/11/2022</a:t>
+              <a:t>05/12/2022</a:t>
             </a:fld>
             <a:endParaRPr lang="pt-BR"/>
           </a:p>
@@ -1446,7 +1446,7 @@
           <a:p>
             <a:fld id="{52231B9D-E9F6-4612-9B82-E89961B389AC}" type="datetimeFigureOut">
               <a:rPr lang="pt-BR" smtClean="0"/>
-              <a:t>28/11/2022</a:t>
+              <a:t>05/12/2022</a:t>
             </a:fld>
             <a:endParaRPr lang="pt-BR"/>
           </a:p>
@@ -1678,7 +1678,7 @@
           <a:p>
             <a:fld id="{52231B9D-E9F6-4612-9B82-E89961B389AC}" type="datetimeFigureOut">
               <a:rPr lang="pt-BR" smtClean="0"/>
-              <a:t>28/11/2022</a:t>
+              <a:t>05/12/2022</a:t>
             </a:fld>
             <a:endParaRPr lang="pt-BR"/>
           </a:p>
@@ -2045,7 +2045,7 @@
           <a:p>
             <a:fld id="{52231B9D-E9F6-4612-9B82-E89961B389AC}" type="datetimeFigureOut">
               <a:rPr lang="pt-BR" smtClean="0"/>
-              <a:t>28/11/2022</a:t>
+              <a:t>05/12/2022</a:t>
             </a:fld>
             <a:endParaRPr lang="pt-BR"/>
           </a:p>
@@ -2163,7 +2163,7 @@
           <a:p>
             <a:fld id="{52231B9D-E9F6-4612-9B82-E89961B389AC}" type="datetimeFigureOut">
               <a:rPr lang="pt-BR" smtClean="0"/>
-              <a:t>28/11/2022</a:t>
+              <a:t>05/12/2022</a:t>
             </a:fld>
             <a:endParaRPr lang="pt-BR"/>
           </a:p>
@@ -2258,7 +2258,7 @@
           <a:p>
             <a:fld id="{52231B9D-E9F6-4612-9B82-E89961B389AC}" type="datetimeFigureOut">
               <a:rPr lang="pt-BR" smtClean="0"/>
-              <a:t>28/11/2022</a:t>
+              <a:t>05/12/2022</a:t>
             </a:fld>
             <a:endParaRPr lang="pt-BR"/>
           </a:p>
@@ -2535,7 +2535,7 @@
           <a:p>
             <a:fld id="{52231B9D-E9F6-4612-9B82-E89961B389AC}" type="datetimeFigureOut">
               <a:rPr lang="pt-BR" smtClean="0"/>
-              <a:t>28/11/2022</a:t>
+              <a:t>05/12/2022</a:t>
             </a:fld>
             <a:endParaRPr lang="pt-BR"/>
           </a:p>
@@ -2788,7 +2788,7 @@
           <a:p>
             <a:fld id="{52231B9D-E9F6-4612-9B82-E89961B389AC}" type="datetimeFigureOut">
               <a:rPr lang="pt-BR" smtClean="0"/>
-              <a:t>28/11/2022</a:t>
+              <a:t>05/12/2022</a:t>
             </a:fld>
             <a:endParaRPr lang="pt-BR"/>
           </a:p>
@@ -3001,7 +3001,7 @@
           <a:p>
             <a:fld id="{52231B9D-E9F6-4612-9B82-E89961B389AC}" type="datetimeFigureOut">
               <a:rPr lang="pt-BR" smtClean="0"/>
-              <a:t>28/11/2022</a:t>
+              <a:t>05/12/2022</a:t>
             </a:fld>
             <a:endParaRPr lang="pt-BR"/>
           </a:p>
@@ -3665,7 +3665,17 @@
                   </a:schemeClr>
                 </a:solidFill>
               </a:rPr>
-              <a:t>27/11/2022</a:t>
+              <a:t>04</a:t>
+            </a:r>
+            <a:r>
+              <a:rPr lang="pt-BR" sz="1600" dirty="0" smtClean="0">
+                <a:solidFill>
+                  <a:schemeClr val="bg2">
+                    <a:lumMod val="90000"/>
+                  </a:schemeClr>
+                </a:solidFill>
+              </a:rPr>
+              <a:t>/12/2022</a:t>
             </a:r>
             <a:endParaRPr lang="pt-BR" sz="1600" dirty="0">
               <a:solidFill>

--- a/tempimento.pptx
+++ b/tempimento.pptx
@@ -11,7 +11,7 @@
     <p:sldId id="256" r:id="rId2"/>
   </p:sldIdLst>
   <p:sldSz cx="12192000" cy="6858000"/>
-  <p:notesSz cx="7104063" cy="10234613"/>
+  <p:notesSz cx="6889750" cy="9671050"/>
   <p:defaultTextStyle>
     <a:defPPr>
       <a:defRPr lang="pt-BR"/>
@@ -149,18 +149,18 @@
         </p:nvSpPr>
         <p:spPr>
           <a:xfrm>
-            <a:off x="3" y="1"/>
-            <a:ext cx="3078851" cy="512763"/>
+            <a:off x="4" y="1"/>
+            <a:ext cx="2985969" cy="484528"/>
           </a:xfrm>
           <a:prstGeom prst="rect">
             <a:avLst/>
           </a:prstGeom>
         </p:spPr>
         <p:txBody>
-          <a:bodyPr vert="horz" lIns="91419" tIns="45710" rIns="91419" bIns="45710" rtlCol="0"/>
+          <a:bodyPr vert="horz" lIns="87314" tIns="43658" rIns="87314" bIns="43658" rtlCol="0"/>
           <a:lstStyle>
             <a:lvl1pPr algn="l">
-              <a:defRPr sz="1200"/>
+              <a:defRPr sz="1100"/>
             </a:lvl1pPr>
           </a:lstStyle>
           <a:p>
@@ -180,24 +180,24 @@
         </p:nvSpPr>
         <p:spPr>
           <a:xfrm>
-            <a:off x="4023627" y="1"/>
-            <a:ext cx="3078851" cy="512763"/>
+            <a:off x="3902244" y="1"/>
+            <a:ext cx="2985969" cy="484528"/>
           </a:xfrm>
           <a:prstGeom prst="rect">
             <a:avLst/>
           </a:prstGeom>
         </p:spPr>
         <p:txBody>
-          <a:bodyPr vert="horz" lIns="91419" tIns="45710" rIns="91419" bIns="45710" rtlCol="0"/>
+          <a:bodyPr vert="horz" lIns="87314" tIns="43658" rIns="87314" bIns="43658" rtlCol="0"/>
           <a:lstStyle>
             <a:lvl1pPr algn="r">
-              <a:defRPr sz="1200"/>
+              <a:defRPr sz="1100"/>
             </a:lvl1pPr>
           </a:lstStyle>
           <a:p>
             <a:fld id="{A584E3A2-E8EA-4705-A613-CFE9F6F5D3B4}" type="datetimeFigureOut">
               <a:rPr lang="pt-BR" smtClean="0"/>
-              <a:t>05/12/2022</a:t>
+              <a:t>12/12/2022</a:t>
             </a:fld>
             <a:endParaRPr lang="pt-BR"/>
           </a:p>
@@ -215,8 +215,8 @@
         </p:nvSpPr>
         <p:spPr>
           <a:xfrm>
-            <a:off x="482600" y="1279525"/>
-            <a:ext cx="6138863" cy="3454400"/>
+            <a:off x="542925" y="1209675"/>
+            <a:ext cx="5803900" cy="3263900"/>
           </a:xfrm>
           <a:prstGeom prst="rect">
             <a:avLst/>
@@ -229,7 +229,7 @@
           </a:ln>
         </p:spPr>
         <p:txBody>
-          <a:bodyPr vert="horz" lIns="91419" tIns="45710" rIns="91419" bIns="45710" rtlCol="0" anchor="ctr"/>
+          <a:bodyPr vert="horz" lIns="87314" tIns="43658" rIns="87314" bIns="43658" rtlCol="0" anchor="ctr"/>
           <a:lstStyle/>
           <a:p>
             <a:endParaRPr lang="pt-BR"/>
@@ -248,15 +248,15 @@
         </p:nvSpPr>
         <p:spPr>
           <a:xfrm>
-            <a:off x="709774" y="4926015"/>
-            <a:ext cx="5684521" cy="4029075"/>
+            <a:off x="688362" y="4654767"/>
+            <a:ext cx="5513032" cy="3807216"/>
           </a:xfrm>
           <a:prstGeom prst="rect">
             <a:avLst/>
           </a:prstGeom>
         </p:spPr>
         <p:txBody>
-          <a:bodyPr vert="horz" lIns="91419" tIns="45710" rIns="91419" bIns="45710" rtlCol="0"/>
+          <a:bodyPr vert="horz" lIns="87314" tIns="43658" rIns="87314" bIns="43658" rtlCol="0"/>
           <a:lstStyle/>
           <a:p>
             <a:pPr lvl="0"/>
@@ -308,18 +308,18 @@
         </p:nvSpPr>
         <p:spPr>
           <a:xfrm>
-            <a:off x="3" y="9721851"/>
-            <a:ext cx="3078851" cy="512763"/>
+            <a:off x="4" y="9186523"/>
+            <a:ext cx="2985969" cy="484528"/>
           </a:xfrm>
           <a:prstGeom prst="rect">
             <a:avLst/>
           </a:prstGeom>
         </p:spPr>
         <p:txBody>
-          <a:bodyPr vert="horz" lIns="91419" tIns="45710" rIns="91419" bIns="45710" rtlCol="0" anchor="b"/>
+          <a:bodyPr vert="horz" lIns="87314" tIns="43658" rIns="87314" bIns="43658" rtlCol="0" anchor="b"/>
           <a:lstStyle>
             <a:lvl1pPr algn="l">
-              <a:defRPr sz="1200"/>
+              <a:defRPr sz="1100"/>
             </a:lvl1pPr>
           </a:lstStyle>
           <a:p>
@@ -339,18 +339,18 @@
         </p:nvSpPr>
         <p:spPr>
           <a:xfrm>
-            <a:off x="4023627" y="9721851"/>
-            <a:ext cx="3078851" cy="512763"/>
+            <a:off x="3902244" y="9186523"/>
+            <a:ext cx="2985969" cy="484528"/>
           </a:xfrm>
           <a:prstGeom prst="rect">
             <a:avLst/>
           </a:prstGeom>
         </p:spPr>
         <p:txBody>
-          <a:bodyPr vert="horz" lIns="91419" tIns="45710" rIns="91419" bIns="45710" rtlCol="0" anchor="b"/>
+          <a:bodyPr vert="horz" lIns="87314" tIns="43658" rIns="87314" bIns="43658" rtlCol="0" anchor="b"/>
           <a:lstStyle>
             <a:lvl1pPr algn="r">
-              <a:defRPr sz="1200"/>
+              <a:defRPr sz="1100"/>
             </a:lvl1pPr>
           </a:lstStyle>
           <a:p>
@@ -680,7 +680,7 @@
           <a:p>
             <a:fld id="{52231B9D-E9F6-4612-9B82-E89961B389AC}" type="datetimeFigureOut">
               <a:rPr lang="pt-BR" smtClean="0"/>
-              <a:t>05/12/2022</a:t>
+              <a:t>12/12/2022</a:t>
             </a:fld>
             <a:endParaRPr lang="pt-BR"/>
           </a:p>
@@ -850,7 +850,7 @@
           <a:p>
             <a:fld id="{52231B9D-E9F6-4612-9B82-E89961B389AC}" type="datetimeFigureOut">
               <a:rPr lang="pt-BR" smtClean="0"/>
-              <a:t>05/12/2022</a:t>
+              <a:t>12/12/2022</a:t>
             </a:fld>
             <a:endParaRPr lang="pt-BR"/>
           </a:p>
@@ -1030,7 +1030,7 @@
           <a:p>
             <a:fld id="{52231B9D-E9F6-4612-9B82-E89961B389AC}" type="datetimeFigureOut">
               <a:rPr lang="pt-BR" smtClean="0"/>
-              <a:t>05/12/2022</a:t>
+              <a:t>12/12/2022</a:t>
             </a:fld>
             <a:endParaRPr lang="pt-BR"/>
           </a:p>
@@ -1200,7 +1200,7 @@
           <a:p>
             <a:fld id="{52231B9D-E9F6-4612-9B82-E89961B389AC}" type="datetimeFigureOut">
               <a:rPr lang="pt-BR" smtClean="0"/>
-              <a:t>05/12/2022</a:t>
+              <a:t>12/12/2022</a:t>
             </a:fld>
             <a:endParaRPr lang="pt-BR"/>
           </a:p>
@@ -1446,7 +1446,7 @@
           <a:p>
             <a:fld id="{52231B9D-E9F6-4612-9B82-E89961B389AC}" type="datetimeFigureOut">
               <a:rPr lang="pt-BR" smtClean="0"/>
-              <a:t>05/12/2022</a:t>
+              <a:t>12/12/2022</a:t>
             </a:fld>
             <a:endParaRPr lang="pt-BR"/>
           </a:p>
@@ -1678,7 +1678,7 @@
           <a:p>
             <a:fld id="{52231B9D-E9F6-4612-9B82-E89961B389AC}" type="datetimeFigureOut">
               <a:rPr lang="pt-BR" smtClean="0"/>
-              <a:t>05/12/2022</a:t>
+              <a:t>12/12/2022</a:t>
             </a:fld>
             <a:endParaRPr lang="pt-BR"/>
           </a:p>
@@ -2045,7 +2045,7 @@
           <a:p>
             <a:fld id="{52231B9D-E9F6-4612-9B82-E89961B389AC}" type="datetimeFigureOut">
               <a:rPr lang="pt-BR" smtClean="0"/>
-              <a:t>05/12/2022</a:t>
+              <a:t>12/12/2022</a:t>
             </a:fld>
             <a:endParaRPr lang="pt-BR"/>
           </a:p>
@@ -2163,7 +2163,7 @@
           <a:p>
             <a:fld id="{52231B9D-E9F6-4612-9B82-E89961B389AC}" type="datetimeFigureOut">
               <a:rPr lang="pt-BR" smtClean="0"/>
-              <a:t>05/12/2022</a:t>
+              <a:t>12/12/2022</a:t>
             </a:fld>
             <a:endParaRPr lang="pt-BR"/>
           </a:p>
@@ -2258,7 +2258,7 @@
           <a:p>
             <a:fld id="{52231B9D-E9F6-4612-9B82-E89961B389AC}" type="datetimeFigureOut">
               <a:rPr lang="pt-BR" smtClean="0"/>
-              <a:t>05/12/2022</a:t>
+              <a:t>12/12/2022</a:t>
             </a:fld>
             <a:endParaRPr lang="pt-BR"/>
           </a:p>
@@ -2535,7 +2535,7 @@
           <a:p>
             <a:fld id="{52231B9D-E9F6-4612-9B82-E89961B389AC}" type="datetimeFigureOut">
               <a:rPr lang="pt-BR" smtClean="0"/>
-              <a:t>05/12/2022</a:t>
+              <a:t>12/12/2022</a:t>
             </a:fld>
             <a:endParaRPr lang="pt-BR"/>
           </a:p>
@@ -2788,7 +2788,7 @@
           <a:p>
             <a:fld id="{52231B9D-E9F6-4612-9B82-E89961B389AC}" type="datetimeFigureOut">
               <a:rPr lang="pt-BR" smtClean="0"/>
-              <a:t>05/12/2022</a:t>
+              <a:t>12/12/2022</a:t>
             </a:fld>
             <a:endParaRPr lang="pt-BR"/>
           </a:p>
@@ -3001,7 +3001,7 @@
           <a:p>
             <a:fld id="{52231B9D-E9F6-4612-9B82-E89961B389AC}" type="datetimeFigureOut">
               <a:rPr lang="pt-BR" smtClean="0"/>
-              <a:t>05/12/2022</a:t>
+              <a:t>12/12/2022</a:t>
             </a:fld>
             <a:endParaRPr lang="pt-BR"/>
           </a:p>
@@ -3665,17 +3665,7 @@
                   </a:schemeClr>
                 </a:solidFill>
               </a:rPr>
-              <a:t>04</a:t>
-            </a:r>
-            <a:r>
-              <a:rPr lang="pt-BR" sz="1600" dirty="0" smtClean="0">
-                <a:solidFill>
-                  <a:schemeClr val="bg2">
-                    <a:lumMod val="90000"/>
-                  </a:schemeClr>
-                </a:solidFill>
-              </a:rPr>
-              <a:t>/12/2022</a:t>
+              <a:t>01/01/2023</a:t>
             </a:r>
             <a:endParaRPr lang="pt-BR" sz="1600" dirty="0">
               <a:solidFill>

--- a/tempimento.pptx
+++ b/tempimento.pptx
@@ -11,7 +11,7 @@
     <p:sldId id="256" r:id="rId2"/>
   </p:sldIdLst>
   <p:sldSz cx="12192000" cy="6858000"/>
-  <p:notesSz cx="6889750" cy="9671050"/>
+  <p:notesSz cx="7104063" cy="10234613"/>
   <p:defaultTextStyle>
     <a:defPPr>
       <a:defRPr lang="pt-BR"/>
@@ -149,18 +149,18 @@
         </p:nvSpPr>
         <p:spPr>
           <a:xfrm>
-            <a:off x="4" y="1"/>
-            <a:ext cx="2985969" cy="484528"/>
+            <a:off x="5" y="1"/>
+            <a:ext cx="3078851" cy="512763"/>
           </a:xfrm>
           <a:prstGeom prst="rect">
             <a:avLst/>
           </a:prstGeom>
         </p:spPr>
         <p:txBody>
-          <a:bodyPr vert="horz" lIns="87314" tIns="43658" rIns="87314" bIns="43658" rtlCol="0"/>
+          <a:bodyPr vert="horz" lIns="91409" tIns="45706" rIns="91409" bIns="45706" rtlCol="0"/>
           <a:lstStyle>
             <a:lvl1pPr algn="l">
-              <a:defRPr sz="1100"/>
+              <a:defRPr sz="1200"/>
             </a:lvl1pPr>
           </a:lstStyle>
           <a:p>
@@ -180,24 +180,24 @@
         </p:nvSpPr>
         <p:spPr>
           <a:xfrm>
-            <a:off x="3902244" y="1"/>
-            <a:ext cx="2985969" cy="484528"/>
+            <a:off x="4023628" y="1"/>
+            <a:ext cx="3078851" cy="512763"/>
           </a:xfrm>
           <a:prstGeom prst="rect">
             <a:avLst/>
           </a:prstGeom>
         </p:spPr>
         <p:txBody>
-          <a:bodyPr vert="horz" lIns="87314" tIns="43658" rIns="87314" bIns="43658" rtlCol="0"/>
+          <a:bodyPr vert="horz" lIns="91409" tIns="45706" rIns="91409" bIns="45706" rtlCol="0"/>
           <a:lstStyle>
             <a:lvl1pPr algn="r">
-              <a:defRPr sz="1100"/>
+              <a:defRPr sz="1200"/>
             </a:lvl1pPr>
           </a:lstStyle>
           <a:p>
             <a:fld id="{A584E3A2-E8EA-4705-A613-CFE9F6F5D3B4}" type="datetimeFigureOut">
               <a:rPr lang="pt-BR" smtClean="0"/>
-              <a:t>12/12/2022</a:t>
+              <a:t>09/01/2023</a:t>
             </a:fld>
             <a:endParaRPr lang="pt-BR"/>
           </a:p>
@@ -215,8 +215,8 @@
         </p:nvSpPr>
         <p:spPr>
           <a:xfrm>
-            <a:off x="542925" y="1209675"/>
-            <a:ext cx="5803900" cy="3263900"/>
+            <a:off x="482600" y="1279525"/>
+            <a:ext cx="6138863" cy="3454400"/>
           </a:xfrm>
           <a:prstGeom prst="rect">
             <a:avLst/>
@@ -229,7 +229,7 @@
           </a:ln>
         </p:spPr>
         <p:txBody>
-          <a:bodyPr vert="horz" lIns="87314" tIns="43658" rIns="87314" bIns="43658" rtlCol="0" anchor="ctr"/>
+          <a:bodyPr vert="horz" lIns="91409" tIns="45706" rIns="91409" bIns="45706" rtlCol="0" anchor="ctr"/>
           <a:lstStyle/>
           <a:p>
             <a:endParaRPr lang="pt-BR"/>
@@ -248,15 +248,15 @@
         </p:nvSpPr>
         <p:spPr>
           <a:xfrm>
-            <a:off x="688362" y="4654767"/>
-            <a:ext cx="5513032" cy="3807216"/>
+            <a:off x="709774" y="4926015"/>
+            <a:ext cx="5684521" cy="4029075"/>
           </a:xfrm>
           <a:prstGeom prst="rect">
             <a:avLst/>
           </a:prstGeom>
         </p:spPr>
         <p:txBody>
-          <a:bodyPr vert="horz" lIns="87314" tIns="43658" rIns="87314" bIns="43658" rtlCol="0"/>
+          <a:bodyPr vert="horz" lIns="91409" tIns="45706" rIns="91409" bIns="45706" rtlCol="0"/>
           <a:lstStyle/>
           <a:p>
             <a:pPr lvl="0"/>
@@ -308,18 +308,18 @@
         </p:nvSpPr>
         <p:spPr>
           <a:xfrm>
-            <a:off x="4" y="9186523"/>
-            <a:ext cx="2985969" cy="484528"/>
+            <a:off x="5" y="9721851"/>
+            <a:ext cx="3078851" cy="512763"/>
           </a:xfrm>
           <a:prstGeom prst="rect">
             <a:avLst/>
           </a:prstGeom>
         </p:spPr>
         <p:txBody>
-          <a:bodyPr vert="horz" lIns="87314" tIns="43658" rIns="87314" bIns="43658" rtlCol="0" anchor="b"/>
+          <a:bodyPr vert="horz" lIns="91409" tIns="45706" rIns="91409" bIns="45706" rtlCol="0" anchor="b"/>
           <a:lstStyle>
             <a:lvl1pPr algn="l">
-              <a:defRPr sz="1100"/>
+              <a:defRPr sz="1200"/>
             </a:lvl1pPr>
           </a:lstStyle>
           <a:p>
@@ -339,18 +339,18 @@
         </p:nvSpPr>
         <p:spPr>
           <a:xfrm>
-            <a:off x="3902244" y="9186523"/>
-            <a:ext cx="2985969" cy="484528"/>
+            <a:off x="4023628" y="9721851"/>
+            <a:ext cx="3078851" cy="512763"/>
           </a:xfrm>
           <a:prstGeom prst="rect">
             <a:avLst/>
           </a:prstGeom>
         </p:spPr>
         <p:txBody>
-          <a:bodyPr vert="horz" lIns="87314" tIns="43658" rIns="87314" bIns="43658" rtlCol="0" anchor="b"/>
+          <a:bodyPr vert="horz" lIns="91409" tIns="45706" rIns="91409" bIns="45706" rtlCol="0" anchor="b"/>
           <a:lstStyle>
             <a:lvl1pPr algn="r">
-              <a:defRPr sz="1100"/>
+              <a:defRPr sz="1200"/>
             </a:lvl1pPr>
           </a:lstStyle>
           <a:p>
@@ -680,7 +680,7 @@
           <a:p>
             <a:fld id="{52231B9D-E9F6-4612-9B82-E89961B389AC}" type="datetimeFigureOut">
               <a:rPr lang="pt-BR" smtClean="0"/>
-              <a:t>12/12/2022</a:t>
+              <a:t>09/01/2023</a:t>
             </a:fld>
             <a:endParaRPr lang="pt-BR"/>
           </a:p>
@@ -850,7 +850,7 @@
           <a:p>
             <a:fld id="{52231B9D-E9F6-4612-9B82-E89961B389AC}" type="datetimeFigureOut">
               <a:rPr lang="pt-BR" smtClean="0"/>
-              <a:t>12/12/2022</a:t>
+              <a:t>09/01/2023</a:t>
             </a:fld>
             <a:endParaRPr lang="pt-BR"/>
           </a:p>
@@ -1030,7 +1030,7 @@
           <a:p>
             <a:fld id="{52231B9D-E9F6-4612-9B82-E89961B389AC}" type="datetimeFigureOut">
               <a:rPr lang="pt-BR" smtClean="0"/>
-              <a:t>12/12/2022</a:t>
+              <a:t>09/01/2023</a:t>
             </a:fld>
             <a:endParaRPr lang="pt-BR"/>
           </a:p>
@@ -1200,7 +1200,7 @@
           <a:p>
             <a:fld id="{52231B9D-E9F6-4612-9B82-E89961B389AC}" type="datetimeFigureOut">
               <a:rPr lang="pt-BR" smtClean="0"/>
-              <a:t>12/12/2022</a:t>
+              <a:t>09/01/2023</a:t>
             </a:fld>
             <a:endParaRPr lang="pt-BR"/>
           </a:p>
@@ -1446,7 +1446,7 @@
           <a:p>
             <a:fld id="{52231B9D-E9F6-4612-9B82-E89961B389AC}" type="datetimeFigureOut">
               <a:rPr lang="pt-BR" smtClean="0"/>
-              <a:t>12/12/2022</a:t>
+              <a:t>09/01/2023</a:t>
             </a:fld>
             <a:endParaRPr lang="pt-BR"/>
           </a:p>
@@ -1678,7 +1678,7 @@
           <a:p>
             <a:fld id="{52231B9D-E9F6-4612-9B82-E89961B389AC}" type="datetimeFigureOut">
               <a:rPr lang="pt-BR" smtClean="0"/>
-              <a:t>12/12/2022</a:t>
+              <a:t>09/01/2023</a:t>
             </a:fld>
             <a:endParaRPr lang="pt-BR"/>
           </a:p>
@@ -2045,7 +2045,7 @@
           <a:p>
             <a:fld id="{52231B9D-E9F6-4612-9B82-E89961B389AC}" type="datetimeFigureOut">
               <a:rPr lang="pt-BR" smtClean="0"/>
-              <a:t>12/12/2022</a:t>
+              <a:t>09/01/2023</a:t>
             </a:fld>
             <a:endParaRPr lang="pt-BR"/>
           </a:p>
@@ -2163,7 +2163,7 @@
           <a:p>
             <a:fld id="{52231B9D-E9F6-4612-9B82-E89961B389AC}" type="datetimeFigureOut">
               <a:rPr lang="pt-BR" smtClean="0"/>
-              <a:t>12/12/2022</a:t>
+              <a:t>09/01/2023</a:t>
             </a:fld>
             <a:endParaRPr lang="pt-BR"/>
           </a:p>
@@ -2258,7 +2258,7 @@
           <a:p>
             <a:fld id="{52231B9D-E9F6-4612-9B82-E89961B389AC}" type="datetimeFigureOut">
               <a:rPr lang="pt-BR" smtClean="0"/>
-              <a:t>12/12/2022</a:t>
+              <a:t>09/01/2023</a:t>
             </a:fld>
             <a:endParaRPr lang="pt-BR"/>
           </a:p>
@@ -2535,7 +2535,7 @@
           <a:p>
             <a:fld id="{52231B9D-E9F6-4612-9B82-E89961B389AC}" type="datetimeFigureOut">
               <a:rPr lang="pt-BR" smtClean="0"/>
-              <a:t>12/12/2022</a:t>
+              <a:t>09/01/2023</a:t>
             </a:fld>
             <a:endParaRPr lang="pt-BR"/>
           </a:p>
@@ -2788,7 +2788,7 @@
           <a:p>
             <a:fld id="{52231B9D-E9F6-4612-9B82-E89961B389AC}" type="datetimeFigureOut">
               <a:rPr lang="pt-BR" smtClean="0"/>
-              <a:t>12/12/2022</a:t>
+              <a:t>09/01/2023</a:t>
             </a:fld>
             <a:endParaRPr lang="pt-BR"/>
           </a:p>
@@ -3001,7 +3001,7 @@
           <a:p>
             <a:fld id="{52231B9D-E9F6-4612-9B82-E89961B389AC}" type="datetimeFigureOut">
               <a:rPr lang="pt-BR" smtClean="0"/>
-              <a:t>12/12/2022</a:t>
+              <a:t>09/01/2023</a:t>
             </a:fld>
             <a:endParaRPr lang="pt-BR"/>
           </a:p>
@@ -3665,7 +3665,7 @@
                   </a:schemeClr>
                 </a:solidFill>
               </a:rPr>
-              <a:t>01/01/2023</a:t>
+              <a:t>08/01/2023</a:t>
             </a:r>
             <a:endParaRPr lang="pt-BR" sz="1600" dirty="0">
               <a:solidFill>
@@ -3692,23 +3692,18 @@
             <a:avLst/>
           </a:prstGeom>
           <a:ln>
-            <a:solidFill>
-              <a:schemeClr val="bg2">
-                <a:lumMod val="90000"/>
-              </a:schemeClr>
-            </a:solidFill>
             <a:tailEnd type="triangle"/>
           </a:ln>
         </p:spPr>
         <p:style>
           <a:lnRef idx="1">
-            <a:schemeClr val="accent1"/>
+            <a:schemeClr val="accent6"/>
           </a:lnRef>
           <a:fillRef idx="0">
-            <a:schemeClr val="accent1"/>
+            <a:schemeClr val="accent6"/>
           </a:fillRef>
           <a:effectRef idx="0">
-            <a:schemeClr val="accent1"/>
+            <a:schemeClr val="accent6"/>
           </a:effectRef>
           <a:fontRef idx="minor">
             <a:schemeClr val="tx1"/>
@@ -3729,24 +3724,19 @@
           <a:prstGeom prst="straightConnector1">
             <a:avLst/>
           </a:prstGeom>
-          <a:ln w="3175">
-            <a:solidFill>
-              <a:schemeClr val="bg2">
-                <a:lumMod val="90000"/>
-              </a:schemeClr>
-            </a:solidFill>
+          <a:ln>
             <a:tailEnd type="triangle"/>
           </a:ln>
         </p:spPr>
         <p:style>
           <a:lnRef idx="1">
-            <a:schemeClr val="accent1"/>
+            <a:schemeClr val="accent6"/>
           </a:lnRef>
           <a:fillRef idx="0">
-            <a:schemeClr val="accent1"/>
+            <a:schemeClr val="accent6"/>
           </a:fillRef>
           <a:effectRef idx="0">
-            <a:schemeClr val="accent1"/>
+            <a:schemeClr val="accent6"/>
           </a:effectRef>
           <a:fontRef idx="minor">
             <a:schemeClr val="tx1"/>
@@ -3768,23 +3758,18 @@
             <a:avLst/>
           </a:prstGeom>
           <a:ln>
-            <a:solidFill>
-              <a:schemeClr val="bg2">
-                <a:lumMod val="90000"/>
-              </a:schemeClr>
-            </a:solidFill>
             <a:tailEnd type="triangle"/>
           </a:ln>
         </p:spPr>
         <p:style>
           <a:lnRef idx="1">
-            <a:schemeClr val="accent1"/>
+            <a:schemeClr val="accent6"/>
           </a:lnRef>
           <a:fillRef idx="0">
-            <a:schemeClr val="accent1"/>
+            <a:schemeClr val="accent6"/>
           </a:fillRef>
           <a:effectRef idx="0">
-            <a:schemeClr val="accent1"/>
+            <a:schemeClr val="accent6"/>
           </a:effectRef>
           <a:fontRef idx="minor">
             <a:schemeClr val="tx1"/>

--- a/tempimento.pptx
+++ b/tempimento.pptx
@@ -197,7 +197,7 @@
           <a:p>
             <a:fld id="{A584E3A2-E8EA-4705-A613-CFE9F6F5D3B4}" type="datetimeFigureOut">
               <a:rPr lang="pt-BR" smtClean="0"/>
-              <a:t>09/01/2023</a:t>
+              <a:t>17/01/2023</a:t>
             </a:fld>
             <a:endParaRPr lang="pt-BR"/>
           </a:p>
@@ -680,7 +680,7 @@
           <a:p>
             <a:fld id="{52231B9D-E9F6-4612-9B82-E89961B389AC}" type="datetimeFigureOut">
               <a:rPr lang="pt-BR" smtClean="0"/>
-              <a:t>09/01/2023</a:t>
+              <a:t>17/01/2023</a:t>
             </a:fld>
             <a:endParaRPr lang="pt-BR"/>
           </a:p>
@@ -850,7 +850,7 @@
           <a:p>
             <a:fld id="{52231B9D-E9F6-4612-9B82-E89961B389AC}" type="datetimeFigureOut">
               <a:rPr lang="pt-BR" smtClean="0"/>
-              <a:t>09/01/2023</a:t>
+              <a:t>17/01/2023</a:t>
             </a:fld>
             <a:endParaRPr lang="pt-BR"/>
           </a:p>
@@ -1030,7 +1030,7 @@
           <a:p>
             <a:fld id="{52231B9D-E9F6-4612-9B82-E89961B389AC}" type="datetimeFigureOut">
               <a:rPr lang="pt-BR" smtClean="0"/>
-              <a:t>09/01/2023</a:t>
+              <a:t>17/01/2023</a:t>
             </a:fld>
             <a:endParaRPr lang="pt-BR"/>
           </a:p>
@@ -1200,7 +1200,7 @@
           <a:p>
             <a:fld id="{52231B9D-E9F6-4612-9B82-E89961B389AC}" type="datetimeFigureOut">
               <a:rPr lang="pt-BR" smtClean="0"/>
-              <a:t>09/01/2023</a:t>
+              <a:t>17/01/2023</a:t>
             </a:fld>
             <a:endParaRPr lang="pt-BR"/>
           </a:p>
@@ -1446,7 +1446,7 @@
           <a:p>
             <a:fld id="{52231B9D-E9F6-4612-9B82-E89961B389AC}" type="datetimeFigureOut">
               <a:rPr lang="pt-BR" smtClean="0"/>
-              <a:t>09/01/2023</a:t>
+              <a:t>17/01/2023</a:t>
             </a:fld>
             <a:endParaRPr lang="pt-BR"/>
           </a:p>
@@ -1678,7 +1678,7 @@
           <a:p>
             <a:fld id="{52231B9D-E9F6-4612-9B82-E89961B389AC}" type="datetimeFigureOut">
               <a:rPr lang="pt-BR" smtClean="0"/>
-              <a:t>09/01/2023</a:t>
+              <a:t>17/01/2023</a:t>
             </a:fld>
             <a:endParaRPr lang="pt-BR"/>
           </a:p>
@@ -2045,7 +2045,7 @@
           <a:p>
             <a:fld id="{52231B9D-E9F6-4612-9B82-E89961B389AC}" type="datetimeFigureOut">
               <a:rPr lang="pt-BR" smtClean="0"/>
-              <a:t>09/01/2023</a:t>
+              <a:t>17/01/2023</a:t>
             </a:fld>
             <a:endParaRPr lang="pt-BR"/>
           </a:p>
@@ -2163,7 +2163,7 @@
           <a:p>
             <a:fld id="{52231B9D-E9F6-4612-9B82-E89961B389AC}" type="datetimeFigureOut">
               <a:rPr lang="pt-BR" smtClean="0"/>
-              <a:t>09/01/2023</a:t>
+              <a:t>17/01/2023</a:t>
             </a:fld>
             <a:endParaRPr lang="pt-BR"/>
           </a:p>
@@ -2258,7 +2258,7 @@
           <a:p>
             <a:fld id="{52231B9D-E9F6-4612-9B82-E89961B389AC}" type="datetimeFigureOut">
               <a:rPr lang="pt-BR" smtClean="0"/>
-              <a:t>09/01/2023</a:t>
+              <a:t>17/01/2023</a:t>
             </a:fld>
             <a:endParaRPr lang="pt-BR"/>
           </a:p>
@@ -2535,7 +2535,7 @@
           <a:p>
             <a:fld id="{52231B9D-E9F6-4612-9B82-E89961B389AC}" type="datetimeFigureOut">
               <a:rPr lang="pt-BR" smtClean="0"/>
-              <a:t>09/01/2023</a:t>
+              <a:t>17/01/2023</a:t>
             </a:fld>
             <a:endParaRPr lang="pt-BR"/>
           </a:p>
@@ -2788,7 +2788,7 @@
           <a:p>
             <a:fld id="{52231B9D-E9F6-4612-9B82-E89961B389AC}" type="datetimeFigureOut">
               <a:rPr lang="pt-BR" smtClean="0"/>
-              <a:t>09/01/2023</a:t>
+              <a:t>17/01/2023</a:t>
             </a:fld>
             <a:endParaRPr lang="pt-BR"/>
           </a:p>
@@ -3001,7 +3001,7 @@
           <a:p>
             <a:fld id="{52231B9D-E9F6-4612-9B82-E89961B389AC}" type="datetimeFigureOut">
               <a:rPr lang="pt-BR" smtClean="0"/>
-              <a:t>09/01/2023</a:t>
+              <a:t>17/01/2023</a:t>
             </a:fld>
             <a:endParaRPr lang="pt-BR"/>
           </a:p>
@@ -3665,7 +3665,17 @@
                   </a:schemeClr>
                 </a:solidFill>
               </a:rPr>
-              <a:t>08/01/2023</a:t>
+              <a:t>15</a:t>
+            </a:r>
+            <a:r>
+              <a:rPr lang="pt-BR" sz="1600" dirty="0" smtClean="0">
+                <a:solidFill>
+                  <a:schemeClr val="bg2">
+                    <a:lumMod val="90000"/>
+                  </a:schemeClr>
+                </a:solidFill>
+              </a:rPr>
+              <a:t>/01/2023</a:t>
             </a:r>
             <a:endParaRPr lang="pt-BR" sz="1600" dirty="0">
               <a:solidFill>

--- a/tempimento.pptx
+++ b/tempimento.pptx
@@ -197,7 +197,7 @@
           <a:p>
             <a:fld id="{A584E3A2-E8EA-4705-A613-CFE9F6F5D3B4}" type="datetimeFigureOut">
               <a:rPr lang="pt-BR" smtClean="0"/>
-              <a:t>17/01/2023</a:t>
+              <a:t>23/01/2023</a:t>
             </a:fld>
             <a:endParaRPr lang="pt-BR"/>
           </a:p>
@@ -680,7 +680,7 @@
           <a:p>
             <a:fld id="{52231B9D-E9F6-4612-9B82-E89961B389AC}" type="datetimeFigureOut">
               <a:rPr lang="pt-BR" smtClean="0"/>
-              <a:t>17/01/2023</a:t>
+              <a:t>23/01/2023</a:t>
             </a:fld>
             <a:endParaRPr lang="pt-BR"/>
           </a:p>
@@ -850,7 +850,7 @@
           <a:p>
             <a:fld id="{52231B9D-E9F6-4612-9B82-E89961B389AC}" type="datetimeFigureOut">
               <a:rPr lang="pt-BR" smtClean="0"/>
-              <a:t>17/01/2023</a:t>
+              <a:t>23/01/2023</a:t>
             </a:fld>
             <a:endParaRPr lang="pt-BR"/>
           </a:p>
@@ -1030,7 +1030,7 @@
           <a:p>
             <a:fld id="{52231B9D-E9F6-4612-9B82-E89961B389AC}" type="datetimeFigureOut">
               <a:rPr lang="pt-BR" smtClean="0"/>
-              <a:t>17/01/2023</a:t>
+              <a:t>23/01/2023</a:t>
             </a:fld>
             <a:endParaRPr lang="pt-BR"/>
           </a:p>
@@ -1200,7 +1200,7 @@
           <a:p>
             <a:fld id="{52231B9D-E9F6-4612-9B82-E89961B389AC}" type="datetimeFigureOut">
               <a:rPr lang="pt-BR" smtClean="0"/>
-              <a:t>17/01/2023</a:t>
+              <a:t>23/01/2023</a:t>
             </a:fld>
             <a:endParaRPr lang="pt-BR"/>
           </a:p>
@@ -1446,7 +1446,7 @@
           <a:p>
             <a:fld id="{52231B9D-E9F6-4612-9B82-E89961B389AC}" type="datetimeFigureOut">
               <a:rPr lang="pt-BR" smtClean="0"/>
-              <a:t>17/01/2023</a:t>
+              <a:t>23/01/2023</a:t>
             </a:fld>
             <a:endParaRPr lang="pt-BR"/>
           </a:p>
@@ -1678,7 +1678,7 @@
           <a:p>
             <a:fld id="{52231B9D-E9F6-4612-9B82-E89961B389AC}" type="datetimeFigureOut">
               <a:rPr lang="pt-BR" smtClean="0"/>
-              <a:t>17/01/2023</a:t>
+              <a:t>23/01/2023</a:t>
             </a:fld>
             <a:endParaRPr lang="pt-BR"/>
           </a:p>
@@ -2045,7 +2045,7 @@
           <a:p>
             <a:fld id="{52231B9D-E9F6-4612-9B82-E89961B389AC}" type="datetimeFigureOut">
               <a:rPr lang="pt-BR" smtClean="0"/>
-              <a:t>17/01/2023</a:t>
+              <a:t>23/01/2023</a:t>
             </a:fld>
             <a:endParaRPr lang="pt-BR"/>
           </a:p>
@@ -2163,7 +2163,7 @@
           <a:p>
             <a:fld id="{52231B9D-E9F6-4612-9B82-E89961B389AC}" type="datetimeFigureOut">
               <a:rPr lang="pt-BR" smtClean="0"/>
-              <a:t>17/01/2023</a:t>
+              <a:t>23/01/2023</a:t>
             </a:fld>
             <a:endParaRPr lang="pt-BR"/>
           </a:p>
@@ -2258,7 +2258,7 @@
           <a:p>
             <a:fld id="{52231B9D-E9F6-4612-9B82-E89961B389AC}" type="datetimeFigureOut">
               <a:rPr lang="pt-BR" smtClean="0"/>
-              <a:t>17/01/2023</a:t>
+              <a:t>23/01/2023</a:t>
             </a:fld>
             <a:endParaRPr lang="pt-BR"/>
           </a:p>
@@ -2535,7 +2535,7 @@
           <a:p>
             <a:fld id="{52231B9D-E9F6-4612-9B82-E89961B389AC}" type="datetimeFigureOut">
               <a:rPr lang="pt-BR" smtClean="0"/>
-              <a:t>17/01/2023</a:t>
+              <a:t>23/01/2023</a:t>
             </a:fld>
             <a:endParaRPr lang="pt-BR"/>
           </a:p>
@@ -2788,7 +2788,7 @@
           <a:p>
             <a:fld id="{52231B9D-E9F6-4612-9B82-E89961B389AC}" type="datetimeFigureOut">
               <a:rPr lang="pt-BR" smtClean="0"/>
-              <a:t>17/01/2023</a:t>
+              <a:t>23/01/2023</a:t>
             </a:fld>
             <a:endParaRPr lang="pt-BR"/>
           </a:p>
@@ -3001,7 +3001,7 @@
           <a:p>
             <a:fld id="{52231B9D-E9F6-4612-9B82-E89961B389AC}" type="datetimeFigureOut">
               <a:rPr lang="pt-BR" smtClean="0"/>
-              <a:t>17/01/2023</a:t>
+              <a:t>23/01/2023</a:t>
             </a:fld>
             <a:endParaRPr lang="pt-BR"/>
           </a:p>
@@ -3665,7 +3665,7 @@
                   </a:schemeClr>
                 </a:solidFill>
               </a:rPr>
-              <a:t>15</a:t>
+              <a:t>22</a:t>
             </a:r>
             <a:r>
               <a:rPr lang="pt-BR" sz="1600" dirty="0" smtClean="0">

--- a/tempimento.pptx
+++ b/tempimento.pptx
@@ -197,7 +197,7 @@
           <a:p>
             <a:fld id="{A584E3A2-E8EA-4705-A613-CFE9F6F5D3B4}" type="datetimeFigureOut">
               <a:rPr lang="pt-BR" smtClean="0"/>
-              <a:t>23/01/2023</a:t>
+              <a:t>30/01/2023</a:t>
             </a:fld>
             <a:endParaRPr lang="pt-BR"/>
           </a:p>
@@ -680,7 +680,7 @@
           <a:p>
             <a:fld id="{52231B9D-E9F6-4612-9B82-E89961B389AC}" type="datetimeFigureOut">
               <a:rPr lang="pt-BR" smtClean="0"/>
-              <a:t>23/01/2023</a:t>
+              <a:t>30/01/2023</a:t>
             </a:fld>
             <a:endParaRPr lang="pt-BR"/>
           </a:p>
@@ -850,7 +850,7 @@
           <a:p>
             <a:fld id="{52231B9D-E9F6-4612-9B82-E89961B389AC}" type="datetimeFigureOut">
               <a:rPr lang="pt-BR" smtClean="0"/>
-              <a:t>23/01/2023</a:t>
+              <a:t>30/01/2023</a:t>
             </a:fld>
             <a:endParaRPr lang="pt-BR"/>
           </a:p>
@@ -1030,7 +1030,7 @@
           <a:p>
             <a:fld id="{52231B9D-E9F6-4612-9B82-E89961B389AC}" type="datetimeFigureOut">
               <a:rPr lang="pt-BR" smtClean="0"/>
-              <a:t>23/01/2023</a:t>
+              <a:t>30/01/2023</a:t>
             </a:fld>
             <a:endParaRPr lang="pt-BR"/>
           </a:p>
@@ -1200,7 +1200,7 @@
           <a:p>
             <a:fld id="{52231B9D-E9F6-4612-9B82-E89961B389AC}" type="datetimeFigureOut">
               <a:rPr lang="pt-BR" smtClean="0"/>
-              <a:t>23/01/2023</a:t>
+              <a:t>30/01/2023</a:t>
             </a:fld>
             <a:endParaRPr lang="pt-BR"/>
           </a:p>
@@ -1446,7 +1446,7 @@
           <a:p>
             <a:fld id="{52231B9D-E9F6-4612-9B82-E89961B389AC}" type="datetimeFigureOut">
               <a:rPr lang="pt-BR" smtClean="0"/>
-              <a:t>23/01/2023</a:t>
+              <a:t>30/01/2023</a:t>
             </a:fld>
             <a:endParaRPr lang="pt-BR"/>
           </a:p>
@@ -1678,7 +1678,7 @@
           <a:p>
             <a:fld id="{52231B9D-E9F6-4612-9B82-E89961B389AC}" type="datetimeFigureOut">
               <a:rPr lang="pt-BR" smtClean="0"/>
-              <a:t>23/01/2023</a:t>
+              <a:t>30/01/2023</a:t>
             </a:fld>
             <a:endParaRPr lang="pt-BR"/>
           </a:p>
@@ -2045,7 +2045,7 @@
           <a:p>
             <a:fld id="{52231B9D-E9F6-4612-9B82-E89961B389AC}" type="datetimeFigureOut">
               <a:rPr lang="pt-BR" smtClean="0"/>
-              <a:t>23/01/2023</a:t>
+              <a:t>30/01/2023</a:t>
             </a:fld>
             <a:endParaRPr lang="pt-BR"/>
           </a:p>
@@ -2163,7 +2163,7 @@
           <a:p>
             <a:fld id="{52231B9D-E9F6-4612-9B82-E89961B389AC}" type="datetimeFigureOut">
               <a:rPr lang="pt-BR" smtClean="0"/>
-              <a:t>23/01/2023</a:t>
+              <a:t>30/01/2023</a:t>
             </a:fld>
             <a:endParaRPr lang="pt-BR"/>
           </a:p>
@@ -2258,7 +2258,7 @@
           <a:p>
             <a:fld id="{52231B9D-E9F6-4612-9B82-E89961B389AC}" type="datetimeFigureOut">
               <a:rPr lang="pt-BR" smtClean="0"/>
-              <a:t>23/01/2023</a:t>
+              <a:t>30/01/2023</a:t>
             </a:fld>
             <a:endParaRPr lang="pt-BR"/>
           </a:p>
@@ -2535,7 +2535,7 @@
           <a:p>
             <a:fld id="{52231B9D-E9F6-4612-9B82-E89961B389AC}" type="datetimeFigureOut">
               <a:rPr lang="pt-BR" smtClean="0"/>
-              <a:t>23/01/2023</a:t>
+              <a:t>30/01/2023</a:t>
             </a:fld>
             <a:endParaRPr lang="pt-BR"/>
           </a:p>
@@ -2788,7 +2788,7 @@
           <a:p>
             <a:fld id="{52231B9D-E9F6-4612-9B82-E89961B389AC}" type="datetimeFigureOut">
               <a:rPr lang="pt-BR" smtClean="0"/>
-              <a:t>23/01/2023</a:t>
+              <a:t>30/01/2023</a:t>
             </a:fld>
             <a:endParaRPr lang="pt-BR"/>
           </a:p>
@@ -3001,7 +3001,7 @@
           <a:p>
             <a:fld id="{52231B9D-E9F6-4612-9B82-E89961B389AC}" type="datetimeFigureOut">
               <a:rPr lang="pt-BR" smtClean="0"/>
-              <a:t>23/01/2023</a:t>
+              <a:t>30/01/2023</a:t>
             </a:fld>
             <a:endParaRPr lang="pt-BR"/>
           </a:p>
@@ -3658,17 +3658,17 @@
           <a:lstStyle/>
           <a:p>
             <a:r>
-              <a:rPr lang="pt-BR" sz="1600" dirty="0" smtClean="0">
+              <a:rPr lang="pt-BR" sz="1600" smtClean="0">
                 <a:solidFill>
                   <a:schemeClr val="bg2">
                     <a:lumMod val="90000"/>
                   </a:schemeClr>
                 </a:solidFill>
               </a:rPr>
-              <a:t>22</a:t>
-            </a:r>
-            <a:r>
-              <a:rPr lang="pt-BR" sz="1600" dirty="0" smtClean="0">
+              <a:t>29</a:t>
+            </a:r>
+            <a:r>
+              <a:rPr lang="pt-BR" sz="1600" smtClean="0">
                 <a:solidFill>
                   <a:schemeClr val="bg2">
                     <a:lumMod val="90000"/>

--- a/tempimento.pptx
+++ b/tempimento.pptx
@@ -197,7 +197,7 @@
           <a:p>
             <a:fld id="{A584E3A2-E8EA-4705-A613-CFE9F6F5D3B4}" type="datetimeFigureOut">
               <a:rPr lang="pt-BR" smtClean="0"/>
-              <a:t>30/01/2023</a:t>
+              <a:t>07/02/2023</a:t>
             </a:fld>
             <a:endParaRPr lang="pt-BR"/>
           </a:p>
@@ -680,7 +680,7 @@
           <a:p>
             <a:fld id="{52231B9D-E9F6-4612-9B82-E89961B389AC}" type="datetimeFigureOut">
               <a:rPr lang="pt-BR" smtClean="0"/>
-              <a:t>30/01/2023</a:t>
+              <a:t>07/02/2023</a:t>
             </a:fld>
             <a:endParaRPr lang="pt-BR"/>
           </a:p>
@@ -850,7 +850,7 @@
           <a:p>
             <a:fld id="{52231B9D-E9F6-4612-9B82-E89961B389AC}" type="datetimeFigureOut">
               <a:rPr lang="pt-BR" smtClean="0"/>
-              <a:t>30/01/2023</a:t>
+              <a:t>07/02/2023</a:t>
             </a:fld>
             <a:endParaRPr lang="pt-BR"/>
           </a:p>
@@ -1030,7 +1030,7 @@
           <a:p>
             <a:fld id="{52231B9D-E9F6-4612-9B82-E89961B389AC}" type="datetimeFigureOut">
               <a:rPr lang="pt-BR" smtClean="0"/>
-              <a:t>30/01/2023</a:t>
+              <a:t>07/02/2023</a:t>
             </a:fld>
             <a:endParaRPr lang="pt-BR"/>
           </a:p>
@@ -1200,7 +1200,7 @@
           <a:p>
             <a:fld id="{52231B9D-E9F6-4612-9B82-E89961B389AC}" type="datetimeFigureOut">
               <a:rPr lang="pt-BR" smtClean="0"/>
-              <a:t>30/01/2023</a:t>
+              <a:t>07/02/2023</a:t>
             </a:fld>
             <a:endParaRPr lang="pt-BR"/>
           </a:p>
@@ -1446,7 +1446,7 @@
           <a:p>
             <a:fld id="{52231B9D-E9F6-4612-9B82-E89961B389AC}" type="datetimeFigureOut">
               <a:rPr lang="pt-BR" smtClean="0"/>
-              <a:t>30/01/2023</a:t>
+              <a:t>07/02/2023</a:t>
             </a:fld>
             <a:endParaRPr lang="pt-BR"/>
           </a:p>
@@ -1678,7 +1678,7 @@
           <a:p>
             <a:fld id="{52231B9D-E9F6-4612-9B82-E89961B389AC}" type="datetimeFigureOut">
               <a:rPr lang="pt-BR" smtClean="0"/>
-              <a:t>30/01/2023</a:t>
+              <a:t>07/02/2023</a:t>
             </a:fld>
             <a:endParaRPr lang="pt-BR"/>
           </a:p>
@@ -2045,7 +2045,7 @@
           <a:p>
             <a:fld id="{52231B9D-E9F6-4612-9B82-E89961B389AC}" type="datetimeFigureOut">
               <a:rPr lang="pt-BR" smtClean="0"/>
-              <a:t>30/01/2023</a:t>
+              <a:t>07/02/2023</a:t>
             </a:fld>
             <a:endParaRPr lang="pt-BR"/>
           </a:p>
@@ -2163,7 +2163,7 @@
           <a:p>
             <a:fld id="{52231B9D-E9F6-4612-9B82-E89961B389AC}" type="datetimeFigureOut">
               <a:rPr lang="pt-BR" smtClean="0"/>
-              <a:t>30/01/2023</a:t>
+              <a:t>07/02/2023</a:t>
             </a:fld>
             <a:endParaRPr lang="pt-BR"/>
           </a:p>
@@ -2258,7 +2258,7 @@
           <a:p>
             <a:fld id="{52231B9D-E9F6-4612-9B82-E89961B389AC}" type="datetimeFigureOut">
               <a:rPr lang="pt-BR" smtClean="0"/>
-              <a:t>30/01/2023</a:t>
+              <a:t>07/02/2023</a:t>
             </a:fld>
             <a:endParaRPr lang="pt-BR"/>
           </a:p>
@@ -2535,7 +2535,7 @@
           <a:p>
             <a:fld id="{52231B9D-E9F6-4612-9B82-E89961B389AC}" type="datetimeFigureOut">
               <a:rPr lang="pt-BR" smtClean="0"/>
-              <a:t>30/01/2023</a:t>
+              <a:t>07/02/2023</a:t>
             </a:fld>
             <a:endParaRPr lang="pt-BR"/>
           </a:p>
@@ -2788,7 +2788,7 @@
           <a:p>
             <a:fld id="{52231B9D-E9F6-4612-9B82-E89961B389AC}" type="datetimeFigureOut">
               <a:rPr lang="pt-BR" smtClean="0"/>
-              <a:t>30/01/2023</a:t>
+              <a:t>07/02/2023</a:t>
             </a:fld>
             <a:endParaRPr lang="pt-BR"/>
           </a:p>
@@ -3001,7 +3001,7 @@
           <a:p>
             <a:fld id="{52231B9D-E9F6-4612-9B82-E89961B389AC}" type="datetimeFigureOut">
               <a:rPr lang="pt-BR" smtClean="0"/>
-              <a:t>30/01/2023</a:t>
+              <a:t>07/02/2023</a:t>
             </a:fld>
             <a:endParaRPr lang="pt-BR"/>
           </a:p>
@@ -3658,24 +3658,24 @@
           <a:lstStyle/>
           <a:p>
             <a:r>
-              <a:rPr lang="pt-BR" sz="1600" smtClean="0">
+              <a:rPr lang="pt-BR" sz="1600" dirty="0" smtClean="0">
                 <a:solidFill>
                   <a:schemeClr val="bg2">
                     <a:lumMod val="90000"/>
                   </a:schemeClr>
                 </a:solidFill>
               </a:rPr>
-              <a:t>29</a:t>
-            </a:r>
-            <a:r>
-              <a:rPr lang="pt-BR" sz="1600" smtClean="0">
+              <a:t>05</a:t>
+            </a:r>
+            <a:r>
+              <a:rPr lang="pt-BR" sz="1600" dirty="0" smtClean="0">
                 <a:solidFill>
                   <a:schemeClr val="bg2">
                     <a:lumMod val="90000"/>
                   </a:schemeClr>
                 </a:solidFill>
               </a:rPr>
-              <a:t>/01/2023</a:t>
+              <a:t>/02/2023</a:t>
             </a:r>
             <a:endParaRPr lang="pt-BR" sz="1600" dirty="0">
               <a:solidFill>

--- a/tempimento.pptx
+++ b/tempimento.pptx
@@ -11,7 +11,7 @@
     <p:sldId id="256" r:id="rId2"/>
   </p:sldIdLst>
   <p:sldSz cx="12192000" cy="6858000"/>
-  <p:notesSz cx="7104063" cy="10234613"/>
+  <p:notesSz cx="6889750" cy="9671050"/>
   <p:defaultTextStyle>
     <a:defPPr>
       <a:defRPr lang="pt-BR"/>
@@ -150,17 +150,17 @@
         <p:spPr>
           <a:xfrm>
             <a:off x="5" y="1"/>
-            <a:ext cx="3078851" cy="512763"/>
+            <a:ext cx="2985969" cy="484528"/>
           </a:xfrm>
           <a:prstGeom prst="rect">
             <a:avLst/>
           </a:prstGeom>
         </p:spPr>
         <p:txBody>
-          <a:bodyPr vert="horz" lIns="91409" tIns="45706" rIns="91409" bIns="45706" rtlCol="0"/>
+          <a:bodyPr vert="horz" lIns="87305" tIns="43654" rIns="87305" bIns="43654" rtlCol="0"/>
           <a:lstStyle>
             <a:lvl1pPr algn="l">
-              <a:defRPr sz="1200"/>
+              <a:defRPr sz="1100"/>
             </a:lvl1pPr>
           </a:lstStyle>
           <a:p>
@@ -180,24 +180,24 @@
         </p:nvSpPr>
         <p:spPr>
           <a:xfrm>
-            <a:off x="4023628" y="1"/>
-            <a:ext cx="3078851" cy="512763"/>
+            <a:off x="3902245" y="1"/>
+            <a:ext cx="2985969" cy="484528"/>
           </a:xfrm>
           <a:prstGeom prst="rect">
             <a:avLst/>
           </a:prstGeom>
         </p:spPr>
         <p:txBody>
-          <a:bodyPr vert="horz" lIns="91409" tIns="45706" rIns="91409" bIns="45706" rtlCol="0"/>
+          <a:bodyPr vert="horz" lIns="87305" tIns="43654" rIns="87305" bIns="43654" rtlCol="0"/>
           <a:lstStyle>
             <a:lvl1pPr algn="r">
-              <a:defRPr sz="1200"/>
+              <a:defRPr sz="1100"/>
             </a:lvl1pPr>
           </a:lstStyle>
           <a:p>
             <a:fld id="{A584E3A2-E8EA-4705-A613-CFE9F6F5D3B4}" type="datetimeFigureOut">
               <a:rPr lang="pt-BR" smtClean="0"/>
-              <a:t>07/02/2023</a:t>
+              <a:t>15/02/2023</a:t>
             </a:fld>
             <a:endParaRPr lang="pt-BR"/>
           </a:p>
@@ -215,8 +215,8 @@
         </p:nvSpPr>
         <p:spPr>
           <a:xfrm>
-            <a:off x="482600" y="1279525"/>
-            <a:ext cx="6138863" cy="3454400"/>
+            <a:off x="542925" y="1209675"/>
+            <a:ext cx="5803900" cy="3263900"/>
           </a:xfrm>
           <a:prstGeom prst="rect">
             <a:avLst/>
@@ -229,7 +229,7 @@
           </a:ln>
         </p:spPr>
         <p:txBody>
-          <a:bodyPr vert="horz" lIns="91409" tIns="45706" rIns="91409" bIns="45706" rtlCol="0" anchor="ctr"/>
+          <a:bodyPr vert="horz" lIns="87305" tIns="43654" rIns="87305" bIns="43654" rtlCol="0" anchor="ctr"/>
           <a:lstStyle/>
           <a:p>
             <a:endParaRPr lang="pt-BR"/>
@@ -248,15 +248,15 @@
         </p:nvSpPr>
         <p:spPr>
           <a:xfrm>
-            <a:off x="709774" y="4926015"/>
-            <a:ext cx="5684521" cy="4029075"/>
+            <a:off x="688362" y="4654767"/>
+            <a:ext cx="5513032" cy="3807216"/>
           </a:xfrm>
           <a:prstGeom prst="rect">
             <a:avLst/>
           </a:prstGeom>
         </p:spPr>
         <p:txBody>
-          <a:bodyPr vert="horz" lIns="91409" tIns="45706" rIns="91409" bIns="45706" rtlCol="0"/>
+          <a:bodyPr vert="horz" lIns="87305" tIns="43654" rIns="87305" bIns="43654" rtlCol="0"/>
           <a:lstStyle/>
           <a:p>
             <a:pPr lvl="0"/>
@@ -308,18 +308,18 @@
         </p:nvSpPr>
         <p:spPr>
           <a:xfrm>
-            <a:off x="5" y="9721851"/>
-            <a:ext cx="3078851" cy="512763"/>
+            <a:off x="5" y="9186523"/>
+            <a:ext cx="2985969" cy="484528"/>
           </a:xfrm>
           <a:prstGeom prst="rect">
             <a:avLst/>
           </a:prstGeom>
         </p:spPr>
         <p:txBody>
-          <a:bodyPr vert="horz" lIns="91409" tIns="45706" rIns="91409" bIns="45706" rtlCol="0" anchor="b"/>
+          <a:bodyPr vert="horz" lIns="87305" tIns="43654" rIns="87305" bIns="43654" rtlCol="0" anchor="b"/>
           <a:lstStyle>
             <a:lvl1pPr algn="l">
-              <a:defRPr sz="1200"/>
+              <a:defRPr sz="1100"/>
             </a:lvl1pPr>
           </a:lstStyle>
           <a:p>
@@ -339,18 +339,18 @@
         </p:nvSpPr>
         <p:spPr>
           <a:xfrm>
-            <a:off x="4023628" y="9721851"/>
-            <a:ext cx="3078851" cy="512763"/>
+            <a:off x="3902245" y="9186523"/>
+            <a:ext cx="2985969" cy="484528"/>
           </a:xfrm>
           <a:prstGeom prst="rect">
             <a:avLst/>
           </a:prstGeom>
         </p:spPr>
         <p:txBody>
-          <a:bodyPr vert="horz" lIns="91409" tIns="45706" rIns="91409" bIns="45706" rtlCol="0" anchor="b"/>
+          <a:bodyPr vert="horz" lIns="87305" tIns="43654" rIns="87305" bIns="43654" rtlCol="0" anchor="b"/>
           <a:lstStyle>
             <a:lvl1pPr algn="r">
-              <a:defRPr sz="1200"/>
+              <a:defRPr sz="1100"/>
             </a:lvl1pPr>
           </a:lstStyle>
           <a:p>
@@ -680,7 +680,7 @@
           <a:p>
             <a:fld id="{52231B9D-E9F6-4612-9B82-E89961B389AC}" type="datetimeFigureOut">
               <a:rPr lang="pt-BR" smtClean="0"/>
-              <a:t>07/02/2023</a:t>
+              <a:t>15/02/2023</a:t>
             </a:fld>
             <a:endParaRPr lang="pt-BR"/>
           </a:p>
@@ -850,7 +850,7 @@
           <a:p>
             <a:fld id="{52231B9D-E9F6-4612-9B82-E89961B389AC}" type="datetimeFigureOut">
               <a:rPr lang="pt-BR" smtClean="0"/>
-              <a:t>07/02/2023</a:t>
+              <a:t>15/02/2023</a:t>
             </a:fld>
             <a:endParaRPr lang="pt-BR"/>
           </a:p>
@@ -1030,7 +1030,7 @@
           <a:p>
             <a:fld id="{52231B9D-E9F6-4612-9B82-E89961B389AC}" type="datetimeFigureOut">
               <a:rPr lang="pt-BR" smtClean="0"/>
-              <a:t>07/02/2023</a:t>
+              <a:t>15/02/2023</a:t>
             </a:fld>
             <a:endParaRPr lang="pt-BR"/>
           </a:p>
@@ -1200,7 +1200,7 @@
           <a:p>
             <a:fld id="{52231B9D-E9F6-4612-9B82-E89961B389AC}" type="datetimeFigureOut">
               <a:rPr lang="pt-BR" smtClean="0"/>
-              <a:t>07/02/2023</a:t>
+              <a:t>15/02/2023</a:t>
             </a:fld>
             <a:endParaRPr lang="pt-BR"/>
           </a:p>
@@ -1446,7 +1446,7 @@
           <a:p>
             <a:fld id="{52231B9D-E9F6-4612-9B82-E89961B389AC}" type="datetimeFigureOut">
               <a:rPr lang="pt-BR" smtClean="0"/>
-              <a:t>07/02/2023</a:t>
+              <a:t>15/02/2023</a:t>
             </a:fld>
             <a:endParaRPr lang="pt-BR"/>
           </a:p>
@@ -1678,7 +1678,7 @@
           <a:p>
             <a:fld id="{52231B9D-E9F6-4612-9B82-E89961B389AC}" type="datetimeFigureOut">
               <a:rPr lang="pt-BR" smtClean="0"/>
-              <a:t>07/02/2023</a:t>
+              <a:t>15/02/2023</a:t>
             </a:fld>
             <a:endParaRPr lang="pt-BR"/>
           </a:p>
@@ -2045,7 +2045,7 @@
           <a:p>
             <a:fld id="{52231B9D-E9F6-4612-9B82-E89961B389AC}" type="datetimeFigureOut">
               <a:rPr lang="pt-BR" smtClean="0"/>
-              <a:t>07/02/2023</a:t>
+              <a:t>15/02/2023</a:t>
             </a:fld>
             <a:endParaRPr lang="pt-BR"/>
           </a:p>
@@ -2163,7 +2163,7 @@
           <a:p>
             <a:fld id="{52231B9D-E9F6-4612-9B82-E89961B389AC}" type="datetimeFigureOut">
               <a:rPr lang="pt-BR" smtClean="0"/>
-              <a:t>07/02/2023</a:t>
+              <a:t>15/02/2023</a:t>
             </a:fld>
             <a:endParaRPr lang="pt-BR"/>
           </a:p>
@@ -2258,7 +2258,7 @@
           <a:p>
             <a:fld id="{52231B9D-E9F6-4612-9B82-E89961B389AC}" type="datetimeFigureOut">
               <a:rPr lang="pt-BR" smtClean="0"/>
-              <a:t>07/02/2023</a:t>
+              <a:t>15/02/2023</a:t>
             </a:fld>
             <a:endParaRPr lang="pt-BR"/>
           </a:p>
@@ -2535,7 +2535,7 @@
           <a:p>
             <a:fld id="{52231B9D-E9F6-4612-9B82-E89961B389AC}" type="datetimeFigureOut">
               <a:rPr lang="pt-BR" smtClean="0"/>
-              <a:t>07/02/2023</a:t>
+              <a:t>15/02/2023</a:t>
             </a:fld>
             <a:endParaRPr lang="pt-BR"/>
           </a:p>
@@ -2788,7 +2788,7 @@
           <a:p>
             <a:fld id="{52231B9D-E9F6-4612-9B82-E89961B389AC}" type="datetimeFigureOut">
               <a:rPr lang="pt-BR" smtClean="0"/>
-              <a:t>07/02/2023</a:t>
+              <a:t>15/02/2023</a:t>
             </a:fld>
             <a:endParaRPr lang="pt-BR"/>
           </a:p>
@@ -3001,7 +3001,7 @@
           <a:p>
             <a:fld id="{52231B9D-E9F6-4612-9B82-E89961B389AC}" type="datetimeFigureOut">
               <a:rPr lang="pt-BR" smtClean="0"/>
-              <a:t>07/02/2023</a:t>
+              <a:t>15/02/2023</a:t>
             </a:fld>
             <a:endParaRPr lang="pt-BR"/>
           </a:p>
@@ -3658,24 +3658,14 @@
           <a:lstStyle/>
           <a:p>
             <a:r>
-              <a:rPr lang="pt-BR" sz="1600" dirty="0" smtClean="0">
+              <a:rPr lang="pt-BR" sz="1600" smtClean="0">
                 <a:solidFill>
                   <a:schemeClr val="bg2">
                     <a:lumMod val="90000"/>
                   </a:schemeClr>
                 </a:solidFill>
               </a:rPr>
-              <a:t>05</a:t>
-            </a:r>
-            <a:r>
-              <a:rPr lang="pt-BR" sz="1600" dirty="0" smtClean="0">
-                <a:solidFill>
-                  <a:schemeClr val="bg2">
-                    <a:lumMod val="90000"/>
-                  </a:schemeClr>
-                </a:solidFill>
-              </a:rPr>
-              <a:t>/02/2023</a:t>
+              <a:t>19/02/2023</a:t>
             </a:r>
             <a:endParaRPr lang="pt-BR" sz="1600" dirty="0">
               <a:solidFill>

--- a/tempimento.pptx
+++ b/tempimento.pptx
@@ -11,7 +11,7 @@
     <p:sldId id="256" r:id="rId2"/>
   </p:sldIdLst>
   <p:sldSz cx="12192000" cy="6858000"/>
-  <p:notesSz cx="6889750" cy="9671050"/>
+  <p:notesSz cx="7104063" cy="10234613"/>
   <p:defaultTextStyle>
     <a:defPPr>
       <a:defRPr lang="pt-BR"/>
@@ -149,18 +149,18 @@
         </p:nvSpPr>
         <p:spPr>
           <a:xfrm>
-            <a:off x="5" y="1"/>
-            <a:ext cx="2985969" cy="484528"/>
+            <a:off x="6" y="1"/>
+            <a:ext cx="3078851" cy="512763"/>
           </a:xfrm>
           <a:prstGeom prst="rect">
             <a:avLst/>
           </a:prstGeom>
         </p:spPr>
         <p:txBody>
-          <a:bodyPr vert="horz" lIns="87305" tIns="43654" rIns="87305" bIns="43654" rtlCol="0"/>
+          <a:bodyPr vert="horz" lIns="91400" tIns="45701" rIns="91400" bIns="45701" rtlCol="0"/>
           <a:lstStyle>
             <a:lvl1pPr algn="l">
-              <a:defRPr sz="1100"/>
+              <a:defRPr sz="1200"/>
             </a:lvl1pPr>
           </a:lstStyle>
           <a:p>
@@ -180,24 +180,24 @@
         </p:nvSpPr>
         <p:spPr>
           <a:xfrm>
-            <a:off x="3902245" y="1"/>
-            <a:ext cx="2985969" cy="484528"/>
+            <a:off x="4023629" y="1"/>
+            <a:ext cx="3078851" cy="512763"/>
           </a:xfrm>
           <a:prstGeom prst="rect">
             <a:avLst/>
           </a:prstGeom>
         </p:spPr>
         <p:txBody>
-          <a:bodyPr vert="horz" lIns="87305" tIns="43654" rIns="87305" bIns="43654" rtlCol="0"/>
+          <a:bodyPr vert="horz" lIns="91400" tIns="45701" rIns="91400" bIns="45701" rtlCol="0"/>
           <a:lstStyle>
             <a:lvl1pPr algn="r">
-              <a:defRPr sz="1100"/>
+              <a:defRPr sz="1200"/>
             </a:lvl1pPr>
           </a:lstStyle>
           <a:p>
             <a:fld id="{A584E3A2-E8EA-4705-A613-CFE9F6F5D3B4}" type="datetimeFigureOut">
               <a:rPr lang="pt-BR" smtClean="0"/>
-              <a:t>15/02/2023</a:t>
+              <a:t>27/02/2023</a:t>
             </a:fld>
             <a:endParaRPr lang="pt-BR"/>
           </a:p>
@@ -215,8 +215,8 @@
         </p:nvSpPr>
         <p:spPr>
           <a:xfrm>
-            <a:off x="542925" y="1209675"/>
-            <a:ext cx="5803900" cy="3263900"/>
+            <a:off x="482600" y="1279525"/>
+            <a:ext cx="6138863" cy="3454400"/>
           </a:xfrm>
           <a:prstGeom prst="rect">
             <a:avLst/>
@@ -229,7 +229,7 @@
           </a:ln>
         </p:spPr>
         <p:txBody>
-          <a:bodyPr vert="horz" lIns="87305" tIns="43654" rIns="87305" bIns="43654" rtlCol="0" anchor="ctr"/>
+          <a:bodyPr vert="horz" lIns="91400" tIns="45701" rIns="91400" bIns="45701" rtlCol="0" anchor="ctr"/>
           <a:lstStyle/>
           <a:p>
             <a:endParaRPr lang="pt-BR"/>
@@ -248,15 +248,15 @@
         </p:nvSpPr>
         <p:spPr>
           <a:xfrm>
-            <a:off x="688362" y="4654767"/>
-            <a:ext cx="5513032" cy="3807216"/>
+            <a:off x="709774" y="4926015"/>
+            <a:ext cx="5684521" cy="4029075"/>
           </a:xfrm>
           <a:prstGeom prst="rect">
             <a:avLst/>
           </a:prstGeom>
         </p:spPr>
         <p:txBody>
-          <a:bodyPr vert="horz" lIns="87305" tIns="43654" rIns="87305" bIns="43654" rtlCol="0"/>
+          <a:bodyPr vert="horz" lIns="91400" tIns="45701" rIns="91400" bIns="45701" rtlCol="0"/>
           <a:lstStyle/>
           <a:p>
             <a:pPr lvl="0"/>
@@ -308,18 +308,18 @@
         </p:nvSpPr>
         <p:spPr>
           <a:xfrm>
-            <a:off x="5" y="9186523"/>
-            <a:ext cx="2985969" cy="484528"/>
+            <a:off x="6" y="9721851"/>
+            <a:ext cx="3078851" cy="512763"/>
           </a:xfrm>
           <a:prstGeom prst="rect">
             <a:avLst/>
           </a:prstGeom>
         </p:spPr>
         <p:txBody>
-          <a:bodyPr vert="horz" lIns="87305" tIns="43654" rIns="87305" bIns="43654" rtlCol="0" anchor="b"/>
+          <a:bodyPr vert="horz" lIns="91400" tIns="45701" rIns="91400" bIns="45701" rtlCol="0" anchor="b"/>
           <a:lstStyle>
             <a:lvl1pPr algn="l">
-              <a:defRPr sz="1100"/>
+              <a:defRPr sz="1200"/>
             </a:lvl1pPr>
           </a:lstStyle>
           <a:p>
@@ -339,18 +339,18 @@
         </p:nvSpPr>
         <p:spPr>
           <a:xfrm>
-            <a:off x="3902245" y="9186523"/>
-            <a:ext cx="2985969" cy="484528"/>
+            <a:off x="4023629" y="9721851"/>
+            <a:ext cx="3078851" cy="512763"/>
           </a:xfrm>
           <a:prstGeom prst="rect">
             <a:avLst/>
           </a:prstGeom>
         </p:spPr>
         <p:txBody>
-          <a:bodyPr vert="horz" lIns="87305" tIns="43654" rIns="87305" bIns="43654" rtlCol="0" anchor="b"/>
+          <a:bodyPr vert="horz" lIns="91400" tIns="45701" rIns="91400" bIns="45701" rtlCol="0" anchor="b"/>
           <a:lstStyle>
             <a:lvl1pPr algn="r">
-              <a:defRPr sz="1100"/>
+              <a:defRPr sz="1200"/>
             </a:lvl1pPr>
           </a:lstStyle>
           <a:p>
@@ -680,7 +680,7 @@
           <a:p>
             <a:fld id="{52231B9D-E9F6-4612-9B82-E89961B389AC}" type="datetimeFigureOut">
               <a:rPr lang="pt-BR" smtClean="0"/>
-              <a:t>15/02/2023</a:t>
+              <a:t>27/02/2023</a:t>
             </a:fld>
             <a:endParaRPr lang="pt-BR"/>
           </a:p>
@@ -850,7 +850,7 @@
           <a:p>
             <a:fld id="{52231B9D-E9F6-4612-9B82-E89961B389AC}" type="datetimeFigureOut">
               <a:rPr lang="pt-BR" smtClean="0"/>
-              <a:t>15/02/2023</a:t>
+              <a:t>27/02/2023</a:t>
             </a:fld>
             <a:endParaRPr lang="pt-BR"/>
           </a:p>
@@ -1030,7 +1030,7 @@
           <a:p>
             <a:fld id="{52231B9D-E9F6-4612-9B82-E89961B389AC}" type="datetimeFigureOut">
               <a:rPr lang="pt-BR" smtClean="0"/>
-              <a:t>15/02/2023</a:t>
+              <a:t>27/02/2023</a:t>
             </a:fld>
             <a:endParaRPr lang="pt-BR"/>
           </a:p>
@@ -1200,7 +1200,7 @@
           <a:p>
             <a:fld id="{52231B9D-E9F6-4612-9B82-E89961B389AC}" type="datetimeFigureOut">
               <a:rPr lang="pt-BR" smtClean="0"/>
-              <a:t>15/02/2023</a:t>
+              <a:t>27/02/2023</a:t>
             </a:fld>
             <a:endParaRPr lang="pt-BR"/>
           </a:p>
@@ -1446,7 +1446,7 @@
           <a:p>
             <a:fld id="{52231B9D-E9F6-4612-9B82-E89961B389AC}" type="datetimeFigureOut">
               <a:rPr lang="pt-BR" smtClean="0"/>
-              <a:t>15/02/2023</a:t>
+              <a:t>27/02/2023</a:t>
             </a:fld>
             <a:endParaRPr lang="pt-BR"/>
           </a:p>
@@ -1678,7 +1678,7 @@
           <a:p>
             <a:fld id="{52231B9D-E9F6-4612-9B82-E89961B389AC}" type="datetimeFigureOut">
               <a:rPr lang="pt-BR" smtClean="0"/>
-              <a:t>15/02/2023</a:t>
+              <a:t>27/02/2023</a:t>
             </a:fld>
             <a:endParaRPr lang="pt-BR"/>
           </a:p>
@@ -2045,7 +2045,7 @@
           <a:p>
             <a:fld id="{52231B9D-E9F6-4612-9B82-E89961B389AC}" type="datetimeFigureOut">
               <a:rPr lang="pt-BR" smtClean="0"/>
-              <a:t>15/02/2023</a:t>
+              <a:t>27/02/2023</a:t>
             </a:fld>
             <a:endParaRPr lang="pt-BR"/>
           </a:p>
@@ -2163,7 +2163,7 @@
           <a:p>
             <a:fld id="{52231B9D-E9F6-4612-9B82-E89961B389AC}" type="datetimeFigureOut">
               <a:rPr lang="pt-BR" smtClean="0"/>
-              <a:t>15/02/2023</a:t>
+              <a:t>27/02/2023</a:t>
             </a:fld>
             <a:endParaRPr lang="pt-BR"/>
           </a:p>
@@ -2258,7 +2258,7 @@
           <a:p>
             <a:fld id="{52231B9D-E9F6-4612-9B82-E89961B389AC}" type="datetimeFigureOut">
               <a:rPr lang="pt-BR" smtClean="0"/>
-              <a:t>15/02/2023</a:t>
+              <a:t>27/02/2023</a:t>
             </a:fld>
             <a:endParaRPr lang="pt-BR"/>
           </a:p>
@@ -2535,7 +2535,7 @@
           <a:p>
             <a:fld id="{52231B9D-E9F6-4612-9B82-E89961B389AC}" type="datetimeFigureOut">
               <a:rPr lang="pt-BR" smtClean="0"/>
-              <a:t>15/02/2023</a:t>
+              <a:t>27/02/2023</a:t>
             </a:fld>
             <a:endParaRPr lang="pt-BR"/>
           </a:p>
@@ -2788,7 +2788,7 @@
           <a:p>
             <a:fld id="{52231B9D-E9F6-4612-9B82-E89961B389AC}" type="datetimeFigureOut">
               <a:rPr lang="pt-BR" smtClean="0"/>
-              <a:t>15/02/2023</a:t>
+              <a:t>27/02/2023</a:t>
             </a:fld>
             <a:endParaRPr lang="pt-BR"/>
           </a:p>
@@ -3001,7 +3001,7 @@
           <a:p>
             <a:fld id="{52231B9D-E9F6-4612-9B82-E89961B389AC}" type="datetimeFigureOut">
               <a:rPr lang="pt-BR" smtClean="0"/>
-              <a:t>15/02/2023</a:t>
+              <a:t>27/02/2023</a:t>
             </a:fld>
             <a:endParaRPr lang="pt-BR"/>
           </a:p>
@@ -3658,14 +3658,24 @@
           <a:lstStyle/>
           <a:p>
             <a:r>
-              <a:rPr lang="pt-BR" sz="1600" smtClean="0">
+              <a:rPr lang="pt-BR" sz="1600" dirty="0" smtClean="0">
                 <a:solidFill>
                   <a:schemeClr val="bg2">
                     <a:lumMod val="90000"/>
                   </a:schemeClr>
                 </a:solidFill>
               </a:rPr>
-              <a:t>19/02/2023</a:t>
+              <a:t>26</a:t>
+            </a:r>
+            <a:r>
+              <a:rPr lang="pt-BR" sz="1600" dirty="0" smtClean="0">
+                <a:solidFill>
+                  <a:schemeClr val="bg2">
+                    <a:lumMod val="90000"/>
+                  </a:schemeClr>
+                </a:solidFill>
+              </a:rPr>
+              <a:t>/02/2023</a:t>
             </a:r>
             <a:endParaRPr lang="pt-BR" sz="1600" dirty="0">
               <a:solidFill>

--- a/tempimento.pptx
+++ b/tempimento.pptx
@@ -197,7 +197,7 @@
           <a:p>
             <a:fld id="{A584E3A2-E8EA-4705-A613-CFE9F6F5D3B4}" type="datetimeFigureOut">
               <a:rPr lang="pt-BR" smtClean="0"/>
-              <a:t>27/02/2023</a:t>
+              <a:t>06/03/2023</a:t>
             </a:fld>
             <a:endParaRPr lang="pt-BR"/>
           </a:p>
@@ -680,7 +680,7 @@
           <a:p>
             <a:fld id="{52231B9D-E9F6-4612-9B82-E89961B389AC}" type="datetimeFigureOut">
               <a:rPr lang="pt-BR" smtClean="0"/>
-              <a:t>27/02/2023</a:t>
+              <a:t>06/03/2023</a:t>
             </a:fld>
             <a:endParaRPr lang="pt-BR"/>
           </a:p>
@@ -850,7 +850,7 @@
           <a:p>
             <a:fld id="{52231B9D-E9F6-4612-9B82-E89961B389AC}" type="datetimeFigureOut">
               <a:rPr lang="pt-BR" smtClean="0"/>
-              <a:t>27/02/2023</a:t>
+              <a:t>06/03/2023</a:t>
             </a:fld>
             <a:endParaRPr lang="pt-BR"/>
           </a:p>
@@ -1030,7 +1030,7 @@
           <a:p>
             <a:fld id="{52231B9D-E9F6-4612-9B82-E89961B389AC}" type="datetimeFigureOut">
               <a:rPr lang="pt-BR" smtClean="0"/>
-              <a:t>27/02/2023</a:t>
+              <a:t>06/03/2023</a:t>
             </a:fld>
             <a:endParaRPr lang="pt-BR"/>
           </a:p>
@@ -1200,7 +1200,7 @@
           <a:p>
             <a:fld id="{52231B9D-E9F6-4612-9B82-E89961B389AC}" type="datetimeFigureOut">
               <a:rPr lang="pt-BR" smtClean="0"/>
-              <a:t>27/02/2023</a:t>
+              <a:t>06/03/2023</a:t>
             </a:fld>
             <a:endParaRPr lang="pt-BR"/>
           </a:p>
@@ -1446,7 +1446,7 @@
           <a:p>
             <a:fld id="{52231B9D-E9F6-4612-9B82-E89961B389AC}" type="datetimeFigureOut">
               <a:rPr lang="pt-BR" smtClean="0"/>
-              <a:t>27/02/2023</a:t>
+              <a:t>06/03/2023</a:t>
             </a:fld>
             <a:endParaRPr lang="pt-BR"/>
           </a:p>
@@ -1678,7 +1678,7 @@
           <a:p>
             <a:fld id="{52231B9D-E9F6-4612-9B82-E89961B389AC}" type="datetimeFigureOut">
               <a:rPr lang="pt-BR" smtClean="0"/>
-              <a:t>27/02/2023</a:t>
+              <a:t>06/03/2023</a:t>
             </a:fld>
             <a:endParaRPr lang="pt-BR"/>
           </a:p>
@@ -2045,7 +2045,7 @@
           <a:p>
             <a:fld id="{52231B9D-E9F6-4612-9B82-E89961B389AC}" type="datetimeFigureOut">
               <a:rPr lang="pt-BR" smtClean="0"/>
-              <a:t>27/02/2023</a:t>
+              <a:t>06/03/2023</a:t>
             </a:fld>
             <a:endParaRPr lang="pt-BR"/>
           </a:p>
@@ -2163,7 +2163,7 @@
           <a:p>
             <a:fld id="{52231B9D-E9F6-4612-9B82-E89961B389AC}" type="datetimeFigureOut">
               <a:rPr lang="pt-BR" smtClean="0"/>
-              <a:t>27/02/2023</a:t>
+              <a:t>06/03/2023</a:t>
             </a:fld>
             <a:endParaRPr lang="pt-BR"/>
           </a:p>
@@ -2258,7 +2258,7 @@
           <a:p>
             <a:fld id="{52231B9D-E9F6-4612-9B82-E89961B389AC}" type="datetimeFigureOut">
               <a:rPr lang="pt-BR" smtClean="0"/>
-              <a:t>27/02/2023</a:t>
+              <a:t>06/03/2023</a:t>
             </a:fld>
             <a:endParaRPr lang="pt-BR"/>
           </a:p>
@@ -2535,7 +2535,7 @@
           <a:p>
             <a:fld id="{52231B9D-E9F6-4612-9B82-E89961B389AC}" type="datetimeFigureOut">
               <a:rPr lang="pt-BR" smtClean="0"/>
-              <a:t>27/02/2023</a:t>
+              <a:t>06/03/2023</a:t>
             </a:fld>
             <a:endParaRPr lang="pt-BR"/>
           </a:p>
@@ -2788,7 +2788,7 @@
           <a:p>
             <a:fld id="{52231B9D-E9F6-4612-9B82-E89961B389AC}" type="datetimeFigureOut">
               <a:rPr lang="pt-BR" smtClean="0"/>
-              <a:t>27/02/2023</a:t>
+              <a:t>06/03/2023</a:t>
             </a:fld>
             <a:endParaRPr lang="pt-BR"/>
           </a:p>
@@ -3001,7 +3001,7 @@
           <a:p>
             <a:fld id="{52231B9D-E9F6-4612-9B82-E89961B389AC}" type="datetimeFigureOut">
               <a:rPr lang="pt-BR" smtClean="0"/>
-              <a:t>27/02/2023</a:t>
+              <a:t>06/03/2023</a:t>
             </a:fld>
             <a:endParaRPr lang="pt-BR"/>
           </a:p>
@@ -3665,7 +3665,7 @@
                   </a:schemeClr>
                 </a:solidFill>
               </a:rPr>
-              <a:t>26</a:t>
+              <a:t>0</a:t>
             </a:r>
             <a:r>
               <a:rPr lang="pt-BR" sz="1600" dirty="0" smtClean="0">
@@ -3675,7 +3675,7 @@
                   </a:schemeClr>
                 </a:solidFill>
               </a:rPr>
-              <a:t>/02/2023</a:t>
+              <a:t>6/03/2023</a:t>
             </a:r>
             <a:endParaRPr lang="pt-BR" sz="1600" dirty="0">
               <a:solidFill>

--- a/tempimento.pptx
+++ b/tempimento.pptx
@@ -197,7 +197,7 @@
           <a:p>
             <a:fld id="{A584E3A2-E8EA-4705-A613-CFE9F6F5D3B4}" type="datetimeFigureOut">
               <a:rPr lang="pt-BR" smtClean="0"/>
-              <a:t>06/03/2023</a:t>
+              <a:t>13/03/2023</a:t>
             </a:fld>
             <a:endParaRPr lang="pt-BR"/>
           </a:p>
@@ -680,7 +680,7 @@
           <a:p>
             <a:fld id="{52231B9D-E9F6-4612-9B82-E89961B389AC}" type="datetimeFigureOut">
               <a:rPr lang="pt-BR" smtClean="0"/>
-              <a:t>06/03/2023</a:t>
+              <a:t>13/03/2023</a:t>
             </a:fld>
             <a:endParaRPr lang="pt-BR"/>
           </a:p>
@@ -850,7 +850,7 @@
           <a:p>
             <a:fld id="{52231B9D-E9F6-4612-9B82-E89961B389AC}" type="datetimeFigureOut">
               <a:rPr lang="pt-BR" smtClean="0"/>
-              <a:t>06/03/2023</a:t>
+              <a:t>13/03/2023</a:t>
             </a:fld>
             <a:endParaRPr lang="pt-BR"/>
           </a:p>
@@ -1030,7 +1030,7 @@
           <a:p>
             <a:fld id="{52231B9D-E9F6-4612-9B82-E89961B389AC}" type="datetimeFigureOut">
               <a:rPr lang="pt-BR" smtClean="0"/>
-              <a:t>06/03/2023</a:t>
+              <a:t>13/03/2023</a:t>
             </a:fld>
             <a:endParaRPr lang="pt-BR"/>
           </a:p>
@@ -1200,7 +1200,7 @@
           <a:p>
             <a:fld id="{52231B9D-E9F6-4612-9B82-E89961B389AC}" type="datetimeFigureOut">
               <a:rPr lang="pt-BR" smtClean="0"/>
-              <a:t>06/03/2023</a:t>
+              <a:t>13/03/2023</a:t>
             </a:fld>
             <a:endParaRPr lang="pt-BR"/>
           </a:p>
@@ -1446,7 +1446,7 @@
           <a:p>
             <a:fld id="{52231B9D-E9F6-4612-9B82-E89961B389AC}" type="datetimeFigureOut">
               <a:rPr lang="pt-BR" smtClean="0"/>
-              <a:t>06/03/2023</a:t>
+              <a:t>13/03/2023</a:t>
             </a:fld>
             <a:endParaRPr lang="pt-BR"/>
           </a:p>
@@ -1678,7 +1678,7 @@
           <a:p>
             <a:fld id="{52231B9D-E9F6-4612-9B82-E89961B389AC}" type="datetimeFigureOut">
               <a:rPr lang="pt-BR" smtClean="0"/>
-              <a:t>06/03/2023</a:t>
+              <a:t>13/03/2023</a:t>
             </a:fld>
             <a:endParaRPr lang="pt-BR"/>
           </a:p>
@@ -2045,7 +2045,7 @@
           <a:p>
             <a:fld id="{52231B9D-E9F6-4612-9B82-E89961B389AC}" type="datetimeFigureOut">
               <a:rPr lang="pt-BR" smtClean="0"/>
-              <a:t>06/03/2023</a:t>
+              <a:t>13/03/2023</a:t>
             </a:fld>
             <a:endParaRPr lang="pt-BR"/>
           </a:p>
@@ -2163,7 +2163,7 @@
           <a:p>
             <a:fld id="{52231B9D-E9F6-4612-9B82-E89961B389AC}" type="datetimeFigureOut">
               <a:rPr lang="pt-BR" smtClean="0"/>
-              <a:t>06/03/2023</a:t>
+              <a:t>13/03/2023</a:t>
             </a:fld>
             <a:endParaRPr lang="pt-BR"/>
           </a:p>
@@ -2258,7 +2258,7 @@
           <a:p>
             <a:fld id="{52231B9D-E9F6-4612-9B82-E89961B389AC}" type="datetimeFigureOut">
               <a:rPr lang="pt-BR" smtClean="0"/>
-              <a:t>06/03/2023</a:t>
+              <a:t>13/03/2023</a:t>
             </a:fld>
             <a:endParaRPr lang="pt-BR"/>
           </a:p>
@@ -2535,7 +2535,7 @@
           <a:p>
             <a:fld id="{52231B9D-E9F6-4612-9B82-E89961B389AC}" type="datetimeFigureOut">
               <a:rPr lang="pt-BR" smtClean="0"/>
-              <a:t>06/03/2023</a:t>
+              <a:t>13/03/2023</a:t>
             </a:fld>
             <a:endParaRPr lang="pt-BR"/>
           </a:p>
@@ -2788,7 +2788,7 @@
           <a:p>
             <a:fld id="{52231B9D-E9F6-4612-9B82-E89961B389AC}" type="datetimeFigureOut">
               <a:rPr lang="pt-BR" smtClean="0"/>
-              <a:t>06/03/2023</a:t>
+              <a:t>13/03/2023</a:t>
             </a:fld>
             <a:endParaRPr lang="pt-BR"/>
           </a:p>
@@ -3001,7 +3001,7 @@
           <a:p>
             <a:fld id="{52231B9D-E9F6-4612-9B82-E89961B389AC}" type="datetimeFigureOut">
               <a:rPr lang="pt-BR" smtClean="0"/>
-              <a:t>06/03/2023</a:t>
+              <a:t>13/03/2023</a:t>
             </a:fld>
             <a:endParaRPr lang="pt-BR"/>
           </a:p>
@@ -3665,7 +3665,7 @@
                   </a:schemeClr>
                 </a:solidFill>
               </a:rPr>
-              <a:t>0</a:t>
+              <a:t>12</a:t>
             </a:r>
             <a:r>
               <a:rPr lang="pt-BR" sz="1600" dirty="0" smtClean="0">
@@ -3675,7 +3675,7 @@
                   </a:schemeClr>
                 </a:solidFill>
               </a:rPr>
-              <a:t>6/03/2023</a:t>
+              <a:t>/03/2023</a:t>
             </a:r>
             <a:endParaRPr lang="pt-BR" sz="1600" dirty="0">
               <a:solidFill>

--- a/tempimento.pptx
+++ b/tempimento.pptx
@@ -11,7 +11,7 @@
     <p:sldId id="256" r:id="rId2"/>
   </p:sldIdLst>
   <p:sldSz cx="12192000" cy="6858000"/>
-  <p:notesSz cx="7104063" cy="10234613"/>
+  <p:notesSz cx="6889750" cy="9671050"/>
   <p:defaultTextStyle>
     <a:defPPr>
       <a:defRPr lang="pt-BR"/>
@@ -150,17 +150,17 @@
         <p:spPr>
           <a:xfrm>
             <a:off x="6" y="1"/>
-            <a:ext cx="3078851" cy="512763"/>
+            <a:ext cx="2985969" cy="484528"/>
           </a:xfrm>
           <a:prstGeom prst="rect">
             <a:avLst/>
           </a:prstGeom>
         </p:spPr>
         <p:txBody>
-          <a:bodyPr vert="horz" lIns="91400" tIns="45701" rIns="91400" bIns="45701" rtlCol="0"/>
+          <a:bodyPr vert="horz" lIns="87296" tIns="43649" rIns="87296" bIns="43649" rtlCol="0"/>
           <a:lstStyle>
             <a:lvl1pPr algn="l">
-              <a:defRPr sz="1200"/>
+              <a:defRPr sz="1100"/>
             </a:lvl1pPr>
           </a:lstStyle>
           <a:p>
@@ -180,24 +180,24 @@
         </p:nvSpPr>
         <p:spPr>
           <a:xfrm>
-            <a:off x="4023629" y="1"/>
-            <a:ext cx="3078851" cy="512763"/>
+            <a:off x="3902246" y="1"/>
+            <a:ext cx="2985969" cy="484528"/>
           </a:xfrm>
           <a:prstGeom prst="rect">
             <a:avLst/>
           </a:prstGeom>
         </p:spPr>
         <p:txBody>
-          <a:bodyPr vert="horz" lIns="91400" tIns="45701" rIns="91400" bIns="45701" rtlCol="0"/>
+          <a:bodyPr vert="horz" lIns="87296" tIns="43649" rIns="87296" bIns="43649" rtlCol="0"/>
           <a:lstStyle>
             <a:lvl1pPr algn="r">
-              <a:defRPr sz="1200"/>
+              <a:defRPr sz="1100"/>
             </a:lvl1pPr>
           </a:lstStyle>
           <a:p>
             <a:fld id="{A584E3A2-E8EA-4705-A613-CFE9F6F5D3B4}" type="datetimeFigureOut">
               <a:rPr lang="pt-BR" smtClean="0"/>
-              <a:t>13/03/2023</a:t>
+              <a:t>21/03/2023</a:t>
             </a:fld>
             <a:endParaRPr lang="pt-BR"/>
           </a:p>
@@ -215,8 +215,8 @@
         </p:nvSpPr>
         <p:spPr>
           <a:xfrm>
-            <a:off x="482600" y="1279525"/>
-            <a:ext cx="6138863" cy="3454400"/>
+            <a:off x="542925" y="1209675"/>
+            <a:ext cx="5803900" cy="3263900"/>
           </a:xfrm>
           <a:prstGeom prst="rect">
             <a:avLst/>
@@ -229,7 +229,7 @@
           </a:ln>
         </p:spPr>
         <p:txBody>
-          <a:bodyPr vert="horz" lIns="91400" tIns="45701" rIns="91400" bIns="45701" rtlCol="0" anchor="ctr"/>
+          <a:bodyPr vert="horz" lIns="87296" tIns="43649" rIns="87296" bIns="43649" rtlCol="0" anchor="ctr"/>
           <a:lstStyle/>
           <a:p>
             <a:endParaRPr lang="pt-BR"/>
@@ -248,15 +248,15 @@
         </p:nvSpPr>
         <p:spPr>
           <a:xfrm>
-            <a:off x="709774" y="4926015"/>
-            <a:ext cx="5684521" cy="4029075"/>
+            <a:off x="688362" y="4654767"/>
+            <a:ext cx="5513032" cy="3807216"/>
           </a:xfrm>
           <a:prstGeom prst="rect">
             <a:avLst/>
           </a:prstGeom>
         </p:spPr>
         <p:txBody>
-          <a:bodyPr vert="horz" lIns="91400" tIns="45701" rIns="91400" bIns="45701" rtlCol="0"/>
+          <a:bodyPr vert="horz" lIns="87296" tIns="43649" rIns="87296" bIns="43649" rtlCol="0"/>
           <a:lstStyle/>
           <a:p>
             <a:pPr lvl="0"/>
@@ -308,18 +308,18 @@
         </p:nvSpPr>
         <p:spPr>
           <a:xfrm>
-            <a:off x="6" y="9721851"/>
-            <a:ext cx="3078851" cy="512763"/>
+            <a:off x="6" y="9186523"/>
+            <a:ext cx="2985969" cy="484528"/>
           </a:xfrm>
           <a:prstGeom prst="rect">
             <a:avLst/>
           </a:prstGeom>
         </p:spPr>
         <p:txBody>
-          <a:bodyPr vert="horz" lIns="91400" tIns="45701" rIns="91400" bIns="45701" rtlCol="0" anchor="b"/>
+          <a:bodyPr vert="horz" lIns="87296" tIns="43649" rIns="87296" bIns="43649" rtlCol="0" anchor="b"/>
           <a:lstStyle>
             <a:lvl1pPr algn="l">
-              <a:defRPr sz="1200"/>
+              <a:defRPr sz="1100"/>
             </a:lvl1pPr>
           </a:lstStyle>
           <a:p>
@@ -339,18 +339,18 @@
         </p:nvSpPr>
         <p:spPr>
           <a:xfrm>
-            <a:off x="4023629" y="9721851"/>
-            <a:ext cx="3078851" cy="512763"/>
+            <a:off x="3902246" y="9186523"/>
+            <a:ext cx="2985969" cy="484528"/>
           </a:xfrm>
           <a:prstGeom prst="rect">
             <a:avLst/>
           </a:prstGeom>
         </p:spPr>
         <p:txBody>
-          <a:bodyPr vert="horz" lIns="91400" tIns="45701" rIns="91400" bIns="45701" rtlCol="0" anchor="b"/>
+          <a:bodyPr vert="horz" lIns="87296" tIns="43649" rIns="87296" bIns="43649" rtlCol="0" anchor="b"/>
           <a:lstStyle>
             <a:lvl1pPr algn="r">
-              <a:defRPr sz="1200"/>
+              <a:defRPr sz="1100"/>
             </a:lvl1pPr>
           </a:lstStyle>
           <a:p>
@@ -680,7 +680,7 @@
           <a:p>
             <a:fld id="{52231B9D-E9F6-4612-9B82-E89961B389AC}" type="datetimeFigureOut">
               <a:rPr lang="pt-BR" smtClean="0"/>
-              <a:t>13/03/2023</a:t>
+              <a:t>21/03/2023</a:t>
             </a:fld>
             <a:endParaRPr lang="pt-BR"/>
           </a:p>
@@ -850,7 +850,7 @@
           <a:p>
             <a:fld id="{52231B9D-E9F6-4612-9B82-E89961B389AC}" type="datetimeFigureOut">
               <a:rPr lang="pt-BR" smtClean="0"/>
-              <a:t>13/03/2023</a:t>
+              <a:t>21/03/2023</a:t>
             </a:fld>
             <a:endParaRPr lang="pt-BR"/>
           </a:p>
@@ -1030,7 +1030,7 @@
           <a:p>
             <a:fld id="{52231B9D-E9F6-4612-9B82-E89961B389AC}" type="datetimeFigureOut">
               <a:rPr lang="pt-BR" smtClean="0"/>
-              <a:t>13/03/2023</a:t>
+              <a:t>21/03/2023</a:t>
             </a:fld>
             <a:endParaRPr lang="pt-BR"/>
           </a:p>
@@ -1200,7 +1200,7 @@
           <a:p>
             <a:fld id="{52231B9D-E9F6-4612-9B82-E89961B389AC}" type="datetimeFigureOut">
               <a:rPr lang="pt-BR" smtClean="0"/>
-              <a:t>13/03/2023</a:t>
+              <a:t>21/03/2023</a:t>
             </a:fld>
             <a:endParaRPr lang="pt-BR"/>
           </a:p>
@@ -1446,7 +1446,7 @@
           <a:p>
             <a:fld id="{52231B9D-E9F6-4612-9B82-E89961B389AC}" type="datetimeFigureOut">
               <a:rPr lang="pt-BR" smtClean="0"/>
-              <a:t>13/03/2023</a:t>
+              <a:t>21/03/2023</a:t>
             </a:fld>
             <a:endParaRPr lang="pt-BR"/>
           </a:p>
@@ -1678,7 +1678,7 @@
           <a:p>
             <a:fld id="{52231B9D-E9F6-4612-9B82-E89961B389AC}" type="datetimeFigureOut">
               <a:rPr lang="pt-BR" smtClean="0"/>
-              <a:t>13/03/2023</a:t>
+              <a:t>21/03/2023</a:t>
             </a:fld>
             <a:endParaRPr lang="pt-BR"/>
           </a:p>
@@ -2045,7 +2045,7 @@
           <a:p>
             <a:fld id="{52231B9D-E9F6-4612-9B82-E89961B389AC}" type="datetimeFigureOut">
               <a:rPr lang="pt-BR" smtClean="0"/>
-              <a:t>13/03/2023</a:t>
+              <a:t>21/03/2023</a:t>
             </a:fld>
             <a:endParaRPr lang="pt-BR"/>
           </a:p>
@@ -2163,7 +2163,7 @@
           <a:p>
             <a:fld id="{52231B9D-E9F6-4612-9B82-E89961B389AC}" type="datetimeFigureOut">
               <a:rPr lang="pt-BR" smtClean="0"/>
-              <a:t>13/03/2023</a:t>
+              <a:t>21/03/2023</a:t>
             </a:fld>
             <a:endParaRPr lang="pt-BR"/>
           </a:p>
@@ -2258,7 +2258,7 @@
           <a:p>
             <a:fld id="{52231B9D-E9F6-4612-9B82-E89961B389AC}" type="datetimeFigureOut">
               <a:rPr lang="pt-BR" smtClean="0"/>
-              <a:t>13/03/2023</a:t>
+              <a:t>21/03/2023</a:t>
             </a:fld>
             <a:endParaRPr lang="pt-BR"/>
           </a:p>
@@ -2535,7 +2535,7 @@
           <a:p>
             <a:fld id="{52231B9D-E9F6-4612-9B82-E89961B389AC}" type="datetimeFigureOut">
               <a:rPr lang="pt-BR" smtClean="0"/>
-              <a:t>13/03/2023</a:t>
+              <a:t>21/03/2023</a:t>
             </a:fld>
             <a:endParaRPr lang="pt-BR"/>
           </a:p>
@@ -2788,7 +2788,7 @@
           <a:p>
             <a:fld id="{52231B9D-E9F6-4612-9B82-E89961B389AC}" type="datetimeFigureOut">
               <a:rPr lang="pt-BR" smtClean="0"/>
-              <a:t>13/03/2023</a:t>
+              <a:t>21/03/2023</a:t>
             </a:fld>
             <a:endParaRPr lang="pt-BR"/>
           </a:p>
@@ -3001,7 +3001,7 @@
           <a:p>
             <a:fld id="{52231B9D-E9F6-4612-9B82-E89961B389AC}" type="datetimeFigureOut">
               <a:rPr lang="pt-BR" smtClean="0"/>
-              <a:t>13/03/2023</a:t>
+              <a:t>21/03/2023</a:t>
             </a:fld>
             <a:endParaRPr lang="pt-BR"/>
           </a:p>
@@ -3658,17 +3658,17 @@
           <a:lstStyle/>
           <a:p>
             <a:r>
-              <a:rPr lang="pt-BR" sz="1600" dirty="0" smtClean="0">
+              <a:rPr lang="pt-BR" sz="1600" smtClean="0">
                 <a:solidFill>
                   <a:schemeClr val="bg2">
                     <a:lumMod val="90000"/>
                   </a:schemeClr>
                 </a:solidFill>
               </a:rPr>
-              <a:t>12</a:t>
-            </a:r>
-            <a:r>
-              <a:rPr lang="pt-BR" sz="1600" dirty="0" smtClean="0">
+              <a:t>26</a:t>
+            </a:r>
+            <a:r>
+              <a:rPr lang="pt-BR" sz="1600" smtClean="0">
                 <a:solidFill>
                   <a:schemeClr val="bg2">
                     <a:lumMod val="90000"/>

--- a/tempimento.pptx
+++ b/tempimento.pptx
@@ -197,7 +197,7 @@
           <a:p>
             <a:fld id="{A584E3A2-E8EA-4705-A613-CFE9F6F5D3B4}" type="datetimeFigureOut">
               <a:rPr lang="pt-BR" smtClean="0"/>
-              <a:t>21/03/2023</a:t>
+              <a:t>04/04/2023</a:t>
             </a:fld>
             <a:endParaRPr lang="pt-BR"/>
           </a:p>
@@ -680,7 +680,7 @@
           <a:p>
             <a:fld id="{52231B9D-E9F6-4612-9B82-E89961B389AC}" type="datetimeFigureOut">
               <a:rPr lang="pt-BR" smtClean="0"/>
-              <a:t>21/03/2023</a:t>
+              <a:t>04/04/2023</a:t>
             </a:fld>
             <a:endParaRPr lang="pt-BR"/>
           </a:p>
@@ -850,7 +850,7 @@
           <a:p>
             <a:fld id="{52231B9D-E9F6-4612-9B82-E89961B389AC}" type="datetimeFigureOut">
               <a:rPr lang="pt-BR" smtClean="0"/>
-              <a:t>21/03/2023</a:t>
+              <a:t>04/04/2023</a:t>
             </a:fld>
             <a:endParaRPr lang="pt-BR"/>
           </a:p>
@@ -1030,7 +1030,7 @@
           <a:p>
             <a:fld id="{52231B9D-E9F6-4612-9B82-E89961B389AC}" type="datetimeFigureOut">
               <a:rPr lang="pt-BR" smtClean="0"/>
-              <a:t>21/03/2023</a:t>
+              <a:t>04/04/2023</a:t>
             </a:fld>
             <a:endParaRPr lang="pt-BR"/>
           </a:p>
@@ -1200,7 +1200,7 @@
           <a:p>
             <a:fld id="{52231B9D-E9F6-4612-9B82-E89961B389AC}" type="datetimeFigureOut">
               <a:rPr lang="pt-BR" smtClean="0"/>
-              <a:t>21/03/2023</a:t>
+              <a:t>04/04/2023</a:t>
             </a:fld>
             <a:endParaRPr lang="pt-BR"/>
           </a:p>
@@ -1446,7 +1446,7 @@
           <a:p>
             <a:fld id="{52231B9D-E9F6-4612-9B82-E89961B389AC}" type="datetimeFigureOut">
               <a:rPr lang="pt-BR" smtClean="0"/>
-              <a:t>21/03/2023</a:t>
+              <a:t>04/04/2023</a:t>
             </a:fld>
             <a:endParaRPr lang="pt-BR"/>
           </a:p>
@@ -1678,7 +1678,7 @@
           <a:p>
             <a:fld id="{52231B9D-E9F6-4612-9B82-E89961B389AC}" type="datetimeFigureOut">
               <a:rPr lang="pt-BR" smtClean="0"/>
-              <a:t>21/03/2023</a:t>
+              <a:t>04/04/2023</a:t>
             </a:fld>
             <a:endParaRPr lang="pt-BR"/>
           </a:p>
@@ -2045,7 +2045,7 @@
           <a:p>
             <a:fld id="{52231B9D-E9F6-4612-9B82-E89961B389AC}" type="datetimeFigureOut">
               <a:rPr lang="pt-BR" smtClean="0"/>
-              <a:t>21/03/2023</a:t>
+              <a:t>04/04/2023</a:t>
             </a:fld>
             <a:endParaRPr lang="pt-BR"/>
           </a:p>
@@ -2163,7 +2163,7 @@
           <a:p>
             <a:fld id="{52231B9D-E9F6-4612-9B82-E89961B389AC}" type="datetimeFigureOut">
               <a:rPr lang="pt-BR" smtClean="0"/>
-              <a:t>21/03/2023</a:t>
+              <a:t>04/04/2023</a:t>
             </a:fld>
             <a:endParaRPr lang="pt-BR"/>
           </a:p>
@@ -2258,7 +2258,7 @@
           <a:p>
             <a:fld id="{52231B9D-E9F6-4612-9B82-E89961B389AC}" type="datetimeFigureOut">
               <a:rPr lang="pt-BR" smtClean="0"/>
-              <a:t>21/03/2023</a:t>
+              <a:t>04/04/2023</a:t>
             </a:fld>
             <a:endParaRPr lang="pt-BR"/>
           </a:p>
@@ -2535,7 +2535,7 @@
           <a:p>
             <a:fld id="{52231B9D-E9F6-4612-9B82-E89961B389AC}" type="datetimeFigureOut">
               <a:rPr lang="pt-BR" smtClean="0"/>
-              <a:t>21/03/2023</a:t>
+              <a:t>04/04/2023</a:t>
             </a:fld>
             <a:endParaRPr lang="pt-BR"/>
           </a:p>
@@ -2788,7 +2788,7 @@
           <a:p>
             <a:fld id="{52231B9D-E9F6-4612-9B82-E89961B389AC}" type="datetimeFigureOut">
               <a:rPr lang="pt-BR" smtClean="0"/>
-              <a:t>21/03/2023</a:t>
+              <a:t>04/04/2023</a:t>
             </a:fld>
             <a:endParaRPr lang="pt-BR"/>
           </a:p>
@@ -3001,7 +3001,7 @@
           <a:p>
             <a:fld id="{52231B9D-E9F6-4612-9B82-E89961B389AC}" type="datetimeFigureOut">
               <a:rPr lang="pt-BR" smtClean="0"/>
-              <a:t>21/03/2023</a:t>
+              <a:t>04/04/2023</a:t>
             </a:fld>
             <a:endParaRPr lang="pt-BR"/>
           </a:p>
@@ -3658,24 +3658,24 @@
           <a:lstStyle/>
           <a:p>
             <a:r>
-              <a:rPr lang="pt-BR" sz="1600" smtClean="0">
+              <a:rPr lang="pt-BR" sz="1600" dirty="0" smtClean="0">
                 <a:solidFill>
                   <a:schemeClr val="bg2">
                     <a:lumMod val="90000"/>
                   </a:schemeClr>
                 </a:solidFill>
               </a:rPr>
-              <a:t>26</a:t>
-            </a:r>
-            <a:r>
-              <a:rPr lang="pt-BR" sz="1600" smtClean="0">
+              <a:t>09</a:t>
+            </a:r>
+            <a:r>
+              <a:rPr lang="pt-BR" sz="1600" dirty="0" smtClean="0">
                 <a:solidFill>
                   <a:schemeClr val="bg2">
                     <a:lumMod val="90000"/>
                   </a:schemeClr>
                 </a:solidFill>
               </a:rPr>
-              <a:t>/03/2023</a:t>
+              <a:t>/04/2023</a:t>
             </a:r>
             <a:endParaRPr lang="pt-BR" sz="1600" dirty="0">
               <a:solidFill>

--- a/tempimento.pptx
+++ b/tempimento.pptx
@@ -197,7 +197,7 @@
           <a:p>
             <a:fld id="{A584E3A2-E8EA-4705-A613-CFE9F6F5D3B4}" type="datetimeFigureOut">
               <a:rPr lang="pt-BR" smtClean="0"/>
-              <a:t>04/04/2023</a:t>
+              <a:t>18/04/2023</a:t>
             </a:fld>
             <a:endParaRPr lang="pt-BR"/>
           </a:p>
@@ -680,7 +680,7 @@
           <a:p>
             <a:fld id="{52231B9D-E9F6-4612-9B82-E89961B389AC}" type="datetimeFigureOut">
               <a:rPr lang="pt-BR" smtClean="0"/>
-              <a:t>04/04/2023</a:t>
+              <a:t>18/04/2023</a:t>
             </a:fld>
             <a:endParaRPr lang="pt-BR"/>
           </a:p>
@@ -850,7 +850,7 @@
           <a:p>
             <a:fld id="{52231B9D-E9F6-4612-9B82-E89961B389AC}" type="datetimeFigureOut">
               <a:rPr lang="pt-BR" smtClean="0"/>
-              <a:t>04/04/2023</a:t>
+              <a:t>18/04/2023</a:t>
             </a:fld>
             <a:endParaRPr lang="pt-BR"/>
           </a:p>
@@ -1030,7 +1030,7 @@
           <a:p>
             <a:fld id="{52231B9D-E9F6-4612-9B82-E89961B389AC}" type="datetimeFigureOut">
               <a:rPr lang="pt-BR" smtClean="0"/>
-              <a:t>04/04/2023</a:t>
+              <a:t>18/04/2023</a:t>
             </a:fld>
             <a:endParaRPr lang="pt-BR"/>
           </a:p>
@@ -1200,7 +1200,7 @@
           <a:p>
             <a:fld id="{52231B9D-E9F6-4612-9B82-E89961B389AC}" type="datetimeFigureOut">
               <a:rPr lang="pt-BR" smtClean="0"/>
-              <a:t>04/04/2023</a:t>
+              <a:t>18/04/2023</a:t>
             </a:fld>
             <a:endParaRPr lang="pt-BR"/>
           </a:p>
@@ -1446,7 +1446,7 @@
           <a:p>
             <a:fld id="{52231B9D-E9F6-4612-9B82-E89961B389AC}" type="datetimeFigureOut">
               <a:rPr lang="pt-BR" smtClean="0"/>
-              <a:t>04/04/2023</a:t>
+              <a:t>18/04/2023</a:t>
             </a:fld>
             <a:endParaRPr lang="pt-BR"/>
           </a:p>
@@ -1678,7 +1678,7 @@
           <a:p>
             <a:fld id="{52231B9D-E9F6-4612-9B82-E89961B389AC}" type="datetimeFigureOut">
               <a:rPr lang="pt-BR" smtClean="0"/>
-              <a:t>04/04/2023</a:t>
+              <a:t>18/04/2023</a:t>
             </a:fld>
             <a:endParaRPr lang="pt-BR"/>
           </a:p>
@@ -2045,7 +2045,7 @@
           <a:p>
             <a:fld id="{52231B9D-E9F6-4612-9B82-E89961B389AC}" type="datetimeFigureOut">
               <a:rPr lang="pt-BR" smtClean="0"/>
-              <a:t>04/04/2023</a:t>
+              <a:t>18/04/2023</a:t>
             </a:fld>
             <a:endParaRPr lang="pt-BR"/>
           </a:p>
@@ -2163,7 +2163,7 @@
           <a:p>
             <a:fld id="{52231B9D-E9F6-4612-9B82-E89961B389AC}" type="datetimeFigureOut">
               <a:rPr lang="pt-BR" smtClean="0"/>
-              <a:t>04/04/2023</a:t>
+              <a:t>18/04/2023</a:t>
             </a:fld>
             <a:endParaRPr lang="pt-BR"/>
           </a:p>
@@ -2258,7 +2258,7 @@
           <a:p>
             <a:fld id="{52231B9D-E9F6-4612-9B82-E89961B389AC}" type="datetimeFigureOut">
               <a:rPr lang="pt-BR" smtClean="0"/>
-              <a:t>04/04/2023</a:t>
+              <a:t>18/04/2023</a:t>
             </a:fld>
             <a:endParaRPr lang="pt-BR"/>
           </a:p>
@@ -2535,7 +2535,7 @@
           <a:p>
             <a:fld id="{52231B9D-E9F6-4612-9B82-E89961B389AC}" type="datetimeFigureOut">
               <a:rPr lang="pt-BR" smtClean="0"/>
-              <a:t>04/04/2023</a:t>
+              <a:t>18/04/2023</a:t>
             </a:fld>
             <a:endParaRPr lang="pt-BR"/>
           </a:p>
@@ -2788,7 +2788,7 @@
           <a:p>
             <a:fld id="{52231B9D-E9F6-4612-9B82-E89961B389AC}" type="datetimeFigureOut">
               <a:rPr lang="pt-BR" smtClean="0"/>
-              <a:t>04/04/2023</a:t>
+              <a:t>18/04/2023</a:t>
             </a:fld>
             <a:endParaRPr lang="pt-BR"/>
           </a:p>
@@ -3001,7 +3001,7 @@
           <a:p>
             <a:fld id="{52231B9D-E9F6-4612-9B82-E89961B389AC}" type="datetimeFigureOut">
               <a:rPr lang="pt-BR" smtClean="0"/>
-              <a:t>04/04/2023</a:t>
+              <a:t>18/04/2023</a:t>
             </a:fld>
             <a:endParaRPr lang="pt-BR"/>
           </a:p>
@@ -3665,17 +3665,7 @@
                   </a:schemeClr>
                 </a:solidFill>
               </a:rPr>
-              <a:t>09</a:t>
-            </a:r>
-            <a:r>
-              <a:rPr lang="pt-BR" sz="1600" dirty="0" smtClean="0">
-                <a:solidFill>
-                  <a:schemeClr val="bg2">
-                    <a:lumMod val="90000"/>
-                  </a:schemeClr>
-                </a:solidFill>
-              </a:rPr>
-              <a:t>/04/2023</a:t>
+              <a:t>16/04/2023</a:t>
             </a:r>
             <a:endParaRPr lang="pt-BR" sz="1600" dirty="0">
               <a:solidFill>

--- a/tempimento.pptx
+++ b/tempimento.pptx
@@ -197,7 +197,7 @@
           <a:p>
             <a:fld id="{A584E3A2-E8EA-4705-A613-CFE9F6F5D3B4}" type="datetimeFigureOut">
               <a:rPr lang="pt-BR" smtClean="0"/>
-              <a:t>18/04/2023</a:t>
+              <a:t>28/04/2023</a:t>
             </a:fld>
             <a:endParaRPr lang="pt-BR"/>
           </a:p>
@@ -680,7 +680,7 @@
           <a:p>
             <a:fld id="{52231B9D-E9F6-4612-9B82-E89961B389AC}" type="datetimeFigureOut">
               <a:rPr lang="pt-BR" smtClean="0"/>
-              <a:t>18/04/2023</a:t>
+              <a:t>28/04/2023</a:t>
             </a:fld>
             <a:endParaRPr lang="pt-BR"/>
           </a:p>
@@ -850,7 +850,7 @@
           <a:p>
             <a:fld id="{52231B9D-E9F6-4612-9B82-E89961B389AC}" type="datetimeFigureOut">
               <a:rPr lang="pt-BR" smtClean="0"/>
-              <a:t>18/04/2023</a:t>
+              <a:t>28/04/2023</a:t>
             </a:fld>
             <a:endParaRPr lang="pt-BR"/>
           </a:p>
@@ -1030,7 +1030,7 @@
           <a:p>
             <a:fld id="{52231B9D-E9F6-4612-9B82-E89961B389AC}" type="datetimeFigureOut">
               <a:rPr lang="pt-BR" smtClean="0"/>
-              <a:t>18/04/2023</a:t>
+              <a:t>28/04/2023</a:t>
             </a:fld>
             <a:endParaRPr lang="pt-BR"/>
           </a:p>
@@ -1200,7 +1200,7 @@
           <a:p>
             <a:fld id="{52231B9D-E9F6-4612-9B82-E89961B389AC}" type="datetimeFigureOut">
               <a:rPr lang="pt-BR" smtClean="0"/>
-              <a:t>18/04/2023</a:t>
+              <a:t>28/04/2023</a:t>
             </a:fld>
             <a:endParaRPr lang="pt-BR"/>
           </a:p>
@@ -1446,7 +1446,7 @@
           <a:p>
             <a:fld id="{52231B9D-E9F6-4612-9B82-E89961B389AC}" type="datetimeFigureOut">
               <a:rPr lang="pt-BR" smtClean="0"/>
-              <a:t>18/04/2023</a:t>
+              <a:t>28/04/2023</a:t>
             </a:fld>
             <a:endParaRPr lang="pt-BR"/>
           </a:p>
@@ -1678,7 +1678,7 @@
           <a:p>
             <a:fld id="{52231B9D-E9F6-4612-9B82-E89961B389AC}" type="datetimeFigureOut">
               <a:rPr lang="pt-BR" smtClean="0"/>
-              <a:t>18/04/2023</a:t>
+              <a:t>28/04/2023</a:t>
             </a:fld>
             <a:endParaRPr lang="pt-BR"/>
           </a:p>
@@ -2045,7 +2045,7 @@
           <a:p>
             <a:fld id="{52231B9D-E9F6-4612-9B82-E89961B389AC}" type="datetimeFigureOut">
               <a:rPr lang="pt-BR" smtClean="0"/>
-              <a:t>18/04/2023</a:t>
+              <a:t>28/04/2023</a:t>
             </a:fld>
             <a:endParaRPr lang="pt-BR"/>
           </a:p>
@@ -2163,7 +2163,7 @@
           <a:p>
             <a:fld id="{52231B9D-E9F6-4612-9B82-E89961B389AC}" type="datetimeFigureOut">
               <a:rPr lang="pt-BR" smtClean="0"/>
-              <a:t>18/04/2023</a:t>
+              <a:t>28/04/2023</a:t>
             </a:fld>
             <a:endParaRPr lang="pt-BR"/>
           </a:p>
@@ -2258,7 +2258,7 @@
           <a:p>
             <a:fld id="{52231B9D-E9F6-4612-9B82-E89961B389AC}" type="datetimeFigureOut">
               <a:rPr lang="pt-BR" smtClean="0"/>
-              <a:t>18/04/2023</a:t>
+              <a:t>28/04/2023</a:t>
             </a:fld>
             <a:endParaRPr lang="pt-BR"/>
           </a:p>
@@ -2535,7 +2535,7 @@
           <a:p>
             <a:fld id="{52231B9D-E9F6-4612-9B82-E89961B389AC}" type="datetimeFigureOut">
               <a:rPr lang="pt-BR" smtClean="0"/>
-              <a:t>18/04/2023</a:t>
+              <a:t>28/04/2023</a:t>
             </a:fld>
             <a:endParaRPr lang="pt-BR"/>
           </a:p>
@@ -2788,7 +2788,7 @@
           <a:p>
             <a:fld id="{52231B9D-E9F6-4612-9B82-E89961B389AC}" type="datetimeFigureOut">
               <a:rPr lang="pt-BR" smtClean="0"/>
-              <a:t>18/04/2023</a:t>
+              <a:t>28/04/2023</a:t>
             </a:fld>
             <a:endParaRPr lang="pt-BR"/>
           </a:p>
@@ -3001,7 +3001,7 @@
           <a:p>
             <a:fld id="{52231B9D-E9F6-4612-9B82-E89961B389AC}" type="datetimeFigureOut">
               <a:rPr lang="pt-BR" smtClean="0"/>
-              <a:t>18/04/2023</a:t>
+              <a:t>28/04/2023</a:t>
             </a:fld>
             <a:endParaRPr lang="pt-BR"/>
           </a:p>
@@ -3665,7 +3665,17 @@
                   </a:schemeClr>
                 </a:solidFill>
               </a:rPr>
-              <a:t>16/04/2023</a:t>
+              <a:t>23</a:t>
+            </a:r>
+            <a:r>
+              <a:rPr lang="pt-BR" sz="1600" dirty="0" smtClean="0">
+                <a:solidFill>
+                  <a:schemeClr val="bg2">
+                    <a:lumMod val="90000"/>
+                  </a:schemeClr>
+                </a:solidFill>
+              </a:rPr>
+              <a:t>/04/2023</a:t>
             </a:r>
             <a:endParaRPr lang="pt-BR" sz="1600" dirty="0">
               <a:solidFill>

--- a/tempimento.pptx
+++ b/tempimento.pptx
@@ -197,7 +197,7 @@
           <a:p>
             <a:fld id="{A584E3A2-E8EA-4705-A613-CFE9F6F5D3B4}" type="datetimeFigureOut">
               <a:rPr lang="pt-BR" smtClean="0"/>
-              <a:t>28/04/2023</a:t>
+              <a:t>02/05/2023</a:t>
             </a:fld>
             <a:endParaRPr lang="pt-BR"/>
           </a:p>
@@ -680,7 +680,7 @@
           <a:p>
             <a:fld id="{52231B9D-E9F6-4612-9B82-E89961B389AC}" type="datetimeFigureOut">
               <a:rPr lang="pt-BR" smtClean="0"/>
-              <a:t>28/04/2023</a:t>
+              <a:t>02/05/2023</a:t>
             </a:fld>
             <a:endParaRPr lang="pt-BR"/>
           </a:p>
@@ -850,7 +850,7 @@
           <a:p>
             <a:fld id="{52231B9D-E9F6-4612-9B82-E89961B389AC}" type="datetimeFigureOut">
               <a:rPr lang="pt-BR" smtClean="0"/>
-              <a:t>28/04/2023</a:t>
+              <a:t>02/05/2023</a:t>
             </a:fld>
             <a:endParaRPr lang="pt-BR"/>
           </a:p>
@@ -1030,7 +1030,7 @@
           <a:p>
             <a:fld id="{52231B9D-E9F6-4612-9B82-E89961B389AC}" type="datetimeFigureOut">
               <a:rPr lang="pt-BR" smtClean="0"/>
-              <a:t>28/04/2023</a:t>
+              <a:t>02/05/2023</a:t>
             </a:fld>
             <a:endParaRPr lang="pt-BR"/>
           </a:p>
@@ -1200,7 +1200,7 @@
           <a:p>
             <a:fld id="{52231B9D-E9F6-4612-9B82-E89961B389AC}" type="datetimeFigureOut">
               <a:rPr lang="pt-BR" smtClean="0"/>
-              <a:t>28/04/2023</a:t>
+              <a:t>02/05/2023</a:t>
             </a:fld>
             <a:endParaRPr lang="pt-BR"/>
           </a:p>
@@ -1446,7 +1446,7 @@
           <a:p>
             <a:fld id="{52231B9D-E9F6-4612-9B82-E89961B389AC}" type="datetimeFigureOut">
               <a:rPr lang="pt-BR" smtClean="0"/>
-              <a:t>28/04/2023</a:t>
+              <a:t>02/05/2023</a:t>
             </a:fld>
             <a:endParaRPr lang="pt-BR"/>
           </a:p>
@@ -1678,7 +1678,7 @@
           <a:p>
             <a:fld id="{52231B9D-E9F6-4612-9B82-E89961B389AC}" type="datetimeFigureOut">
               <a:rPr lang="pt-BR" smtClean="0"/>
-              <a:t>28/04/2023</a:t>
+              <a:t>02/05/2023</a:t>
             </a:fld>
             <a:endParaRPr lang="pt-BR"/>
           </a:p>
@@ -2045,7 +2045,7 @@
           <a:p>
             <a:fld id="{52231B9D-E9F6-4612-9B82-E89961B389AC}" type="datetimeFigureOut">
               <a:rPr lang="pt-BR" smtClean="0"/>
-              <a:t>28/04/2023</a:t>
+              <a:t>02/05/2023</a:t>
             </a:fld>
             <a:endParaRPr lang="pt-BR"/>
           </a:p>
@@ -2163,7 +2163,7 @@
           <a:p>
             <a:fld id="{52231B9D-E9F6-4612-9B82-E89961B389AC}" type="datetimeFigureOut">
               <a:rPr lang="pt-BR" smtClean="0"/>
-              <a:t>28/04/2023</a:t>
+              <a:t>02/05/2023</a:t>
             </a:fld>
             <a:endParaRPr lang="pt-BR"/>
           </a:p>
@@ -2258,7 +2258,7 @@
           <a:p>
             <a:fld id="{52231B9D-E9F6-4612-9B82-E89961B389AC}" type="datetimeFigureOut">
               <a:rPr lang="pt-BR" smtClean="0"/>
-              <a:t>28/04/2023</a:t>
+              <a:t>02/05/2023</a:t>
             </a:fld>
             <a:endParaRPr lang="pt-BR"/>
           </a:p>
@@ -2535,7 +2535,7 @@
           <a:p>
             <a:fld id="{52231B9D-E9F6-4612-9B82-E89961B389AC}" type="datetimeFigureOut">
               <a:rPr lang="pt-BR" smtClean="0"/>
-              <a:t>28/04/2023</a:t>
+              <a:t>02/05/2023</a:t>
             </a:fld>
             <a:endParaRPr lang="pt-BR"/>
           </a:p>
@@ -2788,7 +2788,7 @@
           <a:p>
             <a:fld id="{52231B9D-E9F6-4612-9B82-E89961B389AC}" type="datetimeFigureOut">
               <a:rPr lang="pt-BR" smtClean="0"/>
-              <a:t>28/04/2023</a:t>
+              <a:t>02/05/2023</a:t>
             </a:fld>
             <a:endParaRPr lang="pt-BR"/>
           </a:p>
@@ -3001,7 +3001,7 @@
           <a:p>
             <a:fld id="{52231B9D-E9F6-4612-9B82-E89961B389AC}" type="datetimeFigureOut">
               <a:rPr lang="pt-BR" smtClean="0"/>
-              <a:t>28/04/2023</a:t>
+              <a:t>02/05/2023</a:t>
             </a:fld>
             <a:endParaRPr lang="pt-BR"/>
           </a:p>
@@ -3665,7 +3665,7 @@
                   </a:schemeClr>
                 </a:solidFill>
               </a:rPr>
-              <a:t>23</a:t>
+              <a:t>30</a:t>
             </a:r>
             <a:r>
               <a:rPr lang="pt-BR" sz="1600" dirty="0" smtClean="0">

--- a/tempimento.pptx
+++ b/tempimento.pptx
@@ -11,7 +11,7 @@
     <p:sldId id="256" r:id="rId2"/>
   </p:sldIdLst>
   <p:sldSz cx="12192000" cy="6858000"/>
-  <p:notesSz cx="6889750" cy="9671050"/>
+  <p:notesSz cx="6797675" cy="9872663"/>
   <p:defaultTextStyle>
     <a:defPPr>
       <a:defRPr lang="pt-BR"/>
@@ -150,7 +150,7 @@
         <p:spPr>
           <a:xfrm>
             <a:off x="6" y="1"/>
-            <a:ext cx="2985969" cy="484528"/>
+            <a:ext cx="2946065" cy="494629"/>
           </a:xfrm>
           <a:prstGeom prst="rect">
             <a:avLst/>
@@ -180,8 +180,8 @@
         </p:nvSpPr>
         <p:spPr>
           <a:xfrm>
-            <a:off x="3902246" y="1"/>
-            <a:ext cx="2985969" cy="484528"/>
+            <a:off x="3850097" y="1"/>
+            <a:ext cx="2946065" cy="494629"/>
           </a:xfrm>
           <a:prstGeom prst="rect">
             <a:avLst/>
@@ -197,7 +197,7 @@
           <a:p>
             <a:fld id="{A584E3A2-E8EA-4705-A613-CFE9F6F5D3B4}" type="datetimeFigureOut">
               <a:rPr lang="pt-BR" smtClean="0"/>
-              <a:t>02/05/2023</a:t>
+              <a:t>08/05/2023</a:t>
             </a:fld>
             <a:endParaRPr lang="pt-BR"/>
           </a:p>
@@ -215,8 +215,8 @@
         </p:nvSpPr>
         <p:spPr>
           <a:xfrm>
-            <a:off x="542925" y="1209675"/>
-            <a:ext cx="5803900" cy="3263900"/>
+            <a:off x="438150" y="1235075"/>
+            <a:ext cx="5921375" cy="3330575"/>
           </a:xfrm>
           <a:prstGeom prst="rect">
             <a:avLst/>
@@ -248,8 +248,8 @@
         </p:nvSpPr>
         <p:spPr>
           <a:xfrm>
-            <a:off x="688362" y="4654767"/>
-            <a:ext cx="5513032" cy="3807216"/>
+            <a:off x="679163" y="4751805"/>
+            <a:ext cx="5439356" cy="3886586"/>
           </a:xfrm>
           <a:prstGeom prst="rect">
             <a:avLst/>
@@ -308,8 +308,8 @@
         </p:nvSpPr>
         <p:spPr>
           <a:xfrm>
-            <a:off x="6" y="9186523"/>
-            <a:ext cx="2985969" cy="484528"/>
+            <a:off x="6" y="9378036"/>
+            <a:ext cx="2946065" cy="494629"/>
           </a:xfrm>
           <a:prstGeom prst="rect">
             <a:avLst/>
@@ -339,8 +339,8 @@
         </p:nvSpPr>
         <p:spPr>
           <a:xfrm>
-            <a:off x="3902246" y="9186523"/>
-            <a:ext cx="2985969" cy="484528"/>
+            <a:off x="3850097" y="9378036"/>
+            <a:ext cx="2946065" cy="494629"/>
           </a:xfrm>
           <a:prstGeom prst="rect">
             <a:avLst/>
@@ -680,7 +680,7 @@
           <a:p>
             <a:fld id="{52231B9D-E9F6-4612-9B82-E89961B389AC}" type="datetimeFigureOut">
               <a:rPr lang="pt-BR" smtClean="0"/>
-              <a:t>02/05/2023</a:t>
+              <a:t>08/05/2023</a:t>
             </a:fld>
             <a:endParaRPr lang="pt-BR"/>
           </a:p>
@@ -850,7 +850,7 @@
           <a:p>
             <a:fld id="{52231B9D-E9F6-4612-9B82-E89961B389AC}" type="datetimeFigureOut">
               <a:rPr lang="pt-BR" smtClean="0"/>
-              <a:t>02/05/2023</a:t>
+              <a:t>08/05/2023</a:t>
             </a:fld>
             <a:endParaRPr lang="pt-BR"/>
           </a:p>
@@ -1030,7 +1030,7 @@
           <a:p>
             <a:fld id="{52231B9D-E9F6-4612-9B82-E89961B389AC}" type="datetimeFigureOut">
               <a:rPr lang="pt-BR" smtClean="0"/>
-              <a:t>02/05/2023</a:t>
+              <a:t>08/05/2023</a:t>
             </a:fld>
             <a:endParaRPr lang="pt-BR"/>
           </a:p>
@@ -1200,7 +1200,7 @@
           <a:p>
             <a:fld id="{52231B9D-E9F6-4612-9B82-E89961B389AC}" type="datetimeFigureOut">
               <a:rPr lang="pt-BR" smtClean="0"/>
-              <a:t>02/05/2023</a:t>
+              <a:t>08/05/2023</a:t>
             </a:fld>
             <a:endParaRPr lang="pt-BR"/>
           </a:p>
@@ -1446,7 +1446,7 @@
           <a:p>
             <a:fld id="{52231B9D-E9F6-4612-9B82-E89961B389AC}" type="datetimeFigureOut">
               <a:rPr lang="pt-BR" smtClean="0"/>
-              <a:t>02/05/2023</a:t>
+              <a:t>08/05/2023</a:t>
             </a:fld>
             <a:endParaRPr lang="pt-BR"/>
           </a:p>
@@ -1678,7 +1678,7 @@
           <a:p>
             <a:fld id="{52231B9D-E9F6-4612-9B82-E89961B389AC}" type="datetimeFigureOut">
               <a:rPr lang="pt-BR" smtClean="0"/>
-              <a:t>02/05/2023</a:t>
+              <a:t>08/05/2023</a:t>
             </a:fld>
             <a:endParaRPr lang="pt-BR"/>
           </a:p>
@@ -2045,7 +2045,7 @@
           <a:p>
             <a:fld id="{52231B9D-E9F6-4612-9B82-E89961B389AC}" type="datetimeFigureOut">
               <a:rPr lang="pt-BR" smtClean="0"/>
-              <a:t>02/05/2023</a:t>
+              <a:t>08/05/2023</a:t>
             </a:fld>
             <a:endParaRPr lang="pt-BR"/>
           </a:p>
@@ -2163,7 +2163,7 @@
           <a:p>
             <a:fld id="{52231B9D-E9F6-4612-9B82-E89961B389AC}" type="datetimeFigureOut">
               <a:rPr lang="pt-BR" smtClean="0"/>
-              <a:t>02/05/2023</a:t>
+              <a:t>08/05/2023</a:t>
             </a:fld>
             <a:endParaRPr lang="pt-BR"/>
           </a:p>
@@ -2258,7 +2258,7 @@
           <a:p>
             <a:fld id="{52231B9D-E9F6-4612-9B82-E89961B389AC}" type="datetimeFigureOut">
               <a:rPr lang="pt-BR" smtClean="0"/>
-              <a:t>02/05/2023</a:t>
+              <a:t>08/05/2023</a:t>
             </a:fld>
             <a:endParaRPr lang="pt-BR"/>
           </a:p>
@@ -2535,7 +2535,7 @@
           <a:p>
             <a:fld id="{52231B9D-E9F6-4612-9B82-E89961B389AC}" type="datetimeFigureOut">
               <a:rPr lang="pt-BR" smtClean="0"/>
-              <a:t>02/05/2023</a:t>
+              <a:t>08/05/2023</a:t>
             </a:fld>
             <a:endParaRPr lang="pt-BR"/>
           </a:p>
@@ -2788,7 +2788,7 @@
           <a:p>
             <a:fld id="{52231B9D-E9F6-4612-9B82-E89961B389AC}" type="datetimeFigureOut">
               <a:rPr lang="pt-BR" smtClean="0"/>
-              <a:t>02/05/2023</a:t>
+              <a:t>08/05/2023</a:t>
             </a:fld>
             <a:endParaRPr lang="pt-BR"/>
           </a:p>
@@ -3001,7 +3001,7 @@
           <a:p>
             <a:fld id="{52231B9D-E9F6-4612-9B82-E89961B389AC}" type="datetimeFigureOut">
               <a:rPr lang="pt-BR" smtClean="0"/>
-              <a:t>02/05/2023</a:t>
+              <a:t>08/05/2023</a:t>
             </a:fld>
             <a:endParaRPr lang="pt-BR"/>
           </a:p>
@@ -3665,7 +3665,7 @@
                   </a:schemeClr>
                 </a:solidFill>
               </a:rPr>
-              <a:t>30</a:t>
+              <a:t>28</a:t>
             </a:r>
             <a:r>
               <a:rPr lang="pt-BR" sz="1600" dirty="0" smtClean="0">
@@ -3675,7 +3675,7 @@
                   </a:schemeClr>
                 </a:solidFill>
               </a:rPr>
-              <a:t>/04/2023</a:t>
+              <a:t>/05/2023</a:t>
             </a:r>
             <a:endParaRPr lang="pt-BR" sz="1600" dirty="0">
               <a:solidFill>

--- a/tempimento.pptx
+++ b/tempimento.pptx
@@ -11,7 +11,7 @@
     <p:sldId id="256" r:id="rId2"/>
   </p:sldIdLst>
   <p:sldSz cx="12192000" cy="6858000"/>
-  <p:notesSz cx="6797675" cy="9872663"/>
+  <p:notesSz cx="6889750" cy="9671050"/>
   <p:defaultTextStyle>
     <a:defPPr>
       <a:defRPr lang="pt-BR"/>
@@ -150,7 +150,7 @@
         <p:spPr>
           <a:xfrm>
             <a:off x="6" y="1"/>
-            <a:ext cx="2946065" cy="494629"/>
+            <a:ext cx="2985970" cy="484528"/>
           </a:xfrm>
           <a:prstGeom prst="rect">
             <a:avLst/>
@@ -180,8 +180,8 @@
         </p:nvSpPr>
         <p:spPr>
           <a:xfrm>
-            <a:off x="3850097" y="1"/>
-            <a:ext cx="2946065" cy="494629"/>
+            <a:off x="3902247" y="1"/>
+            <a:ext cx="2985970" cy="484528"/>
           </a:xfrm>
           <a:prstGeom prst="rect">
             <a:avLst/>
@@ -197,7 +197,7 @@
           <a:p>
             <a:fld id="{A584E3A2-E8EA-4705-A613-CFE9F6F5D3B4}" type="datetimeFigureOut">
               <a:rPr lang="pt-BR" smtClean="0"/>
-              <a:t>08/05/2023</a:t>
+              <a:t>16/05/2023</a:t>
             </a:fld>
             <a:endParaRPr lang="pt-BR"/>
           </a:p>
@@ -215,8 +215,8 @@
         </p:nvSpPr>
         <p:spPr>
           <a:xfrm>
-            <a:off x="438150" y="1235075"/>
-            <a:ext cx="5921375" cy="3330575"/>
+            <a:off x="544513" y="1209675"/>
+            <a:ext cx="5800725" cy="3262313"/>
           </a:xfrm>
           <a:prstGeom prst="rect">
             <a:avLst/>
@@ -248,8 +248,8 @@
         </p:nvSpPr>
         <p:spPr>
           <a:xfrm>
-            <a:off x="679163" y="4751805"/>
-            <a:ext cx="5439356" cy="3886586"/>
+            <a:off x="688363" y="4654767"/>
+            <a:ext cx="5513032" cy="3807217"/>
           </a:xfrm>
           <a:prstGeom prst="rect">
             <a:avLst/>
@@ -308,8 +308,8 @@
         </p:nvSpPr>
         <p:spPr>
           <a:xfrm>
-            <a:off x="6" y="9378036"/>
-            <a:ext cx="2946065" cy="494629"/>
+            <a:off x="6" y="9186524"/>
+            <a:ext cx="2985970" cy="484528"/>
           </a:xfrm>
           <a:prstGeom prst="rect">
             <a:avLst/>
@@ -339,8 +339,8 @@
         </p:nvSpPr>
         <p:spPr>
           <a:xfrm>
-            <a:off x="3850097" y="9378036"/>
-            <a:ext cx="2946065" cy="494629"/>
+            <a:off x="3902247" y="9186524"/>
+            <a:ext cx="2985970" cy="484528"/>
           </a:xfrm>
           <a:prstGeom prst="rect">
             <a:avLst/>
@@ -680,7 +680,7 @@
           <a:p>
             <a:fld id="{52231B9D-E9F6-4612-9B82-E89961B389AC}" type="datetimeFigureOut">
               <a:rPr lang="pt-BR" smtClean="0"/>
-              <a:t>08/05/2023</a:t>
+              <a:t>16/05/2023</a:t>
             </a:fld>
             <a:endParaRPr lang="pt-BR"/>
           </a:p>
@@ -850,7 +850,7 @@
           <a:p>
             <a:fld id="{52231B9D-E9F6-4612-9B82-E89961B389AC}" type="datetimeFigureOut">
               <a:rPr lang="pt-BR" smtClean="0"/>
-              <a:t>08/05/2023</a:t>
+              <a:t>16/05/2023</a:t>
             </a:fld>
             <a:endParaRPr lang="pt-BR"/>
           </a:p>
@@ -1030,7 +1030,7 @@
           <a:p>
             <a:fld id="{52231B9D-E9F6-4612-9B82-E89961B389AC}" type="datetimeFigureOut">
               <a:rPr lang="pt-BR" smtClean="0"/>
-              <a:t>08/05/2023</a:t>
+              <a:t>16/05/2023</a:t>
             </a:fld>
             <a:endParaRPr lang="pt-BR"/>
           </a:p>
@@ -1200,7 +1200,7 @@
           <a:p>
             <a:fld id="{52231B9D-E9F6-4612-9B82-E89961B389AC}" type="datetimeFigureOut">
               <a:rPr lang="pt-BR" smtClean="0"/>
-              <a:t>08/05/2023</a:t>
+              <a:t>16/05/2023</a:t>
             </a:fld>
             <a:endParaRPr lang="pt-BR"/>
           </a:p>
@@ -1446,7 +1446,7 @@
           <a:p>
             <a:fld id="{52231B9D-E9F6-4612-9B82-E89961B389AC}" type="datetimeFigureOut">
               <a:rPr lang="pt-BR" smtClean="0"/>
-              <a:t>08/05/2023</a:t>
+              <a:t>16/05/2023</a:t>
             </a:fld>
             <a:endParaRPr lang="pt-BR"/>
           </a:p>
@@ -1678,7 +1678,7 @@
           <a:p>
             <a:fld id="{52231B9D-E9F6-4612-9B82-E89961B389AC}" type="datetimeFigureOut">
               <a:rPr lang="pt-BR" smtClean="0"/>
-              <a:t>08/05/2023</a:t>
+              <a:t>16/05/2023</a:t>
             </a:fld>
             <a:endParaRPr lang="pt-BR"/>
           </a:p>
@@ -2045,7 +2045,7 @@
           <a:p>
             <a:fld id="{52231B9D-E9F6-4612-9B82-E89961B389AC}" type="datetimeFigureOut">
               <a:rPr lang="pt-BR" smtClean="0"/>
-              <a:t>08/05/2023</a:t>
+              <a:t>16/05/2023</a:t>
             </a:fld>
             <a:endParaRPr lang="pt-BR"/>
           </a:p>
@@ -2163,7 +2163,7 @@
           <a:p>
             <a:fld id="{52231B9D-E9F6-4612-9B82-E89961B389AC}" type="datetimeFigureOut">
               <a:rPr lang="pt-BR" smtClean="0"/>
-              <a:t>08/05/2023</a:t>
+              <a:t>16/05/2023</a:t>
             </a:fld>
             <a:endParaRPr lang="pt-BR"/>
           </a:p>
@@ -2258,7 +2258,7 @@
           <a:p>
             <a:fld id="{52231B9D-E9F6-4612-9B82-E89961B389AC}" type="datetimeFigureOut">
               <a:rPr lang="pt-BR" smtClean="0"/>
-              <a:t>08/05/2023</a:t>
+              <a:t>16/05/2023</a:t>
             </a:fld>
             <a:endParaRPr lang="pt-BR"/>
           </a:p>
@@ -2535,7 +2535,7 @@
           <a:p>
             <a:fld id="{52231B9D-E9F6-4612-9B82-E89961B389AC}" type="datetimeFigureOut">
               <a:rPr lang="pt-BR" smtClean="0"/>
-              <a:t>08/05/2023</a:t>
+              <a:t>16/05/2023</a:t>
             </a:fld>
             <a:endParaRPr lang="pt-BR"/>
           </a:p>
@@ -2788,7 +2788,7 @@
           <a:p>
             <a:fld id="{52231B9D-E9F6-4612-9B82-E89961B389AC}" type="datetimeFigureOut">
               <a:rPr lang="pt-BR" smtClean="0"/>
-              <a:t>08/05/2023</a:t>
+              <a:t>16/05/2023</a:t>
             </a:fld>
             <a:endParaRPr lang="pt-BR"/>
           </a:p>
@@ -3001,7 +3001,7 @@
           <a:p>
             <a:fld id="{52231B9D-E9F6-4612-9B82-E89961B389AC}" type="datetimeFigureOut">
               <a:rPr lang="pt-BR" smtClean="0"/>
-              <a:t>08/05/2023</a:t>
+              <a:t>16/05/2023</a:t>
             </a:fld>
             <a:endParaRPr lang="pt-BR"/>
           </a:p>
@@ -3665,17 +3665,7 @@
                   </a:schemeClr>
                 </a:solidFill>
               </a:rPr>
-              <a:t>28</a:t>
-            </a:r>
-            <a:r>
-              <a:rPr lang="pt-BR" sz="1600" dirty="0" smtClean="0">
-                <a:solidFill>
-                  <a:schemeClr val="bg2">
-                    <a:lumMod val="90000"/>
-                  </a:schemeClr>
-                </a:solidFill>
-              </a:rPr>
-              <a:t>/05/2023</a:t>
+              <a:t>14/05/2023</a:t>
             </a:r>
             <a:endParaRPr lang="pt-BR" sz="1600" dirty="0">
               <a:solidFill>

--- a/tempimento.pptx
+++ b/tempimento.pptx
@@ -197,7 +197,7 @@
           <a:p>
             <a:fld id="{A584E3A2-E8EA-4705-A613-CFE9F6F5D3B4}" type="datetimeFigureOut">
               <a:rPr lang="pt-BR" smtClean="0"/>
-              <a:t>16/05/2023</a:t>
+              <a:t>05/06/2023</a:t>
             </a:fld>
             <a:endParaRPr lang="pt-BR"/>
           </a:p>
@@ -680,7 +680,7 @@
           <a:p>
             <a:fld id="{52231B9D-E9F6-4612-9B82-E89961B389AC}" type="datetimeFigureOut">
               <a:rPr lang="pt-BR" smtClean="0"/>
-              <a:t>16/05/2023</a:t>
+              <a:t>05/06/2023</a:t>
             </a:fld>
             <a:endParaRPr lang="pt-BR"/>
           </a:p>
@@ -850,7 +850,7 @@
           <a:p>
             <a:fld id="{52231B9D-E9F6-4612-9B82-E89961B389AC}" type="datetimeFigureOut">
               <a:rPr lang="pt-BR" smtClean="0"/>
-              <a:t>16/05/2023</a:t>
+              <a:t>05/06/2023</a:t>
             </a:fld>
             <a:endParaRPr lang="pt-BR"/>
           </a:p>
@@ -1030,7 +1030,7 @@
           <a:p>
             <a:fld id="{52231B9D-E9F6-4612-9B82-E89961B389AC}" type="datetimeFigureOut">
               <a:rPr lang="pt-BR" smtClean="0"/>
-              <a:t>16/05/2023</a:t>
+              <a:t>05/06/2023</a:t>
             </a:fld>
             <a:endParaRPr lang="pt-BR"/>
           </a:p>
@@ -1200,7 +1200,7 @@
           <a:p>
             <a:fld id="{52231B9D-E9F6-4612-9B82-E89961B389AC}" type="datetimeFigureOut">
               <a:rPr lang="pt-BR" smtClean="0"/>
-              <a:t>16/05/2023</a:t>
+              <a:t>05/06/2023</a:t>
             </a:fld>
             <a:endParaRPr lang="pt-BR"/>
           </a:p>
@@ -1446,7 +1446,7 @@
           <a:p>
             <a:fld id="{52231B9D-E9F6-4612-9B82-E89961B389AC}" type="datetimeFigureOut">
               <a:rPr lang="pt-BR" smtClean="0"/>
-              <a:t>16/05/2023</a:t>
+              <a:t>05/06/2023</a:t>
             </a:fld>
             <a:endParaRPr lang="pt-BR"/>
           </a:p>
@@ -1678,7 +1678,7 @@
           <a:p>
             <a:fld id="{52231B9D-E9F6-4612-9B82-E89961B389AC}" type="datetimeFigureOut">
               <a:rPr lang="pt-BR" smtClean="0"/>
-              <a:t>16/05/2023</a:t>
+              <a:t>05/06/2023</a:t>
             </a:fld>
             <a:endParaRPr lang="pt-BR"/>
           </a:p>
@@ -2045,7 +2045,7 @@
           <a:p>
             <a:fld id="{52231B9D-E9F6-4612-9B82-E89961B389AC}" type="datetimeFigureOut">
               <a:rPr lang="pt-BR" smtClean="0"/>
-              <a:t>16/05/2023</a:t>
+              <a:t>05/06/2023</a:t>
             </a:fld>
             <a:endParaRPr lang="pt-BR"/>
           </a:p>
@@ -2163,7 +2163,7 @@
           <a:p>
             <a:fld id="{52231B9D-E9F6-4612-9B82-E89961B389AC}" type="datetimeFigureOut">
               <a:rPr lang="pt-BR" smtClean="0"/>
-              <a:t>16/05/2023</a:t>
+              <a:t>05/06/2023</a:t>
             </a:fld>
             <a:endParaRPr lang="pt-BR"/>
           </a:p>
@@ -2258,7 +2258,7 @@
           <a:p>
             <a:fld id="{52231B9D-E9F6-4612-9B82-E89961B389AC}" type="datetimeFigureOut">
               <a:rPr lang="pt-BR" smtClean="0"/>
-              <a:t>16/05/2023</a:t>
+              <a:t>05/06/2023</a:t>
             </a:fld>
             <a:endParaRPr lang="pt-BR"/>
           </a:p>
@@ -2535,7 +2535,7 @@
           <a:p>
             <a:fld id="{52231B9D-E9F6-4612-9B82-E89961B389AC}" type="datetimeFigureOut">
               <a:rPr lang="pt-BR" smtClean="0"/>
-              <a:t>16/05/2023</a:t>
+              <a:t>05/06/2023</a:t>
             </a:fld>
             <a:endParaRPr lang="pt-BR"/>
           </a:p>
@@ -2788,7 +2788,7 @@
           <a:p>
             <a:fld id="{52231B9D-E9F6-4612-9B82-E89961B389AC}" type="datetimeFigureOut">
               <a:rPr lang="pt-BR" smtClean="0"/>
-              <a:t>16/05/2023</a:t>
+              <a:t>05/06/2023</a:t>
             </a:fld>
             <a:endParaRPr lang="pt-BR"/>
           </a:p>
@@ -3001,7 +3001,7 @@
           <a:p>
             <a:fld id="{52231B9D-E9F6-4612-9B82-E89961B389AC}" type="datetimeFigureOut">
               <a:rPr lang="pt-BR" smtClean="0"/>
-              <a:t>16/05/2023</a:t>
+              <a:t>05/06/2023</a:t>
             </a:fld>
             <a:endParaRPr lang="pt-BR"/>
           </a:p>
@@ -3665,7 +3665,17 @@
                   </a:schemeClr>
                 </a:solidFill>
               </a:rPr>
-              <a:t>14/05/2023</a:t>
+              <a:t>04</a:t>
+            </a:r>
+            <a:r>
+              <a:rPr lang="pt-BR" sz="1600" dirty="0" smtClean="0">
+                <a:solidFill>
+                  <a:schemeClr val="bg2">
+                    <a:lumMod val="90000"/>
+                  </a:schemeClr>
+                </a:solidFill>
+              </a:rPr>
+              <a:t>/06/2023</a:t>
             </a:r>
             <a:endParaRPr lang="pt-BR" sz="1600" dirty="0">
               <a:solidFill>

--- a/tempimento.pptx
+++ b/tempimento.pptx
@@ -197,7 +197,7 @@
           <a:p>
             <a:fld id="{A584E3A2-E8EA-4705-A613-CFE9F6F5D3B4}" type="datetimeFigureOut">
               <a:rPr lang="pt-BR" smtClean="0"/>
-              <a:t>05/06/2023</a:t>
+              <a:t>10/06/2023</a:t>
             </a:fld>
             <a:endParaRPr lang="pt-BR"/>
           </a:p>
@@ -680,7 +680,7 @@
           <a:p>
             <a:fld id="{52231B9D-E9F6-4612-9B82-E89961B389AC}" type="datetimeFigureOut">
               <a:rPr lang="pt-BR" smtClean="0"/>
-              <a:t>05/06/2023</a:t>
+              <a:t>10/06/2023</a:t>
             </a:fld>
             <a:endParaRPr lang="pt-BR"/>
           </a:p>
@@ -850,7 +850,7 @@
           <a:p>
             <a:fld id="{52231B9D-E9F6-4612-9B82-E89961B389AC}" type="datetimeFigureOut">
               <a:rPr lang="pt-BR" smtClean="0"/>
-              <a:t>05/06/2023</a:t>
+              <a:t>10/06/2023</a:t>
             </a:fld>
             <a:endParaRPr lang="pt-BR"/>
           </a:p>
@@ -1030,7 +1030,7 @@
           <a:p>
             <a:fld id="{52231B9D-E9F6-4612-9B82-E89961B389AC}" type="datetimeFigureOut">
               <a:rPr lang="pt-BR" smtClean="0"/>
-              <a:t>05/06/2023</a:t>
+              <a:t>10/06/2023</a:t>
             </a:fld>
             <a:endParaRPr lang="pt-BR"/>
           </a:p>
@@ -1200,7 +1200,7 @@
           <a:p>
             <a:fld id="{52231B9D-E9F6-4612-9B82-E89961B389AC}" type="datetimeFigureOut">
               <a:rPr lang="pt-BR" smtClean="0"/>
-              <a:t>05/06/2023</a:t>
+              <a:t>10/06/2023</a:t>
             </a:fld>
             <a:endParaRPr lang="pt-BR"/>
           </a:p>
@@ -1446,7 +1446,7 @@
           <a:p>
             <a:fld id="{52231B9D-E9F6-4612-9B82-E89961B389AC}" type="datetimeFigureOut">
               <a:rPr lang="pt-BR" smtClean="0"/>
-              <a:t>05/06/2023</a:t>
+              <a:t>10/06/2023</a:t>
             </a:fld>
             <a:endParaRPr lang="pt-BR"/>
           </a:p>
@@ -1678,7 +1678,7 @@
           <a:p>
             <a:fld id="{52231B9D-E9F6-4612-9B82-E89961B389AC}" type="datetimeFigureOut">
               <a:rPr lang="pt-BR" smtClean="0"/>
-              <a:t>05/06/2023</a:t>
+              <a:t>10/06/2023</a:t>
             </a:fld>
             <a:endParaRPr lang="pt-BR"/>
           </a:p>
@@ -2045,7 +2045,7 @@
           <a:p>
             <a:fld id="{52231B9D-E9F6-4612-9B82-E89961B389AC}" type="datetimeFigureOut">
               <a:rPr lang="pt-BR" smtClean="0"/>
-              <a:t>05/06/2023</a:t>
+              <a:t>10/06/2023</a:t>
             </a:fld>
             <a:endParaRPr lang="pt-BR"/>
           </a:p>
@@ -2163,7 +2163,7 @@
           <a:p>
             <a:fld id="{52231B9D-E9F6-4612-9B82-E89961B389AC}" type="datetimeFigureOut">
               <a:rPr lang="pt-BR" smtClean="0"/>
-              <a:t>05/06/2023</a:t>
+              <a:t>10/06/2023</a:t>
             </a:fld>
             <a:endParaRPr lang="pt-BR"/>
           </a:p>
@@ -2258,7 +2258,7 @@
           <a:p>
             <a:fld id="{52231B9D-E9F6-4612-9B82-E89961B389AC}" type="datetimeFigureOut">
               <a:rPr lang="pt-BR" smtClean="0"/>
-              <a:t>05/06/2023</a:t>
+              <a:t>10/06/2023</a:t>
             </a:fld>
             <a:endParaRPr lang="pt-BR"/>
           </a:p>
@@ -2535,7 +2535,7 @@
           <a:p>
             <a:fld id="{52231B9D-E9F6-4612-9B82-E89961B389AC}" type="datetimeFigureOut">
               <a:rPr lang="pt-BR" smtClean="0"/>
-              <a:t>05/06/2023</a:t>
+              <a:t>10/06/2023</a:t>
             </a:fld>
             <a:endParaRPr lang="pt-BR"/>
           </a:p>
@@ -2788,7 +2788,7 @@
           <a:p>
             <a:fld id="{52231B9D-E9F6-4612-9B82-E89961B389AC}" type="datetimeFigureOut">
               <a:rPr lang="pt-BR" smtClean="0"/>
-              <a:t>05/06/2023</a:t>
+              <a:t>10/06/2023</a:t>
             </a:fld>
             <a:endParaRPr lang="pt-BR"/>
           </a:p>
@@ -3001,7 +3001,7 @@
           <a:p>
             <a:fld id="{52231B9D-E9F6-4612-9B82-E89961B389AC}" type="datetimeFigureOut">
               <a:rPr lang="pt-BR" smtClean="0"/>
-              <a:t>05/06/2023</a:t>
+              <a:t>10/06/2023</a:t>
             </a:fld>
             <a:endParaRPr lang="pt-BR"/>
           </a:p>
@@ -3665,7 +3665,7 @@
                   </a:schemeClr>
                 </a:solidFill>
               </a:rPr>
-              <a:t>04</a:t>
+              <a:t>11</a:t>
             </a:r>
             <a:r>
               <a:rPr lang="pt-BR" sz="1600" dirty="0" smtClean="0">

--- a/tempimento.pptx
+++ b/tempimento.pptx
@@ -197,7 +197,7 @@
           <a:p>
             <a:fld id="{A584E3A2-E8EA-4705-A613-CFE9F6F5D3B4}" type="datetimeFigureOut">
               <a:rPr lang="pt-BR" smtClean="0"/>
-              <a:t>10/06/2023</a:t>
+              <a:t>19/06/2023</a:t>
             </a:fld>
             <a:endParaRPr lang="pt-BR"/>
           </a:p>
@@ -680,7 +680,7 @@
           <a:p>
             <a:fld id="{52231B9D-E9F6-4612-9B82-E89961B389AC}" type="datetimeFigureOut">
               <a:rPr lang="pt-BR" smtClean="0"/>
-              <a:t>10/06/2023</a:t>
+              <a:t>19/06/2023</a:t>
             </a:fld>
             <a:endParaRPr lang="pt-BR"/>
           </a:p>
@@ -850,7 +850,7 @@
           <a:p>
             <a:fld id="{52231B9D-E9F6-4612-9B82-E89961B389AC}" type="datetimeFigureOut">
               <a:rPr lang="pt-BR" smtClean="0"/>
-              <a:t>10/06/2023</a:t>
+              <a:t>19/06/2023</a:t>
             </a:fld>
             <a:endParaRPr lang="pt-BR"/>
           </a:p>
@@ -1030,7 +1030,7 @@
           <a:p>
             <a:fld id="{52231B9D-E9F6-4612-9B82-E89961B389AC}" type="datetimeFigureOut">
               <a:rPr lang="pt-BR" smtClean="0"/>
-              <a:t>10/06/2023</a:t>
+              <a:t>19/06/2023</a:t>
             </a:fld>
             <a:endParaRPr lang="pt-BR"/>
           </a:p>
@@ -1200,7 +1200,7 @@
           <a:p>
             <a:fld id="{52231B9D-E9F6-4612-9B82-E89961B389AC}" type="datetimeFigureOut">
               <a:rPr lang="pt-BR" smtClean="0"/>
-              <a:t>10/06/2023</a:t>
+              <a:t>19/06/2023</a:t>
             </a:fld>
             <a:endParaRPr lang="pt-BR"/>
           </a:p>
@@ -1446,7 +1446,7 @@
           <a:p>
             <a:fld id="{52231B9D-E9F6-4612-9B82-E89961B389AC}" type="datetimeFigureOut">
               <a:rPr lang="pt-BR" smtClean="0"/>
-              <a:t>10/06/2023</a:t>
+              <a:t>19/06/2023</a:t>
             </a:fld>
             <a:endParaRPr lang="pt-BR"/>
           </a:p>
@@ -1678,7 +1678,7 @@
           <a:p>
             <a:fld id="{52231B9D-E9F6-4612-9B82-E89961B389AC}" type="datetimeFigureOut">
               <a:rPr lang="pt-BR" smtClean="0"/>
-              <a:t>10/06/2023</a:t>
+              <a:t>19/06/2023</a:t>
             </a:fld>
             <a:endParaRPr lang="pt-BR"/>
           </a:p>
@@ -2045,7 +2045,7 @@
           <a:p>
             <a:fld id="{52231B9D-E9F6-4612-9B82-E89961B389AC}" type="datetimeFigureOut">
               <a:rPr lang="pt-BR" smtClean="0"/>
-              <a:t>10/06/2023</a:t>
+              <a:t>19/06/2023</a:t>
             </a:fld>
             <a:endParaRPr lang="pt-BR"/>
           </a:p>
@@ -2163,7 +2163,7 @@
           <a:p>
             <a:fld id="{52231B9D-E9F6-4612-9B82-E89961B389AC}" type="datetimeFigureOut">
               <a:rPr lang="pt-BR" smtClean="0"/>
-              <a:t>10/06/2023</a:t>
+              <a:t>19/06/2023</a:t>
             </a:fld>
             <a:endParaRPr lang="pt-BR"/>
           </a:p>
@@ -2258,7 +2258,7 @@
           <a:p>
             <a:fld id="{52231B9D-E9F6-4612-9B82-E89961B389AC}" type="datetimeFigureOut">
               <a:rPr lang="pt-BR" smtClean="0"/>
-              <a:t>10/06/2023</a:t>
+              <a:t>19/06/2023</a:t>
             </a:fld>
             <a:endParaRPr lang="pt-BR"/>
           </a:p>
@@ -2535,7 +2535,7 @@
           <a:p>
             <a:fld id="{52231B9D-E9F6-4612-9B82-E89961B389AC}" type="datetimeFigureOut">
               <a:rPr lang="pt-BR" smtClean="0"/>
-              <a:t>10/06/2023</a:t>
+              <a:t>19/06/2023</a:t>
             </a:fld>
             <a:endParaRPr lang="pt-BR"/>
           </a:p>
@@ -2788,7 +2788,7 @@
           <a:p>
             <a:fld id="{52231B9D-E9F6-4612-9B82-E89961B389AC}" type="datetimeFigureOut">
               <a:rPr lang="pt-BR" smtClean="0"/>
-              <a:t>10/06/2023</a:t>
+              <a:t>19/06/2023</a:t>
             </a:fld>
             <a:endParaRPr lang="pt-BR"/>
           </a:p>
@@ -3001,7 +3001,7 @@
           <a:p>
             <a:fld id="{52231B9D-E9F6-4612-9B82-E89961B389AC}" type="datetimeFigureOut">
               <a:rPr lang="pt-BR" smtClean="0"/>
-              <a:t>10/06/2023</a:t>
+              <a:t>19/06/2023</a:t>
             </a:fld>
             <a:endParaRPr lang="pt-BR"/>
           </a:p>
@@ -3665,17 +3665,7 @@
                   </a:schemeClr>
                 </a:solidFill>
               </a:rPr>
-              <a:t>11</a:t>
-            </a:r>
-            <a:r>
-              <a:rPr lang="pt-BR" sz="1600" dirty="0" smtClean="0">
-                <a:solidFill>
-                  <a:schemeClr val="bg2">
-                    <a:lumMod val="90000"/>
-                  </a:schemeClr>
-                </a:solidFill>
-              </a:rPr>
-              <a:t>/06/2023</a:t>
+              <a:t>18/06/2023</a:t>
             </a:r>
             <a:endParaRPr lang="pt-BR" sz="1600" dirty="0">
               <a:solidFill>

--- a/tempimento.pptx
+++ b/tempimento.pptx
@@ -11,7 +11,7 @@
     <p:sldId id="256" r:id="rId2"/>
   </p:sldIdLst>
   <p:sldSz cx="12192000" cy="6858000"/>
-  <p:notesSz cx="6889750" cy="9671050"/>
+  <p:notesSz cx="6797675" cy="9872663"/>
   <p:defaultTextStyle>
     <a:defPPr>
       <a:defRPr lang="pt-BR"/>
@@ -150,7 +150,7 @@
         <p:spPr>
           <a:xfrm>
             <a:off x="6" y="1"/>
-            <a:ext cx="2985970" cy="484528"/>
+            <a:ext cx="2946065" cy="494629"/>
           </a:xfrm>
           <a:prstGeom prst="rect">
             <a:avLst/>
@@ -180,8 +180,8 @@
         </p:nvSpPr>
         <p:spPr>
           <a:xfrm>
-            <a:off x="3902247" y="1"/>
-            <a:ext cx="2985970" cy="484528"/>
+            <a:off x="3850097" y="1"/>
+            <a:ext cx="2946065" cy="494629"/>
           </a:xfrm>
           <a:prstGeom prst="rect">
             <a:avLst/>
@@ -197,7 +197,7 @@
           <a:p>
             <a:fld id="{A584E3A2-E8EA-4705-A613-CFE9F6F5D3B4}" type="datetimeFigureOut">
               <a:rPr lang="pt-BR" smtClean="0"/>
-              <a:t>19/06/2023</a:t>
+              <a:t>23/06/2023</a:t>
             </a:fld>
             <a:endParaRPr lang="pt-BR"/>
           </a:p>
@@ -215,8 +215,8 @@
         </p:nvSpPr>
         <p:spPr>
           <a:xfrm>
-            <a:off x="544513" y="1209675"/>
-            <a:ext cx="5800725" cy="3262313"/>
+            <a:off x="439738" y="1235075"/>
+            <a:ext cx="5918200" cy="3330575"/>
           </a:xfrm>
           <a:prstGeom prst="rect">
             <a:avLst/>
@@ -248,8 +248,8 @@
         </p:nvSpPr>
         <p:spPr>
           <a:xfrm>
-            <a:off x="688363" y="4654767"/>
-            <a:ext cx="5513032" cy="3807217"/>
+            <a:off x="679163" y="4751806"/>
+            <a:ext cx="5439356" cy="3886586"/>
           </a:xfrm>
           <a:prstGeom prst="rect">
             <a:avLst/>
@@ -308,8 +308,8 @@
         </p:nvSpPr>
         <p:spPr>
           <a:xfrm>
-            <a:off x="6" y="9186524"/>
-            <a:ext cx="2985970" cy="484528"/>
+            <a:off x="6" y="9378036"/>
+            <a:ext cx="2946065" cy="494629"/>
           </a:xfrm>
           <a:prstGeom prst="rect">
             <a:avLst/>
@@ -339,8 +339,8 @@
         </p:nvSpPr>
         <p:spPr>
           <a:xfrm>
-            <a:off x="3902247" y="9186524"/>
-            <a:ext cx="2985970" cy="484528"/>
+            <a:off x="3850097" y="9378036"/>
+            <a:ext cx="2946065" cy="494629"/>
           </a:xfrm>
           <a:prstGeom prst="rect">
             <a:avLst/>
@@ -680,7 +680,7 @@
           <a:p>
             <a:fld id="{52231B9D-E9F6-4612-9B82-E89961B389AC}" type="datetimeFigureOut">
               <a:rPr lang="pt-BR" smtClean="0"/>
-              <a:t>19/06/2023</a:t>
+              <a:t>23/06/2023</a:t>
             </a:fld>
             <a:endParaRPr lang="pt-BR"/>
           </a:p>
@@ -850,7 +850,7 @@
           <a:p>
             <a:fld id="{52231B9D-E9F6-4612-9B82-E89961B389AC}" type="datetimeFigureOut">
               <a:rPr lang="pt-BR" smtClean="0"/>
-              <a:t>19/06/2023</a:t>
+              <a:t>23/06/2023</a:t>
             </a:fld>
             <a:endParaRPr lang="pt-BR"/>
           </a:p>
@@ -1030,7 +1030,7 @@
           <a:p>
             <a:fld id="{52231B9D-E9F6-4612-9B82-E89961B389AC}" type="datetimeFigureOut">
               <a:rPr lang="pt-BR" smtClean="0"/>
-              <a:t>19/06/2023</a:t>
+              <a:t>23/06/2023</a:t>
             </a:fld>
             <a:endParaRPr lang="pt-BR"/>
           </a:p>
@@ -1200,7 +1200,7 @@
           <a:p>
             <a:fld id="{52231B9D-E9F6-4612-9B82-E89961B389AC}" type="datetimeFigureOut">
               <a:rPr lang="pt-BR" smtClean="0"/>
-              <a:t>19/06/2023</a:t>
+              <a:t>23/06/2023</a:t>
             </a:fld>
             <a:endParaRPr lang="pt-BR"/>
           </a:p>
@@ -1446,7 +1446,7 @@
           <a:p>
             <a:fld id="{52231B9D-E9F6-4612-9B82-E89961B389AC}" type="datetimeFigureOut">
               <a:rPr lang="pt-BR" smtClean="0"/>
-              <a:t>19/06/2023</a:t>
+              <a:t>23/06/2023</a:t>
             </a:fld>
             <a:endParaRPr lang="pt-BR"/>
           </a:p>
@@ -1678,7 +1678,7 @@
           <a:p>
             <a:fld id="{52231B9D-E9F6-4612-9B82-E89961B389AC}" type="datetimeFigureOut">
               <a:rPr lang="pt-BR" smtClean="0"/>
-              <a:t>19/06/2023</a:t>
+              <a:t>23/06/2023</a:t>
             </a:fld>
             <a:endParaRPr lang="pt-BR"/>
           </a:p>
@@ -2045,7 +2045,7 @@
           <a:p>
             <a:fld id="{52231B9D-E9F6-4612-9B82-E89961B389AC}" type="datetimeFigureOut">
               <a:rPr lang="pt-BR" smtClean="0"/>
-              <a:t>19/06/2023</a:t>
+              <a:t>23/06/2023</a:t>
             </a:fld>
             <a:endParaRPr lang="pt-BR"/>
           </a:p>
@@ -2163,7 +2163,7 @@
           <a:p>
             <a:fld id="{52231B9D-E9F6-4612-9B82-E89961B389AC}" type="datetimeFigureOut">
               <a:rPr lang="pt-BR" smtClean="0"/>
-              <a:t>19/06/2023</a:t>
+              <a:t>23/06/2023</a:t>
             </a:fld>
             <a:endParaRPr lang="pt-BR"/>
           </a:p>
@@ -2258,7 +2258,7 @@
           <a:p>
             <a:fld id="{52231B9D-E9F6-4612-9B82-E89961B389AC}" type="datetimeFigureOut">
               <a:rPr lang="pt-BR" smtClean="0"/>
-              <a:t>19/06/2023</a:t>
+              <a:t>23/06/2023</a:t>
             </a:fld>
             <a:endParaRPr lang="pt-BR"/>
           </a:p>
@@ -2535,7 +2535,7 @@
           <a:p>
             <a:fld id="{52231B9D-E9F6-4612-9B82-E89961B389AC}" type="datetimeFigureOut">
               <a:rPr lang="pt-BR" smtClean="0"/>
-              <a:t>19/06/2023</a:t>
+              <a:t>23/06/2023</a:t>
             </a:fld>
             <a:endParaRPr lang="pt-BR"/>
           </a:p>
@@ -2788,7 +2788,7 @@
           <a:p>
             <a:fld id="{52231B9D-E9F6-4612-9B82-E89961B389AC}" type="datetimeFigureOut">
               <a:rPr lang="pt-BR" smtClean="0"/>
-              <a:t>19/06/2023</a:t>
+              <a:t>23/06/2023</a:t>
             </a:fld>
             <a:endParaRPr lang="pt-BR"/>
           </a:p>
@@ -3001,7 +3001,7 @@
           <a:p>
             <a:fld id="{52231B9D-E9F6-4612-9B82-E89961B389AC}" type="datetimeFigureOut">
               <a:rPr lang="pt-BR" smtClean="0"/>
-              <a:t>19/06/2023</a:t>
+              <a:t>23/06/2023</a:t>
             </a:fld>
             <a:endParaRPr lang="pt-BR"/>
           </a:p>
@@ -3665,7 +3665,17 @@
                   </a:schemeClr>
                 </a:solidFill>
               </a:rPr>
-              <a:t>18/06/2023</a:t>
+              <a:t>31</a:t>
+            </a:r>
+            <a:r>
+              <a:rPr lang="pt-BR" sz="1600" dirty="0" smtClean="0">
+                <a:solidFill>
+                  <a:schemeClr val="bg2">
+                    <a:lumMod val="90000"/>
+                  </a:schemeClr>
+                </a:solidFill>
+              </a:rPr>
+              <a:t>/07/2023</a:t>
             </a:r>
             <a:endParaRPr lang="pt-BR" sz="1600" dirty="0">
               <a:solidFill>

--- a/tempimento.pptx
+++ b/tempimento.pptx
@@ -197,7 +197,7 @@
           <a:p>
             <a:fld id="{A584E3A2-E8EA-4705-A613-CFE9F6F5D3B4}" type="datetimeFigureOut">
               <a:rPr lang="pt-BR" smtClean="0"/>
-              <a:t>23/06/2023</a:t>
+              <a:t>07/07/2023</a:t>
             </a:fld>
             <a:endParaRPr lang="pt-BR"/>
           </a:p>
@@ -680,7 +680,7 @@
           <a:p>
             <a:fld id="{52231B9D-E9F6-4612-9B82-E89961B389AC}" type="datetimeFigureOut">
               <a:rPr lang="pt-BR" smtClean="0"/>
-              <a:t>23/06/2023</a:t>
+              <a:t>07/07/2023</a:t>
             </a:fld>
             <a:endParaRPr lang="pt-BR"/>
           </a:p>
@@ -850,7 +850,7 @@
           <a:p>
             <a:fld id="{52231B9D-E9F6-4612-9B82-E89961B389AC}" type="datetimeFigureOut">
               <a:rPr lang="pt-BR" smtClean="0"/>
-              <a:t>23/06/2023</a:t>
+              <a:t>07/07/2023</a:t>
             </a:fld>
             <a:endParaRPr lang="pt-BR"/>
           </a:p>
@@ -1030,7 +1030,7 @@
           <a:p>
             <a:fld id="{52231B9D-E9F6-4612-9B82-E89961B389AC}" type="datetimeFigureOut">
               <a:rPr lang="pt-BR" smtClean="0"/>
-              <a:t>23/06/2023</a:t>
+              <a:t>07/07/2023</a:t>
             </a:fld>
             <a:endParaRPr lang="pt-BR"/>
           </a:p>
@@ -1200,7 +1200,7 @@
           <a:p>
             <a:fld id="{52231B9D-E9F6-4612-9B82-E89961B389AC}" type="datetimeFigureOut">
               <a:rPr lang="pt-BR" smtClean="0"/>
-              <a:t>23/06/2023</a:t>
+              <a:t>07/07/2023</a:t>
             </a:fld>
             <a:endParaRPr lang="pt-BR"/>
           </a:p>
@@ -1446,7 +1446,7 @@
           <a:p>
             <a:fld id="{52231B9D-E9F6-4612-9B82-E89961B389AC}" type="datetimeFigureOut">
               <a:rPr lang="pt-BR" smtClean="0"/>
-              <a:t>23/06/2023</a:t>
+              <a:t>07/07/2023</a:t>
             </a:fld>
             <a:endParaRPr lang="pt-BR"/>
           </a:p>
@@ -1678,7 +1678,7 @@
           <a:p>
             <a:fld id="{52231B9D-E9F6-4612-9B82-E89961B389AC}" type="datetimeFigureOut">
               <a:rPr lang="pt-BR" smtClean="0"/>
-              <a:t>23/06/2023</a:t>
+              <a:t>07/07/2023</a:t>
             </a:fld>
             <a:endParaRPr lang="pt-BR"/>
           </a:p>
@@ -2045,7 +2045,7 @@
           <a:p>
             <a:fld id="{52231B9D-E9F6-4612-9B82-E89961B389AC}" type="datetimeFigureOut">
               <a:rPr lang="pt-BR" smtClean="0"/>
-              <a:t>23/06/2023</a:t>
+              <a:t>07/07/2023</a:t>
             </a:fld>
             <a:endParaRPr lang="pt-BR"/>
           </a:p>
@@ -2163,7 +2163,7 @@
           <a:p>
             <a:fld id="{52231B9D-E9F6-4612-9B82-E89961B389AC}" type="datetimeFigureOut">
               <a:rPr lang="pt-BR" smtClean="0"/>
-              <a:t>23/06/2023</a:t>
+              <a:t>07/07/2023</a:t>
             </a:fld>
             <a:endParaRPr lang="pt-BR"/>
           </a:p>
@@ -2258,7 +2258,7 @@
           <a:p>
             <a:fld id="{52231B9D-E9F6-4612-9B82-E89961B389AC}" type="datetimeFigureOut">
               <a:rPr lang="pt-BR" smtClean="0"/>
-              <a:t>23/06/2023</a:t>
+              <a:t>07/07/2023</a:t>
             </a:fld>
             <a:endParaRPr lang="pt-BR"/>
           </a:p>
@@ -2535,7 +2535,7 @@
           <a:p>
             <a:fld id="{52231B9D-E9F6-4612-9B82-E89961B389AC}" type="datetimeFigureOut">
               <a:rPr lang="pt-BR" smtClean="0"/>
-              <a:t>23/06/2023</a:t>
+              <a:t>07/07/2023</a:t>
             </a:fld>
             <a:endParaRPr lang="pt-BR"/>
           </a:p>
@@ -2788,7 +2788,7 @@
           <a:p>
             <a:fld id="{52231B9D-E9F6-4612-9B82-E89961B389AC}" type="datetimeFigureOut">
               <a:rPr lang="pt-BR" smtClean="0"/>
-              <a:t>23/06/2023</a:t>
+              <a:t>07/07/2023</a:t>
             </a:fld>
             <a:endParaRPr lang="pt-BR"/>
           </a:p>
@@ -3001,7 +3001,7 @@
           <a:p>
             <a:fld id="{52231B9D-E9F6-4612-9B82-E89961B389AC}" type="datetimeFigureOut">
               <a:rPr lang="pt-BR" smtClean="0"/>
-              <a:t>23/06/2023</a:t>
+              <a:t>07/07/2023</a:t>
             </a:fld>
             <a:endParaRPr lang="pt-BR"/>
           </a:p>
@@ -3665,7 +3665,7 @@
                   </a:schemeClr>
                 </a:solidFill>
               </a:rPr>
-              <a:t>31</a:t>
+              <a:t>13</a:t>
             </a:r>
             <a:r>
               <a:rPr lang="pt-BR" sz="1600" dirty="0" smtClean="0">
@@ -3675,7 +3675,7 @@
                   </a:schemeClr>
                 </a:solidFill>
               </a:rPr>
-              <a:t>/07/2023</a:t>
+              <a:t>/08/2023</a:t>
             </a:r>
             <a:endParaRPr lang="pt-BR" sz="1600" dirty="0">
               <a:solidFill>

--- a/tempimento.pptx
+++ b/tempimento.pptx
@@ -11,7 +11,7 @@
     <p:sldId id="256" r:id="rId2"/>
   </p:sldIdLst>
   <p:sldSz cx="12192000" cy="6858000"/>
-  <p:notesSz cx="6797675" cy="9872663"/>
+  <p:notesSz cx="6889750" cy="9671050"/>
   <p:defaultTextStyle>
     <a:defPPr>
       <a:defRPr lang="pt-BR"/>
@@ -150,7 +150,7 @@
         <p:spPr>
           <a:xfrm>
             <a:off x="6" y="1"/>
-            <a:ext cx="2946065" cy="494629"/>
+            <a:ext cx="2985970" cy="484528"/>
           </a:xfrm>
           <a:prstGeom prst="rect">
             <a:avLst/>
@@ -180,8 +180,8 @@
         </p:nvSpPr>
         <p:spPr>
           <a:xfrm>
-            <a:off x="3850097" y="1"/>
-            <a:ext cx="2946065" cy="494629"/>
+            <a:off x="3902247" y="1"/>
+            <a:ext cx="2985970" cy="484528"/>
           </a:xfrm>
           <a:prstGeom prst="rect">
             <a:avLst/>
@@ -197,7 +197,7 @@
           <a:p>
             <a:fld id="{A584E3A2-E8EA-4705-A613-CFE9F6F5D3B4}" type="datetimeFigureOut">
               <a:rPr lang="pt-BR" smtClean="0"/>
-              <a:t>07/07/2023</a:t>
+              <a:t>24/08/2023</a:t>
             </a:fld>
             <a:endParaRPr lang="pt-BR"/>
           </a:p>
@@ -215,8 +215,8 @@
         </p:nvSpPr>
         <p:spPr>
           <a:xfrm>
-            <a:off x="439738" y="1235075"/>
-            <a:ext cx="5918200" cy="3330575"/>
+            <a:off x="544513" y="1209675"/>
+            <a:ext cx="5800725" cy="3262313"/>
           </a:xfrm>
           <a:prstGeom prst="rect">
             <a:avLst/>
@@ -248,8 +248,8 @@
         </p:nvSpPr>
         <p:spPr>
           <a:xfrm>
-            <a:off x="679163" y="4751806"/>
-            <a:ext cx="5439356" cy="3886586"/>
+            <a:off x="688363" y="4654768"/>
+            <a:ext cx="5513032" cy="3807217"/>
           </a:xfrm>
           <a:prstGeom prst="rect">
             <a:avLst/>
@@ -308,8 +308,8 @@
         </p:nvSpPr>
         <p:spPr>
           <a:xfrm>
-            <a:off x="6" y="9378036"/>
-            <a:ext cx="2946065" cy="494629"/>
+            <a:off x="6" y="9186524"/>
+            <a:ext cx="2985970" cy="484528"/>
           </a:xfrm>
           <a:prstGeom prst="rect">
             <a:avLst/>
@@ -339,8 +339,8 @@
         </p:nvSpPr>
         <p:spPr>
           <a:xfrm>
-            <a:off x="3850097" y="9378036"/>
-            <a:ext cx="2946065" cy="494629"/>
+            <a:off x="3902247" y="9186524"/>
+            <a:ext cx="2985970" cy="484528"/>
           </a:xfrm>
           <a:prstGeom prst="rect">
             <a:avLst/>
@@ -680,7 +680,7 @@
           <a:p>
             <a:fld id="{52231B9D-E9F6-4612-9B82-E89961B389AC}" type="datetimeFigureOut">
               <a:rPr lang="pt-BR" smtClean="0"/>
-              <a:t>07/07/2023</a:t>
+              <a:t>24/08/2023</a:t>
             </a:fld>
             <a:endParaRPr lang="pt-BR"/>
           </a:p>
@@ -850,7 +850,7 @@
           <a:p>
             <a:fld id="{52231B9D-E9F6-4612-9B82-E89961B389AC}" type="datetimeFigureOut">
               <a:rPr lang="pt-BR" smtClean="0"/>
-              <a:t>07/07/2023</a:t>
+              <a:t>24/08/2023</a:t>
             </a:fld>
             <a:endParaRPr lang="pt-BR"/>
           </a:p>
@@ -1030,7 +1030,7 @@
           <a:p>
             <a:fld id="{52231B9D-E9F6-4612-9B82-E89961B389AC}" type="datetimeFigureOut">
               <a:rPr lang="pt-BR" smtClean="0"/>
-              <a:t>07/07/2023</a:t>
+              <a:t>24/08/2023</a:t>
             </a:fld>
             <a:endParaRPr lang="pt-BR"/>
           </a:p>
@@ -1200,7 +1200,7 @@
           <a:p>
             <a:fld id="{52231B9D-E9F6-4612-9B82-E89961B389AC}" type="datetimeFigureOut">
               <a:rPr lang="pt-BR" smtClean="0"/>
-              <a:t>07/07/2023</a:t>
+              <a:t>24/08/2023</a:t>
             </a:fld>
             <a:endParaRPr lang="pt-BR"/>
           </a:p>
@@ -1446,7 +1446,7 @@
           <a:p>
             <a:fld id="{52231B9D-E9F6-4612-9B82-E89961B389AC}" type="datetimeFigureOut">
               <a:rPr lang="pt-BR" smtClean="0"/>
-              <a:t>07/07/2023</a:t>
+              <a:t>24/08/2023</a:t>
             </a:fld>
             <a:endParaRPr lang="pt-BR"/>
           </a:p>
@@ -1678,7 +1678,7 @@
           <a:p>
             <a:fld id="{52231B9D-E9F6-4612-9B82-E89961B389AC}" type="datetimeFigureOut">
               <a:rPr lang="pt-BR" smtClean="0"/>
-              <a:t>07/07/2023</a:t>
+              <a:t>24/08/2023</a:t>
             </a:fld>
             <a:endParaRPr lang="pt-BR"/>
           </a:p>
@@ -2045,7 +2045,7 @@
           <a:p>
             <a:fld id="{52231B9D-E9F6-4612-9B82-E89961B389AC}" type="datetimeFigureOut">
               <a:rPr lang="pt-BR" smtClean="0"/>
-              <a:t>07/07/2023</a:t>
+              <a:t>24/08/2023</a:t>
             </a:fld>
             <a:endParaRPr lang="pt-BR"/>
           </a:p>
@@ -2163,7 +2163,7 @@
           <a:p>
             <a:fld id="{52231B9D-E9F6-4612-9B82-E89961B389AC}" type="datetimeFigureOut">
               <a:rPr lang="pt-BR" smtClean="0"/>
-              <a:t>07/07/2023</a:t>
+              <a:t>24/08/2023</a:t>
             </a:fld>
             <a:endParaRPr lang="pt-BR"/>
           </a:p>
@@ -2258,7 +2258,7 @@
           <a:p>
             <a:fld id="{52231B9D-E9F6-4612-9B82-E89961B389AC}" type="datetimeFigureOut">
               <a:rPr lang="pt-BR" smtClean="0"/>
-              <a:t>07/07/2023</a:t>
+              <a:t>24/08/2023</a:t>
             </a:fld>
             <a:endParaRPr lang="pt-BR"/>
           </a:p>
@@ -2535,7 +2535,7 @@
           <a:p>
             <a:fld id="{52231B9D-E9F6-4612-9B82-E89961B389AC}" type="datetimeFigureOut">
               <a:rPr lang="pt-BR" smtClean="0"/>
-              <a:t>07/07/2023</a:t>
+              <a:t>24/08/2023</a:t>
             </a:fld>
             <a:endParaRPr lang="pt-BR"/>
           </a:p>
@@ -2788,7 +2788,7 @@
           <a:p>
             <a:fld id="{52231B9D-E9F6-4612-9B82-E89961B389AC}" type="datetimeFigureOut">
               <a:rPr lang="pt-BR" smtClean="0"/>
-              <a:t>07/07/2023</a:t>
+              <a:t>24/08/2023</a:t>
             </a:fld>
             <a:endParaRPr lang="pt-BR"/>
           </a:p>
@@ -3001,7 +3001,7 @@
           <a:p>
             <a:fld id="{52231B9D-E9F6-4612-9B82-E89961B389AC}" type="datetimeFigureOut">
               <a:rPr lang="pt-BR" smtClean="0"/>
-              <a:t>07/07/2023</a:t>
+              <a:t>24/08/2023</a:t>
             </a:fld>
             <a:endParaRPr lang="pt-BR"/>
           </a:p>
@@ -3665,17 +3665,7 @@
                   </a:schemeClr>
                 </a:solidFill>
               </a:rPr>
-              <a:t>13</a:t>
-            </a:r>
-            <a:r>
-              <a:rPr lang="pt-BR" sz="1600" dirty="0" smtClean="0">
-                <a:solidFill>
-                  <a:schemeClr val="bg2">
-                    <a:lumMod val="90000"/>
-                  </a:schemeClr>
-                </a:solidFill>
-              </a:rPr>
-              <a:t>/08/2023</a:t>
+              <a:t>20/08/2023</a:t>
             </a:r>
             <a:endParaRPr lang="pt-BR" sz="1600" dirty="0">
               <a:solidFill>

--- a/tempimento.pptx
+++ b/tempimento.pptx
@@ -197,7 +197,7 @@
           <a:p>
             <a:fld id="{A584E3A2-E8EA-4705-A613-CFE9F6F5D3B4}" type="datetimeFigureOut">
               <a:rPr lang="pt-BR" smtClean="0"/>
-              <a:t>24/08/2023</a:t>
+              <a:t>29/08/2023</a:t>
             </a:fld>
             <a:endParaRPr lang="pt-BR"/>
           </a:p>
@@ -680,7 +680,7 @@
           <a:p>
             <a:fld id="{52231B9D-E9F6-4612-9B82-E89961B389AC}" type="datetimeFigureOut">
               <a:rPr lang="pt-BR" smtClean="0"/>
-              <a:t>24/08/2023</a:t>
+              <a:t>29/08/2023</a:t>
             </a:fld>
             <a:endParaRPr lang="pt-BR"/>
           </a:p>
@@ -850,7 +850,7 @@
           <a:p>
             <a:fld id="{52231B9D-E9F6-4612-9B82-E89961B389AC}" type="datetimeFigureOut">
               <a:rPr lang="pt-BR" smtClean="0"/>
-              <a:t>24/08/2023</a:t>
+              <a:t>29/08/2023</a:t>
             </a:fld>
             <a:endParaRPr lang="pt-BR"/>
           </a:p>
@@ -1030,7 +1030,7 @@
           <a:p>
             <a:fld id="{52231B9D-E9F6-4612-9B82-E89961B389AC}" type="datetimeFigureOut">
               <a:rPr lang="pt-BR" smtClean="0"/>
-              <a:t>24/08/2023</a:t>
+              <a:t>29/08/2023</a:t>
             </a:fld>
             <a:endParaRPr lang="pt-BR"/>
           </a:p>
@@ -1200,7 +1200,7 @@
           <a:p>
             <a:fld id="{52231B9D-E9F6-4612-9B82-E89961B389AC}" type="datetimeFigureOut">
               <a:rPr lang="pt-BR" smtClean="0"/>
-              <a:t>24/08/2023</a:t>
+              <a:t>29/08/2023</a:t>
             </a:fld>
             <a:endParaRPr lang="pt-BR"/>
           </a:p>
@@ -1446,7 +1446,7 @@
           <a:p>
             <a:fld id="{52231B9D-E9F6-4612-9B82-E89961B389AC}" type="datetimeFigureOut">
               <a:rPr lang="pt-BR" smtClean="0"/>
-              <a:t>24/08/2023</a:t>
+              <a:t>29/08/2023</a:t>
             </a:fld>
             <a:endParaRPr lang="pt-BR"/>
           </a:p>
@@ -1678,7 +1678,7 @@
           <a:p>
             <a:fld id="{52231B9D-E9F6-4612-9B82-E89961B389AC}" type="datetimeFigureOut">
               <a:rPr lang="pt-BR" smtClean="0"/>
-              <a:t>24/08/2023</a:t>
+              <a:t>29/08/2023</a:t>
             </a:fld>
             <a:endParaRPr lang="pt-BR"/>
           </a:p>
@@ -2045,7 +2045,7 @@
           <a:p>
             <a:fld id="{52231B9D-E9F6-4612-9B82-E89961B389AC}" type="datetimeFigureOut">
               <a:rPr lang="pt-BR" smtClean="0"/>
-              <a:t>24/08/2023</a:t>
+              <a:t>29/08/2023</a:t>
             </a:fld>
             <a:endParaRPr lang="pt-BR"/>
           </a:p>
@@ -2163,7 +2163,7 @@
           <a:p>
             <a:fld id="{52231B9D-E9F6-4612-9B82-E89961B389AC}" type="datetimeFigureOut">
               <a:rPr lang="pt-BR" smtClean="0"/>
-              <a:t>24/08/2023</a:t>
+              <a:t>29/08/2023</a:t>
             </a:fld>
             <a:endParaRPr lang="pt-BR"/>
           </a:p>
@@ -2258,7 +2258,7 @@
           <a:p>
             <a:fld id="{52231B9D-E9F6-4612-9B82-E89961B389AC}" type="datetimeFigureOut">
               <a:rPr lang="pt-BR" smtClean="0"/>
-              <a:t>24/08/2023</a:t>
+              <a:t>29/08/2023</a:t>
             </a:fld>
             <a:endParaRPr lang="pt-BR"/>
           </a:p>
@@ -2535,7 +2535,7 @@
           <a:p>
             <a:fld id="{52231B9D-E9F6-4612-9B82-E89961B389AC}" type="datetimeFigureOut">
               <a:rPr lang="pt-BR" smtClean="0"/>
-              <a:t>24/08/2023</a:t>
+              <a:t>29/08/2023</a:t>
             </a:fld>
             <a:endParaRPr lang="pt-BR"/>
           </a:p>
@@ -2788,7 +2788,7 @@
           <a:p>
             <a:fld id="{52231B9D-E9F6-4612-9B82-E89961B389AC}" type="datetimeFigureOut">
               <a:rPr lang="pt-BR" smtClean="0"/>
-              <a:t>24/08/2023</a:t>
+              <a:t>29/08/2023</a:t>
             </a:fld>
             <a:endParaRPr lang="pt-BR"/>
           </a:p>
@@ -3001,7 +3001,7 @@
           <a:p>
             <a:fld id="{52231B9D-E9F6-4612-9B82-E89961B389AC}" type="datetimeFigureOut">
               <a:rPr lang="pt-BR" smtClean="0"/>
-              <a:t>24/08/2023</a:t>
+              <a:t>29/08/2023</a:t>
             </a:fld>
             <a:endParaRPr lang="pt-BR"/>
           </a:p>
@@ -3665,7 +3665,7 @@
                   </a:schemeClr>
                 </a:solidFill>
               </a:rPr>
-              <a:t>20/08/2023</a:t>
+              <a:t>27/08/2023</a:t>
             </a:r>
             <a:endParaRPr lang="pt-BR" sz="1600" dirty="0">
               <a:solidFill>

--- a/tempimento.pptx
+++ b/tempimento.pptx
@@ -197,7 +197,7 @@
           <a:p>
             <a:fld id="{A584E3A2-E8EA-4705-A613-CFE9F6F5D3B4}" type="datetimeFigureOut">
               <a:rPr lang="pt-BR" smtClean="0"/>
-              <a:t>29/08/2023</a:t>
+              <a:t>04/09/2023</a:t>
             </a:fld>
             <a:endParaRPr lang="pt-BR"/>
           </a:p>
@@ -680,7 +680,7 @@
           <a:p>
             <a:fld id="{52231B9D-E9F6-4612-9B82-E89961B389AC}" type="datetimeFigureOut">
               <a:rPr lang="pt-BR" smtClean="0"/>
-              <a:t>29/08/2023</a:t>
+              <a:t>04/09/2023</a:t>
             </a:fld>
             <a:endParaRPr lang="pt-BR"/>
           </a:p>
@@ -850,7 +850,7 @@
           <a:p>
             <a:fld id="{52231B9D-E9F6-4612-9B82-E89961B389AC}" type="datetimeFigureOut">
               <a:rPr lang="pt-BR" smtClean="0"/>
-              <a:t>29/08/2023</a:t>
+              <a:t>04/09/2023</a:t>
             </a:fld>
             <a:endParaRPr lang="pt-BR"/>
           </a:p>
@@ -1030,7 +1030,7 @@
           <a:p>
             <a:fld id="{52231B9D-E9F6-4612-9B82-E89961B389AC}" type="datetimeFigureOut">
               <a:rPr lang="pt-BR" smtClean="0"/>
-              <a:t>29/08/2023</a:t>
+              <a:t>04/09/2023</a:t>
             </a:fld>
             <a:endParaRPr lang="pt-BR"/>
           </a:p>
@@ -1200,7 +1200,7 @@
           <a:p>
             <a:fld id="{52231B9D-E9F6-4612-9B82-E89961B389AC}" type="datetimeFigureOut">
               <a:rPr lang="pt-BR" smtClean="0"/>
-              <a:t>29/08/2023</a:t>
+              <a:t>04/09/2023</a:t>
             </a:fld>
             <a:endParaRPr lang="pt-BR"/>
           </a:p>
@@ -1446,7 +1446,7 @@
           <a:p>
             <a:fld id="{52231B9D-E9F6-4612-9B82-E89961B389AC}" type="datetimeFigureOut">
               <a:rPr lang="pt-BR" smtClean="0"/>
-              <a:t>29/08/2023</a:t>
+              <a:t>04/09/2023</a:t>
             </a:fld>
             <a:endParaRPr lang="pt-BR"/>
           </a:p>
@@ -1678,7 +1678,7 @@
           <a:p>
             <a:fld id="{52231B9D-E9F6-4612-9B82-E89961B389AC}" type="datetimeFigureOut">
               <a:rPr lang="pt-BR" smtClean="0"/>
-              <a:t>29/08/2023</a:t>
+              <a:t>04/09/2023</a:t>
             </a:fld>
             <a:endParaRPr lang="pt-BR"/>
           </a:p>
@@ -2045,7 +2045,7 @@
           <a:p>
             <a:fld id="{52231B9D-E9F6-4612-9B82-E89961B389AC}" type="datetimeFigureOut">
               <a:rPr lang="pt-BR" smtClean="0"/>
-              <a:t>29/08/2023</a:t>
+              <a:t>04/09/2023</a:t>
             </a:fld>
             <a:endParaRPr lang="pt-BR"/>
           </a:p>
@@ -2163,7 +2163,7 @@
           <a:p>
             <a:fld id="{52231B9D-E9F6-4612-9B82-E89961B389AC}" type="datetimeFigureOut">
               <a:rPr lang="pt-BR" smtClean="0"/>
-              <a:t>29/08/2023</a:t>
+              <a:t>04/09/2023</a:t>
             </a:fld>
             <a:endParaRPr lang="pt-BR"/>
           </a:p>
@@ -2258,7 +2258,7 @@
           <a:p>
             <a:fld id="{52231B9D-E9F6-4612-9B82-E89961B389AC}" type="datetimeFigureOut">
               <a:rPr lang="pt-BR" smtClean="0"/>
-              <a:t>29/08/2023</a:t>
+              <a:t>04/09/2023</a:t>
             </a:fld>
             <a:endParaRPr lang="pt-BR"/>
           </a:p>
@@ -2535,7 +2535,7 @@
           <a:p>
             <a:fld id="{52231B9D-E9F6-4612-9B82-E89961B389AC}" type="datetimeFigureOut">
               <a:rPr lang="pt-BR" smtClean="0"/>
-              <a:t>29/08/2023</a:t>
+              <a:t>04/09/2023</a:t>
             </a:fld>
             <a:endParaRPr lang="pt-BR"/>
           </a:p>
@@ -2788,7 +2788,7 @@
           <a:p>
             <a:fld id="{52231B9D-E9F6-4612-9B82-E89961B389AC}" type="datetimeFigureOut">
               <a:rPr lang="pt-BR" smtClean="0"/>
-              <a:t>29/08/2023</a:t>
+              <a:t>04/09/2023</a:t>
             </a:fld>
             <a:endParaRPr lang="pt-BR"/>
           </a:p>
@@ -3001,7 +3001,7 @@
           <a:p>
             <a:fld id="{52231B9D-E9F6-4612-9B82-E89961B389AC}" type="datetimeFigureOut">
               <a:rPr lang="pt-BR" smtClean="0"/>
-              <a:t>29/08/2023</a:t>
+              <a:t>04/09/2023</a:t>
             </a:fld>
             <a:endParaRPr lang="pt-BR"/>
           </a:p>
@@ -3658,14 +3658,24 @@
           <a:lstStyle/>
           <a:p>
             <a:r>
-              <a:rPr lang="pt-BR" sz="1600" dirty="0" smtClean="0">
+              <a:rPr lang="pt-BR" sz="1600" smtClean="0">
                 <a:solidFill>
                   <a:schemeClr val="bg2">
                     <a:lumMod val="90000"/>
                   </a:schemeClr>
                 </a:solidFill>
               </a:rPr>
-              <a:t>27/08/2023</a:t>
+              <a:t>03</a:t>
+            </a:r>
+            <a:r>
+              <a:rPr lang="pt-BR" sz="1600" smtClean="0">
+                <a:solidFill>
+                  <a:schemeClr val="bg2">
+                    <a:lumMod val="90000"/>
+                  </a:schemeClr>
+                </a:solidFill>
+              </a:rPr>
+              <a:t>/09/2023</a:t>
             </a:r>
             <a:endParaRPr lang="pt-BR" sz="1600" dirty="0">
               <a:solidFill>

--- a/tempimento.pptx
+++ b/tempimento.pptx
@@ -197,7 +197,7 @@
           <a:p>
             <a:fld id="{A584E3A2-E8EA-4705-A613-CFE9F6F5D3B4}" type="datetimeFigureOut">
               <a:rPr lang="pt-BR" smtClean="0"/>
-              <a:t>04/09/2023</a:t>
+              <a:t>14/09/2023</a:t>
             </a:fld>
             <a:endParaRPr lang="pt-BR"/>
           </a:p>
@@ -680,7 +680,7 @@
           <a:p>
             <a:fld id="{52231B9D-E9F6-4612-9B82-E89961B389AC}" type="datetimeFigureOut">
               <a:rPr lang="pt-BR" smtClean="0"/>
-              <a:t>04/09/2023</a:t>
+              <a:t>14/09/2023</a:t>
             </a:fld>
             <a:endParaRPr lang="pt-BR"/>
           </a:p>
@@ -850,7 +850,7 @@
           <a:p>
             <a:fld id="{52231B9D-E9F6-4612-9B82-E89961B389AC}" type="datetimeFigureOut">
               <a:rPr lang="pt-BR" smtClean="0"/>
-              <a:t>04/09/2023</a:t>
+              <a:t>14/09/2023</a:t>
             </a:fld>
             <a:endParaRPr lang="pt-BR"/>
           </a:p>
@@ -1030,7 +1030,7 @@
           <a:p>
             <a:fld id="{52231B9D-E9F6-4612-9B82-E89961B389AC}" type="datetimeFigureOut">
               <a:rPr lang="pt-BR" smtClean="0"/>
-              <a:t>04/09/2023</a:t>
+              <a:t>14/09/2023</a:t>
             </a:fld>
             <a:endParaRPr lang="pt-BR"/>
           </a:p>
@@ -1200,7 +1200,7 @@
           <a:p>
             <a:fld id="{52231B9D-E9F6-4612-9B82-E89961B389AC}" type="datetimeFigureOut">
               <a:rPr lang="pt-BR" smtClean="0"/>
-              <a:t>04/09/2023</a:t>
+              <a:t>14/09/2023</a:t>
             </a:fld>
             <a:endParaRPr lang="pt-BR"/>
           </a:p>
@@ -1446,7 +1446,7 @@
           <a:p>
             <a:fld id="{52231B9D-E9F6-4612-9B82-E89961B389AC}" type="datetimeFigureOut">
               <a:rPr lang="pt-BR" smtClean="0"/>
-              <a:t>04/09/2023</a:t>
+              <a:t>14/09/2023</a:t>
             </a:fld>
             <a:endParaRPr lang="pt-BR"/>
           </a:p>
@@ -1678,7 +1678,7 @@
           <a:p>
             <a:fld id="{52231B9D-E9F6-4612-9B82-E89961B389AC}" type="datetimeFigureOut">
               <a:rPr lang="pt-BR" smtClean="0"/>
-              <a:t>04/09/2023</a:t>
+              <a:t>14/09/2023</a:t>
             </a:fld>
             <a:endParaRPr lang="pt-BR"/>
           </a:p>
@@ -2045,7 +2045,7 @@
           <a:p>
             <a:fld id="{52231B9D-E9F6-4612-9B82-E89961B389AC}" type="datetimeFigureOut">
               <a:rPr lang="pt-BR" smtClean="0"/>
-              <a:t>04/09/2023</a:t>
+              <a:t>14/09/2023</a:t>
             </a:fld>
             <a:endParaRPr lang="pt-BR"/>
           </a:p>
@@ -2163,7 +2163,7 @@
           <a:p>
             <a:fld id="{52231B9D-E9F6-4612-9B82-E89961B389AC}" type="datetimeFigureOut">
               <a:rPr lang="pt-BR" smtClean="0"/>
-              <a:t>04/09/2023</a:t>
+              <a:t>14/09/2023</a:t>
             </a:fld>
             <a:endParaRPr lang="pt-BR"/>
           </a:p>
@@ -2258,7 +2258,7 @@
           <a:p>
             <a:fld id="{52231B9D-E9F6-4612-9B82-E89961B389AC}" type="datetimeFigureOut">
               <a:rPr lang="pt-BR" smtClean="0"/>
-              <a:t>04/09/2023</a:t>
+              <a:t>14/09/2023</a:t>
             </a:fld>
             <a:endParaRPr lang="pt-BR"/>
           </a:p>
@@ -2535,7 +2535,7 @@
           <a:p>
             <a:fld id="{52231B9D-E9F6-4612-9B82-E89961B389AC}" type="datetimeFigureOut">
               <a:rPr lang="pt-BR" smtClean="0"/>
-              <a:t>04/09/2023</a:t>
+              <a:t>14/09/2023</a:t>
             </a:fld>
             <a:endParaRPr lang="pt-BR"/>
           </a:p>
@@ -2788,7 +2788,7 @@
           <a:p>
             <a:fld id="{52231B9D-E9F6-4612-9B82-E89961B389AC}" type="datetimeFigureOut">
               <a:rPr lang="pt-BR" smtClean="0"/>
-              <a:t>04/09/2023</a:t>
+              <a:t>14/09/2023</a:t>
             </a:fld>
             <a:endParaRPr lang="pt-BR"/>
           </a:p>
@@ -3001,7 +3001,7 @@
           <a:p>
             <a:fld id="{52231B9D-E9F6-4612-9B82-E89961B389AC}" type="datetimeFigureOut">
               <a:rPr lang="pt-BR" smtClean="0"/>
-              <a:t>04/09/2023</a:t>
+              <a:t>14/09/2023</a:t>
             </a:fld>
             <a:endParaRPr lang="pt-BR"/>
           </a:p>
@@ -3658,17 +3658,17 @@
           <a:lstStyle/>
           <a:p>
             <a:r>
-              <a:rPr lang="pt-BR" sz="1600" smtClean="0">
+              <a:rPr lang="pt-BR" sz="1600" dirty="0" smtClean="0">
                 <a:solidFill>
                   <a:schemeClr val="bg2">
                     <a:lumMod val="90000"/>
                   </a:schemeClr>
                 </a:solidFill>
               </a:rPr>
-              <a:t>03</a:t>
-            </a:r>
-            <a:r>
-              <a:rPr lang="pt-BR" sz="1600" smtClean="0">
+              <a:t>10</a:t>
+            </a:r>
+            <a:r>
+              <a:rPr lang="pt-BR" sz="1600" dirty="0" smtClean="0">
                 <a:solidFill>
                   <a:schemeClr val="bg2">
                     <a:lumMod val="90000"/>

--- a/tempimento.pptx
+++ b/tempimento.pptx
@@ -197,7 +197,7 @@
           <a:p>
             <a:fld id="{A584E3A2-E8EA-4705-A613-CFE9F6F5D3B4}" type="datetimeFigureOut">
               <a:rPr lang="pt-BR" smtClean="0"/>
-              <a:t>14/09/2023</a:t>
+              <a:t>18/09/2023</a:t>
             </a:fld>
             <a:endParaRPr lang="pt-BR"/>
           </a:p>
@@ -680,7 +680,7 @@
           <a:p>
             <a:fld id="{52231B9D-E9F6-4612-9B82-E89961B389AC}" type="datetimeFigureOut">
               <a:rPr lang="pt-BR" smtClean="0"/>
-              <a:t>14/09/2023</a:t>
+              <a:t>18/09/2023</a:t>
             </a:fld>
             <a:endParaRPr lang="pt-BR"/>
           </a:p>
@@ -850,7 +850,7 @@
           <a:p>
             <a:fld id="{52231B9D-E9F6-4612-9B82-E89961B389AC}" type="datetimeFigureOut">
               <a:rPr lang="pt-BR" smtClean="0"/>
-              <a:t>14/09/2023</a:t>
+              <a:t>18/09/2023</a:t>
             </a:fld>
             <a:endParaRPr lang="pt-BR"/>
           </a:p>
@@ -1030,7 +1030,7 @@
           <a:p>
             <a:fld id="{52231B9D-E9F6-4612-9B82-E89961B389AC}" type="datetimeFigureOut">
               <a:rPr lang="pt-BR" smtClean="0"/>
-              <a:t>14/09/2023</a:t>
+              <a:t>18/09/2023</a:t>
             </a:fld>
             <a:endParaRPr lang="pt-BR"/>
           </a:p>
@@ -1200,7 +1200,7 @@
           <a:p>
             <a:fld id="{52231B9D-E9F6-4612-9B82-E89961B389AC}" type="datetimeFigureOut">
               <a:rPr lang="pt-BR" smtClean="0"/>
-              <a:t>14/09/2023</a:t>
+              <a:t>18/09/2023</a:t>
             </a:fld>
             <a:endParaRPr lang="pt-BR"/>
           </a:p>
@@ -1446,7 +1446,7 @@
           <a:p>
             <a:fld id="{52231B9D-E9F6-4612-9B82-E89961B389AC}" type="datetimeFigureOut">
               <a:rPr lang="pt-BR" smtClean="0"/>
-              <a:t>14/09/2023</a:t>
+              <a:t>18/09/2023</a:t>
             </a:fld>
             <a:endParaRPr lang="pt-BR"/>
           </a:p>
@@ -1678,7 +1678,7 @@
           <a:p>
             <a:fld id="{52231B9D-E9F6-4612-9B82-E89961B389AC}" type="datetimeFigureOut">
               <a:rPr lang="pt-BR" smtClean="0"/>
-              <a:t>14/09/2023</a:t>
+              <a:t>18/09/2023</a:t>
             </a:fld>
             <a:endParaRPr lang="pt-BR"/>
           </a:p>
@@ -2045,7 +2045,7 @@
           <a:p>
             <a:fld id="{52231B9D-E9F6-4612-9B82-E89961B389AC}" type="datetimeFigureOut">
               <a:rPr lang="pt-BR" smtClean="0"/>
-              <a:t>14/09/2023</a:t>
+              <a:t>18/09/2023</a:t>
             </a:fld>
             <a:endParaRPr lang="pt-BR"/>
           </a:p>
@@ -2163,7 +2163,7 @@
           <a:p>
             <a:fld id="{52231B9D-E9F6-4612-9B82-E89961B389AC}" type="datetimeFigureOut">
               <a:rPr lang="pt-BR" smtClean="0"/>
-              <a:t>14/09/2023</a:t>
+              <a:t>18/09/2023</a:t>
             </a:fld>
             <a:endParaRPr lang="pt-BR"/>
           </a:p>
@@ -2258,7 +2258,7 @@
           <a:p>
             <a:fld id="{52231B9D-E9F6-4612-9B82-E89961B389AC}" type="datetimeFigureOut">
               <a:rPr lang="pt-BR" smtClean="0"/>
-              <a:t>14/09/2023</a:t>
+              <a:t>18/09/2023</a:t>
             </a:fld>
             <a:endParaRPr lang="pt-BR"/>
           </a:p>
@@ -2535,7 +2535,7 @@
           <a:p>
             <a:fld id="{52231B9D-E9F6-4612-9B82-E89961B389AC}" type="datetimeFigureOut">
               <a:rPr lang="pt-BR" smtClean="0"/>
-              <a:t>14/09/2023</a:t>
+              <a:t>18/09/2023</a:t>
             </a:fld>
             <a:endParaRPr lang="pt-BR"/>
           </a:p>
@@ -2788,7 +2788,7 @@
           <a:p>
             <a:fld id="{52231B9D-E9F6-4612-9B82-E89961B389AC}" type="datetimeFigureOut">
               <a:rPr lang="pt-BR" smtClean="0"/>
-              <a:t>14/09/2023</a:t>
+              <a:t>18/09/2023</a:t>
             </a:fld>
             <a:endParaRPr lang="pt-BR"/>
           </a:p>
@@ -3001,7 +3001,7 @@
           <a:p>
             <a:fld id="{52231B9D-E9F6-4612-9B82-E89961B389AC}" type="datetimeFigureOut">
               <a:rPr lang="pt-BR" smtClean="0"/>
-              <a:t>14/09/2023</a:t>
+              <a:t>18/09/2023</a:t>
             </a:fld>
             <a:endParaRPr lang="pt-BR"/>
           </a:p>
@@ -3658,24 +3658,14 @@
           <a:lstStyle/>
           <a:p>
             <a:r>
-              <a:rPr lang="pt-BR" sz="1600" dirty="0" smtClean="0">
+              <a:rPr lang="pt-BR" sz="1600" smtClean="0">
                 <a:solidFill>
                   <a:schemeClr val="bg2">
                     <a:lumMod val="90000"/>
                   </a:schemeClr>
                 </a:solidFill>
               </a:rPr>
-              <a:t>10</a:t>
-            </a:r>
-            <a:r>
-              <a:rPr lang="pt-BR" sz="1600" dirty="0" smtClean="0">
-                <a:solidFill>
-                  <a:schemeClr val="bg2">
-                    <a:lumMod val="90000"/>
-                  </a:schemeClr>
-                </a:solidFill>
-              </a:rPr>
-              <a:t>/09/2023</a:t>
+              <a:t>17/09/2023</a:t>
             </a:r>
             <a:endParaRPr lang="pt-BR" sz="1600" dirty="0">
               <a:solidFill>

--- a/tempimento.pptx
+++ b/tempimento.pptx
@@ -197,7 +197,7 @@
           <a:p>
             <a:fld id="{A584E3A2-E8EA-4705-A613-CFE9F6F5D3B4}" type="datetimeFigureOut">
               <a:rPr lang="pt-BR" smtClean="0"/>
-              <a:t>18/09/2023</a:t>
+              <a:t>25/09/2023</a:t>
             </a:fld>
             <a:endParaRPr lang="pt-BR"/>
           </a:p>
@@ -680,7 +680,7 @@
           <a:p>
             <a:fld id="{52231B9D-E9F6-4612-9B82-E89961B389AC}" type="datetimeFigureOut">
               <a:rPr lang="pt-BR" smtClean="0"/>
-              <a:t>18/09/2023</a:t>
+              <a:t>25/09/2023</a:t>
             </a:fld>
             <a:endParaRPr lang="pt-BR"/>
           </a:p>
@@ -850,7 +850,7 @@
           <a:p>
             <a:fld id="{52231B9D-E9F6-4612-9B82-E89961B389AC}" type="datetimeFigureOut">
               <a:rPr lang="pt-BR" smtClean="0"/>
-              <a:t>18/09/2023</a:t>
+              <a:t>25/09/2023</a:t>
             </a:fld>
             <a:endParaRPr lang="pt-BR"/>
           </a:p>
@@ -1030,7 +1030,7 @@
           <a:p>
             <a:fld id="{52231B9D-E9F6-4612-9B82-E89961B389AC}" type="datetimeFigureOut">
               <a:rPr lang="pt-BR" smtClean="0"/>
-              <a:t>18/09/2023</a:t>
+              <a:t>25/09/2023</a:t>
             </a:fld>
             <a:endParaRPr lang="pt-BR"/>
           </a:p>
@@ -1200,7 +1200,7 @@
           <a:p>
             <a:fld id="{52231B9D-E9F6-4612-9B82-E89961B389AC}" type="datetimeFigureOut">
               <a:rPr lang="pt-BR" smtClean="0"/>
-              <a:t>18/09/2023</a:t>
+              <a:t>25/09/2023</a:t>
             </a:fld>
             <a:endParaRPr lang="pt-BR"/>
           </a:p>
@@ -1446,7 +1446,7 @@
           <a:p>
             <a:fld id="{52231B9D-E9F6-4612-9B82-E89961B389AC}" type="datetimeFigureOut">
               <a:rPr lang="pt-BR" smtClean="0"/>
-              <a:t>18/09/2023</a:t>
+              <a:t>25/09/2023</a:t>
             </a:fld>
             <a:endParaRPr lang="pt-BR"/>
           </a:p>
@@ -1678,7 +1678,7 @@
           <a:p>
             <a:fld id="{52231B9D-E9F6-4612-9B82-E89961B389AC}" type="datetimeFigureOut">
               <a:rPr lang="pt-BR" smtClean="0"/>
-              <a:t>18/09/2023</a:t>
+              <a:t>25/09/2023</a:t>
             </a:fld>
             <a:endParaRPr lang="pt-BR"/>
           </a:p>
@@ -2045,7 +2045,7 @@
           <a:p>
             <a:fld id="{52231B9D-E9F6-4612-9B82-E89961B389AC}" type="datetimeFigureOut">
               <a:rPr lang="pt-BR" smtClean="0"/>
-              <a:t>18/09/2023</a:t>
+              <a:t>25/09/2023</a:t>
             </a:fld>
             <a:endParaRPr lang="pt-BR"/>
           </a:p>
@@ -2163,7 +2163,7 @@
           <a:p>
             <a:fld id="{52231B9D-E9F6-4612-9B82-E89961B389AC}" type="datetimeFigureOut">
               <a:rPr lang="pt-BR" smtClean="0"/>
-              <a:t>18/09/2023</a:t>
+              <a:t>25/09/2023</a:t>
             </a:fld>
             <a:endParaRPr lang="pt-BR"/>
           </a:p>
@@ -2258,7 +2258,7 @@
           <a:p>
             <a:fld id="{52231B9D-E9F6-4612-9B82-E89961B389AC}" type="datetimeFigureOut">
               <a:rPr lang="pt-BR" smtClean="0"/>
-              <a:t>18/09/2023</a:t>
+              <a:t>25/09/2023</a:t>
             </a:fld>
             <a:endParaRPr lang="pt-BR"/>
           </a:p>
@@ -2535,7 +2535,7 @@
           <a:p>
             <a:fld id="{52231B9D-E9F6-4612-9B82-E89961B389AC}" type="datetimeFigureOut">
               <a:rPr lang="pt-BR" smtClean="0"/>
-              <a:t>18/09/2023</a:t>
+              <a:t>25/09/2023</a:t>
             </a:fld>
             <a:endParaRPr lang="pt-BR"/>
           </a:p>
@@ -2788,7 +2788,7 @@
           <a:p>
             <a:fld id="{52231B9D-E9F6-4612-9B82-E89961B389AC}" type="datetimeFigureOut">
               <a:rPr lang="pt-BR" smtClean="0"/>
-              <a:t>18/09/2023</a:t>
+              <a:t>25/09/2023</a:t>
             </a:fld>
             <a:endParaRPr lang="pt-BR"/>
           </a:p>
@@ -3001,7 +3001,7 @@
           <a:p>
             <a:fld id="{52231B9D-E9F6-4612-9B82-E89961B389AC}" type="datetimeFigureOut">
               <a:rPr lang="pt-BR" smtClean="0"/>
-              <a:t>18/09/2023</a:t>
+              <a:t>25/09/2023</a:t>
             </a:fld>
             <a:endParaRPr lang="pt-BR"/>
           </a:p>
@@ -3658,14 +3658,14 @@
           <a:lstStyle/>
           <a:p>
             <a:r>
-              <a:rPr lang="pt-BR" sz="1600" smtClean="0">
+              <a:rPr lang="pt-BR" sz="1600" dirty="0" smtClean="0">
                 <a:solidFill>
                   <a:schemeClr val="bg2">
                     <a:lumMod val="90000"/>
                   </a:schemeClr>
                 </a:solidFill>
               </a:rPr>
-              <a:t>17/09/2023</a:t>
+              <a:t>01/10/2023</a:t>
             </a:r>
             <a:endParaRPr lang="pt-BR" sz="1600" dirty="0">
               <a:solidFill>

--- a/tempimento.pptx
+++ b/tempimento.pptx
@@ -197,7 +197,7 @@
           <a:p>
             <a:fld id="{A584E3A2-E8EA-4705-A613-CFE9F6F5D3B4}" type="datetimeFigureOut">
               <a:rPr lang="pt-BR" smtClean="0"/>
-              <a:t>25/09/2023</a:t>
+              <a:t>25/10/2023</a:t>
             </a:fld>
             <a:endParaRPr lang="pt-BR"/>
           </a:p>
@@ -680,7 +680,7 @@
           <a:p>
             <a:fld id="{52231B9D-E9F6-4612-9B82-E89961B389AC}" type="datetimeFigureOut">
               <a:rPr lang="pt-BR" smtClean="0"/>
-              <a:t>25/09/2023</a:t>
+              <a:t>25/10/2023</a:t>
             </a:fld>
             <a:endParaRPr lang="pt-BR"/>
           </a:p>
@@ -850,7 +850,7 @@
           <a:p>
             <a:fld id="{52231B9D-E9F6-4612-9B82-E89961B389AC}" type="datetimeFigureOut">
               <a:rPr lang="pt-BR" smtClean="0"/>
-              <a:t>25/09/2023</a:t>
+              <a:t>25/10/2023</a:t>
             </a:fld>
             <a:endParaRPr lang="pt-BR"/>
           </a:p>
@@ -1030,7 +1030,7 @@
           <a:p>
             <a:fld id="{52231B9D-E9F6-4612-9B82-E89961B389AC}" type="datetimeFigureOut">
               <a:rPr lang="pt-BR" smtClean="0"/>
-              <a:t>25/09/2023</a:t>
+              <a:t>25/10/2023</a:t>
             </a:fld>
             <a:endParaRPr lang="pt-BR"/>
           </a:p>
@@ -1200,7 +1200,7 @@
           <a:p>
             <a:fld id="{52231B9D-E9F6-4612-9B82-E89961B389AC}" type="datetimeFigureOut">
               <a:rPr lang="pt-BR" smtClean="0"/>
-              <a:t>25/09/2023</a:t>
+              <a:t>25/10/2023</a:t>
             </a:fld>
             <a:endParaRPr lang="pt-BR"/>
           </a:p>
@@ -1446,7 +1446,7 @@
           <a:p>
             <a:fld id="{52231B9D-E9F6-4612-9B82-E89961B389AC}" type="datetimeFigureOut">
               <a:rPr lang="pt-BR" smtClean="0"/>
-              <a:t>25/09/2023</a:t>
+              <a:t>25/10/2023</a:t>
             </a:fld>
             <a:endParaRPr lang="pt-BR"/>
           </a:p>
@@ -1678,7 +1678,7 @@
           <a:p>
             <a:fld id="{52231B9D-E9F6-4612-9B82-E89961B389AC}" type="datetimeFigureOut">
               <a:rPr lang="pt-BR" smtClean="0"/>
-              <a:t>25/09/2023</a:t>
+              <a:t>25/10/2023</a:t>
             </a:fld>
             <a:endParaRPr lang="pt-BR"/>
           </a:p>
@@ -2045,7 +2045,7 @@
           <a:p>
             <a:fld id="{52231B9D-E9F6-4612-9B82-E89961B389AC}" type="datetimeFigureOut">
               <a:rPr lang="pt-BR" smtClean="0"/>
-              <a:t>25/09/2023</a:t>
+              <a:t>25/10/2023</a:t>
             </a:fld>
             <a:endParaRPr lang="pt-BR"/>
           </a:p>
@@ -2163,7 +2163,7 @@
           <a:p>
             <a:fld id="{52231B9D-E9F6-4612-9B82-E89961B389AC}" type="datetimeFigureOut">
               <a:rPr lang="pt-BR" smtClean="0"/>
-              <a:t>25/09/2023</a:t>
+              <a:t>25/10/2023</a:t>
             </a:fld>
             <a:endParaRPr lang="pt-BR"/>
           </a:p>
@@ -2258,7 +2258,7 @@
           <a:p>
             <a:fld id="{52231B9D-E9F6-4612-9B82-E89961B389AC}" type="datetimeFigureOut">
               <a:rPr lang="pt-BR" smtClean="0"/>
-              <a:t>25/09/2023</a:t>
+              <a:t>25/10/2023</a:t>
             </a:fld>
             <a:endParaRPr lang="pt-BR"/>
           </a:p>
@@ -2535,7 +2535,7 @@
           <a:p>
             <a:fld id="{52231B9D-E9F6-4612-9B82-E89961B389AC}" type="datetimeFigureOut">
               <a:rPr lang="pt-BR" smtClean="0"/>
-              <a:t>25/09/2023</a:t>
+              <a:t>25/10/2023</a:t>
             </a:fld>
             <a:endParaRPr lang="pt-BR"/>
           </a:p>
@@ -2788,7 +2788,7 @@
           <a:p>
             <a:fld id="{52231B9D-E9F6-4612-9B82-E89961B389AC}" type="datetimeFigureOut">
               <a:rPr lang="pt-BR" smtClean="0"/>
-              <a:t>25/09/2023</a:t>
+              <a:t>25/10/2023</a:t>
             </a:fld>
             <a:endParaRPr lang="pt-BR"/>
           </a:p>
@@ -3001,7 +3001,7 @@
           <a:p>
             <a:fld id="{52231B9D-E9F6-4612-9B82-E89961B389AC}" type="datetimeFigureOut">
               <a:rPr lang="pt-BR" smtClean="0"/>
-              <a:t>25/09/2023</a:t>
+              <a:t>25/10/2023</a:t>
             </a:fld>
             <a:endParaRPr lang="pt-BR"/>
           </a:p>
@@ -3665,7 +3665,17 @@
                   </a:schemeClr>
                 </a:solidFill>
               </a:rPr>
-              <a:t>01/10/2023</a:t>
+              <a:t>22</a:t>
+            </a:r>
+            <a:r>
+              <a:rPr lang="pt-BR" sz="1600" dirty="0" smtClean="0">
+                <a:solidFill>
+                  <a:schemeClr val="bg2">
+                    <a:lumMod val="90000"/>
+                  </a:schemeClr>
+                </a:solidFill>
+              </a:rPr>
+              <a:t>/10/2023</a:t>
             </a:r>
             <a:endParaRPr lang="pt-BR" sz="1600" dirty="0">
               <a:solidFill>

--- a/tempimento.pptx
+++ b/tempimento.pptx
@@ -197,7 +197,7 @@
           <a:p>
             <a:fld id="{A584E3A2-E8EA-4705-A613-CFE9F6F5D3B4}" type="datetimeFigureOut">
               <a:rPr lang="pt-BR" smtClean="0"/>
-              <a:t>25/10/2023</a:t>
+              <a:t>26/10/2023</a:t>
             </a:fld>
             <a:endParaRPr lang="pt-BR"/>
           </a:p>
@@ -680,7 +680,7 @@
           <a:p>
             <a:fld id="{52231B9D-E9F6-4612-9B82-E89961B389AC}" type="datetimeFigureOut">
               <a:rPr lang="pt-BR" smtClean="0"/>
-              <a:t>25/10/2023</a:t>
+              <a:t>26/10/2023</a:t>
             </a:fld>
             <a:endParaRPr lang="pt-BR"/>
           </a:p>
@@ -850,7 +850,7 @@
           <a:p>
             <a:fld id="{52231B9D-E9F6-4612-9B82-E89961B389AC}" type="datetimeFigureOut">
               <a:rPr lang="pt-BR" smtClean="0"/>
-              <a:t>25/10/2023</a:t>
+              <a:t>26/10/2023</a:t>
             </a:fld>
             <a:endParaRPr lang="pt-BR"/>
           </a:p>
@@ -1030,7 +1030,7 @@
           <a:p>
             <a:fld id="{52231B9D-E9F6-4612-9B82-E89961B389AC}" type="datetimeFigureOut">
               <a:rPr lang="pt-BR" smtClean="0"/>
-              <a:t>25/10/2023</a:t>
+              <a:t>26/10/2023</a:t>
             </a:fld>
             <a:endParaRPr lang="pt-BR"/>
           </a:p>
@@ -1200,7 +1200,7 @@
           <a:p>
             <a:fld id="{52231B9D-E9F6-4612-9B82-E89961B389AC}" type="datetimeFigureOut">
               <a:rPr lang="pt-BR" smtClean="0"/>
-              <a:t>25/10/2023</a:t>
+              <a:t>26/10/2023</a:t>
             </a:fld>
             <a:endParaRPr lang="pt-BR"/>
           </a:p>
@@ -1446,7 +1446,7 @@
           <a:p>
             <a:fld id="{52231B9D-E9F6-4612-9B82-E89961B389AC}" type="datetimeFigureOut">
               <a:rPr lang="pt-BR" smtClean="0"/>
-              <a:t>25/10/2023</a:t>
+              <a:t>26/10/2023</a:t>
             </a:fld>
             <a:endParaRPr lang="pt-BR"/>
           </a:p>
@@ -1678,7 +1678,7 @@
           <a:p>
             <a:fld id="{52231B9D-E9F6-4612-9B82-E89961B389AC}" type="datetimeFigureOut">
               <a:rPr lang="pt-BR" smtClean="0"/>
-              <a:t>25/10/2023</a:t>
+              <a:t>26/10/2023</a:t>
             </a:fld>
             <a:endParaRPr lang="pt-BR"/>
           </a:p>
@@ -2045,7 +2045,7 @@
           <a:p>
             <a:fld id="{52231B9D-E9F6-4612-9B82-E89961B389AC}" type="datetimeFigureOut">
               <a:rPr lang="pt-BR" smtClean="0"/>
-              <a:t>25/10/2023</a:t>
+              <a:t>26/10/2023</a:t>
             </a:fld>
             <a:endParaRPr lang="pt-BR"/>
           </a:p>
@@ -2163,7 +2163,7 @@
           <a:p>
             <a:fld id="{52231B9D-E9F6-4612-9B82-E89961B389AC}" type="datetimeFigureOut">
               <a:rPr lang="pt-BR" smtClean="0"/>
-              <a:t>25/10/2023</a:t>
+              <a:t>26/10/2023</a:t>
             </a:fld>
             <a:endParaRPr lang="pt-BR"/>
           </a:p>
@@ -2258,7 +2258,7 @@
           <a:p>
             <a:fld id="{52231B9D-E9F6-4612-9B82-E89961B389AC}" type="datetimeFigureOut">
               <a:rPr lang="pt-BR" smtClean="0"/>
-              <a:t>25/10/2023</a:t>
+              <a:t>26/10/2023</a:t>
             </a:fld>
             <a:endParaRPr lang="pt-BR"/>
           </a:p>
@@ -2535,7 +2535,7 @@
           <a:p>
             <a:fld id="{52231B9D-E9F6-4612-9B82-E89961B389AC}" type="datetimeFigureOut">
               <a:rPr lang="pt-BR" smtClean="0"/>
-              <a:t>25/10/2023</a:t>
+              <a:t>26/10/2023</a:t>
             </a:fld>
             <a:endParaRPr lang="pt-BR"/>
           </a:p>
@@ -2788,7 +2788,7 @@
           <a:p>
             <a:fld id="{52231B9D-E9F6-4612-9B82-E89961B389AC}" type="datetimeFigureOut">
               <a:rPr lang="pt-BR" smtClean="0"/>
-              <a:t>25/10/2023</a:t>
+              <a:t>26/10/2023</a:t>
             </a:fld>
             <a:endParaRPr lang="pt-BR"/>
           </a:p>
@@ -3001,7 +3001,7 @@
           <a:p>
             <a:fld id="{52231B9D-E9F6-4612-9B82-E89961B389AC}" type="datetimeFigureOut">
               <a:rPr lang="pt-BR" smtClean="0"/>
-              <a:t>25/10/2023</a:t>
+              <a:t>26/10/2023</a:t>
             </a:fld>
             <a:endParaRPr lang="pt-BR"/>
           </a:p>
@@ -3658,24 +3658,14 @@
           <a:lstStyle/>
           <a:p>
             <a:r>
-              <a:rPr lang="pt-BR" sz="1600" dirty="0" smtClean="0">
+              <a:rPr lang="pt-BR" sz="1600" smtClean="0">
                 <a:solidFill>
                   <a:schemeClr val="bg2">
                     <a:lumMod val="90000"/>
                   </a:schemeClr>
                 </a:solidFill>
               </a:rPr>
-              <a:t>22</a:t>
-            </a:r>
-            <a:r>
-              <a:rPr lang="pt-BR" sz="1600" dirty="0" smtClean="0">
-                <a:solidFill>
-                  <a:schemeClr val="bg2">
-                    <a:lumMod val="90000"/>
-                  </a:schemeClr>
-                </a:solidFill>
-              </a:rPr>
-              <a:t>/10/2023</a:t>
+              <a:t>29/10/2023</a:t>
             </a:r>
             <a:endParaRPr lang="pt-BR" sz="1600" dirty="0">
               <a:solidFill>

--- a/tempimento.pptx
+++ b/tempimento.pptx
@@ -197,7 +197,7 @@
           <a:p>
             <a:fld id="{A584E3A2-E8EA-4705-A613-CFE9F6F5D3B4}" type="datetimeFigureOut">
               <a:rPr lang="pt-BR" smtClean="0"/>
-              <a:t>26/10/2023</a:t>
+              <a:t>06/11/2023</a:t>
             </a:fld>
             <a:endParaRPr lang="pt-BR"/>
           </a:p>
@@ -680,7 +680,7 @@
           <a:p>
             <a:fld id="{52231B9D-E9F6-4612-9B82-E89961B389AC}" type="datetimeFigureOut">
               <a:rPr lang="pt-BR" smtClean="0"/>
-              <a:t>26/10/2023</a:t>
+              <a:t>06/11/2023</a:t>
             </a:fld>
             <a:endParaRPr lang="pt-BR"/>
           </a:p>
@@ -850,7 +850,7 @@
           <a:p>
             <a:fld id="{52231B9D-E9F6-4612-9B82-E89961B389AC}" type="datetimeFigureOut">
               <a:rPr lang="pt-BR" smtClean="0"/>
-              <a:t>26/10/2023</a:t>
+              <a:t>06/11/2023</a:t>
             </a:fld>
             <a:endParaRPr lang="pt-BR"/>
           </a:p>
@@ -1030,7 +1030,7 @@
           <a:p>
             <a:fld id="{52231B9D-E9F6-4612-9B82-E89961B389AC}" type="datetimeFigureOut">
               <a:rPr lang="pt-BR" smtClean="0"/>
-              <a:t>26/10/2023</a:t>
+              <a:t>06/11/2023</a:t>
             </a:fld>
             <a:endParaRPr lang="pt-BR"/>
           </a:p>
@@ -1200,7 +1200,7 @@
           <a:p>
             <a:fld id="{52231B9D-E9F6-4612-9B82-E89961B389AC}" type="datetimeFigureOut">
               <a:rPr lang="pt-BR" smtClean="0"/>
-              <a:t>26/10/2023</a:t>
+              <a:t>06/11/2023</a:t>
             </a:fld>
             <a:endParaRPr lang="pt-BR"/>
           </a:p>
@@ -1446,7 +1446,7 @@
           <a:p>
             <a:fld id="{52231B9D-E9F6-4612-9B82-E89961B389AC}" type="datetimeFigureOut">
               <a:rPr lang="pt-BR" smtClean="0"/>
-              <a:t>26/10/2023</a:t>
+              <a:t>06/11/2023</a:t>
             </a:fld>
             <a:endParaRPr lang="pt-BR"/>
           </a:p>
@@ -1678,7 +1678,7 @@
           <a:p>
             <a:fld id="{52231B9D-E9F6-4612-9B82-E89961B389AC}" type="datetimeFigureOut">
               <a:rPr lang="pt-BR" smtClean="0"/>
-              <a:t>26/10/2023</a:t>
+              <a:t>06/11/2023</a:t>
             </a:fld>
             <a:endParaRPr lang="pt-BR"/>
           </a:p>
@@ -2045,7 +2045,7 @@
           <a:p>
             <a:fld id="{52231B9D-E9F6-4612-9B82-E89961B389AC}" type="datetimeFigureOut">
               <a:rPr lang="pt-BR" smtClean="0"/>
-              <a:t>26/10/2023</a:t>
+              <a:t>06/11/2023</a:t>
             </a:fld>
             <a:endParaRPr lang="pt-BR"/>
           </a:p>
@@ -2163,7 +2163,7 @@
           <a:p>
             <a:fld id="{52231B9D-E9F6-4612-9B82-E89961B389AC}" type="datetimeFigureOut">
               <a:rPr lang="pt-BR" smtClean="0"/>
-              <a:t>26/10/2023</a:t>
+              <a:t>06/11/2023</a:t>
             </a:fld>
             <a:endParaRPr lang="pt-BR"/>
           </a:p>
@@ -2258,7 +2258,7 @@
           <a:p>
             <a:fld id="{52231B9D-E9F6-4612-9B82-E89961B389AC}" type="datetimeFigureOut">
               <a:rPr lang="pt-BR" smtClean="0"/>
-              <a:t>26/10/2023</a:t>
+              <a:t>06/11/2023</a:t>
             </a:fld>
             <a:endParaRPr lang="pt-BR"/>
           </a:p>
@@ -2535,7 +2535,7 @@
           <a:p>
             <a:fld id="{52231B9D-E9F6-4612-9B82-E89961B389AC}" type="datetimeFigureOut">
               <a:rPr lang="pt-BR" smtClean="0"/>
-              <a:t>26/10/2023</a:t>
+              <a:t>06/11/2023</a:t>
             </a:fld>
             <a:endParaRPr lang="pt-BR"/>
           </a:p>
@@ -2788,7 +2788,7 @@
           <a:p>
             <a:fld id="{52231B9D-E9F6-4612-9B82-E89961B389AC}" type="datetimeFigureOut">
               <a:rPr lang="pt-BR" smtClean="0"/>
-              <a:t>26/10/2023</a:t>
+              <a:t>06/11/2023</a:t>
             </a:fld>
             <a:endParaRPr lang="pt-BR"/>
           </a:p>
@@ -3001,7 +3001,7 @@
           <a:p>
             <a:fld id="{52231B9D-E9F6-4612-9B82-E89961B389AC}" type="datetimeFigureOut">
               <a:rPr lang="pt-BR" smtClean="0"/>
-              <a:t>26/10/2023</a:t>
+              <a:t>06/11/2023</a:t>
             </a:fld>
             <a:endParaRPr lang="pt-BR"/>
           </a:p>
@@ -3658,14 +3658,14 @@
           <a:lstStyle/>
           <a:p>
             <a:r>
-              <a:rPr lang="pt-BR" sz="1600" smtClean="0">
+              <a:rPr lang="pt-BR" sz="1600" dirty="0" smtClean="0">
                 <a:solidFill>
                   <a:schemeClr val="bg2">
                     <a:lumMod val="90000"/>
                   </a:schemeClr>
                 </a:solidFill>
               </a:rPr>
-              <a:t>29/10/2023</a:t>
+              <a:t>12/11/2023</a:t>
             </a:r>
             <a:endParaRPr lang="pt-BR" sz="1600" dirty="0">
               <a:solidFill>

--- a/tempimento.pptx
+++ b/tempimento.pptx
@@ -197,7 +197,7 @@
           <a:p>
             <a:fld id="{A584E3A2-E8EA-4705-A613-CFE9F6F5D3B4}" type="datetimeFigureOut">
               <a:rPr lang="pt-BR" smtClean="0"/>
-              <a:t>06/11/2023</a:t>
+              <a:t>21/11/2023</a:t>
             </a:fld>
             <a:endParaRPr lang="pt-BR"/>
           </a:p>
@@ -680,7 +680,7 @@
           <a:p>
             <a:fld id="{52231B9D-E9F6-4612-9B82-E89961B389AC}" type="datetimeFigureOut">
               <a:rPr lang="pt-BR" smtClean="0"/>
-              <a:t>06/11/2023</a:t>
+              <a:t>21/11/2023</a:t>
             </a:fld>
             <a:endParaRPr lang="pt-BR"/>
           </a:p>
@@ -850,7 +850,7 @@
           <a:p>
             <a:fld id="{52231B9D-E9F6-4612-9B82-E89961B389AC}" type="datetimeFigureOut">
               <a:rPr lang="pt-BR" smtClean="0"/>
-              <a:t>06/11/2023</a:t>
+              <a:t>21/11/2023</a:t>
             </a:fld>
             <a:endParaRPr lang="pt-BR"/>
           </a:p>
@@ -1030,7 +1030,7 @@
           <a:p>
             <a:fld id="{52231B9D-E9F6-4612-9B82-E89961B389AC}" type="datetimeFigureOut">
               <a:rPr lang="pt-BR" smtClean="0"/>
-              <a:t>06/11/2023</a:t>
+              <a:t>21/11/2023</a:t>
             </a:fld>
             <a:endParaRPr lang="pt-BR"/>
           </a:p>
@@ -1200,7 +1200,7 @@
           <a:p>
             <a:fld id="{52231B9D-E9F6-4612-9B82-E89961B389AC}" type="datetimeFigureOut">
               <a:rPr lang="pt-BR" smtClean="0"/>
-              <a:t>06/11/2023</a:t>
+              <a:t>21/11/2023</a:t>
             </a:fld>
             <a:endParaRPr lang="pt-BR"/>
           </a:p>
@@ -1446,7 +1446,7 @@
           <a:p>
             <a:fld id="{52231B9D-E9F6-4612-9B82-E89961B389AC}" type="datetimeFigureOut">
               <a:rPr lang="pt-BR" smtClean="0"/>
-              <a:t>06/11/2023</a:t>
+              <a:t>21/11/2023</a:t>
             </a:fld>
             <a:endParaRPr lang="pt-BR"/>
           </a:p>
@@ -1678,7 +1678,7 @@
           <a:p>
             <a:fld id="{52231B9D-E9F6-4612-9B82-E89961B389AC}" type="datetimeFigureOut">
               <a:rPr lang="pt-BR" smtClean="0"/>
-              <a:t>06/11/2023</a:t>
+              <a:t>21/11/2023</a:t>
             </a:fld>
             <a:endParaRPr lang="pt-BR"/>
           </a:p>
@@ -2045,7 +2045,7 @@
           <a:p>
             <a:fld id="{52231B9D-E9F6-4612-9B82-E89961B389AC}" type="datetimeFigureOut">
               <a:rPr lang="pt-BR" smtClean="0"/>
-              <a:t>06/11/2023</a:t>
+              <a:t>21/11/2023</a:t>
             </a:fld>
             <a:endParaRPr lang="pt-BR"/>
           </a:p>
@@ -2163,7 +2163,7 @@
           <a:p>
             <a:fld id="{52231B9D-E9F6-4612-9B82-E89961B389AC}" type="datetimeFigureOut">
               <a:rPr lang="pt-BR" smtClean="0"/>
-              <a:t>06/11/2023</a:t>
+              <a:t>21/11/2023</a:t>
             </a:fld>
             <a:endParaRPr lang="pt-BR"/>
           </a:p>
@@ -2258,7 +2258,7 @@
           <a:p>
             <a:fld id="{52231B9D-E9F6-4612-9B82-E89961B389AC}" type="datetimeFigureOut">
               <a:rPr lang="pt-BR" smtClean="0"/>
-              <a:t>06/11/2023</a:t>
+              <a:t>21/11/2023</a:t>
             </a:fld>
             <a:endParaRPr lang="pt-BR"/>
           </a:p>
@@ -2535,7 +2535,7 @@
           <a:p>
             <a:fld id="{52231B9D-E9F6-4612-9B82-E89961B389AC}" type="datetimeFigureOut">
               <a:rPr lang="pt-BR" smtClean="0"/>
-              <a:t>06/11/2023</a:t>
+              <a:t>21/11/2023</a:t>
             </a:fld>
             <a:endParaRPr lang="pt-BR"/>
           </a:p>
@@ -2788,7 +2788,7 @@
           <a:p>
             <a:fld id="{52231B9D-E9F6-4612-9B82-E89961B389AC}" type="datetimeFigureOut">
               <a:rPr lang="pt-BR" smtClean="0"/>
-              <a:t>06/11/2023</a:t>
+              <a:t>21/11/2023</a:t>
             </a:fld>
             <a:endParaRPr lang="pt-BR"/>
           </a:p>
@@ -3001,7 +3001,7 @@
           <a:p>
             <a:fld id="{52231B9D-E9F6-4612-9B82-E89961B389AC}" type="datetimeFigureOut">
               <a:rPr lang="pt-BR" smtClean="0"/>
-              <a:t>06/11/2023</a:t>
+              <a:t>21/11/2023</a:t>
             </a:fld>
             <a:endParaRPr lang="pt-BR"/>
           </a:p>
@@ -3665,7 +3665,7 @@
                   </a:schemeClr>
                 </a:solidFill>
               </a:rPr>
-              <a:t>12/11/2023</a:t>
+              <a:t>19/11/2023</a:t>
             </a:r>
             <a:endParaRPr lang="pt-BR" sz="1600" dirty="0">
               <a:solidFill>

--- a/tempimento.pptx
+++ b/tempimento.pptx
@@ -197,7 +197,7 @@
           <a:p>
             <a:fld id="{A584E3A2-E8EA-4705-A613-CFE9F6F5D3B4}" type="datetimeFigureOut">
               <a:rPr lang="pt-BR" smtClean="0"/>
-              <a:t>21/11/2023</a:t>
+              <a:t>27/11/2023</a:t>
             </a:fld>
             <a:endParaRPr lang="pt-BR"/>
           </a:p>
@@ -680,7 +680,7 @@
           <a:p>
             <a:fld id="{52231B9D-E9F6-4612-9B82-E89961B389AC}" type="datetimeFigureOut">
               <a:rPr lang="pt-BR" smtClean="0"/>
-              <a:t>21/11/2023</a:t>
+              <a:t>27/11/2023</a:t>
             </a:fld>
             <a:endParaRPr lang="pt-BR"/>
           </a:p>
@@ -850,7 +850,7 @@
           <a:p>
             <a:fld id="{52231B9D-E9F6-4612-9B82-E89961B389AC}" type="datetimeFigureOut">
               <a:rPr lang="pt-BR" smtClean="0"/>
-              <a:t>21/11/2023</a:t>
+              <a:t>27/11/2023</a:t>
             </a:fld>
             <a:endParaRPr lang="pt-BR"/>
           </a:p>
@@ -1030,7 +1030,7 @@
           <a:p>
             <a:fld id="{52231B9D-E9F6-4612-9B82-E89961B389AC}" type="datetimeFigureOut">
               <a:rPr lang="pt-BR" smtClean="0"/>
-              <a:t>21/11/2023</a:t>
+              <a:t>27/11/2023</a:t>
             </a:fld>
             <a:endParaRPr lang="pt-BR"/>
           </a:p>
@@ -1200,7 +1200,7 @@
           <a:p>
             <a:fld id="{52231B9D-E9F6-4612-9B82-E89961B389AC}" type="datetimeFigureOut">
               <a:rPr lang="pt-BR" smtClean="0"/>
-              <a:t>21/11/2023</a:t>
+              <a:t>27/11/2023</a:t>
             </a:fld>
             <a:endParaRPr lang="pt-BR"/>
           </a:p>
@@ -1446,7 +1446,7 @@
           <a:p>
             <a:fld id="{52231B9D-E9F6-4612-9B82-E89961B389AC}" type="datetimeFigureOut">
               <a:rPr lang="pt-BR" smtClean="0"/>
-              <a:t>21/11/2023</a:t>
+              <a:t>27/11/2023</a:t>
             </a:fld>
             <a:endParaRPr lang="pt-BR"/>
           </a:p>
@@ -1678,7 +1678,7 @@
           <a:p>
             <a:fld id="{52231B9D-E9F6-4612-9B82-E89961B389AC}" type="datetimeFigureOut">
               <a:rPr lang="pt-BR" smtClean="0"/>
-              <a:t>21/11/2023</a:t>
+              <a:t>27/11/2023</a:t>
             </a:fld>
             <a:endParaRPr lang="pt-BR"/>
           </a:p>
@@ -2045,7 +2045,7 @@
           <a:p>
             <a:fld id="{52231B9D-E9F6-4612-9B82-E89961B389AC}" type="datetimeFigureOut">
               <a:rPr lang="pt-BR" smtClean="0"/>
-              <a:t>21/11/2023</a:t>
+              <a:t>27/11/2023</a:t>
             </a:fld>
             <a:endParaRPr lang="pt-BR"/>
           </a:p>
@@ -2163,7 +2163,7 @@
           <a:p>
             <a:fld id="{52231B9D-E9F6-4612-9B82-E89961B389AC}" type="datetimeFigureOut">
               <a:rPr lang="pt-BR" smtClean="0"/>
-              <a:t>21/11/2023</a:t>
+              <a:t>27/11/2023</a:t>
             </a:fld>
             <a:endParaRPr lang="pt-BR"/>
           </a:p>
@@ -2258,7 +2258,7 @@
           <a:p>
             <a:fld id="{52231B9D-E9F6-4612-9B82-E89961B389AC}" type="datetimeFigureOut">
               <a:rPr lang="pt-BR" smtClean="0"/>
-              <a:t>21/11/2023</a:t>
+              <a:t>27/11/2023</a:t>
             </a:fld>
             <a:endParaRPr lang="pt-BR"/>
           </a:p>
@@ -2535,7 +2535,7 @@
           <a:p>
             <a:fld id="{52231B9D-E9F6-4612-9B82-E89961B389AC}" type="datetimeFigureOut">
               <a:rPr lang="pt-BR" smtClean="0"/>
-              <a:t>21/11/2023</a:t>
+              <a:t>27/11/2023</a:t>
             </a:fld>
             <a:endParaRPr lang="pt-BR"/>
           </a:p>
@@ -2788,7 +2788,7 @@
           <a:p>
             <a:fld id="{52231B9D-E9F6-4612-9B82-E89961B389AC}" type="datetimeFigureOut">
               <a:rPr lang="pt-BR" smtClean="0"/>
-              <a:t>21/11/2023</a:t>
+              <a:t>27/11/2023</a:t>
             </a:fld>
             <a:endParaRPr lang="pt-BR"/>
           </a:p>
@@ -3001,7 +3001,7 @@
           <a:p>
             <a:fld id="{52231B9D-E9F6-4612-9B82-E89961B389AC}" type="datetimeFigureOut">
               <a:rPr lang="pt-BR" smtClean="0"/>
-              <a:t>21/11/2023</a:t>
+              <a:t>27/11/2023</a:t>
             </a:fld>
             <a:endParaRPr lang="pt-BR"/>
           </a:p>
@@ -3665,7 +3665,17 @@
                   </a:schemeClr>
                 </a:solidFill>
               </a:rPr>
-              <a:t>19/11/2023</a:t>
+              <a:t>26</a:t>
+            </a:r>
+            <a:r>
+              <a:rPr lang="pt-BR" sz="1600" dirty="0" smtClean="0">
+                <a:solidFill>
+                  <a:schemeClr val="bg2">
+                    <a:lumMod val="90000"/>
+                  </a:schemeClr>
+                </a:solidFill>
+              </a:rPr>
+              <a:t>/11/2023</a:t>
             </a:r>
             <a:endParaRPr lang="pt-BR" sz="1600" dirty="0">
               <a:solidFill>

--- a/tempimento.pptx
+++ b/tempimento.pptx
@@ -197,7 +197,7 @@
           <a:p>
             <a:fld id="{A584E3A2-E8EA-4705-A613-CFE9F6F5D3B4}" type="datetimeFigureOut">
               <a:rPr lang="pt-BR" smtClean="0"/>
-              <a:t>27/11/2023</a:t>
+              <a:t>09/12/2023</a:t>
             </a:fld>
             <a:endParaRPr lang="pt-BR"/>
           </a:p>
@@ -680,7 +680,7 @@
           <a:p>
             <a:fld id="{52231B9D-E9F6-4612-9B82-E89961B389AC}" type="datetimeFigureOut">
               <a:rPr lang="pt-BR" smtClean="0"/>
-              <a:t>27/11/2023</a:t>
+              <a:t>09/12/2023</a:t>
             </a:fld>
             <a:endParaRPr lang="pt-BR"/>
           </a:p>
@@ -850,7 +850,7 @@
           <a:p>
             <a:fld id="{52231B9D-E9F6-4612-9B82-E89961B389AC}" type="datetimeFigureOut">
               <a:rPr lang="pt-BR" smtClean="0"/>
-              <a:t>27/11/2023</a:t>
+              <a:t>09/12/2023</a:t>
             </a:fld>
             <a:endParaRPr lang="pt-BR"/>
           </a:p>
@@ -1030,7 +1030,7 @@
           <a:p>
             <a:fld id="{52231B9D-E9F6-4612-9B82-E89961B389AC}" type="datetimeFigureOut">
               <a:rPr lang="pt-BR" smtClean="0"/>
-              <a:t>27/11/2023</a:t>
+              <a:t>09/12/2023</a:t>
             </a:fld>
             <a:endParaRPr lang="pt-BR"/>
           </a:p>
@@ -1200,7 +1200,7 @@
           <a:p>
             <a:fld id="{52231B9D-E9F6-4612-9B82-E89961B389AC}" type="datetimeFigureOut">
               <a:rPr lang="pt-BR" smtClean="0"/>
-              <a:t>27/11/2023</a:t>
+              <a:t>09/12/2023</a:t>
             </a:fld>
             <a:endParaRPr lang="pt-BR"/>
           </a:p>
@@ -1446,7 +1446,7 @@
           <a:p>
             <a:fld id="{52231B9D-E9F6-4612-9B82-E89961B389AC}" type="datetimeFigureOut">
               <a:rPr lang="pt-BR" smtClean="0"/>
-              <a:t>27/11/2023</a:t>
+              <a:t>09/12/2023</a:t>
             </a:fld>
             <a:endParaRPr lang="pt-BR"/>
           </a:p>
@@ -1678,7 +1678,7 @@
           <a:p>
             <a:fld id="{52231B9D-E9F6-4612-9B82-E89961B389AC}" type="datetimeFigureOut">
               <a:rPr lang="pt-BR" smtClean="0"/>
-              <a:t>27/11/2023</a:t>
+              <a:t>09/12/2023</a:t>
             </a:fld>
             <a:endParaRPr lang="pt-BR"/>
           </a:p>
@@ -2045,7 +2045,7 @@
           <a:p>
             <a:fld id="{52231B9D-E9F6-4612-9B82-E89961B389AC}" type="datetimeFigureOut">
               <a:rPr lang="pt-BR" smtClean="0"/>
-              <a:t>27/11/2023</a:t>
+              <a:t>09/12/2023</a:t>
             </a:fld>
             <a:endParaRPr lang="pt-BR"/>
           </a:p>
@@ -2163,7 +2163,7 @@
           <a:p>
             <a:fld id="{52231B9D-E9F6-4612-9B82-E89961B389AC}" type="datetimeFigureOut">
               <a:rPr lang="pt-BR" smtClean="0"/>
-              <a:t>27/11/2023</a:t>
+              <a:t>09/12/2023</a:t>
             </a:fld>
             <a:endParaRPr lang="pt-BR"/>
           </a:p>
@@ -2258,7 +2258,7 @@
           <a:p>
             <a:fld id="{52231B9D-E9F6-4612-9B82-E89961B389AC}" type="datetimeFigureOut">
               <a:rPr lang="pt-BR" smtClean="0"/>
-              <a:t>27/11/2023</a:t>
+              <a:t>09/12/2023</a:t>
             </a:fld>
             <a:endParaRPr lang="pt-BR"/>
           </a:p>
@@ -2535,7 +2535,7 @@
           <a:p>
             <a:fld id="{52231B9D-E9F6-4612-9B82-E89961B389AC}" type="datetimeFigureOut">
               <a:rPr lang="pt-BR" smtClean="0"/>
-              <a:t>27/11/2023</a:t>
+              <a:t>09/12/2023</a:t>
             </a:fld>
             <a:endParaRPr lang="pt-BR"/>
           </a:p>
@@ -2788,7 +2788,7 @@
           <a:p>
             <a:fld id="{52231B9D-E9F6-4612-9B82-E89961B389AC}" type="datetimeFigureOut">
               <a:rPr lang="pt-BR" smtClean="0"/>
-              <a:t>27/11/2023</a:t>
+              <a:t>09/12/2023</a:t>
             </a:fld>
             <a:endParaRPr lang="pt-BR"/>
           </a:p>
@@ -3001,7 +3001,7 @@
           <a:p>
             <a:fld id="{52231B9D-E9F6-4612-9B82-E89961B389AC}" type="datetimeFigureOut">
               <a:rPr lang="pt-BR" smtClean="0"/>
-              <a:t>27/11/2023</a:t>
+              <a:t>09/12/2023</a:t>
             </a:fld>
             <a:endParaRPr lang="pt-BR"/>
           </a:p>
@@ -3665,17 +3665,7 @@
                   </a:schemeClr>
                 </a:solidFill>
               </a:rPr>
-              <a:t>26</a:t>
-            </a:r>
-            <a:r>
-              <a:rPr lang="pt-BR" sz="1600" dirty="0" smtClean="0">
-                <a:solidFill>
-                  <a:schemeClr val="bg2">
-                    <a:lumMod val="90000"/>
-                  </a:schemeClr>
-                </a:solidFill>
-              </a:rPr>
-              <a:t>/11/2023</a:t>
+              <a:t>30/12/2023</a:t>
             </a:r>
             <a:endParaRPr lang="pt-BR" sz="1600" dirty="0">
               <a:solidFill>

--- a/tempimento.pptx
+++ b/tempimento.pptx
@@ -197,7 +197,7 @@
           <a:p>
             <a:fld id="{A584E3A2-E8EA-4705-A613-CFE9F6F5D3B4}" type="datetimeFigureOut">
               <a:rPr lang="pt-BR" smtClean="0"/>
-              <a:t>09/12/2023</a:t>
+              <a:t>22/12/2023</a:t>
             </a:fld>
             <a:endParaRPr lang="pt-BR"/>
           </a:p>
@@ -680,7 +680,7 @@
           <a:p>
             <a:fld id="{52231B9D-E9F6-4612-9B82-E89961B389AC}" type="datetimeFigureOut">
               <a:rPr lang="pt-BR" smtClean="0"/>
-              <a:t>09/12/2023</a:t>
+              <a:t>22/12/2023</a:t>
             </a:fld>
             <a:endParaRPr lang="pt-BR"/>
           </a:p>
@@ -850,7 +850,7 @@
           <a:p>
             <a:fld id="{52231B9D-E9F6-4612-9B82-E89961B389AC}" type="datetimeFigureOut">
               <a:rPr lang="pt-BR" smtClean="0"/>
-              <a:t>09/12/2023</a:t>
+              <a:t>22/12/2023</a:t>
             </a:fld>
             <a:endParaRPr lang="pt-BR"/>
           </a:p>
@@ -1030,7 +1030,7 @@
           <a:p>
             <a:fld id="{52231B9D-E9F6-4612-9B82-E89961B389AC}" type="datetimeFigureOut">
               <a:rPr lang="pt-BR" smtClean="0"/>
-              <a:t>09/12/2023</a:t>
+              <a:t>22/12/2023</a:t>
             </a:fld>
             <a:endParaRPr lang="pt-BR"/>
           </a:p>
@@ -1200,7 +1200,7 @@
           <a:p>
             <a:fld id="{52231B9D-E9F6-4612-9B82-E89961B389AC}" type="datetimeFigureOut">
               <a:rPr lang="pt-BR" smtClean="0"/>
-              <a:t>09/12/2023</a:t>
+              <a:t>22/12/2023</a:t>
             </a:fld>
             <a:endParaRPr lang="pt-BR"/>
           </a:p>
@@ -1446,7 +1446,7 @@
           <a:p>
             <a:fld id="{52231B9D-E9F6-4612-9B82-E89961B389AC}" type="datetimeFigureOut">
               <a:rPr lang="pt-BR" smtClean="0"/>
-              <a:t>09/12/2023</a:t>
+              <a:t>22/12/2023</a:t>
             </a:fld>
             <a:endParaRPr lang="pt-BR"/>
           </a:p>
@@ -1678,7 +1678,7 @@
           <a:p>
             <a:fld id="{52231B9D-E9F6-4612-9B82-E89961B389AC}" type="datetimeFigureOut">
               <a:rPr lang="pt-BR" smtClean="0"/>
-              <a:t>09/12/2023</a:t>
+              <a:t>22/12/2023</a:t>
             </a:fld>
             <a:endParaRPr lang="pt-BR"/>
           </a:p>
@@ -2045,7 +2045,7 @@
           <a:p>
             <a:fld id="{52231B9D-E9F6-4612-9B82-E89961B389AC}" type="datetimeFigureOut">
               <a:rPr lang="pt-BR" smtClean="0"/>
-              <a:t>09/12/2023</a:t>
+              <a:t>22/12/2023</a:t>
             </a:fld>
             <a:endParaRPr lang="pt-BR"/>
           </a:p>
@@ -2163,7 +2163,7 @@
           <a:p>
             <a:fld id="{52231B9D-E9F6-4612-9B82-E89961B389AC}" type="datetimeFigureOut">
               <a:rPr lang="pt-BR" smtClean="0"/>
-              <a:t>09/12/2023</a:t>
+              <a:t>22/12/2023</a:t>
             </a:fld>
             <a:endParaRPr lang="pt-BR"/>
           </a:p>
@@ -2258,7 +2258,7 @@
           <a:p>
             <a:fld id="{52231B9D-E9F6-4612-9B82-E89961B389AC}" type="datetimeFigureOut">
               <a:rPr lang="pt-BR" smtClean="0"/>
-              <a:t>09/12/2023</a:t>
+              <a:t>22/12/2023</a:t>
             </a:fld>
             <a:endParaRPr lang="pt-BR"/>
           </a:p>
@@ -2535,7 +2535,7 @@
           <a:p>
             <a:fld id="{52231B9D-E9F6-4612-9B82-E89961B389AC}" type="datetimeFigureOut">
               <a:rPr lang="pt-BR" smtClean="0"/>
-              <a:t>09/12/2023</a:t>
+              <a:t>22/12/2023</a:t>
             </a:fld>
             <a:endParaRPr lang="pt-BR"/>
           </a:p>
@@ -2788,7 +2788,7 @@
           <a:p>
             <a:fld id="{52231B9D-E9F6-4612-9B82-E89961B389AC}" type="datetimeFigureOut">
               <a:rPr lang="pt-BR" smtClean="0"/>
-              <a:t>09/12/2023</a:t>
+              <a:t>22/12/2023</a:t>
             </a:fld>
             <a:endParaRPr lang="pt-BR"/>
           </a:p>
@@ -3001,7 +3001,7 @@
           <a:p>
             <a:fld id="{52231B9D-E9F6-4612-9B82-E89961B389AC}" type="datetimeFigureOut">
               <a:rPr lang="pt-BR" smtClean="0"/>
-              <a:t>09/12/2023</a:t>
+              <a:t>22/12/2023</a:t>
             </a:fld>
             <a:endParaRPr lang="pt-BR"/>
           </a:p>
@@ -3665,7 +3665,17 @@
                   </a:schemeClr>
                 </a:solidFill>
               </a:rPr>
-              <a:t>30/12/2023</a:t>
+              <a:t>17</a:t>
+            </a:r>
+            <a:r>
+              <a:rPr lang="pt-BR" sz="1600" dirty="0" smtClean="0">
+                <a:solidFill>
+                  <a:schemeClr val="bg2">
+                    <a:lumMod val="90000"/>
+                  </a:schemeClr>
+                </a:solidFill>
+              </a:rPr>
+              <a:t>/12/2023</a:t>
             </a:r>
             <a:endParaRPr lang="pt-BR" sz="1600" dirty="0">
               <a:solidFill>

--- a/tempimento.pptx
+++ b/tempimento.pptx
@@ -197,7 +197,7 @@
           <a:p>
             <a:fld id="{A584E3A2-E8EA-4705-A613-CFE9F6F5D3B4}" type="datetimeFigureOut">
               <a:rPr lang="pt-BR" smtClean="0"/>
-              <a:t>22/12/2023</a:t>
+              <a:t>02/01/2024</a:t>
             </a:fld>
             <a:endParaRPr lang="pt-BR"/>
           </a:p>
@@ -680,7 +680,7 @@
           <a:p>
             <a:fld id="{52231B9D-E9F6-4612-9B82-E89961B389AC}" type="datetimeFigureOut">
               <a:rPr lang="pt-BR" smtClean="0"/>
-              <a:t>22/12/2023</a:t>
+              <a:t>02/01/2024</a:t>
             </a:fld>
             <a:endParaRPr lang="pt-BR"/>
           </a:p>
@@ -850,7 +850,7 @@
           <a:p>
             <a:fld id="{52231B9D-E9F6-4612-9B82-E89961B389AC}" type="datetimeFigureOut">
               <a:rPr lang="pt-BR" smtClean="0"/>
-              <a:t>22/12/2023</a:t>
+              <a:t>02/01/2024</a:t>
             </a:fld>
             <a:endParaRPr lang="pt-BR"/>
           </a:p>
@@ -1030,7 +1030,7 @@
           <a:p>
             <a:fld id="{52231B9D-E9F6-4612-9B82-E89961B389AC}" type="datetimeFigureOut">
               <a:rPr lang="pt-BR" smtClean="0"/>
-              <a:t>22/12/2023</a:t>
+              <a:t>02/01/2024</a:t>
             </a:fld>
             <a:endParaRPr lang="pt-BR"/>
           </a:p>
@@ -1200,7 +1200,7 @@
           <a:p>
             <a:fld id="{52231B9D-E9F6-4612-9B82-E89961B389AC}" type="datetimeFigureOut">
               <a:rPr lang="pt-BR" smtClean="0"/>
-              <a:t>22/12/2023</a:t>
+              <a:t>02/01/2024</a:t>
             </a:fld>
             <a:endParaRPr lang="pt-BR"/>
           </a:p>
@@ -1446,7 +1446,7 @@
           <a:p>
             <a:fld id="{52231B9D-E9F6-4612-9B82-E89961B389AC}" type="datetimeFigureOut">
               <a:rPr lang="pt-BR" smtClean="0"/>
-              <a:t>22/12/2023</a:t>
+              <a:t>02/01/2024</a:t>
             </a:fld>
             <a:endParaRPr lang="pt-BR"/>
           </a:p>
@@ -1678,7 +1678,7 @@
           <a:p>
             <a:fld id="{52231B9D-E9F6-4612-9B82-E89961B389AC}" type="datetimeFigureOut">
               <a:rPr lang="pt-BR" smtClean="0"/>
-              <a:t>22/12/2023</a:t>
+              <a:t>02/01/2024</a:t>
             </a:fld>
             <a:endParaRPr lang="pt-BR"/>
           </a:p>
@@ -2045,7 +2045,7 @@
           <a:p>
             <a:fld id="{52231B9D-E9F6-4612-9B82-E89961B389AC}" type="datetimeFigureOut">
               <a:rPr lang="pt-BR" smtClean="0"/>
-              <a:t>22/12/2023</a:t>
+              <a:t>02/01/2024</a:t>
             </a:fld>
             <a:endParaRPr lang="pt-BR"/>
           </a:p>
@@ -2163,7 +2163,7 @@
           <a:p>
             <a:fld id="{52231B9D-E9F6-4612-9B82-E89961B389AC}" type="datetimeFigureOut">
               <a:rPr lang="pt-BR" smtClean="0"/>
-              <a:t>22/12/2023</a:t>
+              <a:t>02/01/2024</a:t>
             </a:fld>
             <a:endParaRPr lang="pt-BR"/>
           </a:p>
@@ -2258,7 +2258,7 @@
           <a:p>
             <a:fld id="{52231B9D-E9F6-4612-9B82-E89961B389AC}" type="datetimeFigureOut">
               <a:rPr lang="pt-BR" smtClean="0"/>
-              <a:t>22/12/2023</a:t>
+              <a:t>02/01/2024</a:t>
             </a:fld>
             <a:endParaRPr lang="pt-BR"/>
           </a:p>
@@ -2535,7 +2535,7 @@
           <a:p>
             <a:fld id="{52231B9D-E9F6-4612-9B82-E89961B389AC}" type="datetimeFigureOut">
               <a:rPr lang="pt-BR" smtClean="0"/>
-              <a:t>22/12/2023</a:t>
+              <a:t>02/01/2024</a:t>
             </a:fld>
             <a:endParaRPr lang="pt-BR"/>
           </a:p>
@@ -2788,7 +2788,7 @@
           <a:p>
             <a:fld id="{52231B9D-E9F6-4612-9B82-E89961B389AC}" type="datetimeFigureOut">
               <a:rPr lang="pt-BR" smtClean="0"/>
-              <a:t>22/12/2023</a:t>
+              <a:t>02/01/2024</a:t>
             </a:fld>
             <a:endParaRPr lang="pt-BR"/>
           </a:p>
@@ -3001,7 +3001,7 @@
           <a:p>
             <a:fld id="{52231B9D-E9F6-4612-9B82-E89961B389AC}" type="datetimeFigureOut">
               <a:rPr lang="pt-BR" smtClean="0"/>
-              <a:t>22/12/2023</a:t>
+              <a:t>02/01/2024</a:t>
             </a:fld>
             <a:endParaRPr lang="pt-BR"/>
           </a:p>
@@ -3658,24 +3658,14 @@
           <a:lstStyle/>
           <a:p>
             <a:r>
-              <a:rPr lang="pt-BR" sz="1600" dirty="0" smtClean="0">
+              <a:rPr lang="pt-BR" sz="1600" smtClean="0">
                 <a:solidFill>
                   <a:schemeClr val="bg2">
                     <a:lumMod val="90000"/>
                   </a:schemeClr>
                 </a:solidFill>
               </a:rPr>
-              <a:t>17</a:t>
-            </a:r>
-            <a:r>
-              <a:rPr lang="pt-BR" sz="1600" dirty="0" smtClean="0">
-                <a:solidFill>
-                  <a:schemeClr val="bg2">
-                    <a:lumMod val="90000"/>
-                  </a:schemeClr>
-                </a:solidFill>
-              </a:rPr>
-              <a:t>/12/2023</a:t>
+              <a:t>31/12/2023</a:t>
             </a:r>
             <a:endParaRPr lang="pt-BR" sz="1600" dirty="0">
               <a:solidFill>

--- a/tempimento.pptx
+++ b/tempimento.pptx
@@ -197,7 +197,7 @@
           <a:p>
             <a:fld id="{A584E3A2-E8EA-4705-A613-CFE9F6F5D3B4}" type="datetimeFigureOut">
               <a:rPr lang="pt-BR" smtClean="0"/>
-              <a:t>02/01/2024</a:t>
+              <a:t>10/01/2024</a:t>
             </a:fld>
             <a:endParaRPr lang="pt-BR"/>
           </a:p>
@@ -680,7 +680,7 @@
           <a:p>
             <a:fld id="{52231B9D-E9F6-4612-9B82-E89961B389AC}" type="datetimeFigureOut">
               <a:rPr lang="pt-BR" smtClean="0"/>
-              <a:t>02/01/2024</a:t>
+              <a:t>10/01/2024</a:t>
             </a:fld>
             <a:endParaRPr lang="pt-BR"/>
           </a:p>
@@ -850,7 +850,7 @@
           <a:p>
             <a:fld id="{52231B9D-E9F6-4612-9B82-E89961B389AC}" type="datetimeFigureOut">
               <a:rPr lang="pt-BR" smtClean="0"/>
-              <a:t>02/01/2024</a:t>
+              <a:t>10/01/2024</a:t>
             </a:fld>
             <a:endParaRPr lang="pt-BR"/>
           </a:p>
@@ -1030,7 +1030,7 @@
           <a:p>
             <a:fld id="{52231B9D-E9F6-4612-9B82-E89961B389AC}" type="datetimeFigureOut">
               <a:rPr lang="pt-BR" smtClean="0"/>
-              <a:t>02/01/2024</a:t>
+              <a:t>10/01/2024</a:t>
             </a:fld>
             <a:endParaRPr lang="pt-BR"/>
           </a:p>
@@ -1200,7 +1200,7 @@
           <a:p>
             <a:fld id="{52231B9D-E9F6-4612-9B82-E89961B389AC}" type="datetimeFigureOut">
               <a:rPr lang="pt-BR" smtClean="0"/>
-              <a:t>02/01/2024</a:t>
+              <a:t>10/01/2024</a:t>
             </a:fld>
             <a:endParaRPr lang="pt-BR"/>
           </a:p>
@@ -1446,7 +1446,7 @@
           <a:p>
             <a:fld id="{52231B9D-E9F6-4612-9B82-E89961B389AC}" type="datetimeFigureOut">
               <a:rPr lang="pt-BR" smtClean="0"/>
-              <a:t>02/01/2024</a:t>
+              <a:t>10/01/2024</a:t>
             </a:fld>
             <a:endParaRPr lang="pt-BR"/>
           </a:p>
@@ -1678,7 +1678,7 @@
           <a:p>
             <a:fld id="{52231B9D-E9F6-4612-9B82-E89961B389AC}" type="datetimeFigureOut">
               <a:rPr lang="pt-BR" smtClean="0"/>
-              <a:t>02/01/2024</a:t>
+              <a:t>10/01/2024</a:t>
             </a:fld>
             <a:endParaRPr lang="pt-BR"/>
           </a:p>
@@ -2045,7 +2045,7 @@
           <a:p>
             <a:fld id="{52231B9D-E9F6-4612-9B82-E89961B389AC}" type="datetimeFigureOut">
               <a:rPr lang="pt-BR" smtClean="0"/>
-              <a:t>02/01/2024</a:t>
+              <a:t>10/01/2024</a:t>
             </a:fld>
             <a:endParaRPr lang="pt-BR"/>
           </a:p>
@@ -2163,7 +2163,7 @@
           <a:p>
             <a:fld id="{52231B9D-E9F6-4612-9B82-E89961B389AC}" type="datetimeFigureOut">
               <a:rPr lang="pt-BR" smtClean="0"/>
-              <a:t>02/01/2024</a:t>
+              <a:t>10/01/2024</a:t>
             </a:fld>
             <a:endParaRPr lang="pt-BR"/>
           </a:p>
@@ -2258,7 +2258,7 @@
           <a:p>
             <a:fld id="{52231B9D-E9F6-4612-9B82-E89961B389AC}" type="datetimeFigureOut">
               <a:rPr lang="pt-BR" smtClean="0"/>
-              <a:t>02/01/2024</a:t>
+              <a:t>10/01/2024</a:t>
             </a:fld>
             <a:endParaRPr lang="pt-BR"/>
           </a:p>
@@ -2535,7 +2535,7 @@
           <a:p>
             <a:fld id="{52231B9D-E9F6-4612-9B82-E89961B389AC}" type="datetimeFigureOut">
               <a:rPr lang="pt-BR" smtClean="0"/>
-              <a:t>02/01/2024</a:t>
+              <a:t>10/01/2024</a:t>
             </a:fld>
             <a:endParaRPr lang="pt-BR"/>
           </a:p>
@@ -2788,7 +2788,7 @@
           <a:p>
             <a:fld id="{52231B9D-E9F6-4612-9B82-E89961B389AC}" type="datetimeFigureOut">
               <a:rPr lang="pt-BR" smtClean="0"/>
-              <a:t>02/01/2024</a:t>
+              <a:t>10/01/2024</a:t>
             </a:fld>
             <a:endParaRPr lang="pt-BR"/>
           </a:p>
@@ -3001,7 +3001,7 @@
           <a:p>
             <a:fld id="{52231B9D-E9F6-4612-9B82-E89961B389AC}" type="datetimeFigureOut">
               <a:rPr lang="pt-BR" smtClean="0"/>
-              <a:t>02/01/2024</a:t>
+              <a:t>10/01/2024</a:t>
             </a:fld>
             <a:endParaRPr lang="pt-BR"/>
           </a:p>
@@ -3658,14 +3658,14 @@
           <a:lstStyle/>
           <a:p>
             <a:r>
-              <a:rPr lang="pt-BR" sz="1600" smtClean="0">
+              <a:rPr lang="pt-BR" sz="1600" dirty="0" smtClean="0">
                 <a:solidFill>
                   <a:schemeClr val="bg2">
                     <a:lumMod val="90000"/>
                   </a:schemeClr>
                 </a:solidFill>
               </a:rPr>
-              <a:t>31/12/2023</a:t>
+              <a:t>07/01/2024</a:t>
             </a:r>
             <a:endParaRPr lang="pt-BR" sz="1600" dirty="0">
               <a:solidFill>

--- a/tempimento.pptx
+++ b/tempimento.pptx
@@ -11,7 +11,7 @@
     <p:sldId id="256" r:id="rId2"/>
   </p:sldIdLst>
   <p:sldSz cx="12192000" cy="6858000"/>
-  <p:notesSz cx="6889750" cy="9671050"/>
+  <p:notesSz cx="6888163" cy="10021888"/>
   <p:defaultTextStyle>
     <a:defPPr>
       <a:defRPr lang="pt-BR"/>
@@ -150,7 +150,7 @@
         <p:spPr>
           <a:xfrm>
             <a:off x="6" y="1"/>
-            <a:ext cx="2985970" cy="484528"/>
+            <a:ext cx="2985282" cy="502105"/>
           </a:xfrm>
           <a:prstGeom prst="rect">
             <a:avLst/>
@@ -180,8 +180,8 @@
         </p:nvSpPr>
         <p:spPr>
           <a:xfrm>
-            <a:off x="3902247" y="1"/>
-            <a:ext cx="2985970" cy="484528"/>
+            <a:off x="3901348" y="1"/>
+            <a:ext cx="2985282" cy="502105"/>
           </a:xfrm>
           <a:prstGeom prst="rect">
             <a:avLst/>
@@ -197,7 +197,7 @@
           <a:p>
             <a:fld id="{A584E3A2-E8EA-4705-A613-CFE9F6F5D3B4}" type="datetimeFigureOut">
               <a:rPr lang="pt-BR" smtClean="0"/>
-              <a:t>10/01/2024</a:t>
+              <a:t>20/01/2024</a:t>
             </a:fld>
             <a:endParaRPr lang="pt-BR"/>
           </a:p>
@@ -215,8 +215,8 @@
         </p:nvSpPr>
         <p:spPr>
           <a:xfrm>
-            <a:off x="544513" y="1209675"/>
-            <a:ext cx="5800725" cy="3262313"/>
+            <a:off x="441325" y="1254125"/>
+            <a:ext cx="6005513" cy="3379788"/>
           </a:xfrm>
           <a:prstGeom prst="rect">
             <a:avLst/>
@@ -248,8 +248,8 @@
         </p:nvSpPr>
         <p:spPr>
           <a:xfrm>
-            <a:off x="688363" y="4654768"/>
-            <a:ext cx="5513032" cy="3807217"/>
+            <a:off x="688204" y="4823630"/>
+            <a:ext cx="5511762" cy="3945332"/>
           </a:xfrm>
           <a:prstGeom prst="rect">
             <a:avLst/>
@@ -308,8 +308,8 @@
         </p:nvSpPr>
         <p:spPr>
           <a:xfrm>
-            <a:off x="6" y="9186524"/>
-            <a:ext cx="2985970" cy="484528"/>
+            <a:off x="6" y="9519785"/>
+            <a:ext cx="2985282" cy="502105"/>
           </a:xfrm>
           <a:prstGeom prst="rect">
             <a:avLst/>
@@ -339,8 +339,8 @@
         </p:nvSpPr>
         <p:spPr>
           <a:xfrm>
-            <a:off x="3902247" y="9186524"/>
-            <a:ext cx="2985970" cy="484528"/>
+            <a:off x="3901348" y="9519785"/>
+            <a:ext cx="2985282" cy="502105"/>
           </a:xfrm>
           <a:prstGeom prst="rect">
             <a:avLst/>
@@ -680,7 +680,7 @@
           <a:p>
             <a:fld id="{52231B9D-E9F6-4612-9B82-E89961B389AC}" type="datetimeFigureOut">
               <a:rPr lang="pt-BR" smtClean="0"/>
-              <a:t>10/01/2024</a:t>
+              <a:t>20/01/2024</a:t>
             </a:fld>
             <a:endParaRPr lang="pt-BR"/>
           </a:p>
@@ -850,7 +850,7 @@
           <a:p>
             <a:fld id="{52231B9D-E9F6-4612-9B82-E89961B389AC}" type="datetimeFigureOut">
               <a:rPr lang="pt-BR" smtClean="0"/>
-              <a:t>10/01/2024</a:t>
+              <a:t>20/01/2024</a:t>
             </a:fld>
             <a:endParaRPr lang="pt-BR"/>
           </a:p>
@@ -1030,7 +1030,7 @@
           <a:p>
             <a:fld id="{52231B9D-E9F6-4612-9B82-E89961B389AC}" type="datetimeFigureOut">
               <a:rPr lang="pt-BR" smtClean="0"/>
-              <a:t>10/01/2024</a:t>
+              <a:t>20/01/2024</a:t>
             </a:fld>
             <a:endParaRPr lang="pt-BR"/>
           </a:p>
@@ -1200,7 +1200,7 @@
           <a:p>
             <a:fld id="{52231B9D-E9F6-4612-9B82-E89961B389AC}" type="datetimeFigureOut">
               <a:rPr lang="pt-BR" smtClean="0"/>
-              <a:t>10/01/2024</a:t>
+              <a:t>20/01/2024</a:t>
             </a:fld>
             <a:endParaRPr lang="pt-BR"/>
           </a:p>
@@ -1446,7 +1446,7 @@
           <a:p>
             <a:fld id="{52231B9D-E9F6-4612-9B82-E89961B389AC}" type="datetimeFigureOut">
               <a:rPr lang="pt-BR" smtClean="0"/>
-              <a:t>10/01/2024</a:t>
+              <a:t>20/01/2024</a:t>
             </a:fld>
             <a:endParaRPr lang="pt-BR"/>
           </a:p>
@@ -1678,7 +1678,7 @@
           <a:p>
             <a:fld id="{52231B9D-E9F6-4612-9B82-E89961B389AC}" type="datetimeFigureOut">
               <a:rPr lang="pt-BR" smtClean="0"/>
-              <a:t>10/01/2024</a:t>
+              <a:t>20/01/2024</a:t>
             </a:fld>
             <a:endParaRPr lang="pt-BR"/>
           </a:p>
@@ -2045,7 +2045,7 @@
           <a:p>
             <a:fld id="{52231B9D-E9F6-4612-9B82-E89961B389AC}" type="datetimeFigureOut">
               <a:rPr lang="pt-BR" smtClean="0"/>
-              <a:t>10/01/2024</a:t>
+              <a:t>20/01/2024</a:t>
             </a:fld>
             <a:endParaRPr lang="pt-BR"/>
           </a:p>
@@ -2163,7 +2163,7 @@
           <a:p>
             <a:fld id="{52231B9D-E9F6-4612-9B82-E89961B389AC}" type="datetimeFigureOut">
               <a:rPr lang="pt-BR" smtClean="0"/>
-              <a:t>10/01/2024</a:t>
+              <a:t>20/01/2024</a:t>
             </a:fld>
             <a:endParaRPr lang="pt-BR"/>
           </a:p>
@@ -2258,7 +2258,7 @@
           <a:p>
             <a:fld id="{52231B9D-E9F6-4612-9B82-E89961B389AC}" type="datetimeFigureOut">
               <a:rPr lang="pt-BR" smtClean="0"/>
-              <a:t>10/01/2024</a:t>
+              <a:t>20/01/2024</a:t>
             </a:fld>
             <a:endParaRPr lang="pt-BR"/>
           </a:p>
@@ -2535,7 +2535,7 @@
           <a:p>
             <a:fld id="{52231B9D-E9F6-4612-9B82-E89961B389AC}" type="datetimeFigureOut">
               <a:rPr lang="pt-BR" smtClean="0"/>
-              <a:t>10/01/2024</a:t>
+              <a:t>20/01/2024</a:t>
             </a:fld>
             <a:endParaRPr lang="pt-BR"/>
           </a:p>
@@ -2788,7 +2788,7 @@
           <a:p>
             <a:fld id="{52231B9D-E9F6-4612-9B82-E89961B389AC}" type="datetimeFigureOut">
               <a:rPr lang="pt-BR" smtClean="0"/>
-              <a:t>10/01/2024</a:t>
+              <a:t>20/01/2024</a:t>
             </a:fld>
             <a:endParaRPr lang="pt-BR"/>
           </a:p>
@@ -3001,7 +3001,7 @@
           <a:p>
             <a:fld id="{52231B9D-E9F6-4612-9B82-E89961B389AC}" type="datetimeFigureOut">
               <a:rPr lang="pt-BR" smtClean="0"/>
-              <a:t>10/01/2024</a:t>
+              <a:t>20/01/2024</a:t>
             </a:fld>
             <a:endParaRPr lang="pt-BR"/>
           </a:p>
@@ -3665,7 +3665,17 @@
                   </a:schemeClr>
                 </a:solidFill>
               </a:rPr>
-              <a:t>07/01/2024</a:t>
+              <a:t>21</a:t>
+            </a:r>
+            <a:r>
+              <a:rPr lang="pt-BR" sz="1600" dirty="0" smtClean="0">
+                <a:solidFill>
+                  <a:schemeClr val="bg2">
+                    <a:lumMod val="90000"/>
+                  </a:schemeClr>
+                </a:solidFill>
+              </a:rPr>
+              <a:t>/01/2024</a:t>
             </a:r>
             <a:endParaRPr lang="pt-BR" sz="1600" dirty="0">
               <a:solidFill>

--- a/tempimento.pptx
+++ b/tempimento.pptx
@@ -197,7 +197,7 @@
           <a:p>
             <a:fld id="{A584E3A2-E8EA-4705-A613-CFE9F6F5D3B4}" type="datetimeFigureOut">
               <a:rPr lang="pt-BR" smtClean="0"/>
-              <a:t>20/01/2024</a:t>
+              <a:t>29/01/2024</a:t>
             </a:fld>
             <a:endParaRPr lang="pt-BR"/>
           </a:p>
@@ -680,7 +680,7 @@
           <a:p>
             <a:fld id="{52231B9D-E9F6-4612-9B82-E89961B389AC}" type="datetimeFigureOut">
               <a:rPr lang="pt-BR" smtClean="0"/>
-              <a:t>20/01/2024</a:t>
+              <a:t>29/01/2024</a:t>
             </a:fld>
             <a:endParaRPr lang="pt-BR"/>
           </a:p>
@@ -850,7 +850,7 @@
           <a:p>
             <a:fld id="{52231B9D-E9F6-4612-9B82-E89961B389AC}" type="datetimeFigureOut">
               <a:rPr lang="pt-BR" smtClean="0"/>
-              <a:t>20/01/2024</a:t>
+              <a:t>29/01/2024</a:t>
             </a:fld>
             <a:endParaRPr lang="pt-BR"/>
           </a:p>
@@ -1030,7 +1030,7 @@
           <a:p>
             <a:fld id="{52231B9D-E9F6-4612-9B82-E89961B389AC}" type="datetimeFigureOut">
               <a:rPr lang="pt-BR" smtClean="0"/>
-              <a:t>20/01/2024</a:t>
+              <a:t>29/01/2024</a:t>
             </a:fld>
             <a:endParaRPr lang="pt-BR"/>
           </a:p>
@@ -1200,7 +1200,7 @@
           <a:p>
             <a:fld id="{52231B9D-E9F6-4612-9B82-E89961B389AC}" type="datetimeFigureOut">
               <a:rPr lang="pt-BR" smtClean="0"/>
-              <a:t>20/01/2024</a:t>
+              <a:t>29/01/2024</a:t>
             </a:fld>
             <a:endParaRPr lang="pt-BR"/>
           </a:p>
@@ -1446,7 +1446,7 @@
           <a:p>
             <a:fld id="{52231B9D-E9F6-4612-9B82-E89961B389AC}" type="datetimeFigureOut">
               <a:rPr lang="pt-BR" smtClean="0"/>
-              <a:t>20/01/2024</a:t>
+              <a:t>29/01/2024</a:t>
             </a:fld>
             <a:endParaRPr lang="pt-BR"/>
           </a:p>
@@ -1678,7 +1678,7 @@
           <a:p>
             <a:fld id="{52231B9D-E9F6-4612-9B82-E89961B389AC}" type="datetimeFigureOut">
               <a:rPr lang="pt-BR" smtClean="0"/>
-              <a:t>20/01/2024</a:t>
+              <a:t>29/01/2024</a:t>
             </a:fld>
             <a:endParaRPr lang="pt-BR"/>
           </a:p>
@@ -2045,7 +2045,7 @@
           <a:p>
             <a:fld id="{52231B9D-E9F6-4612-9B82-E89961B389AC}" type="datetimeFigureOut">
               <a:rPr lang="pt-BR" smtClean="0"/>
-              <a:t>20/01/2024</a:t>
+              <a:t>29/01/2024</a:t>
             </a:fld>
             <a:endParaRPr lang="pt-BR"/>
           </a:p>
@@ -2163,7 +2163,7 @@
           <a:p>
             <a:fld id="{52231B9D-E9F6-4612-9B82-E89961B389AC}" type="datetimeFigureOut">
               <a:rPr lang="pt-BR" smtClean="0"/>
-              <a:t>20/01/2024</a:t>
+              <a:t>29/01/2024</a:t>
             </a:fld>
             <a:endParaRPr lang="pt-BR"/>
           </a:p>
@@ -2258,7 +2258,7 @@
           <a:p>
             <a:fld id="{52231B9D-E9F6-4612-9B82-E89961B389AC}" type="datetimeFigureOut">
               <a:rPr lang="pt-BR" smtClean="0"/>
-              <a:t>20/01/2024</a:t>
+              <a:t>29/01/2024</a:t>
             </a:fld>
             <a:endParaRPr lang="pt-BR"/>
           </a:p>
@@ -2535,7 +2535,7 @@
           <a:p>
             <a:fld id="{52231B9D-E9F6-4612-9B82-E89961B389AC}" type="datetimeFigureOut">
               <a:rPr lang="pt-BR" smtClean="0"/>
-              <a:t>20/01/2024</a:t>
+              <a:t>29/01/2024</a:t>
             </a:fld>
             <a:endParaRPr lang="pt-BR"/>
           </a:p>
@@ -2788,7 +2788,7 @@
           <a:p>
             <a:fld id="{52231B9D-E9F6-4612-9B82-E89961B389AC}" type="datetimeFigureOut">
               <a:rPr lang="pt-BR" smtClean="0"/>
-              <a:t>20/01/2024</a:t>
+              <a:t>29/01/2024</a:t>
             </a:fld>
             <a:endParaRPr lang="pt-BR"/>
           </a:p>
@@ -3001,7 +3001,7 @@
           <a:p>
             <a:fld id="{52231B9D-E9F6-4612-9B82-E89961B389AC}" type="datetimeFigureOut">
               <a:rPr lang="pt-BR" smtClean="0"/>
-              <a:t>20/01/2024</a:t>
+              <a:t>29/01/2024</a:t>
             </a:fld>
             <a:endParaRPr lang="pt-BR"/>
           </a:p>
@@ -3665,7 +3665,7 @@
                   </a:schemeClr>
                 </a:solidFill>
               </a:rPr>
-              <a:t>21</a:t>
+              <a:t>04</a:t>
             </a:r>
             <a:r>
               <a:rPr lang="pt-BR" sz="1600" dirty="0" smtClean="0">
@@ -3675,7 +3675,7 @@
                   </a:schemeClr>
                 </a:solidFill>
               </a:rPr>
-              <a:t>/01/2024</a:t>
+              <a:t>/02/2024</a:t>
             </a:r>
             <a:endParaRPr lang="pt-BR" sz="1600" dirty="0">
               <a:solidFill>

--- a/tempimento.pptx
+++ b/tempimento.pptx
@@ -11,7 +11,7 @@
     <p:sldId id="256" r:id="rId2"/>
   </p:sldIdLst>
   <p:sldSz cx="12192000" cy="6858000"/>
-  <p:notesSz cx="6888163" cy="10021888"/>
+  <p:notesSz cx="6889750" cy="9671050"/>
   <p:defaultTextStyle>
     <a:defPPr>
       <a:defRPr lang="pt-BR"/>
@@ -150,7 +150,7 @@
         <p:spPr>
           <a:xfrm>
             <a:off x="6" y="1"/>
-            <a:ext cx="2985282" cy="502105"/>
+            <a:ext cx="2985970" cy="484528"/>
           </a:xfrm>
           <a:prstGeom prst="rect">
             <a:avLst/>
@@ -180,8 +180,8 @@
         </p:nvSpPr>
         <p:spPr>
           <a:xfrm>
-            <a:off x="3901348" y="1"/>
-            <a:ext cx="2985282" cy="502105"/>
+            <a:off x="3902247" y="1"/>
+            <a:ext cx="2985970" cy="484528"/>
           </a:xfrm>
           <a:prstGeom prst="rect">
             <a:avLst/>
@@ -197,7 +197,7 @@
           <a:p>
             <a:fld id="{A584E3A2-E8EA-4705-A613-CFE9F6F5D3B4}" type="datetimeFigureOut">
               <a:rPr lang="pt-BR" smtClean="0"/>
-              <a:t>29/01/2024</a:t>
+              <a:t>05/02/2024</a:t>
             </a:fld>
             <a:endParaRPr lang="pt-BR"/>
           </a:p>
@@ -215,8 +215,8 @@
         </p:nvSpPr>
         <p:spPr>
           <a:xfrm>
-            <a:off x="441325" y="1254125"/>
-            <a:ext cx="6005513" cy="3379788"/>
+            <a:off x="544513" y="1209675"/>
+            <a:ext cx="5800725" cy="3262313"/>
           </a:xfrm>
           <a:prstGeom prst="rect">
             <a:avLst/>
@@ -248,8 +248,8 @@
         </p:nvSpPr>
         <p:spPr>
           <a:xfrm>
-            <a:off x="688204" y="4823630"/>
-            <a:ext cx="5511762" cy="3945332"/>
+            <a:off x="688363" y="4654768"/>
+            <a:ext cx="5513032" cy="3807217"/>
           </a:xfrm>
           <a:prstGeom prst="rect">
             <a:avLst/>
@@ -308,8 +308,8 @@
         </p:nvSpPr>
         <p:spPr>
           <a:xfrm>
-            <a:off x="6" y="9519785"/>
-            <a:ext cx="2985282" cy="502105"/>
+            <a:off x="6" y="9186525"/>
+            <a:ext cx="2985970" cy="484528"/>
           </a:xfrm>
           <a:prstGeom prst="rect">
             <a:avLst/>
@@ -339,8 +339,8 @@
         </p:nvSpPr>
         <p:spPr>
           <a:xfrm>
-            <a:off x="3901348" y="9519785"/>
-            <a:ext cx="2985282" cy="502105"/>
+            <a:off x="3902247" y="9186525"/>
+            <a:ext cx="2985970" cy="484528"/>
           </a:xfrm>
           <a:prstGeom prst="rect">
             <a:avLst/>
@@ -680,7 +680,7 @@
           <a:p>
             <a:fld id="{52231B9D-E9F6-4612-9B82-E89961B389AC}" type="datetimeFigureOut">
               <a:rPr lang="pt-BR" smtClean="0"/>
-              <a:t>29/01/2024</a:t>
+              <a:t>05/02/2024</a:t>
             </a:fld>
             <a:endParaRPr lang="pt-BR"/>
           </a:p>
@@ -850,7 +850,7 @@
           <a:p>
             <a:fld id="{52231B9D-E9F6-4612-9B82-E89961B389AC}" type="datetimeFigureOut">
               <a:rPr lang="pt-BR" smtClean="0"/>
-              <a:t>29/01/2024</a:t>
+              <a:t>05/02/2024</a:t>
             </a:fld>
             <a:endParaRPr lang="pt-BR"/>
           </a:p>
@@ -1030,7 +1030,7 @@
           <a:p>
             <a:fld id="{52231B9D-E9F6-4612-9B82-E89961B389AC}" type="datetimeFigureOut">
               <a:rPr lang="pt-BR" smtClean="0"/>
-              <a:t>29/01/2024</a:t>
+              <a:t>05/02/2024</a:t>
             </a:fld>
             <a:endParaRPr lang="pt-BR"/>
           </a:p>
@@ -1200,7 +1200,7 @@
           <a:p>
             <a:fld id="{52231B9D-E9F6-4612-9B82-E89961B389AC}" type="datetimeFigureOut">
               <a:rPr lang="pt-BR" smtClean="0"/>
-              <a:t>29/01/2024</a:t>
+              <a:t>05/02/2024</a:t>
             </a:fld>
             <a:endParaRPr lang="pt-BR"/>
           </a:p>
@@ -1446,7 +1446,7 @@
           <a:p>
             <a:fld id="{52231B9D-E9F6-4612-9B82-E89961B389AC}" type="datetimeFigureOut">
               <a:rPr lang="pt-BR" smtClean="0"/>
-              <a:t>29/01/2024</a:t>
+              <a:t>05/02/2024</a:t>
             </a:fld>
             <a:endParaRPr lang="pt-BR"/>
           </a:p>
@@ -1678,7 +1678,7 @@
           <a:p>
             <a:fld id="{52231B9D-E9F6-4612-9B82-E89961B389AC}" type="datetimeFigureOut">
               <a:rPr lang="pt-BR" smtClean="0"/>
-              <a:t>29/01/2024</a:t>
+              <a:t>05/02/2024</a:t>
             </a:fld>
             <a:endParaRPr lang="pt-BR"/>
           </a:p>
@@ -2045,7 +2045,7 @@
           <a:p>
             <a:fld id="{52231B9D-E9F6-4612-9B82-E89961B389AC}" type="datetimeFigureOut">
               <a:rPr lang="pt-BR" smtClean="0"/>
-              <a:t>29/01/2024</a:t>
+              <a:t>05/02/2024</a:t>
             </a:fld>
             <a:endParaRPr lang="pt-BR"/>
           </a:p>
@@ -2163,7 +2163,7 @@
           <a:p>
             <a:fld id="{52231B9D-E9F6-4612-9B82-E89961B389AC}" type="datetimeFigureOut">
               <a:rPr lang="pt-BR" smtClean="0"/>
-              <a:t>29/01/2024</a:t>
+              <a:t>05/02/2024</a:t>
             </a:fld>
             <a:endParaRPr lang="pt-BR"/>
           </a:p>
@@ -2258,7 +2258,7 @@
           <a:p>
             <a:fld id="{52231B9D-E9F6-4612-9B82-E89961B389AC}" type="datetimeFigureOut">
               <a:rPr lang="pt-BR" smtClean="0"/>
-              <a:t>29/01/2024</a:t>
+              <a:t>05/02/2024</a:t>
             </a:fld>
             <a:endParaRPr lang="pt-BR"/>
           </a:p>
@@ -2535,7 +2535,7 @@
           <a:p>
             <a:fld id="{52231B9D-E9F6-4612-9B82-E89961B389AC}" type="datetimeFigureOut">
               <a:rPr lang="pt-BR" smtClean="0"/>
-              <a:t>29/01/2024</a:t>
+              <a:t>05/02/2024</a:t>
             </a:fld>
             <a:endParaRPr lang="pt-BR"/>
           </a:p>
@@ -2788,7 +2788,7 @@
           <a:p>
             <a:fld id="{52231B9D-E9F6-4612-9B82-E89961B389AC}" type="datetimeFigureOut">
               <a:rPr lang="pt-BR" smtClean="0"/>
-              <a:t>29/01/2024</a:t>
+              <a:t>05/02/2024</a:t>
             </a:fld>
             <a:endParaRPr lang="pt-BR"/>
           </a:p>
@@ -3001,7 +3001,7 @@
           <a:p>
             <a:fld id="{52231B9D-E9F6-4612-9B82-E89961B389AC}" type="datetimeFigureOut">
               <a:rPr lang="pt-BR" smtClean="0"/>
-              <a:t>29/01/2024</a:t>
+              <a:t>05/02/2024</a:t>
             </a:fld>
             <a:endParaRPr lang="pt-BR"/>
           </a:p>
@@ -3665,7 +3665,7 @@
                   </a:schemeClr>
                 </a:solidFill>
               </a:rPr>
-              <a:t>04</a:t>
+              <a:t>11</a:t>
             </a:r>
             <a:r>
               <a:rPr lang="pt-BR" sz="1600" dirty="0" smtClean="0">

--- a/tempimento.pptx
+++ b/tempimento.pptx
@@ -197,7 +197,7 @@
           <a:p>
             <a:fld id="{A584E3A2-E8EA-4705-A613-CFE9F6F5D3B4}" type="datetimeFigureOut">
               <a:rPr lang="pt-BR" smtClean="0"/>
-              <a:t>05/02/2024</a:t>
+              <a:t>21/02/2024</a:t>
             </a:fld>
             <a:endParaRPr lang="pt-BR"/>
           </a:p>
@@ -680,7 +680,7 @@
           <a:p>
             <a:fld id="{52231B9D-E9F6-4612-9B82-E89961B389AC}" type="datetimeFigureOut">
               <a:rPr lang="pt-BR" smtClean="0"/>
-              <a:t>05/02/2024</a:t>
+              <a:t>21/02/2024</a:t>
             </a:fld>
             <a:endParaRPr lang="pt-BR"/>
           </a:p>
@@ -850,7 +850,7 @@
           <a:p>
             <a:fld id="{52231B9D-E9F6-4612-9B82-E89961B389AC}" type="datetimeFigureOut">
               <a:rPr lang="pt-BR" smtClean="0"/>
-              <a:t>05/02/2024</a:t>
+              <a:t>21/02/2024</a:t>
             </a:fld>
             <a:endParaRPr lang="pt-BR"/>
           </a:p>
@@ -1030,7 +1030,7 @@
           <a:p>
             <a:fld id="{52231B9D-E9F6-4612-9B82-E89961B389AC}" type="datetimeFigureOut">
               <a:rPr lang="pt-BR" smtClean="0"/>
-              <a:t>05/02/2024</a:t>
+              <a:t>21/02/2024</a:t>
             </a:fld>
             <a:endParaRPr lang="pt-BR"/>
           </a:p>
@@ -1200,7 +1200,7 @@
           <a:p>
             <a:fld id="{52231B9D-E9F6-4612-9B82-E89961B389AC}" type="datetimeFigureOut">
               <a:rPr lang="pt-BR" smtClean="0"/>
-              <a:t>05/02/2024</a:t>
+              <a:t>21/02/2024</a:t>
             </a:fld>
             <a:endParaRPr lang="pt-BR"/>
           </a:p>
@@ -1446,7 +1446,7 @@
           <a:p>
             <a:fld id="{52231B9D-E9F6-4612-9B82-E89961B389AC}" type="datetimeFigureOut">
               <a:rPr lang="pt-BR" smtClean="0"/>
-              <a:t>05/02/2024</a:t>
+              <a:t>21/02/2024</a:t>
             </a:fld>
             <a:endParaRPr lang="pt-BR"/>
           </a:p>
@@ -1678,7 +1678,7 @@
           <a:p>
             <a:fld id="{52231B9D-E9F6-4612-9B82-E89961B389AC}" type="datetimeFigureOut">
               <a:rPr lang="pt-BR" smtClean="0"/>
-              <a:t>05/02/2024</a:t>
+              <a:t>21/02/2024</a:t>
             </a:fld>
             <a:endParaRPr lang="pt-BR"/>
           </a:p>
@@ -2045,7 +2045,7 @@
           <a:p>
             <a:fld id="{52231B9D-E9F6-4612-9B82-E89961B389AC}" type="datetimeFigureOut">
               <a:rPr lang="pt-BR" smtClean="0"/>
-              <a:t>05/02/2024</a:t>
+              <a:t>21/02/2024</a:t>
             </a:fld>
             <a:endParaRPr lang="pt-BR"/>
           </a:p>
@@ -2163,7 +2163,7 @@
           <a:p>
             <a:fld id="{52231B9D-E9F6-4612-9B82-E89961B389AC}" type="datetimeFigureOut">
               <a:rPr lang="pt-BR" smtClean="0"/>
-              <a:t>05/02/2024</a:t>
+              <a:t>21/02/2024</a:t>
             </a:fld>
             <a:endParaRPr lang="pt-BR"/>
           </a:p>
@@ -2258,7 +2258,7 @@
           <a:p>
             <a:fld id="{52231B9D-E9F6-4612-9B82-E89961B389AC}" type="datetimeFigureOut">
               <a:rPr lang="pt-BR" smtClean="0"/>
-              <a:t>05/02/2024</a:t>
+              <a:t>21/02/2024</a:t>
             </a:fld>
             <a:endParaRPr lang="pt-BR"/>
           </a:p>
@@ -2535,7 +2535,7 @@
           <a:p>
             <a:fld id="{52231B9D-E9F6-4612-9B82-E89961B389AC}" type="datetimeFigureOut">
               <a:rPr lang="pt-BR" smtClean="0"/>
-              <a:t>05/02/2024</a:t>
+              <a:t>21/02/2024</a:t>
             </a:fld>
             <a:endParaRPr lang="pt-BR"/>
           </a:p>
@@ -2788,7 +2788,7 @@
           <a:p>
             <a:fld id="{52231B9D-E9F6-4612-9B82-E89961B389AC}" type="datetimeFigureOut">
               <a:rPr lang="pt-BR" smtClean="0"/>
-              <a:t>05/02/2024</a:t>
+              <a:t>21/02/2024</a:t>
             </a:fld>
             <a:endParaRPr lang="pt-BR"/>
           </a:p>
@@ -3001,7 +3001,7 @@
           <a:p>
             <a:fld id="{52231B9D-E9F6-4612-9B82-E89961B389AC}" type="datetimeFigureOut">
               <a:rPr lang="pt-BR" smtClean="0"/>
-              <a:t>05/02/2024</a:t>
+              <a:t>21/02/2024</a:t>
             </a:fld>
             <a:endParaRPr lang="pt-BR"/>
           </a:p>
@@ -3665,17 +3665,7 @@
                   </a:schemeClr>
                 </a:solidFill>
               </a:rPr>
-              <a:t>11</a:t>
-            </a:r>
-            <a:r>
-              <a:rPr lang="pt-BR" sz="1600" dirty="0" smtClean="0">
-                <a:solidFill>
-                  <a:schemeClr val="bg2">
-                    <a:lumMod val="90000"/>
-                  </a:schemeClr>
-                </a:solidFill>
-              </a:rPr>
-              <a:t>/02/2024</a:t>
+              <a:t>03/03/2024</a:t>
             </a:r>
             <a:endParaRPr lang="pt-BR" sz="1600" dirty="0">
               <a:solidFill>

--- a/tempimento.pptx
+++ b/tempimento.pptx
@@ -197,7 +197,7 @@
           <a:p>
             <a:fld id="{A584E3A2-E8EA-4705-A613-CFE9F6F5D3B4}" type="datetimeFigureOut">
               <a:rPr lang="pt-BR" smtClean="0"/>
-              <a:t>21/02/2024</a:t>
+              <a:t>13/03/2024</a:t>
             </a:fld>
             <a:endParaRPr lang="pt-BR"/>
           </a:p>
@@ -680,7 +680,7 @@
           <a:p>
             <a:fld id="{52231B9D-E9F6-4612-9B82-E89961B389AC}" type="datetimeFigureOut">
               <a:rPr lang="pt-BR" smtClean="0"/>
-              <a:t>21/02/2024</a:t>
+              <a:t>13/03/2024</a:t>
             </a:fld>
             <a:endParaRPr lang="pt-BR"/>
           </a:p>
@@ -850,7 +850,7 @@
           <a:p>
             <a:fld id="{52231B9D-E9F6-4612-9B82-E89961B389AC}" type="datetimeFigureOut">
               <a:rPr lang="pt-BR" smtClean="0"/>
-              <a:t>21/02/2024</a:t>
+              <a:t>13/03/2024</a:t>
             </a:fld>
             <a:endParaRPr lang="pt-BR"/>
           </a:p>
@@ -1030,7 +1030,7 @@
           <a:p>
             <a:fld id="{52231B9D-E9F6-4612-9B82-E89961B389AC}" type="datetimeFigureOut">
               <a:rPr lang="pt-BR" smtClean="0"/>
-              <a:t>21/02/2024</a:t>
+              <a:t>13/03/2024</a:t>
             </a:fld>
             <a:endParaRPr lang="pt-BR"/>
           </a:p>
@@ -1200,7 +1200,7 @@
           <a:p>
             <a:fld id="{52231B9D-E9F6-4612-9B82-E89961B389AC}" type="datetimeFigureOut">
               <a:rPr lang="pt-BR" smtClean="0"/>
-              <a:t>21/02/2024</a:t>
+              <a:t>13/03/2024</a:t>
             </a:fld>
             <a:endParaRPr lang="pt-BR"/>
           </a:p>
@@ -1446,7 +1446,7 @@
           <a:p>
             <a:fld id="{52231B9D-E9F6-4612-9B82-E89961B389AC}" type="datetimeFigureOut">
               <a:rPr lang="pt-BR" smtClean="0"/>
-              <a:t>21/02/2024</a:t>
+              <a:t>13/03/2024</a:t>
             </a:fld>
             <a:endParaRPr lang="pt-BR"/>
           </a:p>
@@ -1678,7 +1678,7 @@
           <a:p>
             <a:fld id="{52231B9D-E9F6-4612-9B82-E89961B389AC}" type="datetimeFigureOut">
               <a:rPr lang="pt-BR" smtClean="0"/>
-              <a:t>21/02/2024</a:t>
+              <a:t>13/03/2024</a:t>
             </a:fld>
             <a:endParaRPr lang="pt-BR"/>
           </a:p>
@@ -2045,7 +2045,7 @@
           <a:p>
             <a:fld id="{52231B9D-E9F6-4612-9B82-E89961B389AC}" type="datetimeFigureOut">
               <a:rPr lang="pt-BR" smtClean="0"/>
-              <a:t>21/02/2024</a:t>
+              <a:t>13/03/2024</a:t>
             </a:fld>
             <a:endParaRPr lang="pt-BR"/>
           </a:p>
@@ -2163,7 +2163,7 @@
           <a:p>
             <a:fld id="{52231B9D-E9F6-4612-9B82-E89961B389AC}" type="datetimeFigureOut">
               <a:rPr lang="pt-BR" smtClean="0"/>
-              <a:t>21/02/2024</a:t>
+              <a:t>13/03/2024</a:t>
             </a:fld>
             <a:endParaRPr lang="pt-BR"/>
           </a:p>
@@ -2258,7 +2258,7 @@
           <a:p>
             <a:fld id="{52231B9D-E9F6-4612-9B82-E89961B389AC}" type="datetimeFigureOut">
               <a:rPr lang="pt-BR" smtClean="0"/>
-              <a:t>21/02/2024</a:t>
+              <a:t>13/03/2024</a:t>
             </a:fld>
             <a:endParaRPr lang="pt-BR"/>
           </a:p>
@@ -2535,7 +2535,7 @@
           <a:p>
             <a:fld id="{52231B9D-E9F6-4612-9B82-E89961B389AC}" type="datetimeFigureOut">
               <a:rPr lang="pt-BR" smtClean="0"/>
-              <a:t>21/02/2024</a:t>
+              <a:t>13/03/2024</a:t>
             </a:fld>
             <a:endParaRPr lang="pt-BR"/>
           </a:p>
@@ -2788,7 +2788,7 @@
           <a:p>
             <a:fld id="{52231B9D-E9F6-4612-9B82-E89961B389AC}" type="datetimeFigureOut">
               <a:rPr lang="pt-BR" smtClean="0"/>
-              <a:t>21/02/2024</a:t>
+              <a:t>13/03/2024</a:t>
             </a:fld>
             <a:endParaRPr lang="pt-BR"/>
           </a:p>
@@ -3001,7 +3001,7 @@
           <a:p>
             <a:fld id="{52231B9D-E9F6-4612-9B82-E89961B389AC}" type="datetimeFigureOut">
               <a:rPr lang="pt-BR" smtClean="0"/>
-              <a:t>21/02/2024</a:t>
+              <a:t>13/03/2024</a:t>
             </a:fld>
             <a:endParaRPr lang="pt-BR"/>
           </a:p>
@@ -3665,7 +3665,17 @@
                   </a:schemeClr>
                 </a:solidFill>
               </a:rPr>
-              <a:t>03/03/2024</a:t>
+              <a:t>10</a:t>
+            </a:r>
+            <a:r>
+              <a:rPr lang="pt-BR" sz="1600" dirty="0" smtClean="0">
+                <a:solidFill>
+                  <a:schemeClr val="bg2">
+                    <a:lumMod val="90000"/>
+                  </a:schemeClr>
+                </a:solidFill>
+              </a:rPr>
+              <a:t>/03/2024</a:t>
             </a:r>
             <a:endParaRPr lang="pt-BR" sz="1600" dirty="0">
               <a:solidFill>

--- a/tempimento.pptx
+++ b/tempimento.pptx
@@ -197,7 +197,7 @@
           <a:p>
             <a:fld id="{A584E3A2-E8EA-4705-A613-CFE9F6F5D3B4}" type="datetimeFigureOut">
               <a:rPr lang="pt-BR" smtClean="0"/>
-              <a:t>13/03/2024</a:t>
+              <a:t>18/03/2024</a:t>
             </a:fld>
             <a:endParaRPr lang="pt-BR"/>
           </a:p>
@@ -680,7 +680,7 @@
           <a:p>
             <a:fld id="{52231B9D-E9F6-4612-9B82-E89961B389AC}" type="datetimeFigureOut">
               <a:rPr lang="pt-BR" smtClean="0"/>
-              <a:t>13/03/2024</a:t>
+              <a:t>18/03/2024</a:t>
             </a:fld>
             <a:endParaRPr lang="pt-BR"/>
           </a:p>
@@ -850,7 +850,7 @@
           <a:p>
             <a:fld id="{52231B9D-E9F6-4612-9B82-E89961B389AC}" type="datetimeFigureOut">
               <a:rPr lang="pt-BR" smtClean="0"/>
-              <a:t>13/03/2024</a:t>
+              <a:t>18/03/2024</a:t>
             </a:fld>
             <a:endParaRPr lang="pt-BR"/>
           </a:p>
@@ -1030,7 +1030,7 @@
           <a:p>
             <a:fld id="{52231B9D-E9F6-4612-9B82-E89961B389AC}" type="datetimeFigureOut">
               <a:rPr lang="pt-BR" smtClean="0"/>
-              <a:t>13/03/2024</a:t>
+              <a:t>18/03/2024</a:t>
             </a:fld>
             <a:endParaRPr lang="pt-BR"/>
           </a:p>
@@ -1200,7 +1200,7 @@
           <a:p>
             <a:fld id="{52231B9D-E9F6-4612-9B82-E89961B389AC}" type="datetimeFigureOut">
               <a:rPr lang="pt-BR" smtClean="0"/>
-              <a:t>13/03/2024</a:t>
+              <a:t>18/03/2024</a:t>
             </a:fld>
             <a:endParaRPr lang="pt-BR"/>
           </a:p>
@@ -1446,7 +1446,7 @@
           <a:p>
             <a:fld id="{52231B9D-E9F6-4612-9B82-E89961B389AC}" type="datetimeFigureOut">
               <a:rPr lang="pt-BR" smtClean="0"/>
-              <a:t>13/03/2024</a:t>
+              <a:t>18/03/2024</a:t>
             </a:fld>
             <a:endParaRPr lang="pt-BR"/>
           </a:p>
@@ -1678,7 +1678,7 @@
           <a:p>
             <a:fld id="{52231B9D-E9F6-4612-9B82-E89961B389AC}" type="datetimeFigureOut">
               <a:rPr lang="pt-BR" smtClean="0"/>
-              <a:t>13/03/2024</a:t>
+              <a:t>18/03/2024</a:t>
             </a:fld>
             <a:endParaRPr lang="pt-BR"/>
           </a:p>
@@ -2045,7 +2045,7 @@
           <a:p>
             <a:fld id="{52231B9D-E9F6-4612-9B82-E89961B389AC}" type="datetimeFigureOut">
               <a:rPr lang="pt-BR" smtClean="0"/>
-              <a:t>13/03/2024</a:t>
+              <a:t>18/03/2024</a:t>
             </a:fld>
             <a:endParaRPr lang="pt-BR"/>
           </a:p>
@@ -2163,7 +2163,7 @@
           <a:p>
             <a:fld id="{52231B9D-E9F6-4612-9B82-E89961B389AC}" type="datetimeFigureOut">
               <a:rPr lang="pt-BR" smtClean="0"/>
-              <a:t>13/03/2024</a:t>
+              <a:t>18/03/2024</a:t>
             </a:fld>
             <a:endParaRPr lang="pt-BR"/>
           </a:p>
@@ -2258,7 +2258,7 @@
           <a:p>
             <a:fld id="{52231B9D-E9F6-4612-9B82-E89961B389AC}" type="datetimeFigureOut">
               <a:rPr lang="pt-BR" smtClean="0"/>
-              <a:t>13/03/2024</a:t>
+              <a:t>18/03/2024</a:t>
             </a:fld>
             <a:endParaRPr lang="pt-BR"/>
           </a:p>
@@ -2535,7 +2535,7 @@
           <a:p>
             <a:fld id="{52231B9D-E9F6-4612-9B82-E89961B389AC}" type="datetimeFigureOut">
               <a:rPr lang="pt-BR" smtClean="0"/>
-              <a:t>13/03/2024</a:t>
+              <a:t>18/03/2024</a:t>
             </a:fld>
             <a:endParaRPr lang="pt-BR"/>
           </a:p>
@@ -2788,7 +2788,7 @@
           <a:p>
             <a:fld id="{52231B9D-E9F6-4612-9B82-E89961B389AC}" type="datetimeFigureOut">
               <a:rPr lang="pt-BR" smtClean="0"/>
-              <a:t>13/03/2024</a:t>
+              <a:t>18/03/2024</a:t>
             </a:fld>
             <a:endParaRPr lang="pt-BR"/>
           </a:p>
@@ -3001,7 +3001,7 @@
           <a:p>
             <a:fld id="{52231B9D-E9F6-4612-9B82-E89961B389AC}" type="datetimeFigureOut">
               <a:rPr lang="pt-BR" smtClean="0"/>
-              <a:t>13/03/2024</a:t>
+              <a:t>18/03/2024</a:t>
             </a:fld>
             <a:endParaRPr lang="pt-BR"/>
           </a:p>
@@ -3665,17 +3665,7 @@
                   </a:schemeClr>
                 </a:solidFill>
               </a:rPr>
-              <a:t>10</a:t>
-            </a:r>
-            <a:r>
-              <a:rPr lang="pt-BR" sz="1600" dirty="0" smtClean="0">
-                <a:solidFill>
-                  <a:schemeClr val="bg2">
-                    <a:lumMod val="90000"/>
-                  </a:schemeClr>
-                </a:solidFill>
-              </a:rPr>
-              <a:t>/03/2024</a:t>
+              <a:t>17/03/2024</a:t>
             </a:r>
             <a:endParaRPr lang="pt-BR" sz="1600" dirty="0">
               <a:solidFill>

--- a/tempimento.pptx
+++ b/tempimento.pptx
@@ -197,7 +197,7 @@
           <a:p>
             <a:fld id="{A584E3A2-E8EA-4705-A613-CFE9F6F5D3B4}" type="datetimeFigureOut">
               <a:rPr lang="pt-BR" smtClean="0"/>
-              <a:t>18/03/2024</a:t>
+              <a:t>26/03/2024</a:t>
             </a:fld>
             <a:endParaRPr lang="pt-BR"/>
           </a:p>
@@ -680,7 +680,7 @@
           <a:p>
             <a:fld id="{52231B9D-E9F6-4612-9B82-E89961B389AC}" type="datetimeFigureOut">
               <a:rPr lang="pt-BR" smtClean="0"/>
-              <a:t>18/03/2024</a:t>
+              <a:t>26/03/2024</a:t>
             </a:fld>
             <a:endParaRPr lang="pt-BR"/>
           </a:p>
@@ -850,7 +850,7 @@
           <a:p>
             <a:fld id="{52231B9D-E9F6-4612-9B82-E89961B389AC}" type="datetimeFigureOut">
               <a:rPr lang="pt-BR" smtClean="0"/>
-              <a:t>18/03/2024</a:t>
+              <a:t>26/03/2024</a:t>
             </a:fld>
             <a:endParaRPr lang="pt-BR"/>
           </a:p>
@@ -1030,7 +1030,7 @@
           <a:p>
             <a:fld id="{52231B9D-E9F6-4612-9B82-E89961B389AC}" type="datetimeFigureOut">
               <a:rPr lang="pt-BR" smtClean="0"/>
-              <a:t>18/03/2024</a:t>
+              <a:t>26/03/2024</a:t>
             </a:fld>
             <a:endParaRPr lang="pt-BR"/>
           </a:p>
@@ -1200,7 +1200,7 @@
           <a:p>
             <a:fld id="{52231B9D-E9F6-4612-9B82-E89961B389AC}" type="datetimeFigureOut">
               <a:rPr lang="pt-BR" smtClean="0"/>
-              <a:t>18/03/2024</a:t>
+              <a:t>26/03/2024</a:t>
             </a:fld>
             <a:endParaRPr lang="pt-BR"/>
           </a:p>
@@ -1446,7 +1446,7 @@
           <a:p>
             <a:fld id="{52231B9D-E9F6-4612-9B82-E89961B389AC}" type="datetimeFigureOut">
               <a:rPr lang="pt-BR" smtClean="0"/>
-              <a:t>18/03/2024</a:t>
+              <a:t>26/03/2024</a:t>
             </a:fld>
             <a:endParaRPr lang="pt-BR"/>
           </a:p>
@@ -1678,7 +1678,7 @@
           <a:p>
             <a:fld id="{52231B9D-E9F6-4612-9B82-E89961B389AC}" type="datetimeFigureOut">
               <a:rPr lang="pt-BR" smtClean="0"/>
-              <a:t>18/03/2024</a:t>
+              <a:t>26/03/2024</a:t>
             </a:fld>
             <a:endParaRPr lang="pt-BR"/>
           </a:p>
@@ -2045,7 +2045,7 @@
           <a:p>
             <a:fld id="{52231B9D-E9F6-4612-9B82-E89961B389AC}" type="datetimeFigureOut">
               <a:rPr lang="pt-BR" smtClean="0"/>
-              <a:t>18/03/2024</a:t>
+              <a:t>26/03/2024</a:t>
             </a:fld>
             <a:endParaRPr lang="pt-BR"/>
           </a:p>
@@ -2163,7 +2163,7 @@
           <a:p>
             <a:fld id="{52231B9D-E9F6-4612-9B82-E89961B389AC}" type="datetimeFigureOut">
               <a:rPr lang="pt-BR" smtClean="0"/>
-              <a:t>18/03/2024</a:t>
+              <a:t>26/03/2024</a:t>
             </a:fld>
             <a:endParaRPr lang="pt-BR"/>
           </a:p>
@@ -2258,7 +2258,7 @@
           <a:p>
             <a:fld id="{52231B9D-E9F6-4612-9B82-E89961B389AC}" type="datetimeFigureOut">
               <a:rPr lang="pt-BR" smtClean="0"/>
-              <a:t>18/03/2024</a:t>
+              <a:t>26/03/2024</a:t>
             </a:fld>
             <a:endParaRPr lang="pt-BR"/>
           </a:p>
@@ -2535,7 +2535,7 @@
           <a:p>
             <a:fld id="{52231B9D-E9F6-4612-9B82-E89961B389AC}" type="datetimeFigureOut">
               <a:rPr lang="pt-BR" smtClean="0"/>
-              <a:t>18/03/2024</a:t>
+              <a:t>26/03/2024</a:t>
             </a:fld>
             <a:endParaRPr lang="pt-BR"/>
           </a:p>
@@ -2788,7 +2788,7 @@
           <a:p>
             <a:fld id="{52231B9D-E9F6-4612-9B82-E89961B389AC}" type="datetimeFigureOut">
               <a:rPr lang="pt-BR" smtClean="0"/>
-              <a:t>18/03/2024</a:t>
+              <a:t>26/03/2024</a:t>
             </a:fld>
             <a:endParaRPr lang="pt-BR"/>
           </a:p>
@@ -3001,7 +3001,7 @@
           <a:p>
             <a:fld id="{52231B9D-E9F6-4612-9B82-E89961B389AC}" type="datetimeFigureOut">
               <a:rPr lang="pt-BR" smtClean="0"/>
-              <a:t>18/03/2024</a:t>
+              <a:t>26/03/2024</a:t>
             </a:fld>
             <a:endParaRPr lang="pt-BR"/>
           </a:p>
@@ -3665,7 +3665,7 @@
                   </a:schemeClr>
                 </a:solidFill>
               </a:rPr>
-              <a:t>17/03/2024</a:t>
+              <a:t>31/03/2024</a:t>
             </a:r>
             <a:endParaRPr lang="pt-BR" sz="1600" dirty="0">
               <a:solidFill>

--- a/tempimento.pptx
+++ b/tempimento.pptx
@@ -197,7 +197,7 @@
           <a:p>
             <a:fld id="{A584E3A2-E8EA-4705-A613-CFE9F6F5D3B4}" type="datetimeFigureOut">
               <a:rPr lang="pt-BR" smtClean="0"/>
-              <a:t>26/03/2024</a:t>
+              <a:t>11/04/2024</a:t>
             </a:fld>
             <a:endParaRPr lang="pt-BR"/>
           </a:p>
@@ -680,7 +680,7 @@
           <a:p>
             <a:fld id="{52231B9D-E9F6-4612-9B82-E89961B389AC}" type="datetimeFigureOut">
               <a:rPr lang="pt-BR" smtClean="0"/>
-              <a:t>26/03/2024</a:t>
+              <a:t>11/04/2024</a:t>
             </a:fld>
             <a:endParaRPr lang="pt-BR"/>
           </a:p>
@@ -850,7 +850,7 @@
           <a:p>
             <a:fld id="{52231B9D-E9F6-4612-9B82-E89961B389AC}" type="datetimeFigureOut">
               <a:rPr lang="pt-BR" smtClean="0"/>
-              <a:t>26/03/2024</a:t>
+              <a:t>11/04/2024</a:t>
             </a:fld>
             <a:endParaRPr lang="pt-BR"/>
           </a:p>
@@ -1030,7 +1030,7 @@
           <a:p>
             <a:fld id="{52231B9D-E9F6-4612-9B82-E89961B389AC}" type="datetimeFigureOut">
               <a:rPr lang="pt-BR" smtClean="0"/>
-              <a:t>26/03/2024</a:t>
+              <a:t>11/04/2024</a:t>
             </a:fld>
             <a:endParaRPr lang="pt-BR"/>
           </a:p>
@@ -1200,7 +1200,7 @@
           <a:p>
             <a:fld id="{52231B9D-E9F6-4612-9B82-E89961B389AC}" type="datetimeFigureOut">
               <a:rPr lang="pt-BR" smtClean="0"/>
-              <a:t>26/03/2024</a:t>
+              <a:t>11/04/2024</a:t>
             </a:fld>
             <a:endParaRPr lang="pt-BR"/>
           </a:p>
@@ -1446,7 +1446,7 @@
           <a:p>
             <a:fld id="{52231B9D-E9F6-4612-9B82-E89961B389AC}" type="datetimeFigureOut">
               <a:rPr lang="pt-BR" smtClean="0"/>
-              <a:t>26/03/2024</a:t>
+              <a:t>11/04/2024</a:t>
             </a:fld>
             <a:endParaRPr lang="pt-BR"/>
           </a:p>
@@ -1678,7 +1678,7 @@
           <a:p>
             <a:fld id="{52231B9D-E9F6-4612-9B82-E89961B389AC}" type="datetimeFigureOut">
               <a:rPr lang="pt-BR" smtClean="0"/>
-              <a:t>26/03/2024</a:t>
+              <a:t>11/04/2024</a:t>
             </a:fld>
             <a:endParaRPr lang="pt-BR"/>
           </a:p>
@@ -2045,7 +2045,7 @@
           <a:p>
             <a:fld id="{52231B9D-E9F6-4612-9B82-E89961B389AC}" type="datetimeFigureOut">
               <a:rPr lang="pt-BR" smtClean="0"/>
-              <a:t>26/03/2024</a:t>
+              <a:t>11/04/2024</a:t>
             </a:fld>
             <a:endParaRPr lang="pt-BR"/>
           </a:p>
@@ -2163,7 +2163,7 @@
           <a:p>
             <a:fld id="{52231B9D-E9F6-4612-9B82-E89961B389AC}" type="datetimeFigureOut">
               <a:rPr lang="pt-BR" smtClean="0"/>
-              <a:t>26/03/2024</a:t>
+              <a:t>11/04/2024</a:t>
             </a:fld>
             <a:endParaRPr lang="pt-BR"/>
           </a:p>
@@ -2258,7 +2258,7 @@
           <a:p>
             <a:fld id="{52231B9D-E9F6-4612-9B82-E89961B389AC}" type="datetimeFigureOut">
               <a:rPr lang="pt-BR" smtClean="0"/>
-              <a:t>26/03/2024</a:t>
+              <a:t>11/04/2024</a:t>
             </a:fld>
             <a:endParaRPr lang="pt-BR"/>
           </a:p>
@@ -2535,7 +2535,7 @@
           <a:p>
             <a:fld id="{52231B9D-E9F6-4612-9B82-E89961B389AC}" type="datetimeFigureOut">
               <a:rPr lang="pt-BR" smtClean="0"/>
-              <a:t>26/03/2024</a:t>
+              <a:t>11/04/2024</a:t>
             </a:fld>
             <a:endParaRPr lang="pt-BR"/>
           </a:p>
@@ -2788,7 +2788,7 @@
           <a:p>
             <a:fld id="{52231B9D-E9F6-4612-9B82-E89961B389AC}" type="datetimeFigureOut">
               <a:rPr lang="pt-BR" smtClean="0"/>
-              <a:t>26/03/2024</a:t>
+              <a:t>11/04/2024</a:t>
             </a:fld>
             <a:endParaRPr lang="pt-BR"/>
           </a:p>
@@ -3001,7 +3001,7 @@
           <a:p>
             <a:fld id="{52231B9D-E9F6-4612-9B82-E89961B389AC}" type="datetimeFigureOut">
               <a:rPr lang="pt-BR" smtClean="0"/>
-              <a:t>26/03/2024</a:t>
+              <a:t>11/04/2024</a:t>
             </a:fld>
             <a:endParaRPr lang="pt-BR"/>
           </a:p>
@@ -3665,7 +3665,7 @@
                   </a:schemeClr>
                 </a:solidFill>
               </a:rPr>
-              <a:t>31/03/2024</a:t>
+              <a:t>21/04/2024</a:t>
             </a:r>
             <a:endParaRPr lang="pt-BR" sz="1600" dirty="0">
               <a:solidFill>

--- a/tempimento.pptx
+++ b/tempimento.pptx
@@ -197,7 +197,7 @@
           <a:p>
             <a:fld id="{A584E3A2-E8EA-4705-A613-CFE9F6F5D3B4}" type="datetimeFigureOut">
               <a:rPr lang="pt-BR" smtClean="0"/>
-              <a:t>11/04/2024</a:t>
+              <a:t>29/04/2024</a:t>
             </a:fld>
             <a:endParaRPr lang="pt-BR"/>
           </a:p>
@@ -680,7 +680,7 @@
           <a:p>
             <a:fld id="{52231B9D-E9F6-4612-9B82-E89961B389AC}" type="datetimeFigureOut">
               <a:rPr lang="pt-BR" smtClean="0"/>
-              <a:t>11/04/2024</a:t>
+              <a:t>29/04/2024</a:t>
             </a:fld>
             <a:endParaRPr lang="pt-BR"/>
           </a:p>
@@ -850,7 +850,7 @@
           <a:p>
             <a:fld id="{52231B9D-E9F6-4612-9B82-E89961B389AC}" type="datetimeFigureOut">
               <a:rPr lang="pt-BR" smtClean="0"/>
-              <a:t>11/04/2024</a:t>
+              <a:t>29/04/2024</a:t>
             </a:fld>
             <a:endParaRPr lang="pt-BR"/>
           </a:p>
@@ -1030,7 +1030,7 @@
           <a:p>
             <a:fld id="{52231B9D-E9F6-4612-9B82-E89961B389AC}" type="datetimeFigureOut">
               <a:rPr lang="pt-BR" smtClean="0"/>
-              <a:t>11/04/2024</a:t>
+              <a:t>29/04/2024</a:t>
             </a:fld>
             <a:endParaRPr lang="pt-BR"/>
           </a:p>
@@ -1200,7 +1200,7 @@
           <a:p>
             <a:fld id="{52231B9D-E9F6-4612-9B82-E89961B389AC}" type="datetimeFigureOut">
               <a:rPr lang="pt-BR" smtClean="0"/>
-              <a:t>11/04/2024</a:t>
+              <a:t>29/04/2024</a:t>
             </a:fld>
             <a:endParaRPr lang="pt-BR"/>
           </a:p>
@@ -1446,7 +1446,7 @@
           <a:p>
             <a:fld id="{52231B9D-E9F6-4612-9B82-E89961B389AC}" type="datetimeFigureOut">
               <a:rPr lang="pt-BR" smtClean="0"/>
-              <a:t>11/04/2024</a:t>
+              <a:t>29/04/2024</a:t>
             </a:fld>
             <a:endParaRPr lang="pt-BR"/>
           </a:p>
@@ -1678,7 +1678,7 @@
           <a:p>
             <a:fld id="{52231B9D-E9F6-4612-9B82-E89961B389AC}" type="datetimeFigureOut">
               <a:rPr lang="pt-BR" smtClean="0"/>
-              <a:t>11/04/2024</a:t>
+              <a:t>29/04/2024</a:t>
             </a:fld>
             <a:endParaRPr lang="pt-BR"/>
           </a:p>
@@ -2045,7 +2045,7 @@
           <a:p>
             <a:fld id="{52231B9D-E9F6-4612-9B82-E89961B389AC}" type="datetimeFigureOut">
               <a:rPr lang="pt-BR" smtClean="0"/>
-              <a:t>11/04/2024</a:t>
+              <a:t>29/04/2024</a:t>
             </a:fld>
             <a:endParaRPr lang="pt-BR"/>
           </a:p>
@@ -2163,7 +2163,7 @@
           <a:p>
             <a:fld id="{52231B9D-E9F6-4612-9B82-E89961B389AC}" type="datetimeFigureOut">
               <a:rPr lang="pt-BR" smtClean="0"/>
-              <a:t>11/04/2024</a:t>
+              <a:t>29/04/2024</a:t>
             </a:fld>
             <a:endParaRPr lang="pt-BR"/>
           </a:p>
@@ -2258,7 +2258,7 @@
           <a:p>
             <a:fld id="{52231B9D-E9F6-4612-9B82-E89961B389AC}" type="datetimeFigureOut">
               <a:rPr lang="pt-BR" smtClean="0"/>
-              <a:t>11/04/2024</a:t>
+              <a:t>29/04/2024</a:t>
             </a:fld>
             <a:endParaRPr lang="pt-BR"/>
           </a:p>
@@ -2535,7 +2535,7 @@
           <a:p>
             <a:fld id="{52231B9D-E9F6-4612-9B82-E89961B389AC}" type="datetimeFigureOut">
               <a:rPr lang="pt-BR" smtClean="0"/>
-              <a:t>11/04/2024</a:t>
+              <a:t>29/04/2024</a:t>
             </a:fld>
             <a:endParaRPr lang="pt-BR"/>
           </a:p>
@@ -2788,7 +2788,7 @@
           <a:p>
             <a:fld id="{52231B9D-E9F6-4612-9B82-E89961B389AC}" type="datetimeFigureOut">
               <a:rPr lang="pt-BR" smtClean="0"/>
-              <a:t>11/04/2024</a:t>
+              <a:t>29/04/2024</a:t>
             </a:fld>
             <a:endParaRPr lang="pt-BR"/>
           </a:p>
@@ -3001,7 +3001,7 @@
           <a:p>
             <a:fld id="{52231B9D-E9F6-4612-9B82-E89961B389AC}" type="datetimeFigureOut">
               <a:rPr lang="pt-BR" smtClean="0"/>
-              <a:t>11/04/2024</a:t>
+              <a:t>29/04/2024</a:t>
             </a:fld>
             <a:endParaRPr lang="pt-BR"/>
           </a:p>
@@ -3665,7 +3665,7 @@
                   </a:schemeClr>
                 </a:solidFill>
               </a:rPr>
-              <a:t>21/04/2024</a:t>
+              <a:t>28/04/2024</a:t>
             </a:r>
             <a:endParaRPr lang="pt-BR" sz="1600" dirty="0">
               <a:solidFill>

--- a/tempimento.pptx
+++ b/tempimento.pptx
@@ -197,7 +197,7 @@
           <a:p>
             <a:fld id="{A584E3A2-E8EA-4705-A613-CFE9F6F5D3B4}" type="datetimeFigureOut">
               <a:rPr lang="pt-BR" smtClean="0"/>
-              <a:t>29/04/2024</a:t>
+              <a:t>13/05/2024</a:t>
             </a:fld>
             <a:endParaRPr lang="pt-BR"/>
           </a:p>
@@ -680,7 +680,7 @@
           <a:p>
             <a:fld id="{52231B9D-E9F6-4612-9B82-E89961B389AC}" type="datetimeFigureOut">
               <a:rPr lang="pt-BR" smtClean="0"/>
-              <a:t>29/04/2024</a:t>
+              <a:t>13/05/2024</a:t>
             </a:fld>
             <a:endParaRPr lang="pt-BR"/>
           </a:p>
@@ -850,7 +850,7 @@
           <a:p>
             <a:fld id="{52231B9D-E9F6-4612-9B82-E89961B389AC}" type="datetimeFigureOut">
               <a:rPr lang="pt-BR" smtClean="0"/>
-              <a:t>29/04/2024</a:t>
+              <a:t>13/05/2024</a:t>
             </a:fld>
             <a:endParaRPr lang="pt-BR"/>
           </a:p>
@@ -1030,7 +1030,7 @@
           <a:p>
             <a:fld id="{52231B9D-E9F6-4612-9B82-E89961B389AC}" type="datetimeFigureOut">
               <a:rPr lang="pt-BR" smtClean="0"/>
-              <a:t>29/04/2024</a:t>
+              <a:t>13/05/2024</a:t>
             </a:fld>
             <a:endParaRPr lang="pt-BR"/>
           </a:p>
@@ -1200,7 +1200,7 @@
           <a:p>
             <a:fld id="{52231B9D-E9F6-4612-9B82-E89961B389AC}" type="datetimeFigureOut">
               <a:rPr lang="pt-BR" smtClean="0"/>
-              <a:t>29/04/2024</a:t>
+              <a:t>13/05/2024</a:t>
             </a:fld>
             <a:endParaRPr lang="pt-BR"/>
           </a:p>
@@ -1446,7 +1446,7 @@
           <a:p>
             <a:fld id="{52231B9D-E9F6-4612-9B82-E89961B389AC}" type="datetimeFigureOut">
               <a:rPr lang="pt-BR" smtClean="0"/>
-              <a:t>29/04/2024</a:t>
+              <a:t>13/05/2024</a:t>
             </a:fld>
             <a:endParaRPr lang="pt-BR"/>
           </a:p>
@@ -1678,7 +1678,7 @@
           <a:p>
             <a:fld id="{52231B9D-E9F6-4612-9B82-E89961B389AC}" type="datetimeFigureOut">
               <a:rPr lang="pt-BR" smtClean="0"/>
-              <a:t>29/04/2024</a:t>
+              <a:t>13/05/2024</a:t>
             </a:fld>
             <a:endParaRPr lang="pt-BR"/>
           </a:p>
@@ -2045,7 +2045,7 @@
           <a:p>
             <a:fld id="{52231B9D-E9F6-4612-9B82-E89961B389AC}" type="datetimeFigureOut">
               <a:rPr lang="pt-BR" smtClean="0"/>
-              <a:t>29/04/2024</a:t>
+              <a:t>13/05/2024</a:t>
             </a:fld>
             <a:endParaRPr lang="pt-BR"/>
           </a:p>
@@ -2163,7 +2163,7 @@
           <a:p>
             <a:fld id="{52231B9D-E9F6-4612-9B82-E89961B389AC}" type="datetimeFigureOut">
               <a:rPr lang="pt-BR" smtClean="0"/>
-              <a:t>29/04/2024</a:t>
+              <a:t>13/05/2024</a:t>
             </a:fld>
             <a:endParaRPr lang="pt-BR"/>
           </a:p>
@@ -2258,7 +2258,7 @@
           <a:p>
             <a:fld id="{52231B9D-E9F6-4612-9B82-E89961B389AC}" type="datetimeFigureOut">
               <a:rPr lang="pt-BR" smtClean="0"/>
-              <a:t>29/04/2024</a:t>
+              <a:t>13/05/2024</a:t>
             </a:fld>
             <a:endParaRPr lang="pt-BR"/>
           </a:p>
@@ -2535,7 +2535,7 @@
           <a:p>
             <a:fld id="{52231B9D-E9F6-4612-9B82-E89961B389AC}" type="datetimeFigureOut">
               <a:rPr lang="pt-BR" smtClean="0"/>
-              <a:t>29/04/2024</a:t>
+              <a:t>13/05/2024</a:t>
             </a:fld>
             <a:endParaRPr lang="pt-BR"/>
           </a:p>
@@ -2788,7 +2788,7 @@
           <a:p>
             <a:fld id="{52231B9D-E9F6-4612-9B82-E89961B389AC}" type="datetimeFigureOut">
               <a:rPr lang="pt-BR" smtClean="0"/>
-              <a:t>29/04/2024</a:t>
+              <a:t>13/05/2024</a:t>
             </a:fld>
             <a:endParaRPr lang="pt-BR"/>
           </a:p>
@@ -3001,7 +3001,7 @@
           <a:p>
             <a:fld id="{52231B9D-E9F6-4612-9B82-E89961B389AC}" type="datetimeFigureOut">
               <a:rPr lang="pt-BR" smtClean="0"/>
-              <a:t>29/04/2024</a:t>
+              <a:t>13/05/2024</a:t>
             </a:fld>
             <a:endParaRPr lang="pt-BR"/>
           </a:p>
@@ -3665,7 +3665,7 @@
                   </a:schemeClr>
                 </a:solidFill>
               </a:rPr>
-              <a:t>28/04/2024</a:t>
+              <a:t>12/05/2024</a:t>
             </a:r>
             <a:endParaRPr lang="pt-BR" sz="1600" dirty="0">
               <a:solidFill>

--- a/tempimento.pptx
+++ b/tempimento.pptx
@@ -197,7 +197,7 @@
           <a:p>
             <a:fld id="{A584E3A2-E8EA-4705-A613-CFE9F6F5D3B4}" type="datetimeFigureOut">
               <a:rPr lang="pt-BR" smtClean="0"/>
-              <a:t>13/05/2024</a:t>
+              <a:t>24/05/2024</a:t>
             </a:fld>
             <a:endParaRPr lang="pt-BR"/>
           </a:p>
@@ -680,7 +680,7 @@
           <a:p>
             <a:fld id="{52231B9D-E9F6-4612-9B82-E89961B389AC}" type="datetimeFigureOut">
               <a:rPr lang="pt-BR" smtClean="0"/>
-              <a:t>13/05/2024</a:t>
+              <a:t>24/05/2024</a:t>
             </a:fld>
             <a:endParaRPr lang="pt-BR"/>
           </a:p>
@@ -850,7 +850,7 @@
           <a:p>
             <a:fld id="{52231B9D-E9F6-4612-9B82-E89961B389AC}" type="datetimeFigureOut">
               <a:rPr lang="pt-BR" smtClean="0"/>
-              <a:t>13/05/2024</a:t>
+              <a:t>24/05/2024</a:t>
             </a:fld>
             <a:endParaRPr lang="pt-BR"/>
           </a:p>
@@ -1030,7 +1030,7 @@
           <a:p>
             <a:fld id="{52231B9D-E9F6-4612-9B82-E89961B389AC}" type="datetimeFigureOut">
               <a:rPr lang="pt-BR" smtClean="0"/>
-              <a:t>13/05/2024</a:t>
+              <a:t>24/05/2024</a:t>
             </a:fld>
             <a:endParaRPr lang="pt-BR"/>
           </a:p>
@@ -1200,7 +1200,7 @@
           <a:p>
             <a:fld id="{52231B9D-E9F6-4612-9B82-E89961B389AC}" type="datetimeFigureOut">
               <a:rPr lang="pt-BR" smtClean="0"/>
-              <a:t>13/05/2024</a:t>
+              <a:t>24/05/2024</a:t>
             </a:fld>
             <a:endParaRPr lang="pt-BR"/>
           </a:p>
@@ -1446,7 +1446,7 @@
           <a:p>
             <a:fld id="{52231B9D-E9F6-4612-9B82-E89961B389AC}" type="datetimeFigureOut">
               <a:rPr lang="pt-BR" smtClean="0"/>
-              <a:t>13/05/2024</a:t>
+              <a:t>24/05/2024</a:t>
             </a:fld>
             <a:endParaRPr lang="pt-BR"/>
           </a:p>
@@ -1678,7 +1678,7 @@
           <a:p>
             <a:fld id="{52231B9D-E9F6-4612-9B82-E89961B389AC}" type="datetimeFigureOut">
               <a:rPr lang="pt-BR" smtClean="0"/>
-              <a:t>13/05/2024</a:t>
+              <a:t>24/05/2024</a:t>
             </a:fld>
             <a:endParaRPr lang="pt-BR"/>
           </a:p>
@@ -2045,7 +2045,7 @@
           <a:p>
             <a:fld id="{52231B9D-E9F6-4612-9B82-E89961B389AC}" type="datetimeFigureOut">
               <a:rPr lang="pt-BR" smtClean="0"/>
-              <a:t>13/05/2024</a:t>
+              <a:t>24/05/2024</a:t>
             </a:fld>
             <a:endParaRPr lang="pt-BR"/>
           </a:p>
@@ -2163,7 +2163,7 @@
           <a:p>
             <a:fld id="{52231B9D-E9F6-4612-9B82-E89961B389AC}" type="datetimeFigureOut">
               <a:rPr lang="pt-BR" smtClean="0"/>
-              <a:t>13/05/2024</a:t>
+              <a:t>24/05/2024</a:t>
             </a:fld>
             <a:endParaRPr lang="pt-BR"/>
           </a:p>
@@ -2258,7 +2258,7 @@
           <a:p>
             <a:fld id="{52231B9D-E9F6-4612-9B82-E89961B389AC}" type="datetimeFigureOut">
               <a:rPr lang="pt-BR" smtClean="0"/>
-              <a:t>13/05/2024</a:t>
+              <a:t>24/05/2024</a:t>
             </a:fld>
             <a:endParaRPr lang="pt-BR"/>
           </a:p>
@@ -2535,7 +2535,7 @@
           <a:p>
             <a:fld id="{52231B9D-E9F6-4612-9B82-E89961B389AC}" type="datetimeFigureOut">
               <a:rPr lang="pt-BR" smtClean="0"/>
-              <a:t>13/05/2024</a:t>
+              <a:t>24/05/2024</a:t>
             </a:fld>
             <a:endParaRPr lang="pt-BR"/>
           </a:p>
@@ -2788,7 +2788,7 @@
           <a:p>
             <a:fld id="{52231B9D-E9F6-4612-9B82-E89961B389AC}" type="datetimeFigureOut">
               <a:rPr lang="pt-BR" smtClean="0"/>
-              <a:t>13/05/2024</a:t>
+              <a:t>24/05/2024</a:t>
             </a:fld>
             <a:endParaRPr lang="pt-BR"/>
           </a:p>
@@ -3001,7 +3001,7 @@
           <a:p>
             <a:fld id="{52231B9D-E9F6-4612-9B82-E89961B389AC}" type="datetimeFigureOut">
               <a:rPr lang="pt-BR" smtClean="0"/>
-              <a:t>13/05/2024</a:t>
+              <a:t>24/05/2024</a:t>
             </a:fld>
             <a:endParaRPr lang="pt-BR"/>
           </a:p>
@@ -3665,7 +3665,7 @@
                   </a:schemeClr>
                 </a:solidFill>
               </a:rPr>
-              <a:t>12/05/2024</a:t>
+              <a:t>02/06/2024</a:t>
             </a:r>
             <a:endParaRPr lang="pt-BR" sz="1600" dirty="0">
               <a:solidFill>

--- a/tempimento.pptx
+++ b/tempimento.pptx
@@ -197,7 +197,7 @@
           <a:p>
             <a:fld id="{A584E3A2-E8EA-4705-A613-CFE9F6F5D3B4}" type="datetimeFigureOut">
               <a:rPr lang="pt-BR" smtClean="0"/>
-              <a:t>24/05/2024</a:t>
+              <a:t>10/06/2024</a:t>
             </a:fld>
             <a:endParaRPr lang="pt-BR"/>
           </a:p>
@@ -680,7 +680,7 @@
           <a:p>
             <a:fld id="{52231B9D-E9F6-4612-9B82-E89961B389AC}" type="datetimeFigureOut">
               <a:rPr lang="pt-BR" smtClean="0"/>
-              <a:t>24/05/2024</a:t>
+              <a:t>10/06/2024</a:t>
             </a:fld>
             <a:endParaRPr lang="pt-BR"/>
           </a:p>
@@ -850,7 +850,7 @@
           <a:p>
             <a:fld id="{52231B9D-E9F6-4612-9B82-E89961B389AC}" type="datetimeFigureOut">
               <a:rPr lang="pt-BR" smtClean="0"/>
-              <a:t>24/05/2024</a:t>
+              <a:t>10/06/2024</a:t>
             </a:fld>
             <a:endParaRPr lang="pt-BR"/>
           </a:p>
@@ -1030,7 +1030,7 @@
           <a:p>
             <a:fld id="{52231B9D-E9F6-4612-9B82-E89961B389AC}" type="datetimeFigureOut">
               <a:rPr lang="pt-BR" smtClean="0"/>
-              <a:t>24/05/2024</a:t>
+              <a:t>10/06/2024</a:t>
             </a:fld>
             <a:endParaRPr lang="pt-BR"/>
           </a:p>
@@ -1200,7 +1200,7 @@
           <a:p>
             <a:fld id="{52231B9D-E9F6-4612-9B82-E89961B389AC}" type="datetimeFigureOut">
               <a:rPr lang="pt-BR" smtClean="0"/>
-              <a:t>24/05/2024</a:t>
+              <a:t>10/06/2024</a:t>
             </a:fld>
             <a:endParaRPr lang="pt-BR"/>
           </a:p>
@@ -1446,7 +1446,7 @@
           <a:p>
             <a:fld id="{52231B9D-E9F6-4612-9B82-E89961B389AC}" type="datetimeFigureOut">
               <a:rPr lang="pt-BR" smtClean="0"/>
-              <a:t>24/05/2024</a:t>
+              <a:t>10/06/2024</a:t>
             </a:fld>
             <a:endParaRPr lang="pt-BR"/>
           </a:p>
@@ -1678,7 +1678,7 @@
           <a:p>
             <a:fld id="{52231B9D-E9F6-4612-9B82-E89961B389AC}" type="datetimeFigureOut">
               <a:rPr lang="pt-BR" smtClean="0"/>
-              <a:t>24/05/2024</a:t>
+              <a:t>10/06/2024</a:t>
             </a:fld>
             <a:endParaRPr lang="pt-BR"/>
           </a:p>
@@ -2045,7 +2045,7 @@
           <a:p>
             <a:fld id="{52231B9D-E9F6-4612-9B82-E89961B389AC}" type="datetimeFigureOut">
               <a:rPr lang="pt-BR" smtClean="0"/>
-              <a:t>24/05/2024</a:t>
+              <a:t>10/06/2024</a:t>
             </a:fld>
             <a:endParaRPr lang="pt-BR"/>
           </a:p>
@@ -2163,7 +2163,7 @@
           <a:p>
             <a:fld id="{52231B9D-E9F6-4612-9B82-E89961B389AC}" type="datetimeFigureOut">
               <a:rPr lang="pt-BR" smtClean="0"/>
-              <a:t>24/05/2024</a:t>
+              <a:t>10/06/2024</a:t>
             </a:fld>
             <a:endParaRPr lang="pt-BR"/>
           </a:p>
@@ -2258,7 +2258,7 @@
           <a:p>
             <a:fld id="{52231B9D-E9F6-4612-9B82-E89961B389AC}" type="datetimeFigureOut">
               <a:rPr lang="pt-BR" smtClean="0"/>
-              <a:t>24/05/2024</a:t>
+              <a:t>10/06/2024</a:t>
             </a:fld>
             <a:endParaRPr lang="pt-BR"/>
           </a:p>
@@ -2535,7 +2535,7 @@
           <a:p>
             <a:fld id="{52231B9D-E9F6-4612-9B82-E89961B389AC}" type="datetimeFigureOut">
               <a:rPr lang="pt-BR" smtClean="0"/>
-              <a:t>24/05/2024</a:t>
+              <a:t>10/06/2024</a:t>
             </a:fld>
             <a:endParaRPr lang="pt-BR"/>
           </a:p>
@@ -2788,7 +2788,7 @@
           <a:p>
             <a:fld id="{52231B9D-E9F6-4612-9B82-E89961B389AC}" type="datetimeFigureOut">
               <a:rPr lang="pt-BR" smtClean="0"/>
-              <a:t>24/05/2024</a:t>
+              <a:t>10/06/2024</a:t>
             </a:fld>
             <a:endParaRPr lang="pt-BR"/>
           </a:p>
@@ -3001,7 +3001,7 @@
           <a:p>
             <a:fld id="{52231B9D-E9F6-4612-9B82-E89961B389AC}" type="datetimeFigureOut">
               <a:rPr lang="pt-BR" smtClean="0"/>
-              <a:t>24/05/2024</a:t>
+              <a:t>10/06/2024</a:t>
             </a:fld>
             <a:endParaRPr lang="pt-BR"/>
           </a:p>
@@ -3665,7 +3665,7 @@
                   </a:schemeClr>
                 </a:solidFill>
               </a:rPr>
-              <a:t>02/06/2024</a:t>
+              <a:t>09/06/2024</a:t>
             </a:r>
             <a:endParaRPr lang="pt-BR" sz="1600" dirty="0">
               <a:solidFill>

--- a/tempimento.pptx
+++ b/tempimento.pptx
@@ -197,7 +197,7 @@
           <a:p>
             <a:fld id="{A584E3A2-E8EA-4705-A613-CFE9F6F5D3B4}" type="datetimeFigureOut">
               <a:rPr lang="pt-BR" smtClean="0"/>
-              <a:t>10/06/2024</a:t>
+              <a:t>22/06/2024</a:t>
             </a:fld>
             <a:endParaRPr lang="pt-BR"/>
           </a:p>
@@ -680,7 +680,7 @@
           <a:p>
             <a:fld id="{52231B9D-E9F6-4612-9B82-E89961B389AC}" type="datetimeFigureOut">
               <a:rPr lang="pt-BR" smtClean="0"/>
-              <a:t>10/06/2024</a:t>
+              <a:t>22/06/2024</a:t>
             </a:fld>
             <a:endParaRPr lang="pt-BR"/>
           </a:p>
@@ -850,7 +850,7 @@
           <a:p>
             <a:fld id="{52231B9D-E9F6-4612-9B82-E89961B389AC}" type="datetimeFigureOut">
               <a:rPr lang="pt-BR" smtClean="0"/>
-              <a:t>10/06/2024</a:t>
+              <a:t>22/06/2024</a:t>
             </a:fld>
             <a:endParaRPr lang="pt-BR"/>
           </a:p>
@@ -1030,7 +1030,7 @@
           <a:p>
             <a:fld id="{52231B9D-E9F6-4612-9B82-E89961B389AC}" type="datetimeFigureOut">
               <a:rPr lang="pt-BR" smtClean="0"/>
-              <a:t>10/06/2024</a:t>
+              <a:t>22/06/2024</a:t>
             </a:fld>
             <a:endParaRPr lang="pt-BR"/>
           </a:p>
@@ -1200,7 +1200,7 @@
           <a:p>
             <a:fld id="{52231B9D-E9F6-4612-9B82-E89961B389AC}" type="datetimeFigureOut">
               <a:rPr lang="pt-BR" smtClean="0"/>
-              <a:t>10/06/2024</a:t>
+              <a:t>22/06/2024</a:t>
             </a:fld>
             <a:endParaRPr lang="pt-BR"/>
           </a:p>
@@ -1446,7 +1446,7 @@
           <a:p>
             <a:fld id="{52231B9D-E9F6-4612-9B82-E89961B389AC}" type="datetimeFigureOut">
               <a:rPr lang="pt-BR" smtClean="0"/>
-              <a:t>10/06/2024</a:t>
+              <a:t>22/06/2024</a:t>
             </a:fld>
             <a:endParaRPr lang="pt-BR"/>
           </a:p>
@@ -1678,7 +1678,7 @@
           <a:p>
             <a:fld id="{52231B9D-E9F6-4612-9B82-E89961B389AC}" type="datetimeFigureOut">
               <a:rPr lang="pt-BR" smtClean="0"/>
-              <a:t>10/06/2024</a:t>
+              <a:t>22/06/2024</a:t>
             </a:fld>
             <a:endParaRPr lang="pt-BR"/>
           </a:p>
@@ -2045,7 +2045,7 @@
           <a:p>
             <a:fld id="{52231B9D-E9F6-4612-9B82-E89961B389AC}" type="datetimeFigureOut">
               <a:rPr lang="pt-BR" smtClean="0"/>
-              <a:t>10/06/2024</a:t>
+              <a:t>22/06/2024</a:t>
             </a:fld>
             <a:endParaRPr lang="pt-BR"/>
           </a:p>
@@ -2163,7 +2163,7 @@
           <a:p>
             <a:fld id="{52231B9D-E9F6-4612-9B82-E89961B389AC}" type="datetimeFigureOut">
               <a:rPr lang="pt-BR" smtClean="0"/>
-              <a:t>10/06/2024</a:t>
+              <a:t>22/06/2024</a:t>
             </a:fld>
             <a:endParaRPr lang="pt-BR"/>
           </a:p>
@@ -2258,7 +2258,7 @@
           <a:p>
             <a:fld id="{52231B9D-E9F6-4612-9B82-E89961B389AC}" type="datetimeFigureOut">
               <a:rPr lang="pt-BR" smtClean="0"/>
-              <a:t>10/06/2024</a:t>
+              <a:t>22/06/2024</a:t>
             </a:fld>
             <a:endParaRPr lang="pt-BR"/>
           </a:p>
@@ -2535,7 +2535,7 @@
           <a:p>
             <a:fld id="{52231B9D-E9F6-4612-9B82-E89961B389AC}" type="datetimeFigureOut">
               <a:rPr lang="pt-BR" smtClean="0"/>
-              <a:t>10/06/2024</a:t>
+              <a:t>22/06/2024</a:t>
             </a:fld>
             <a:endParaRPr lang="pt-BR"/>
           </a:p>
@@ -2788,7 +2788,7 @@
           <a:p>
             <a:fld id="{52231B9D-E9F6-4612-9B82-E89961B389AC}" type="datetimeFigureOut">
               <a:rPr lang="pt-BR" smtClean="0"/>
-              <a:t>10/06/2024</a:t>
+              <a:t>22/06/2024</a:t>
             </a:fld>
             <a:endParaRPr lang="pt-BR"/>
           </a:p>
@@ -3001,7 +3001,7 @@
           <a:p>
             <a:fld id="{52231B9D-E9F6-4612-9B82-E89961B389AC}" type="datetimeFigureOut">
               <a:rPr lang="pt-BR" smtClean="0"/>
-              <a:t>10/06/2024</a:t>
+              <a:t>22/06/2024</a:t>
             </a:fld>
             <a:endParaRPr lang="pt-BR"/>
           </a:p>
@@ -3665,7 +3665,17 @@
                   </a:schemeClr>
                 </a:solidFill>
               </a:rPr>
-              <a:t>09/06/2024</a:t>
+              <a:t>30</a:t>
+            </a:r>
+            <a:r>
+              <a:rPr lang="pt-BR" sz="1600" dirty="0" smtClean="0">
+                <a:solidFill>
+                  <a:schemeClr val="bg2">
+                    <a:lumMod val="90000"/>
+                  </a:schemeClr>
+                </a:solidFill>
+              </a:rPr>
+              <a:t>/06/2024</a:t>
             </a:r>
             <a:endParaRPr lang="pt-BR" sz="1600" dirty="0">
               <a:solidFill>

--- a/tempimento.pptx
+++ b/tempimento.pptx
@@ -197,7 +197,7 @@
           <a:p>
             <a:fld id="{A584E3A2-E8EA-4705-A613-CFE9F6F5D3B4}" type="datetimeFigureOut">
               <a:rPr lang="pt-BR" smtClean="0"/>
-              <a:t>22/06/2024</a:t>
+              <a:t>11/07/2024</a:t>
             </a:fld>
             <a:endParaRPr lang="pt-BR"/>
           </a:p>
@@ -680,7 +680,7 @@
           <a:p>
             <a:fld id="{52231B9D-E9F6-4612-9B82-E89961B389AC}" type="datetimeFigureOut">
               <a:rPr lang="pt-BR" smtClean="0"/>
-              <a:t>22/06/2024</a:t>
+              <a:t>11/07/2024</a:t>
             </a:fld>
             <a:endParaRPr lang="pt-BR"/>
           </a:p>
@@ -850,7 +850,7 @@
           <a:p>
             <a:fld id="{52231B9D-E9F6-4612-9B82-E89961B389AC}" type="datetimeFigureOut">
               <a:rPr lang="pt-BR" smtClean="0"/>
-              <a:t>22/06/2024</a:t>
+              <a:t>11/07/2024</a:t>
             </a:fld>
             <a:endParaRPr lang="pt-BR"/>
           </a:p>
@@ -1030,7 +1030,7 @@
           <a:p>
             <a:fld id="{52231B9D-E9F6-4612-9B82-E89961B389AC}" type="datetimeFigureOut">
               <a:rPr lang="pt-BR" smtClean="0"/>
-              <a:t>22/06/2024</a:t>
+              <a:t>11/07/2024</a:t>
             </a:fld>
             <a:endParaRPr lang="pt-BR"/>
           </a:p>
@@ -1200,7 +1200,7 @@
           <a:p>
             <a:fld id="{52231B9D-E9F6-4612-9B82-E89961B389AC}" type="datetimeFigureOut">
               <a:rPr lang="pt-BR" smtClean="0"/>
-              <a:t>22/06/2024</a:t>
+              <a:t>11/07/2024</a:t>
             </a:fld>
             <a:endParaRPr lang="pt-BR"/>
           </a:p>
@@ -1446,7 +1446,7 @@
           <a:p>
             <a:fld id="{52231B9D-E9F6-4612-9B82-E89961B389AC}" type="datetimeFigureOut">
               <a:rPr lang="pt-BR" smtClean="0"/>
-              <a:t>22/06/2024</a:t>
+              <a:t>11/07/2024</a:t>
             </a:fld>
             <a:endParaRPr lang="pt-BR"/>
           </a:p>
@@ -1678,7 +1678,7 @@
           <a:p>
             <a:fld id="{52231B9D-E9F6-4612-9B82-E89961B389AC}" type="datetimeFigureOut">
               <a:rPr lang="pt-BR" smtClean="0"/>
-              <a:t>22/06/2024</a:t>
+              <a:t>11/07/2024</a:t>
             </a:fld>
             <a:endParaRPr lang="pt-BR"/>
           </a:p>
@@ -2045,7 +2045,7 @@
           <a:p>
             <a:fld id="{52231B9D-E9F6-4612-9B82-E89961B389AC}" type="datetimeFigureOut">
               <a:rPr lang="pt-BR" smtClean="0"/>
-              <a:t>22/06/2024</a:t>
+              <a:t>11/07/2024</a:t>
             </a:fld>
             <a:endParaRPr lang="pt-BR"/>
           </a:p>
@@ -2163,7 +2163,7 @@
           <a:p>
             <a:fld id="{52231B9D-E9F6-4612-9B82-E89961B389AC}" type="datetimeFigureOut">
               <a:rPr lang="pt-BR" smtClean="0"/>
-              <a:t>22/06/2024</a:t>
+              <a:t>11/07/2024</a:t>
             </a:fld>
             <a:endParaRPr lang="pt-BR"/>
           </a:p>
@@ -2258,7 +2258,7 @@
           <a:p>
             <a:fld id="{52231B9D-E9F6-4612-9B82-E89961B389AC}" type="datetimeFigureOut">
               <a:rPr lang="pt-BR" smtClean="0"/>
-              <a:t>22/06/2024</a:t>
+              <a:t>11/07/2024</a:t>
             </a:fld>
             <a:endParaRPr lang="pt-BR"/>
           </a:p>
@@ -2535,7 +2535,7 @@
           <a:p>
             <a:fld id="{52231B9D-E9F6-4612-9B82-E89961B389AC}" type="datetimeFigureOut">
               <a:rPr lang="pt-BR" smtClean="0"/>
-              <a:t>22/06/2024</a:t>
+              <a:t>11/07/2024</a:t>
             </a:fld>
             <a:endParaRPr lang="pt-BR"/>
           </a:p>
@@ -2788,7 +2788,7 @@
           <a:p>
             <a:fld id="{52231B9D-E9F6-4612-9B82-E89961B389AC}" type="datetimeFigureOut">
               <a:rPr lang="pt-BR" smtClean="0"/>
-              <a:t>22/06/2024</a:t>
+              <a:t>11/07/2024</a:t>
             </a:fld>
             <a:endParaRPr lang="pt-BR"/>
           </a:p>
@@ -3001,7 +3001,7 @@
           <a:p>
             <a:fld id="{52231B9D-E9F6-4612-9B82-E89961B389AC}" type="datetimeFigureOut">
               <a:rPr lang="pt-BR" smtClean="0"/>
-              <a:t>22/06/2024</a:t>
+              <a:t>11/07/2024</a:t>
             </a:fld>
             <a:endParaRPr lang="pt-BR"/>
           </a:p>
@@ -3665,7 +3665,7 @@
                   </a:schemeClr>
                 </a:solidFill>
               </a:rPr>
-              <a:t>30</a:t>
+              <a:t>07</a:t>
             </a:r>
             <a:r>
               <a:rPr lang="pt-BR" sz="1600" dirty="0" smtClean="0">
@@ -3675,7 +3675,7 @@
                   </a:schemeClr>
                 </a:solidFill>
               </a:rPr>
-              <a:t>/06/2024</a:t>
+              <a:t>/07/2024</a:t>
             </a:r>
             <a:endParaRPr lang="pt-BR" sz="1600" dirty="0">
               <a:solidFill>

--- a/tempimento.pptx
+++ b/tempimento.pptx
@@ -197,7 +197,7 @@
           <a:p>
             <a:fld id="{A584E3A2-E8EA-4705-A613-CFE9F6F5D3B4}" type="datetimeFigureOut">
               <a:rPr lang="pt-BR" smtClean="0"/>
-              <a:t>11/07/2024</a:t>
+              <a:t>27/07/2024</a:t>
             </a:fld>
             <a:endParaRPr lang="pt-BR"/>
           </a:p>
@@ -680,7 +680,7 @@
           <a:p>
             <a:fld id="{52231B9D-E9F6-4612-9B82-E89961B389AC}" type="datetimeFigureOut">
               <a:rPr lang="pt-BR" smtClean="0"/>
-              <a:t>11/07/2024</a:t>
+              <a:t>27/07/2024</a:t>
             </a:fld>
             <a:endParaRPr lang="pt-BR"/>
           </a:p>
@@ -850,7 +850,7 @@
           <a:p>
             <a:fld id="{52231B9D-E9F6-4612-9B82-E89961B389AC}" type="datetimeFigureOut">
               <a:rPr lang="pt-BR" smtClean="0"/>
-              <a:t>11/07/2024</a:t>
+              <a:t>27/07/2024</a:t>
             </a:fld>
             <a:endParaRPr lang="pt-BR"/>
           </a:p>
@@ -1030,7 +1030,7 @@
           <a:p>
             <a:fld id="{52231B9D-E9F6-4612-9B82-E89961B389AC}" type="datetimeFigureOut">
               <a:rPr lang="pt-BR" smtClean="0"/>
-              <a:t>11/07/2024</a:t>
+              <a:t>27/07/2024</a:t>
             </a:fld>
             <a:endParaRPr lang="pt-BR"/>
           </a:p>
@@ -1200,7 +1200,7 @@
           <a:p>
             <a:fld id="{52231B9D-E9F6-4612-9B82-E89961B389AC}" type="datetimeFigureOut">
               <a:rPr lang="pt-BR" smtClean="0"/>
-              <a:t>11/07/2024</a:t>
+              <a:t>27/07/2024</a:t>
             </a:fld>
             <a:endParaRPr lang="pt-BR"/>
           </a:p>
@@ -1446,7 +1446,7 @@
           <a:p>
             <a:fld id="{52231B9D-E9F6-4612-9B82-E89961B389AC}" type="datetimeFigureOut">
               <a:rPr lang="pt-BR" smtClean="0"/>
-              <a:t>11/07/2024</a:t>
+              <a:t>27/07/2024</a:t>
             </a:fld>
             <a:endParaRPr lang="pt-BR"/>
           </a:p>
@@ -1678,7 +1678,7 @@
           <a:p>
             <a:fld id="{52231B9D-E9F6-4612-9B82-E89961B389AC}" type="datetimeFigureOut">
               <a:rPr lang="pt-BR" smtClean="0"/>
-              <a:t>11/07/2024</a:t>
+              <a:t>27/07/2024</a:t>
             </a:fld>
             <a:endParaRPr lang="pt-BR"/>
           </a:p>
@@ -2045,7 +2045,7 @@
           <a:p>
             <a:fld id="{52231B9D-E9F6-4612-9B82-E89961B389AC}" type="datetimeFigureOut">
               <a:rPr lang="pt-BR" smtClean="0"/>
-              <a:t>11/07/2024</a:t>
+              <a:t>27/07/2024</a:t>
             </a:fld>
             <a:endParaRPr lang="pt-BR"/>
           </a:p>
@@ -2163,7 +2163,7 @@
           <a:p>
             <a:fld id="{52231B9D-E9F6-4612-9B82-E89961B389AC}" type="datetimeFigureOut">
               <a:rPr lang="pt-BR" smtClean="0"/>
-              <a:t>11/07/2024</a:t>
+              <a:t>27/07/2024</a:t>
             </a:fld>
             <a:endParaRPr lang="pt-BR"/>
           </a:p>
@@ -2258,7 +2258,7 @@
           <a:p>
             <a:fld id="{52231B9D-E9F6-4612-9B82-E89961B389AC}" type="datetimeFigureOut">
               <a:rPr lang="pt-BR" smtClean="0"/>
-              <a:t>11/07/2024</a:t>
+              <a:t>27/07/2024</a:t>
             </a:fld>
             <a:endParaRPr lang="pt-BR"/>
           </a:p>
@@ -2535,7 +2535,7 @@
           <a:p>
             <a:fld id="{52231B9D-E9F6-4612-9B82-E89961B389AC}" type="datetimeFigureOut">
               <a:rPr lang="pt-BR" smtClean="0"/>
-              <a:t>11/07/2024</a:t>
+              <a:t>27/07/2024</a:t>
             </a:fld>
             <a:endParaRPr lang="pt-BR"/>
           </a:p>
@@ -2788,7 +2788,7 @@
           <a:p>
             <a:fld id="{52231B9D-E9F6-4612-9B82-E89961B389AC}" type="datetimeFigureOut">
               <a:rPr lang="pt-BR" smtClean="0"/>
-              <a:t>11/07/2024</a:t>
+              <a:t>27/07/2024</a:t>
             </a:fld>
             <a:endParaRPr lang="pt-BR"/>
           </a:p>
@@ -3001,7 +3001,7 @@
           <a:p>
             <a:fld id="{52231B9D-E9F6-4612-9B82-E89961B389AC}" type="datetimeFigureOut">
               <a:rPr lang="pt-BR" smtClean="0"/>
-              <a:t>11/07/2024</a:t>
+              <a:t>27/07/2024</a:t>
             </a:fld>
             <a:endParaRPr lang="pt-BR"/>
           </a:p>
@@ -3665,17 +3665,7 @@
                   </a:schemeClr>
                 </a:solidFill>
               </a:rPr>
-              <a:t>07</a:t>
-            </a:r>
-            <a:r>
-              <a:rPr lang="pt-BR" sz="1600" dirty="0" smtClean="0">
-                <a:solidFill>
-                  <a:schemeClr val="bg2">
-                    <a:lumMod val="90000"/>
-                  </a:schemeClr>
-                </a:solidFill>
-              </a:rPr>
-              <a:t>/07/2024</a:t>
+              <a:t>28/07/2024</a:t>
             </a:r>
             <a:endParaRPr lang="pt-BR" sz="1600" dirty="0">
               <a:solidFill>

--- a/tempimento.pptx
+++ b/tempimento.pptx
@@ -197,7 +197,7 @@
           <a:p>
             <a:fld id="{A584E3A2-E8EA-4705-A613-CFE9F6F5D3B4}" type="datetimeFigureOut">
               <a:rPr lang="pt-BR" smtClean="0"/>
-              <a:t>27/07/2024</a:t>
+              <a:t>09/08/2024</a:t>
             </a:fld>
             <a:endParaRPr lang="pt-BR"/>
           </a:p>
@@ -680,7 +680,7 @@
           <a:p>
             <a:fld id="{52231B9D-E9F6-4612-9B82-E89961B389AC}" type="datetimeFigureOut">
               <a:rPr lang="pt-BR" smtClean="0"/>
-              <a:t>27/07/2024</a:t>
+              <a:t>09/08/2024</a:t>
             </a:fld>
             <a:endParaRPr lang="pt-BR"/>
           </a:p>
@@ -850,7 +850,7 @@
           <a:p>
             <a:fld id="{52231B9D-E9F6-4612-9B82-E89961B389AC}" type="datetimeFigureOut">
               <a:rPr lang="pt-BR" smtClean="0"/>
-              <a:t>27/07/2024</a:t>
+              <a:t>09/08/2024</a:t>
             </a:fld>
             <a:endParaRPr lang="pt-BR"/>
           </a:p>
@@ -1030,7 +1030,7 @@
           <a:p>
             <a:fld id="{52231B9D-E9F6-4612-9B82-E89961B389AC}" type="datetimeFigureOut">
               <a:rPr lang="pt-BR" smtClean="0"/>
-              <a:t>27/07/2024</a:t>
+              <a:t>09/08/2024</a:t>
             </a:fld>
             <a:endParaRPr lang="pt-BR"/>
           </a:p>
@@ -1200,7 +1200,7 @@
           <a:p>
             <a:fld id="{52231B9D-E9F6-4612-9B82-E89961B389AC}" type="datetimeFigureOut">
               <a:rPr lang="pt-BR" smtClean="0"/>
-              <a:t>27/07/2024</a:t>
+              <a:t>09/08/2024</a:t>
             </a:fld>
             <a:endParaRPr lang="pt-BR"/>
           </a:p>
@@ -1446,7 +1446,7 @@
           <a:p>
             <a:fld id="{52231B9D-E9F6-4612-9B82-E89961B389AC}" type="datetimeFigureOut">
               <a:rPr lang="pt-BR" smtClean="0"/>
-              <a:t>27/07/2024</a:t>
+              <a:t>09/08/2024</a:t>
             </a:fld>
             <a:endParaRPr lang="pt-BR"/>
           </a:p>
@@ -1678,7 +1678,7 @@
           <a:p>
             <a:fld id="{52231B9D-E9F6-4612-9B82-E89961B389AC}" type="datetimeFigureOut">
               <a:rPr lang="pt-BR" smtClean="0"/>
-              <a:t>27/07/2024</a:t>
+              <a:t>09/08/2024</a:t>
             </a:fld>
             <a:endParaRPr lang="pt-BR"/>
           </a:p>
@@ -2045,7 +2045,7 @@
           <a:p>
             <a:fld id="{52231B9D-E9F6-4612-9B82-E89961B389AC}" type="datetimeFigureOut">
               <a:rPr lang="pt-BR" smtClean="0"/>
-              <a:t>27/07/2024</a:t>
+              <a:t>09/08/2024</a:t>
             </a:fld>
             <a:endParaRPr lang="pt-BR"/>
           </a:p>
@@ -2163,7 +2163,7 @@
           <a:p>
             <a:fld id="{52231B9D-E9F6-4612-9B82-E89961B389AC}" type="datetimeFigureOut">
               <a:rPr lang="pt-BR" smtClean="0"/>
-              <a:t>27/07/2024</a:t>
+              <a:t>09/08/2024</a:t>
             </a:fld>
             <a:endParaRPr lang="pt-BR"/>
           </a:p>
@@ -2258,7 +2258,7 @@
           <a:p>
             <a:fld id="{52231B9D-E9F6-4612-9B82-E89961B389AC}" type="datetimeFigureOut">
               <a:rPr lang="pt-BR" smtClean="0"/>
-              <a:t>27/07/2024</a:t>
+              <a:t>09/08/2024</a:t>
             </a:fld>
             <a:endParaRPr lang="pt-BR"/>
           </a:p>
@@ -2535,7 +2535,7 @@
           <a:p>
             <a:fld id="{52231B9D-E9F6-4612-9B82-E89961B389AC}" type="datetimeFigureOut">
               <a:rPr lang="pt-BR" smtClean="0"/>
-              <a:t>27/07/2024</a:t>
+              <a:t>09/08/2024</a:t>
             </a:fld>
             <a:endParaRPr lang="pt-BR"/>
           </a:p>
@@ -2788,7 +2788,7 @@
           <a:p>
             <a:fld id="{52231B9D-E9F6-4612-9B82-E89961B389AC}" type="datetimeFigureOut">
               <a:rPr lang="pt-BR" smtClean="0"/>
-              <a:t>27/07/2024</a:t>
+              <a:t>09/08/2024</a:t>
             </a:fld>
             <a:endParaRPr lang="pt-BR"/>
           </a:p>
@@ -3001,7 +3001,7 @@
           <a:p>
             <a:fld id="{52231B9D-E9F6-4612-9B82-E89961B389AC}" type="datetimeFigureOut">
               <a:rPr lang="pt-BR" smtClean="0"/>
-              <a:t>27/07/2024</a:t>
+              <a:t>09/08/2024</a:t>
             </a:fld>
             <a:endParaRPr lang="pt-BR"/>
           </a:p>
@@ -3665,7 +3665,17 @@
                   </a:schemeClr>
                 </a:solidFill>
               </a:rPr>
-              <a:t>28/07/2024</a:t>
+              <a:t>04</a:t>
+            </a:r>
+            <a:r>
+              <a:rPr lang="pt-BR" sz="1600" dirty="0" smtClean="0">
+                <a:solidFill>
+                  <a:schemeClr val="bg2">
+                    <a:lumMod val="90000"/>
+                  </a:schemeClr>
+                </a:solidFill>
+              </a:rPr>
+              <a:t>/08/2024</a:t>
             </a:r>
             <a:endParaRPr lang="pt-BR" sz="1600" dirty="0">
               <a:solidFill>

--- a/tempimento.pptx
+++ b/tempimento.pptx
@@ -197,7 +197,7 @@
           <a:p>
             <a:fld id="{A584E3A2-E8EA-4705-A613-CFE9F6F5D3B4}" type="datetimeFigureOut">
               <a:rPr lang="pt-BR" smtClean="0"/>
-              <a:t>09/08/2024</a:t>
+              <a:t>16/08/2024</a:t>
             </a:fld>
             <a:endParaRPr lang="pt-BR"/>
           </a:p>
@@ -680,7 +680,7 @@
           <a:p>
             <a:fld id="{52231B9D-E9F6-4612-9B82-E89961B389AC}" type="datetimeFigureOut">
               <a:rPr lang="pt-BR" smtClean="0"/>
-              <a:t>09/08/2024</a:t>
+              <a:t>16/08/2024</a:t>
             </a:fld>
             <a:endParaRPr lang="pt-BR"/>
           </a:p>
@@ -850,7 +850,7 @@
           <a:p>
             <a:fld id="{52231B9D-E9F6-4612-9B82-E89961B389AC}" type="datetimeFigureOut">
               <a:rPr lang="pt-BR" smtClean="0"/>
-              <a:t>09/08/2024</a:t>
+              <a:t>16/08/2024</a:t>
             </a:fld>
             <a:endParaRPr lang="pt-BR"/>
           </a:p>
@@ -1030,7 +1030,7 @@
           <a:p>
             <a:fld id="{52231B9D-E9F6-4612-9B82-E89961B389AC}" type="datetimeFigureOut">
               <a:rPr lang="pt-BR" smtClean="0"/>
-              <a:t>09/08/2024</a:t>
+              <a:t>16/08/2024</a:t>
             </a:fld>
             <a:endParaRPr lang="pt-BR"/>
           </a:p>
@@ -1200,7 +1200,7 @@
           <a:p>
             <a:fld id="{52231B9D-E9F6-4612-9B82-E89961B389AC}" type="datetimeFigureOut">
               <a:rPr lang="pt-BR" smtClean="0"/>
-              <a:t>09/08/2024</a:t>
+              <a:t>16/08/2024</a:t>
             </a:fld>
             <a:endParaRPr lang="pt-BR"/>
           </a:p>
@@ -1446,7 +1446,7 @@
           <a:p>
             <a:fld id="{52231B9D-E9F6-4612-9B82-E89961B389AC}" type="datetimeFigureOut">
               <a:rPr lang="pt-BR" smtClean="0"/>
-              <a:t>09/08/2024</a:t>
+              <a:t>16/08/2024</a:t>
             </a:fld>
             <a:endParaRPr lang="pt-BR"/>
           </a:p>
@@ -1678,7 +1678,7 @@
           <a:p>
             <a:fld id="{52231B9D-E9F6-4612-9B82-E89961B389AC}" type="datetimeFigureOut">
               <a:rPr lang="pt-BR" smtClean="0"/>
-              <a:t>09/08/2024</a:t>
+              <a:t>16/08/2024</a:t>
             </a:fld>
             <a:endParaRPr lang="pt-BR"/>
           </a:p>
@@ -2045,7 +2045,7 @@
           <a:p>
             <a:fld id="{52231B9D-E9F6-4612-9B82-E89961B389AC}" type="datetimeFigureOut">
               <a:rPr lang="pt-BR" smtClean="0"/>
-              <a:t>09/08/2024</a:t>
+              <a:t>16/08/2024</a:t>
             </a:fld>
             <a:endParaRPr lang="pt-BR"/>
           </a:p>
@@ -2163,7 +2163,7 @@
           <a:p>
             <a:fld id="{52231B9D-E9F6-4612-9B82-E89961B389AC}" type="datetimeFigureOut">
               <a:rPr lang="pt-BR" smtClean="0"/>
-              <a:t>09/08/2024</a:t>
+              <a:t>16/08/2024</a:t>
             </a:fld>
             <a:endParaRPr lang="pt-BR"/>
           </a:p>
@@ -2258,7 +2258,7 @@
           <a:p>
             <a:fld id="{52231B9D-E9F6-4612-9B82-E89961B389AC}" type="datetimeFigureOut">
               <a:rPr lang="pt-BR" smtClean="0"/>
-              <a:t>09/08/2024</a:t>
+              <a:t>16/08/2024</a:t>
             </a:fld>
             <a:endParaRPr lang="pt-BR"/>
           </a:p>
@@ -2535,7 +2535,7 @@
           <a:p>
             <a:fld id="{52231B9D-E9F6-4612-9B82-E89961B389AC}" type="datetimeFigureOut">
               <a:rPr lang="pt-BR" smtClean="0"/>
-              <a:t>09/08/2024</a:t>
+              <a:t>16/08/2024</a:t>
             </a:fld>
             <a:endParaRPr lang="pt-BR"/>
           </a:p>
@@ -2788,7 +2788,7 @@
           <a:p>
             <a:fld id="{52231B9D-E9F6-4612-9B82-E89961B389AC}" type="datetimeFigureOut">
               <a:rPr lang="pt-BR" smtClean="0"/>
-              <a:t>09/08/2024</a:t>
+              <a:t>16/08/2024</a:t>
             </a:fld>
             <a:endParaRPr lang="pt-BR"/>
           </a:p>
@@ -3001,7 +3001,7 @@
           <a:p>
             <a:fld id="{52231B9D-E9F6-4612-9B82-E89961B389AC}" type="datetimeFigureOut">
               <a:rPr lang="pt-BR" smtClean="0"/>
-              <a:t>09/08/2024</a:t>
+              <a:t>16/08/2024</a:t>
             </a:fld>
             <a:endParaRPr lang="pt-BR"/>
           </a:p>
@@ -3665,7 +3665,7 @@
                   </a:schemeClr>
                 </a:solidFill>
               </a:rPr>
-              <a:t>04</a:t>
+              <a:t>18</a:t>
             </a:r>
             <a:r>
               <a:rPr lang="pt-BR" sz="1600" dirty="0" smtClean="0">

--- a/tempimento.pptx
+++ b/tempimento.pptx
@@ -197,7 +197,7 @@
           <a:p>
             <a:fld id="{A584E3A2-E8EA-4705-A613-CFE9F6F5D3B4}" type="datetimeFigureOut">
               <a:rPr lang="pt-BR" smtClean="0"/>
-              <a:t>16/08/2024</a:t>
+              <a:t>30/08/2024</a:t>
             </a:fld>
             <a:endParaRPr lang="pt-BR"/>
           </a:p>
@@ -680,7 +680,7 @@
           <a:p>
             <a:fld id="{52231B9D-E9F6-4612-9B82-E89961B389AC}" type="datetimeFigureOut">
               <a:rPr lang="pt-BR" smtClean="0"/>
-              <a:t>16/08/2024</a:t>
+              <a:t>30/08/2024</a:t>
             </a:fld>
             <a:endParaRPr lang="pt-BR"/>
           </a:p>
@@ -850,7 +850,7 @@
           <a:p>
             <a:fld id="{52231B9D-E9F6-4612-9B82-E89961B389AC}" type="datetimeFigureOut">
               <a:rPr lang="pt-BR" smtClean="0"/>
-              <a:t>16/08/2024</a:t>
+              <a:t>30/08/2024</a:t>
             </a:fld>
             <a:endParaRPr lang="pt-BR"/>
           </a:p>
@@ -1030,7 +1030,7 @@
           <a:p>
             <a:fld id="{52231B9D-E9F6-4612-9B82-E89961B389AC}" type="datetimeFigureOut">
               <a:rPr lang="pt-BR" smtClean="0"/>
-              <a:t>16/08/2024</a:t>
+              <a:t>30/08/2024</a:t>
             </a:fld>
             <a:endParaRPr lang="pt-BR"/>
           </a:p>
@@ -1200,7 +1200,7 @@
           <a:p>
             <a:fld id="{52231B9D-E9F6-4612-9B82-E89961B389AC}" type="datetimeFigureOut">
               <a:rPr lang="pt-BR" smtClean="0"/>
-              <a:t>16/08/2024</a:t>
+              <a:t>30/08/2024</a:t>
             </a:fld>
             <a:endParaRPr lang="pt-BR"/>
           </a:p>
@@ -1446,7 +1446,7 @@
           <a:p>
             <a:fld id="{52231B9D-E9F6-4612-9B82-E89961B389AC}" type="datetimeFigureOut">
               <a:rPr lang="pt-BR" smtClean="0"/>
-              <a:t>16/08/2024</a:t>
+              <a:t>30/08/2024</a:t>
             </a:fld>
             <a:endParaRPr lang="pt-BR"/>
           </a:p>
@@ -1678,7 +1678,7 @@
           <a:p>
             <a:fld id="{52231B9D-E9F6-4612-9B82-E89961B389AC}" type="datetimeFigureOut">
               <a:rPr lang="pt-BR" smtClean="0"/>
-              <a:t>16/08/2024</a:t>
+              <a:t>30/08/2024</a:t>
             </a:fld>
             <a:endParaRPr lang="pt-BR"/>
           </a:p>
@@ -2045,7 +2045,7 @@
           <a:p>
             <a:fld id="{52231B9D-E9F6-4612-9B82-E89961B389AC}" type="datetimeFigureOut">
               <a:rPr lang="pt-BR" smtClean="0"/>
-              <a:t>16/08/2024</a:t>
+              <a:t>30/08/2024</a:t>
             </a:fld>
             <a:endParaRPr lang="pt-BR"/>
           </a:p>
@@ -2163,7 +2163,7 @@
           <a:p>
             <a:fld id="{52231B9D-E9F6-4612-9B82-E89961B389AC}" type="datetimeFigureOut">
               <a:rPr lang="pt-BR" smtClean="0"/>
-              <a:t>16/08/2024</a:t>
+              <a:t>30/08/2024</a:t>
             </a:fld>
             <a:endParaRPr lang="pt-BR"/>
           </a:p>
@@ -2258,7 +2258,7 @@
           <a:p>
             <a:fld id="{52231B9D-E9F6-4612-9B82-E89961B389AC}" type="datetimeFigureOut">
               <a:rPr lang="pt-BR" smtClean="0"/>
-              <a:t>16/08/2024</a:t>
+              <a:t>30/08/2024</a:t>
             </a:fld>
             <a:endParaRPr lang="pt-BR"/>
           </a:p>
@@ -2535,7 +2535,7 @@
           <a:p>
             <a:fld id="{52231B9D-E9F6-4612-9B82-E89961B389AC}" type="datetimeFigureOut">
               <a:rPr lang="pt-BR" smtClean="0"/>
-              <a:t>16/08/2024</a:t>
+              <a:t>30/08/2024</a:t>
             </a:fld>
             <a:endParaRPr lang="pt-BR"/>
           </a:p>
@@ -2788,7 +2788,7 @@
           <a:p>
             <a:fld id="{52231B9D-E9F6-4612-9B82-E89961B389AC}" type="datetimeFigureOut">
               <a:rPr lang="pt-BR" smtClean="0"/>
-              <a:t>16/08/2024</a:t>
+              <a:t>30/08/2024</a:t>
             </a:fld>
             <a:endParaRPr lang="pt-BR"/>
           </a:p>
@@ -3001,7 +3001,7 @@
           <a:p>
             <a:fld id="{52231B9D-E9F6-4612-9B82-E89961B389AC}" type="datetimeFigureOut">
               <a:rPr lang="pt-BR" smtClean="0"/>
-              <a:t>16/08/2024</a:t>
+              <a:t>30/08/2024</a:t>
             </a:fld>
             <a:endParaRPr lang="pt-BR"/>
           </a:p>
@@ -3665,7 +3665,7 @@
                   </a:schemeClr>
                 </a:solidFill>
               </a:rPr>
-              <a:t>18</a:t>
+              <a:t>25</a:t>
             </a:r>
             <a:r>
               <a:rPr lang="pt-BR" sz="1600" dirty="0" smtClean="0">

--- a/tempimento.pptx
+++ b/tempimento.pptx
@@ -197,7 +197,7 @@
           <a:p>
             <a:fld id="{A584E3A2-E8EA-4705-A613-CFE9F6F5D3B4}" type="datetimeFigureOut">
               <a:rPr lang="pt-BR" smtClean="0"/>
-              <a:t>30/08/2024</a:t>
+              <a:t>02/09/2024</a:t>
             </a:fld>
             <a:endParaRPr lang="pt-BR"/>
           </a:p>
@@ -680,7 +680,7 @@
           <a:p>
             <a:fld id="{52231B9D-E9F6-4612-9B82-E89961B389AC}" type="datetimeFigureOut">
               <a:rPr lang="pt-BR" smtClean="0"/>
-              <a:t>30/08/2024</a:t>
+              <a:t>02/09/2024</a:t>
             </a:fld>
             <a:endParaRPr lang="pt-BR"/>
           </a:p>
@@ -850,7 +850,7 @@
           <a:p>
             <a:fld id="{52231B9D-E9F6-4612-9B82-E89961B389AC}" type="datetimeFigureOut">
               <a:rPr lang="pt-BR" smtClean="0"/>
-              <a:t>30/08/2024</a:t>
+              <a:t>02/09/2024</a:t>
             </a:fld>
             <a:endParaRPr lang="pt-BR"/>
           </a:p>
@@ -1030,7 +1030,7 @@
           <a:p>
             <a:fld id="{52231B9D-E9F6-4612-9B82-E89961B389AC}" type="datetimeFigureOut">
               <a:rPr lang="pt-BR" smtClean="0"/>
-              <a:t>30/08/2024</a:t>
+              <a:t>02/09/2024</a:t>
             </a:fld>
             <a:endParaRPr lang="pt-BR"/>
           </a:p>
@@ -1200,7 +1200,7 @@
           <a:p>
             <a:fld id="{52231B9D-E9F6-4612-9B82-E89961B389AC}" type="datetimeFigureOut">
               <a:rPr lang="pt-BR" smtClean="0"/>
-              <a:t>30/08/2024</a:t>
+              <a:t>02/09/2024</a:t>
             </a:fld>
             <a:endParaRPr lang="pt-BR"/>
           </a:p>
@@ -1446,7 +1446,7 @@
           <a:p>
             <a:fld id="{52231B9D-E9F6-4612-9B82-E89961B389AC}" type="datetimeFigureOut">
               <a:rPr lang="pt-BR" smtClean="0"/>
-              <a:t>30/08/2024</a:t>
+              <a:t>02/09/2024</a:t>
             </a:fld>
             <a:endParaRPr lang="pt-BR"/>
           </a:p>
@@ -1678,7 +1678,7 @@
           <a:p>
             <a:fld id="{52231B9D-E9F6-4612-9B82-E89961B389AC}" type="datetimeFigureOut">
               <a:rPr lang="pt-BR" smtClean="0"/>
-              <a:t>30/08/2024</a:t>
+              <a:t>02/09/2024</a:t>
             </a:fld>
             <a:endParaRPr lang="pt-BR"/>
           </a:p>
@@ -2045,7 +2045,7 @@
           <a:p>
             <a:fld id="{52231B9D-E9F6-4612-9B82-E89961B389AC}" type="datetimeFigureOut">
               <a:rPr lang="pt-BR" smtClean="0"/>
-              <a:t>30/08/2024</a:t>
+              <a:t>02/09/2024</a:t>
             </a:fld>
             <a:endParaRPr lang="pt-BR"/>
           </a:p>
@@ -2163,7 +2163,7 @@
           <a:p>
             <a:fld id="{52231B9D-E9F6-4612-9B82-E89961B389AC}" type="datetimeFigureOut">
               <a:rPr lang="pt-BR" smtClean="0"/>
-              <a:t>30/08/2024</a:t>
+              <a:t>02/09/2024</a:t>
             </a:fld>
             <a:endParaRPr lang="pt-BR"/>
           </a:p>
@@ -2258,7 +2258,7 @@
           <a:p>
             <a:fld id="{52231B9D-E9F6-4612-9B82-E89961B389AC}" type="datetimeFigureOut">
               <a:rPr lang="pt-BR" smtClean="0"/>
-              <a:t>30/08/2024</a:t>
+              <a:t>02/09/2024</a:t>
             </a:fld>
             <a:endParaRPr lang="pt-BR"/>
           </a:p>
@@ -2535,7 +2535,7 @@
           <a:p>
             <a:fld id="{52231B9D-E9F6-4612-9B82-E89961B389AC}" type="datetimeFigureOut">
               <a:rPr lang="pt-BR" smtClean="0"/>
-              <a:t>30/08/2024</a:t>
+              <a:t>02/09/2024</a:t>
             </a:fld>
             <a:endParaRPr lang="pt-BR"/>
           </a:p>
@@ -2788,7 +2788,7 @@
           <a:p>
             <a:fld id="{52231B9D-E9F6-4612-9B82-E89961B389AC}" type="datetimeFigureOut">
               <a:rPr lang="pt-BR" smtClean="0"/>
-              <a:t>30/08/2024</a:t>
+              <a:t>02/09/2024</a:t>
             </a:fld>
             <a:endParaRPr lang="pt-BR"/>
           </a:p>
@@ -3001,7 +3001,7 @@
           <a:p>
             <a:fld id="{52231B9D-E9F6-4612-9B82-E89961B389AC}" type="datetimeFigureOut">
               <a:rPr lang="pt-BR" smtClean="0"/>
-              <a:t>30/08/2024</a:t>
+              <a:t>02/09/2024</a:t>
             </a:fld>
             <a:endParaRPr lang="pt-BR"/>
           </a:p>
@@ -3665,7 +3665,7 @@
                   </a:schemeClr>
                 </a:solidFill>
               </a:rPr>
-              <a:t>25</a:t>
+              <a:t>01</a:t>
             </a:r>
             <a:r>
               <a:rPr lang="pt-BR" sz="1600" dirty="0" smtClean="0">
@@ -3675,7 +3675,7 @@
                   </a:schemeClr>
                 </a:solidFill>
               </a:rPr>
-              <a:t>/08/2024</a:t>
+              <a:t>/09/2024</a:t>
             </a:r>
             <a:endParaRPr lang="pt-BR" sz="1600" dirty="0">
               <a:solidFill>

--- a/tempimento.pptx
+++ b/tempimento.pptx
@@ -197,7 +197,7 @@
           <a:p>
             <a:fld id="{A584E3A2-E8EA-4705-A613-CFE9F6F5D3B4}" type="datetimeFigureOut">
               <a:rPr lang="pt-BR" smtClean="0"/>
-              <a:t>02/09/2024</a:t>
+              <a:t>10/09/2024</a:t>
             </a:fld>
             <a:endParaRPr lang="pt-BR"/>
           </a:p>
@@ -680,7 +680,7 @@
           <a:p>
             <a:fld id="{52231B9D-E9F6-4612-9B82-E89961B389AC}" type="datetimeFigureOut">
               <a:rPr lang="pt-BR" smtClean="0"/>
-              <a:t>02/09/2024</a:t>
+              <a:t>10/09/2024</a:t>
             </a:fld>
             <a:endParaRPr lang="pt-BR"/>
           </a:p>
@@ -850,7 +850,7 @@
           <a:p>
             <a:fld id="{52231B9D-E9F6-4612-9B82-E89961B389AC}" type="datetimeFigureOut">
               <a:rPr lang="pt-BR" smtClean="0"/>
-              <a:t>02/09/2024</a:t>
+              <a:t>10/09/2024</a:t>
             </a:fld>
             <a:endParaRPr lang="pt-BR"/>
           </a:p>
@@ -1030,7 +1030,7 @@
           <a:p>
             <a:fld id="{52231B9D-E9F6-4612-9B82-E89961B389AC}" type="datetimeFigureOut">
               <a:rPr lang="pt-BR" smtClean="0"/>
-              <a:t>02/09/2024</a:t>
+              <a:t>10/09/2024</a:t>
             </a:fld>
             <a:endParaRPr lang="pt-BR"/>
           </a:p>
@@ -1200,7 +1200,7 @@
           <a:p>
             <a:fld id="{52231B9D-E9F6-4612-9B82-E89961B389AC}" type="datetimeFigureOut">
               <a:rPr lang="pt-BR" smtClean="0"/>
-              <a:t>02/09/2024</a:t>
+              <a:t>10/09/2024</a:t>
             </a:fld>
             <a:endParaRPr lang="pt-BR"/>
           </a:p>
@@ -1446,7 +1446,7 @@
           <a:p>
             <a:fld id="{52231B9D-E9F6-4612-9B82-E89961B389AC}" type="datetimeFigureOut">
               <a:rPr lang="pt-BR" smtClean="0"/>
-              <a:t>02/09/2024</a:t>
+              <a:t>10/09/2024</a:t>
             </a:fld>
             <a:endParaRPr lang="pt-BR"/>
           </a:p>
@@ -1678,7 +1678,7 @@
           <a:p>
             <a:fld id="{52231B9D-E9F6-4612-9B82-E89961B389AC}" type="datetimeFigureOut">
               <a:rPr lang="pt-BR" smtClean="0"/>
-              <a:t>02/09/2024</a:t>
+              <a:t>10/09/2024</a:t>
             </a:fld>
             <a:endParaRPr lang="pt-BR"/>
           </a:p>
@@ -2045,7 +2045,7 @@
           <a:p>
             <a:fld id="{52231B9D-E9F6-4612-9B82-E89961B389AC}" type="datetimeFigureOut">
               <a:rPr lang="pt-BR" smtClean="0"/>
-              <a:t>02/09/2024</a:t>
+              <a:t>10/09/2024</a:t>
             </a:fld>
             <a:endParaRPr lang="pt-BR"/>
           </a:p>
@@ -2163,7 +2163,7 @@
           <a:p>
             <a:fld id="{52231B9D-E9F6-4612-9B82-E89961B389AC}" type="datetimeFigureOut">
               <a:rPr lang="pt-BR" smtClean="0"/>
-              <a:t>02/09/2024</a:t>
+              <a:t>10/09/2024</a:t>
             </a:fld>
             <a:endParaRPr lang="pt-BR"/>
           </a:p>
@@ -2258,7 +2258,7 @@
           <a:p>
             <a:fld id="{52231B9D-E9F6-4612-9B82-E89961B389AC}" type="datetimeFigureOut">
               <a:rPr lang="pt-BR" smtClean="0"/>
-              <a:t>02/09/2024</a:t>
+              <a:t>10/09/2024</a:t>
             </a:fld>
             <a:endParaRPr lang="pt-BR"/>
           </a:p>
@@ -2535,7 +2535,7 @@
           <a:p>
             <a:fld id="{52231B9D-E9F6-4612-9B82-E89961B389AC}" type="datetimeFigureOut">
               <a:rPr lang="pt-BR" smtClean="0"/>
-              <a:t>02/09/2024</a:t>
+              <a:t>10/09/2024</a:t>
             </a:fld>
             <a:endParaRPr lang="pt-BR"/>
           </a:p>
@@ -2788,7 +2788,7 @@
           <a:p>
             <a:fld id="{52231B9D-E9F6-4612-9B82-E89961B389AC}" type="datetimeFigureOut">
               <a:rPr lang="pt-BR" smtClean="0"/>
-              <a:t>02/09/2024</a:t>
+              <a:t>10/09/2024</a:t>
             </a:fld>
             <a:endParaRPr lang="pt-BR"/>
           </a:p>
@@ -3001,7 +3001,7 @@
           <a:p>
             <a:fld id="{52231B9D-E9F6-4612-9B82-E89961B389AC}" type="datetimeFigureOut">
               <a:rPr lang="pt-BR" smtClean="0"/>
-              <a:t>02/09/2024</a:t>
+              <a:t>10/09/2024</a:t>
             </a:fld>
             <a:endParaRPr lang="pt-BR"/>
           </a:p>
@@ -3665,17 +3665,7 @@
                   </a:schemeClr>
                 </a:solidFill>
               </a:rPr>
-              <a:t>01</a:t>
-            </a:r>
-            <a:r>
-              <a:rPr lang="pt-BR" sz="1600" dirty="0" smtClean="0">
-                <a:solidFill>
-                  <a:schemeClr val="bg2">
-                    <a:lumMod val="90000"/>
-                  </a:schemeClr>
-                </a:solidFill>
-              </a:rPr>
-              <a:t>/09/2024</a:t>
+              <a:t>08/09/2024</a:t>
             </a:r>
             <a:endParaRPr lang="pt-BR" sz="1600" dirty="0">
               <a:solidFill>

--- a/tempimento.pptx
+++ b/tempimento.pptx
@@ -197,7 +197,7 @@
           <a:p>
             <a:fld id="{A584E3A2-E8EA-4705-A613-CFE9F6F5D3B4}" type="datetimeFigureOut">
               <a:rPr lang="pt-BR" smtClean="0"/>
-              <a:t>10/09/2024</a:t>
+              <a:t>21/09/2024</a:t>
             </a:fld>
             <a:endParaRPr lang="pt-BR"/>
           </a:p>
@@ -680,7 +680,7 @@
           <a:p>
             <a:fld id="{52231B9D-E9F6-4612-9B82-E89961B389AC}" type="datetimeFigureOut">
               <a:rPr lang="pt-BR" smtClean="0"/>
-              <a:t>10/09/2024</a:t>
+              <a:t>21/09/2024</a:t>
             </a:fld>
             <a:endParaRPr lang="pt-BR"/>
           </a:p>
@@ -850,7 +850,7 @@
           <a:p>
             <a:fld id="{52231B9D-E9F6-4612-9B82-E89961B389AC}" type="datetimeFigureOut">
               <a:rPr lang="pt-BR" smtClean="0"/>
-              <a:t>10/09/2024</a:t>
+              <a:t>21/09/2024</a:t>
             </a:fld>
             <a:endParaRPr lang="pt-BR"/>
           </a:p>
@@ -1030,7 +1030,7 @@
           <a:p>
             <a:fld id="{52231B9D-E9F6-4612-9B82-E89961B389AC}" type="datetimeFigureOut">
               <a:rPr lang="pt-BR" smtClean="0"/>
-              <a:t>10/09/2024</a:t>
+              <a:t>21/09/2024</a:t>
             </a:fld>
             <a:endParaRPr lang="pt-BR"/>
           </a:p>
@@ -1200,7 +1200,7 @@
           <a:p>
             <a:fld id="{52231B9D-E9F6-4612-9B82-E89961B389AC}" type="datetimeFigureOut">
               <a:rPr lang="pt-BR" smtClean="0"/>
-              <a:t>10/09/2024</a:t>
+              <a:t>21/09/2024</a:t>
             </a:fld>
             <a:endParaRPr lang="pt-BR"/>
           </a:p>
@@ -1446,7 +1446,7 @@
           <a:p>
             <a:fld id="{52231B9D-E9F6-4612-9B82-E89961B389AC}" type="datetimeFigureOut">
               <a:rPr lang="pt-BR" smtClean="0"/>
-              <a:t>10/09/2024</a:t>
+              <a:t>21/09/2024</a:t>
             </a:fld>
             <a:endParaRPr lang="pt-BR"/>
           </a:p>
@@ -1678,7 +1678,7 @@
           <a:p>
             <a:fld id="{52231B9D-E9F6-4612-9B82-E89961B389AC}" type="datetimeFigureOut">
               <a:rPr lang="pt-BR" smtClean="0"/>
-              <a:t>10/09/2024</a:t>
+              <a:t>21/09/2024</a:t>
             </a:fld>
             <a:endParaRPr lang="pt-BR"/>
           </a:p>
@@ -2045,7 +2045,7 @@
           <a:p>
             <a:fld id="{52231B9D-E9F6-4612-9B82-E89961B389AC}" type="datetimeFigureOut">
               <a:rPr lang="pt-BR" smtClean="0"/>
-              <a:t>10/09/2024</a:t>
+              <a:t>21/09/2024</a:t>
             </a:fld>
             <a:endParaRPr lang="pt-BR"/>
           </a:p>
@@ -2163,7 +2163,7 @@
           <a:p>
             <a:fld id="{52231B9D-E9F6-4612-9B82-E89961B389AC}" type="datetimeFigureOut">
               <a:rPr lang="pt-BR" smtClean="0"/>
-              <a:t>10/09/2024</a:t>
+              <a:t>21/09/2024</a:t>
             </a:fld>
             <a:endParaRPr lang="pt-BR"/>
           </a:p>
@@ -2258,7 +2258,7 @@
           <a:p>
             <a:fld id="{52231B9D-E9F6-4612-9B82-E89961B389AC}" type="datetimeFigureOut">
               <a:rPr lang="pt-BR" smtClean="0"/>
-              <a:t>10/09/2024</a:t>
+              <a:t>21/09/2024</a:t>
             </a:fld>
             <a:endParaRPr lang="pt-BR"/>
           </a:p>
@@ -2535,7 +2535,7 @@
           <a:p>
             <a:fld id="{52231B9D-E9F6-4612-9B82-E89961B389AC}" type="datetimeFigureOut">
               <a:rPr lang="pt-BR" smtClean="0"/>
-              <a:t>10/09/2024</a:t>
+              <a:t>21/09/2024</a:t>
             </a:fld>
             <a:endParaRPr lang="pt-BR"/>
           </a:p>
@@ -2788,7 +2788,7 @@
           <a:p>
             <a:fld id="{52231B9D-E9F6-4612-9B82-E89961B389AC}" type="datetimeFigureOut">
               <a:rPr lang="pt-BR" smtClean="0"/>
-              <a:t>10/09/2024</a:t>
+              <a:t>21/09/2024</a:t>
             </a:fld>
             <a:endParaRPr lang="pt-BR"/>
           </a:p>
@@ -3001,7 +3001,7 @@
           <a:p>
             <a:fld id="{52231B9D-E9F6-4612-9B82-E89961B389AC}" type="datetimeFigureOut">
               <a:rPr lang="pt-BR" smtClean="0"/>
-              <a:t>10/09/2024</a:t>
+              <a:t>21/09/2024</a:t>
             </a:fld>
             <a:endParaRPr lang="pt-BR"/>
           </a:p>
@@ -3665,7 +3665,7 @@
                   </a:schemeClr>
                 </a:solidFill>
               </a:rPr>
-              <a:t>08/09/2024</a:t>
+              <a:t>22/09/2024</a:t>
             </a:r>
             <a:endParaRPr lang="pt-BR" sz="1600" dirty="0">
               <a:solidFill>

--- a/tempimento.pptx
+++ b/tempimento.pptx
@@ -11,7 +11,7 @@
     <p:sldId id="256" r:id="rId2"/>
   </p:sldIdLst>
   <p:sldSz cx="12192000" cy="6858000"/>
-  <p:notesSz cx="6889750" cy="9671050"/>
+  <p:notesSz cx="6797675" cy="9926638"/>
   <p:defaultTextStyle>
     <a:defPPr>
       <a:defRPr lang="pt-BR"/>
@@ -150,7 +150,7 @@
         <p:spPr>
           <a:xfrm>
             <a:off x="6" y="1"/>
-            <a:ext cx="2985970" cy="484528"/>
+            <a:ext cx="2946065" cy="497333"/>
           </a:xfrm>
           <a:prstGeom prst="rect">
             <a:avLst/>
@@ -180,8 +180,8 @@
         </p:nvSpPr>
         <p:spPr>
           <a:xfrm>
-            <a:off x="3902247" y="1"/>
-            <a:ext cx="2985970" cy="484528"/>
+            <a:off x="3850097" y="1"/>
+            <a:ext cx="2946065" cy="497333"/>
           </a:xfrm>
           <a:prstGeom prst="rect">
             <a:avLst/>
@@ -197,7 +197,7 @@
           <a:p>
             <a:fld id="{A584E3A2-E8EA-4705-A613-CFE9F6F5D3B4}" type="datetimeFigureOut">
               <a:rPr lang="pt-BR" smtClean="0"/>
-              <a:t>21/09/2024</a:t>
+              <a:t>28/09/2024</a:t>
             </a:fld>
             <a:endParaRPr lang="pt-BR"/>
           </a:p>
@@ -215,8 +215,8 @@
         </p:nvSpPr>
         <p:spPr>
           <a:xfrm>
-            <a:off x="544513" y="1209675"/>
-            <a:ext cx="5800725" cy="3262313"/>
+            <a:off x="423863" y="1241425"/>
+            <a:ext cx="5949950" cy="3348038"/>
           </a:xfrm>
           <a:prstGeom prst="rect">
             <a:avLst/>
@@ -248,8 +248,8 @@
         </p:nvSpPr>
         <p:spPr>
           <a:xfrm>
-            <a:off x="688363" y="4654768"/>
-            <a:ext cx="5513032" cy="3807217"/>
+            <a:off x="679163" y="4777785"/>
+            <a:ext cx="5439356" cy="3907835"/>
           </a:xfrm>
           <a:prstGeom prst="rect">
             <a:avLst/>
@@ -308,8 +308,8 @@
         </p:nvSpPr>
         <p:spPr>
           <a:xfrm>
-            <a:off x="6" y="9186525"/>
-            <a:ext cx="2985970" cy="484528"/>
+            <a:off x="6" y="9429308"/>
+            <a:ext cx="2946065" cy="497333"/>
           </a:xfrm>
           <a:prstGeom prst="rect">
             <a:avLst/>
@@ -339,8 +339,8 @@
         </p:nvSpPr>
         <p:spPr>
           <a:xfrm>
-            <a:off x="3902247" y="9186525"/>
-            <a:ext cx="2985970" cy="484528"/>
+            <a:off x="3850097" y="9429308"/>
+            <a:ext cx="2946065" cy="497333"/>
           </a:xfrm>
           <a:prstGeom prst="rect">
             <a:avLst/>
@@ -680,7 +680,7 @@
           <a:p>
             <a:fld id="{52231B9D-E9F6-4612-9B82-E89961B389AC}" type="datetimeFigureOut">
               <a:rPr lang="pt-BR" smtClean="0"/>
-              <a:t>21/09/2024</a:t>
+              <a:t>28/09/2024</a:t>
             </a:fld>
             <a:endParaRPr lang="pt-BR"/>
           </a:p>
@@ -850,7 +850,7 @@
           <a:p>
             <a:fld id="{52231B9D-E9F6-4612-9B82-E89961B389AC}" type="datetimeFigureOut">
               <a:rPr lang="pt-BR" smtClean="0"/>
-              <a:t>21/09/2024</a:t>
+              <a:t>28/09/2024</a:t>
             </a:fld>
             <a:endParaRPr lang="pt-BR"/>
           </a:p>
@@ -1030,7 +1030,7 @@
           <a:p>
             <a:fld id="{52231B9D-E9F6-4612-9B82-E89961B389AC}" type="datetimeFigureOut">
               <a:rPr lang="pt-BR" smtClean="0"/>
-              <a:t>21/09/2024</a:t>
+              <a:t>28/09/2024</a:t>
             </a:fld>
             <a:endParaRPr lang="pt-BR"/>
           </a:p>
@@ -1200,7 +1200,7 @@
           <a:p>
             <a:fld id="{52231B9D-E9F6-4612-9B82-E89961B389AC}" type="datetimeFigureOut">
               <a:rPr lang="pt-BR" smtClean="0"/>
-              <a:t>21/09/2024</a:t>
+              <a:t>28/09/2024</a:t>
             </a:fld>
             <a:endParaRPr lang="pt-BR"/>
           </a:p>
@@ -1446,7 +1446,7 @@
           <a:p>
             <a:fld id="{52231B9D-E9F6-4612-9B82-E89961B389AC}" type="datetimeFigureOut">
               <a:rPr lang="pt-BR" smtClean="0"/>
-              <a:t>21/09/2024</a:t>
+              <a:t>28/09/2024</a:t>
             </a:fld>
             <a:endParaRPr lang="pt-BR"/>
           </a:p>
@@ -1678,7 +1678,7 @@
           <a:p>
             <a:fld id="{52231B9D-E9F6-4612-9B82-E89961B389AC}" type="datetimeFigureOut">
               <a:rPr lang="pt-BR" smtClean="0"/>
-              <a:t>21/09/2024</a:t>
+              <a:t>28/09/2024</a:t>
             </a:fld>
             <a:endParaRPr lang="pt-BR"/>
           </a:p>
@@ -2045,7 +2045,7 @@
           <a:p>
             <a:fld id="{52231B9D-E9F6-4612-9B82-E89961B389AC}" type="datetimeFigureOut">
               <a:rPr lang="pt-BR" smtClean="0"/>
-              <a:t>21/09/2024</a:t>
+              <a:t>28/09/2024</a:t>
             </a:fld>
             <a:endParaRPr lang="pt-BR"/>
           </a:p>
@@ -2163,7 +2163,7 @@
           <a:p>
             <a:fld id="{52231B9D-E9F6-4612-9B82-E89961B389AC}" type="datetimeFigureOut">
               <a:rPr lang="pt-BR" smtClean="0"/>
-              <a:t>21/09/2024</a:t>
+              <a:t>28/09/2024</a:t>
             </a:fld>
             <a:endParaRPr lang="pt-BR"/>
           </a:p>
@@ -2258,7 +2258,7 @@
           <a:p>
             <a:fld id="{52231B9D-E9F6-4612-9B82-E89961B389AC}" type="datetimeFigureOut">
               <a:rPr lang="pt-BR" smtClean="0"/>
-              <a:t>21/09/2024</a:t>
+              <a:t>28/09/2024</a:t>
             </a:fld>
             <a:endParaRPr lang="pt-BR"/>
           </a:p>
@@ -2535,7 +2535,7 @@
           <a:p>
             <a:fld id="{52231B9D-E9F6-4612-9B82-E89961B389AC}" type="datetimeFigureOut">
               <a:rPr lang="pt-BR" smtClean="0"/>
-              <a:t>21/09/2024</a:t>
+              <a:t>28/09/2024</a:t>
             </a:fld>
             <a:endParaRPr lang="pt-BR"/>
           </a:p>
@@ -2788,7 +2788,7 @@
           <a:p>
             <a:fld id="{52231B9D-E9F6-4612-9B82-E89961B389AC}" type="datetimeFigureOut">
               <a:rPr lang="pt-BR" smtClean="0"/>
-              <a:t>21/09/2024</a:t>
+              <a:t>28/09/2024</a:t>
             </a:fld>
             <a:endParaRPr lang="pt-BR"/>
           </a:p>
@@ -3001,7 +3001,7 @@
           <a:p>
             <a:fld id="{52231B9D-E9F6-4612-9B82-E89961B389AC}" type="datetimeFigureOut">
               <a:rPr lang="pt-BR" smtClean="0"/>
-              <a:t>21/09/2024</a:t>
+              <a:t>28/09/2024</a:t>
             </a:fld>
             <a:endParaRPr lang="pt-BR"/>
           </a:p>
@@ -3665,7 +3665,7 @@
                   </a:schemeClr>
                 </a:solidFill>
               </a:rPr>
-              <a:t>22/09/2024</a:t>
+              <a:t>29/09/2024</a:t>
             </a:r>
             <a:endParaRPr lang="pt-BR" sz="1600" dirty="0">
               <a:solidFill>

--- a/tempimento.pptx
+++ b/tempimento.pptx
@@ -149,18 +149,18 @@
         </p:nvSpPr>
         <p:spPr>
           <a:xfrm>
-            <a:off x="6" y="1"/>
-            <a:ext cx="2946065" cy="497333"/>
+            <a:off x="7" y="2"/>
+            <a:ext cx="2946066" cy="497333"/>
           </a:xfrm>
           <a:prstGeom prst="rect">
             <a:avLst/>
           </a:prstGeom>
         </p:spPr>
         <p:txBody>
-          <a:bodyPr vert="horz" lIns="87296" tIns="43649" rIns="87296" bIns="43649" rtlCol="0"/>
+          <a:bodyPr vert="horz" lIns="88146" tIns="44074" rIns="88146" bIns="44074" rtlCol="0"/>
           <a:lstStyle>
             <a:lvl1pPr algn="l">
-              <a:defRPr sz="1100"/>
+              <a:defRPr sz="1200"/>
             </a:lvl1pPr>
           </a:lstStyle>
           <a:p>
@@ -180,24 +180,24 @@
         </p:nvSpPr>
         <p:spPr>
           <a:xfrm>
-            <a:off x="3850097" y="1"/>
-            <a:ext cx="2946065" cy="497333"/>
+            <a:off x="3850097" y="2"/>
+            <a:ext cx="2946066" cy="497333"/>
           </a:xfrm>
           <a:prstGeom prst="rect">
             <a:avLst/>
           </a:prstGeom>
         </p:spPr>
         <p:txBody>
-          <a:bodyPr vert="horz" lIns="87296" tIns="43649" rIns="87296" bIns="43649" rtlCol="0"/>
+          <a:bodyPr vert="horz" lIns="88146" tIns="44074" rIns="88146" bIns="44074" rtlCol="0"/>
           <a:lstStyle>
             <a:lvl1pPr algn="r">
-              <a:defRPr sz="1100"/>
+              <a:defRPr sz="1200"/>
             </a:lvl1pPr>
           </a:lstStyle>
           <a:p>
             <a:fld id="{A584E3A2-E8EA-4705-A613-CFE9F6F5D3B4}" type="datetimeFigureOut">
               <a:rPr lang="pt-BR" smtClean="0"/>
-              <a:t>28/09/2024</a:t>
+              <a:t>10/01/2025</a:t>
             </a:fld>
             <a:endParaRPr lang="pt-BR"/>
           </a:p>
@@ -229,7 +229,7 @@
           </a:ln>
         </p:spPr>
         <p:txBody>
-          <a:bodyPr vert="horz" lIns="87296" tIns="43649" rIns="87296" bIns="43649" rtlCol="0" anchor="ctr"/>
+          <a:bodyPr vert="horz" lIns="88146" tIns="44074" rIns="88146" bIns="44074" rtlCol="0" anchor="ctr"/>
           <a:lstStyle/>
           <a:p>
             <a:endParaRPr lang="pt-BR"/>
@@ -248,7 +248,7 @@
         </p:nvSpPr>
         <p:spPr>
           <a:xfrm>
-            <a:off x="679163" y="4777785"/>
+            <a:off x="679164" y="4777788"/>
             <a:ext cx="5439356" cy="3907835"/>
           </a:xfrm>
           <a:prstGeom prst="rect">
@@ -256,7 +256,7 @@
           </a:prstGeom>
         </p:spPr>
         <p:txBody>
-          <a:bodyPr vert="horz" lIns="87296" tIns="43649" rIns="87296" bIns="43649" rtlCol="0"/>
+          <a:bodyPr vert="horz" lIns="88146" tIns="44074" rIns="88146" bIns="44074" rtlCol="0"/>
           <a:lstStyle/>
           <a:p>
             <a:pPr lvl="0"/>
@@ -308,18 +308,18 @@
         </p:nvSpPr>
         <p:spPr>
           <a:xfrm>
-            <a:off x="6" y="9429308"/>
-            <a:ext cx="2946065" cy="497333"/>
+            <a:off x="7" y="9429308"/>
+            <a:ext cx="2946066" cy="497333"/>
           </a:xfrm>
           <a:prstGeom prst="rect">
             <a:avLst/>
           </a:prstGeom>
         </p:spPr>
         <p:txBody>
-          <a:bodyPr vert="horz" lIns="87296" tIns="43649" rIns="87296" bIns="43649" rtlCol="0" anchor="b"/>
+          <a:bodyPr vert="horz" lIns="88146" tIns="44074" rIns="88146" bIns="44074" rtlCol="0" anchor="b"/>
           <a:lstStyle>
             <a:lvl1pPr algn="l">
-              <a:defRPr sz="1100"/>
+              <a:defRPr sz="1200"/>
             </a:lvl1pPr>
           </a:lstStyle>
           <a:p>
@@ -340,17 +340,17 @@
         <p:spPr>
           <a:xfrm>
             <a:off x="3850097" y="9429308"/>
-            <a:ext cx="2946065" cy="497333"/>
+            <a:ext cx="2946066" cy="497333"/>
           </a:xfrm>
           <a:prstGeom prst="rect">
             <a:avLst/>
           </a:prstGeom>
         </p:spPr>
         <p:txBody>
-          <a:bodyPr vert="horz" lIns="87296" tIns="43649" rIns="87296" bIns="43649" rtlCol="0" anchor="b"/>
+          <a:bodyPr vert="horz" lIns="88146" tIns="44074" rIns="88146" bIns="44074" rtlCol="0" anchor="b"/>
           <a:lstStyle>
             <a:lvl1pPr algn="r">
-              <a:defRPr sz="1100"/>
+              <a:defRPr sz="1200"/>
             </a:lvl1pPr>
           </a:lstStyle>
           <a:p>
@@ -680,7 +680,7 @@
           <a:p>
             <a:fld id="{52231B9D-E9F6-4612-9B82-E89961B389AC}" type="datetimeFigureOut">
               <a:rPr lang="pt-BR" smtClean="0"/>
-              <a:t>28/09/2024</a:t>
+              <a:t>10/01/2025</a:t>
             </a:fld>
             <a:endParaRPr lang="pt-BR"/>
           </a:p>
@@ -850,7 +850,7 @@
           <a:p>
             <a:fld id="{52231B9D-E9F6-4612-9B82-E89961B389AC}" type="datetimeFigureOut">
               <a:rPr lang="pt-BR" smtClean="0"/>
-              <a:t>28/09/2024</a:t>
+              <a:t>10/01/2025</a:t>
             </a:fld>
             <a:endParaRPr lang="pt-BR"/>
           </a:p>
@@ -1030,7 +1030,7 @@
           <a:p>
             <a:fld id="{52231B9D-E9F6-4612-9B82-E89961B389AC}" type="datetimeFigureOut">
               <a:rPr lang="pt-BR" smtClean="0"/>
-              <a:t>28/09/2024</a:t>
+              <a:t>10/01/2025</a:t>
             </a:fld>
             <a:endParaRPr lang="pt-BR"/>
           </a:p>
@@ -1200,7 +1200,7 @@
           <a:p>
             <a:fld id="{52231B9D-E9F6-4612-9B82-E89961B389AC}" type="datetimeFigureOut">
               <a:rPr lang="pt-BR" smtClean="0"/>
-              <a:t>28/09/2024</a:t>
+              <a:t>10/01/2025</a:t>
             </a:fld>
             <a:endParaRPr lang="pt-BR"/>
           </a:p>
@@ -1446,7 +1446,7 @@
           <a:p>
             <a:fld id="{52231B9D-E9F6-4612-9B82-E89961B389AC}" type="datetimeFigureOut">
               <a:rPr lang="pt-BR" smtClean="0"/>
-              <a:t>28/09/2024</a:t>
+              <a:t>10/01/2025</a:t>
             </a:fld>
             <a:endParaRPr lang="pt-BR"/>
           </a:p>
@@ -1678,7 +1678,7 @@
           <a:p>
             <a:fld id="{52231B9D-E9F6-4612-9B82-E89961B389AC}" type="datetimeFigureOut">
               <a:rPr lang="pt-BR" smtClean="0"/>
-              <a:t>28/09/2024</a:t>
+              <a:t>10/01/2025</a:t>
             </a:fld>
             <a:endParaRPr lang="pt-BR"/>
           </a:p>
@@ -2045,7 +2045,7 @@
           <a:p>
             <a:fld id="{52231B9D-E9F6-4612-9B82-E89961B389AC}" type="datetimeFigureOut">
               <a:rPr lang="pt-BR" smtClean="0"/>
-              <a:t>28/09/2024</a:t>
+              <a:t>10/01/2025</a:t>
             </a:fld>
             <a:endParaRPr lang="pt-BR"/>
           </a:p>
@@ -2163,7 +2163,7 @@
           <a:p>
             <a:fld id="{52231B9D-E9F6-4612-9B82-E89961B389AC}" type="datetimeFigureOut">
               <a:rPr lang="pt-BR" smtClean="0"/>
-              <a:t>28/09/2024</a:t>
+              <a:t>10/01/2025</a:t>
             </a:fld>
             <a:endParaRPr lang="pt-BR"/>
           </a:p>
@@ -2258,7 +2258,7 @@
           <a:p>
             <a:fld id="{52231B9D-E9F6-4612-9B82-E89961B389AC}" type="datetimeFigureOut">
               <a:rPr lang="pt-BR" smtClean="0"/>
-              <a:t>28/09/2024</a:t>
+              <a:t>10/01/2025</a:t>
             </a:fld>
             <a:endParaRPr lang="pt-BR"/>
           </a:p>
@@ -2535,7 +2535,7 @@
           <a:p>
             <a:fld id="{52231B9D-E9F6-4612-9B82-E89961B389AC}" type="datetimeFigureOut">
               <a:rPr lang="pt-BR" smtClean="0"/>
-              <a:t>28/09/2024</a:t>
+              <a:t>10/01/2025</a:t>
             </a:fld>
             <a:endParaRPr lang="pt-BR"/>
           </a:p>
@@ -2788,7 +2788,7 @@
           <a:p>
             <a:fld id="{52231B9D-E9F6-4612-9B82-E89961B389AC}" type="datetimeFigureOut">
               <a:rPr lang="pt-BR" smtClean="0"/>
-              <a:t>28/09/2024</a:t>
+              <a:t>10/01/2025</a:t>
             </a:fld>
             <a:endParaRPr lang="pt-BR"/>
           </a:p>
@@ -3001,7 +3001,7 @@
           <a:p>
             <a:fld id="{52231B9D-E9F6-4612-9B82-E89961B389AC}" type="datetimeFigureOut">
               <a:rPr lang="pt-BR" smtClean="0"/>
-              <a:t>28/09/2024</a:t>
+              <a:t>10/01/2025</a:t>
             </a:fld>
             <a:endParaRPr lang="pt-BR"/>
           </a:p>
@@ -3665,7 +3665,7 @@
                   </a:schemeClr>
                 </a:solidFill>
               </a:rPr>
-              <a:t>29/09/2024</a:t>
+              <a:t>05/01/2025</a:t>
             </a:r>
             <a:endParaRPr lang="pt-BR" sz="1600" dirty="0">
               <a:solidFill>
